--- a/课件/C1/C1-A-03/C1-A-03.pptx
+++ b/课件/C1/C1-A-03/C1-A-03.pptx
@@ -1,13 +1,11 @@
 
 <file path=ppt/presentation.xml><?xml version="1.0" encoding="utf-8"?>
-<p:presentation xmlns:p="http://schemas.openxmlformats.org/presentationml/2006/main" xmlns:r="http://schemas.openxmlformats.org/officeDocument/2006/relationships" xmlns:a="http://schemas.openxmlformats.org/drawingml/2006/main" autoCompressPictures="0">
+<p:presentation xmlns:a="http://schemas.openxmlformats.org/drawingml/2006/main" xmlns:r="http://schemas.openxmlformats.org/officeDocument/2006/relationships" xmlns:p="http://schemas.openxmlformats.org/presentationml/2006/main" saveSubsetFonts="1" autoCompressPictures="0">
   <p:sldMasterIdLst>
     <p:sldMasterId id="2147483648" r:id="rId1"/>
   </p:sldMasterIdLst>
-  <p:notesMasterIdLst>
-    <p:notesMasterId r:id="rId2"/>
-  </p:notesMasterIdLst>
   <p:sldIdLst>
+    <p:sldId id="256" r:id="rId2"/>
     <p:sldId id="257" r:id="rId3"/>
     <p:sldId id="258" r:id="rId4"/>
     <p:sldId id="259" r:id="rId5"/>
@@ -18,16 +16,18 @@
     <p:sldId id="264" r:id="rId10"/>
     <p:sldId id="265" r:id="rId11"/>
     <p:sldId id="266" r:id="rId12"/>
-    <p:sldId id="268" r:id="rId13"/>
-    <p:sldId id="269" r:id="rId14"/>
-    <p:sldId id="270" r:id="rId15"/>
-    <p:sldId id="271" r:id="rId16"/>
-    <p:sldId id="272" r:id="rId17"/>
+    <p:sldId id="267" r:id="rId13"/>
+    <p:sldId id="268" r:id="rId14"/>
+    <p:sldId id="269" r:id="rId15"/>
+    <p:sldId id="270" r:id="rId16"/>
   </p:sldIdLst>
-  <p:sldSz cy="6858000" cx="12191365"/>
-  <p:notesSz cx="6858000" cy="12191365"/>
+  <p:notesMasterIdLst>
+    <p:notesMasterId r:id="rId17"/>
+  </p:notesMasterIdLst>
+  <p:sldSz cx="12191695" cy="6858000"/>
+  <p:notesSz cx="6858000" cy="12191695"/>
   <p:defaultTextStyle>
-    <a:lvl1pPr algn="l" defTabSz="914400" eaLnBrk="1" hangingPunct="1" latinLnBrk="0" marL="0" rtl="0">
+    <a:lvl1pPr marL="0" algn="l" defTabSz="914400" rtl="0" eaLnBrk="1" latinLnBrk="0" hangingPunct="1">
       <a:defRPr sz="1800" kern="1200">
         <a:solidFill>
           <a:schemeClr val="tx1"/>
@@ -37,7 +37,7 @@
         <a:cs typeface="+mn-cs"/>
       </a:defRPr>
     </a:lvl1pPr>
-    <a:lvl2pPr algn="l" defTabSz="914400" eaLnBrk="1" hangingPunct="1" latinLnBrk="0" marL="457200" rtl="0">
+    <a:lvl2pPr marL="457200" algn="l" defTabSz="914400" rtl="0" eaLnBrk="1" latinLnBrk="0" hangingPunct="1">
       <a:defRPr sz="1800" kern="1200">
         <a:solidFill>
           <a:schemeClr val="tx1"/>
@@ -47,7 +47,7 @@
         <a:cs typeface="+mn-cs"/>
       </a:defRPr>
     </a:lvl2pPr>
-    <a:lvl3pPr algn="l" defTabSz="914400" eaLnBrk="1" hangingPunct="1" latinLnBrk="0" marL="914400" rtl="0">
+    <a:lvl3pPr marL="914400" algn="l" defTabSz="914400" rtl="0" eaLnBrk="1" latinLnBrk="0" hangingPunct="1">
       <a:defRPr sz="1800" kern="1200">
         <a:solidFill>
           <a:schemeClr val="tx1"/>
@@ -57,7 +57,7 @@
         <a:cs typeface="+mn-cs"/>
       </a:defRPr>
     </a:lvl3pPr>
-    <a:lvl4pPr algn="l" defTabSz="914400" eaLnBrk="1" hangingPunct="1" latinLnBrk="0" marL="1371600" rtl="0">
+    <a:lvl4pPr marL="1371600" algn="l" defTabSz="914400" rtl="0" eaLnBrk="1" latinLnBrk="0" hangingPunct="1">
       <a:defRPr sz="1800" kern="1200">
         <a:solidFill>
           <a:schemeClr val="tx1"/>
@@ -67,7 +67,7 @@
         <a:cs typeface="+mn-cs"/>
       </a:defRPr>
     </a:lvl4pPr>
-    <a:lvl5pPr algn="l" defTabSz="914400" eaLnBrk="1" hangingPunct="1" latinLnBrk="0" marL="1828800" rtl="0">
+    <a:lvl5pPr marL="1828800" algn="l" defTabSz="914400" rtl="0" eaLnBrk="1" latinLnBrk="0" hangingPunct="1">
       <a:defRPr sz="1800" kern="1200">
         <a:solidFill>
           <a:schemeClr val="tx1"/>
@@ -77,7 +77,7 @@
         <a:cs typeface="+mn-cs"/>
       </a:defRPr>
     </a:lvl5pPr>
-    <a:lvl6pPr algn="l" defTabSz="914400" eaLnBrk="1" hangingPunct="1" latinLnBrk="0" marL="2286000" rtl="0">
+    <a:lvl6pPr marL="2286000" algn="l" defTabSz="914400" rtl="0" eaLnBrk="1" latinLnBrk="0" hangingPunct="1">
       <a:defRPr sz="1800" kern="1200">
         <a:solidFill>
           <a:schemeClr val="tx1"/>
@@ -87,7 +87,7 @@
         <a:cs typeface="+mn-cs"/>
       </a:defRPr>
     </a:lvl6pPr>
-    <a:lvl7pPr algn="l" defTabSz="914400" eaLnBrk="1" hangingPunct="1" latinLnBrk="0" marL="2743200" rtl="0">
+    <a:lvl7pPr marL="2743200" algn="l" defTabSz="914400" rtl="0" eaLnBrk="1" latinLnBrk="0" hangingPunct="1">
       <a:defRPr sz="1800" kern="1200">
         <a:solidFill>
           <a:schemeClr val="tx1"/>
@@ -97,7 +97,7 @@
         <a:cs typeface="+mn-cs"/>
       </a:defRPr>
     </a:lvl7pPr>
-    <a:lvl8pPr algn="l" defTabSz="914400" eaLnBrk="1" hangingPunct="1" latinLnBrk="0" marL="3200400" rtl="0">
+    <a:lvl8pPr marL="3200400" algn="l" defTabSz="914400" rtl="0" eaLnBrk="1" latinLnBrk="0" hangingPunct="1">
       <a:defRPr sz="1800" kern="1200">
         <a:solidFill>
           <a:schemeClr val="tx1"/>
@@ -107,7 +107,7 @@
         <a:cs typeface="+mn-cs"/>
       </a:defRPr>
     </a:lvl8pPr>
-    <a:lvl9pPr algn="l" defTabSz="914400" eaLnBrk="1" hangingPunct="1" latinLnBrk="0" marL="3657600" rtl="0">
+    <a:lvl9pPr marL="3657600" algn="l" defTabSz="914400" rtl="0" eaLnBrk="1" latinLnBrk="0" hangingPunct="1">
       <a:defRPr sz="1800" kern="1200">
         <a:solidFill>
           <a:schemeClr val="tx1"/>
@@ -131,7 +131,7 @@
     </p:bg>
     <p:spTree>
       <p:nvGrpSpPr>
-        <p:cNvPr id="65" name=""/>
+        <p:cNvPr id="1" name=""/>
         <p:cNvGrpSpPr/>
         <p:nvPr/>
       </p:nvGrpSpPr>
@@ -145,7 +145,7 @@
       </p:grpSpPr>
       <p:sp>
         <p:nvSpPr>
-          <p:cNvPr id="1048735" name="Header Placeholder 1"/>
+          <p:cNvPr id="2" name="Header Placeholder 1"/>
           <p:cNvSpPr>
             <a:spLocks noGrp="1"/>
           </p:cNvSpPr>
@@ -158,10 +158,12 @@
             <a:off x="0" y="0"/>
             <a:ext cx="2971800" cy="458788"/>
           </a:xfrm>
-          <a:prstGeom prst="rect"/>
-        </p:spPr>
-        <p:txBody>
-          <a:bodyPr bIns="45720" lIns="91440" rIns="91440" rtlCol="0" tIns="45720" vert="horz"/>
+          <a:prstGeom prst="rect">
+            <a:avLst/>
+          </a:prstGeom>
+        </p:spPr>
+        <p:txBody>
+          <a:bodyPr vert="horz" lIns="91440" tIns="45720" rIns="91440" bIns="45720" rtlCol="0"/>
           <a:lstStyle>
             <a:lvl1pPr algn="l">
               <a:defRPr sz="1200"/>
@@ -174,7 +176,7 @@
       </p:sp>
       <p:sp>
         <p:nvSpPr>
-          <p:cNvPr id="1048736" name="Date Placeholder 2"/>
+          <p:cNvPr id="3" name="Date Placeholder 2"/>
           <p:cNvSpPr>
             <a:spLocks noGrp="1"/>
           </p:cNvSpPr>
@@ -187,10 +189,12 @@
             <a:off x="3884613" y="0"/>
             <a:ext cx="2971800" cy="458788"/>
           </a:xfrm>
-          <a:prstGeom prst="rect"/>
-        </p:spPr>
-        <p:txBody>
-          <a:bodyPr bIns="45720" lIns="91440" rIns="91440" rtlCol="0" tIns="45720" vert="horz"/>
+          <a:prstGeom prst="rect">
+            <a:avLst/>
+          </a:prstGeom>
+        </p:spPr>
+        <p:txBody>
+          <a:bodyPr vert="horz" lIns="91440" tIns="45720" rIns="91440" bIns="45720" rtlCol="0"/>
           <a:lstStyle>
             <a:lvl1pPr algn="r">
               <a:defRPr sz="1200"/>
@@ -199,6 +203,7 @@
           <a:p>
             <a:fld id="{5282F153-3F37-0F45-9E97-73ACFA13230C}" type="datetimeFigureOut">
               <a:rPr lang="en-US"/>
+              <a:t>7/23/19</a:t>
             </a:fld>
             <a:endParaRPr lang="en-US"/>
           </a:p>
@@ -206,9 +211,9 @@
       </p:sp>
       <p:sp>
         <p:nvSpPr>
-          <p:cNvPr id="1048737" name="Slide Image Placeholder 3"/>
+          <p:cNvPr id="4" name="Slide Image Placeholder 3"/>
           <p:cNvSpPr>
-            <a:spLocks noChangeAspect="1" noRot="1" noGrp="1"/>
+            <a:spLocks noGrp="1" noRot="1" noChangeAspect="1"/>
           </p:cNvSpPr>
           <p:nvPr>
             <p:ph type="sldImg" idx="2"/>
@@ -219,7 +224,9 @@
             <a:off x="685800" y="1143000"/>
             <a:ext cx="5486400" cy="3086100"/>
           </a:xfrm>
-          <a:prstGeom prst="rect"/>
+          <a:prstGeom prst="rect">
+            <a:avLst/>
+          </a:prstGeom>
           <a:noFill/>
           <a:ln w="12700">
             <a:solidFill>
@@ -228,7 +235,8 @@
           </a:ln>
         </p:spPr>
         <p:txBody>
-          <a:bodyPr anchor="ctr" bIns="45720" lIns="91440" rIns="91440" rtlCol="0" tIns="45720" vert="horz"/>
+          <a:bodyPr vert="horz" lIns="91440" tIns="45720" rIns="91440" bIns="45720" rtlCol="0" anchor="ctr"/>
+          <a:lstStyle/>
           <a:p>
             <a:endParaRPr lang="en-US"/>
           </a:p>
@@ -236,7 +244,7 @@
       </p:sp>
       <p:sp>
         <p:nvSpPr>
-          <p:cNvPr id="1048738" name="Notes Placeholder 4"/>
+          <p:cNvPr id="5" name="Notes Placeholder 4"/>
           <p:cNvSpPr>
             <a:spLocks noGrp="1"/>
           </p:cNvSpPr>
@@ -249,17 +257,19 @@
             <a:off x="685800" y="4400550"/>
             <a:ext cx="5486400" cy="3600450"/>
           </a:xfrm>
-          <a:prstGeom prst="rect"/>
-        </p:spPr>
-        <p:txBody>
-          <a:bodyPr bIns="45720" lIns="91440" rIns="91440" rtlCol="0" tIns="45720" vert="horz"/>
+          <a:prstGeom prst="rect">
+            <a:avLst/>
+          </a:prstGeom>
+        </p:spPr>
+        <p:txBody>
+          <a:bodyPr vert="horz" lIns="91440" tIns="45720" rIns="91440" bIns="45720" rtlCol="0"/>
+          <a:lstStyle/>
           <a:p>
             <a:pPr lvl="0"/>
             <a:r>
               <a:rPr lang="en-US"/>
               <a:t>Click to edit Master text styles</a:t>
             </a:r>
-            <a:endParaRPr lang="en-US"/>
           </a:p>
           <a:p>
             <a:pPr lvl="1"/>
@@ -267,7 +277,6 @@
               <a:rPr lang="en-US"/>
               <a:t>Second level</a:t>
             </a:r>
-            <a:endParaRPr lang="en-US"/>
           </a:p>
           <a:p>
             <a:pPr lvl="2"/>
@@ -275,7 +284,6 @@
               <a:rPr lang="en-US"/>
               <a:t>Third level</a:t>
             </a:r>
-            <a:endParaRPr lang="en-US"/>
           </a:p>
           <a:p>
             <a:pPr lvl="3"/>
@@ -283,7 +291,6 @@
               <a:rPr lang="en-US"/>
               <a:t>Fourth level</a:t>
             </a:r>
-            <a:endParaRPr lang="en-US"/>
           </a:p>
           <a:p>
             <a:pPr lvl="4"/>
@@ -291,13 +298,12 @@
               <a:rPr lang="en-US"/>
               <a:t>Fifth level</a:t>
             </a:r>
-            <a:endParaRPr lang="en-US"/>
-          </a:p>
-        </p:txBody>
-      </p:sp>
-      <p:sp>
-        <p:nvSpPr>
-          <p:cNvPr id="1048739" name="Footer Placeholder 5"/>
+          </a:p>
+        </p:txBody>
+      </p:sp>
+      <p:sp>
+        <p:nvSpPr>
+          <p:cNvPr id="6" name="Footer Placeholder 5"/>
           <p:cNvSpPr>
             <a:spLocks noGrp="1"/>
           </p:cNvSpPr>
@@ -310,10 +316,12 @@
             <a:off x="0" y="8685213"/>
             <a:ext cx="2971800" cy="458787"/>
           </a:xfrm>
-          <a:prstGeom prst="rect"/>
-        </p:spPr>
-        <p:txBody>
-          <a:bodyPr anchor="b" bIns="45720" lIns="91440" rIns="91440" rtlCol="0" tIns="45720" vert="horz"/>
+          <a:prstGeom prst="rect">
+            <a:avLst/>
+          </a:prstGeom>
+        </p:spPr>
+        <p:txBody>
+          <a:bodyPr vert="horz" lIns="91440" tIns="45720" rIns="91440" bIns="45720" rtlCol="0" anchor="b"/>
           <a:lstStyle>
             <a:lvl1pPr algn="l">
               <a:defRPr sz="1200"/>
@@ -326,7 +334,7 @@
       </p:sp>
       <p:sp>
         <p:nvSpPr>
-          <p:cNvPr id="1048740" name="Slide Number Placeholder 6"/>
+          <p:cNvPr id="7" name="Slide Number Placeholder 6"/>
           <p:cNvSpPr>
             <a:spLocks noGrp="1"/>
           </p:cNvSpPr>
@@ -339,10 +347,12 @@
             <a:off x="3884613" y="8685213"/>
             <a:ext cx="2971800" cy="458787"/>
           </a:xfrm>
-          <a:prstGeom prst="rect"/>
-        </p:spPr>
-        <p:txBody>
-          <a:bodyPr anchor="b" bIns="45720" lIns="91440" rIns="91440" rtlCol="0" tIns="45720" vert="horz"/>
+          <a:prstGeom prst="rect">
+            <a:avLst/>
+          </a:prstGeom>
+        </p:spPr>
+        <p:txBody>
+          <a:bodyPr vert="horz" lIns="91440" tIns="45720" rIns="91440" bIns="45720" rtlCol="0" anchor="b"/>
           <a:lstStyle>
             <a:lvl1pPr algn="r">
               <a:defRPr sz="1200"/>
@@ -351,16 +361,22 @@
           <a:p>
             <a:fld id="{CE5E9CC1-C706-0F49-92D6-E571CC5EEA8F}" type="slidenum">
               <a:rPr lang="en-US"/>
+              <a:t>‹#›</a:t>
             </a:fld>
             <a:endParaRPr lang="en-US"/>
           </a:p>
         </p:txBody>
       </p:sp>
     </p:spTree>
+    <p:extLst>
+      <p:ext uri="{BB962C8B-B14F-4D97-AF65-F5344CB8AC3E}">
+        <p14:creationId xmlns:p14="http://schemas.microsoft.com/office/powerpoint/2010/main" val="1024086991"/>
+      </p:ext>
+    </p:extLst>
   </p:cSld>
-  <p:clrMap accent1="accent1" accent2="accent2" accent3="accent3" accent4="accent4" accent5="accent5" accent6="accent6" bg1="lt1" bg2="lt2" tx1="dk1" tx2="dk2" hlink="hlink" folHlink="folHlink"/>
+  <p:clrMap bg1="lt1" tx1="dk1" bg2="lt2" tx2="dk2" accent1="accent1" accent2="accent2" accent3="accent3" accent4="accent4" accent5="accent5" accent6="accent6" hlink="hlink" folHlink="folHlink"/>
   <p:notesStyle>
-    <a:lvl1pPr algn="l" defTabSz="914400" eaLnBrk="1" hangingPunct="1" latinLnBrk="0" marL="0" rtl="0">
+    <a:lvl1pPr marL="0" algn="l" defTabSz="914400" rtl="0" eaLnBrk="1" latinLnBrk="0" hangingPunct="1">
       <a:defRPr sz="1200" kern="1200">
         <a:solidFill>
           <a:schemeClr val="tx1"/>
@@ -370,7 +386,7 @@
         <a:cs typeface="+mn-cs"/>
       </a:defRPr>
     </a:lvl1pPr>
-    <a:lvl2pPr algn="l" defTabSz="914400" eaLnBrk="1" hangingPunct="1" latinLnBrk="0" marL="457200" rtl="0">
+    <a:lvl2pPr marL="457200" algn="l" defTabSz="914400" rtl="0" eaLnBrk="1" latinLnBrk="0" hangingPunct="1">
       <a:defRPr sz="1200" kern="1200">
         <a:solidFill>
           <a:schemeClr val="tx1"/>
@@ -380,7 +396,7 @@
         <a:cs typeface="+mn-cs"/>
       </a:defRPr>
     </a:lvl2pPr>
-    <a:lvl3pPr algn="l" defTabSz="914400" eaLnBrk="1" hangingPunct="1" latinLnBrk="0" marL="914400" rtl="0">
+    <a:lvl3pPr marL="914400" algn="l" defTabSz="914400" rtl="0" eaLnBrk="1" latinLnBrk="0" hangingPunct="1">
       <a:defRPr sz="1200" kern="1200">
         <a:solidFill>
           <a:schemeClr val="tx1"/>
@@ -390,7 +406,7 @@
         <a:cs typeface="+mn-cs"/>
       </a:defRPr>
     </a:lvl3pPr>
-    <a:lvl4pPr algn="l" defTabSz="914400" eaLnBrk="1" hangingPunct="1" latinLnBrk="0" marL="1371600" rtl="0">
+    <a:lvl4pPr marL="1371600" algn="l" defTabSz="914400" rtl="0" eaLnBrk="1" latinLnBrk="0" hangingPunct="1">
       <a:defRPr sz="1200" kern="1200">
         <a:solidFill>
           <a:schemeClr val="tx1"/>
@@ -400,7 +416,7 @@
         <a:cs typeface="+mn-cs"/>
       </a:defRPr>
     </a:lvl4pPr>
-    <a:lvl5pPr algn="l" defTabSz="914400" eaLnBrk="1" hangingPunct="1" latinLnBrk="0" marL="1828800" rtl="0">
+    <a:lvl5pPr marL="1828800" algn="l" defTabSz="914400" rtl="0" eaLnBrk="1" latinLnBrk="0" hangingPunct="1">
       <a:defRPr sz="1200" kern="1200">
         <a:solidFill>
           <a:schemeClr val="tx1"/>
@@ -410,7 +426,7 @@
         <a:cs typeface="+mn-cs"/>
       </a:defRPr>
     </a:lvl5pPr>
-    <a:lvl6pPr algn="l" defTabSz="914400" eaLnBrk="1" hangingPunct="1" latinLnBrk="0" marL="2286000" rtl="0">
+    <a:lvl6pPr marL="2286000" algn="l" defTabSz="914400" rtl="0" eaLnBrk="1" latinLnBrk="0" hangingPunct="1">
       <a:defRPr sz="1200" kern="1200">
         <a:solidFill>
           <a:schemeClr val="tx1"/>
@@ -420,7 +436,7 @@
         <a:cs typeface="+mn-cs"/>
       </a:defRPr>
     </a:lvl6pPr>
-    <a:lvl7pPr algn="l" defTabSz="914400" eaLnBrk="1" hangingPunct="1" latinLnBrk="0" marL="2743200" rtl="0">
+    <a:lvl7pPr marL="2743200" algn="l" defTabSz="914400" rtl="0" eaLnBrk="1" latinLnBrk="0" hangingPunct="1">
       <a:defRPr sz="1200" kern="1200">
         <a:solidFill>
           <a:schemeClr val="tx1"/>
@@ -430,7 +446,7 @@
         <a:cs typeface="+mn-cs"/>
       </a:defRPr>
     </a:lvl7pPr>
-    <a:lvl8pPr algn="l" defTabSz="914400" eaLnBrk="1" hangingPunct="1" latinLnBrk="0" marL="3200400" rtl="0">
+    <a:lvl8pPr marL="3200400" algn="l" defTabSz="914400" rtl="0" eaLnBrk="1" latinLnBrk="0" hangingPunct="1">
       <a:defRPr sz="1200" kern="1200">
         <a:solidFill>
           <a:schemeClr val="tx1"/>
@@ -440,7 +456,7 @@
         <a:cs typeface="+mn-cs"/>
       </a:defRPr>
     </a:lvl8pPr>
-    <a:lvl9pPr algn="l" defTabSz="914400" eaLnBrk="1" hangingPunct="1" latinLnBrk="0" marL="3657600" rtl="0">
+    <a:lvl9pPr marL="3657600" algn="l" defTabSz="914400" rtl="0" eaLnBrk="1" latinLnBrk="0" hangingPunct="1">
       <a:defRPr sz="1200" kern="1200">
         <a:solidFill>
           <a:schemeClr val="tx1"/>
@@ -459,7 +475,7 @@
   <p:cSld>
     <p:spTree>
       <p:nvGrpSpPr>
-        <p:cNvPr id="43" name=""/>
+        <p:cNvPr id="1" name=""/>
         <p:cNvGrpSpPr/>
         <p:nvPr/>
       </p:nvGrpSpPr>
@@ -473,9 +489,9 @@
       </p:grpSpPr>
       <p:sp>
         <p:nvSpPr>
-          <p:cNvPr id="1048657" name="Slide Image Placeholder 1"/>
+          <p:cNvPr id="2" name="Slide Image Placeholder 1"/>
           <p:cNvSpPr>
-            <a:spLocks noChangeAspect="1" noRot="1" noGrp="1"/>
+            <a:spLocks noGrp="1" noRot="1" noChangeAspect="1"/>
           </p:cNvSpPr>
           <p:nvPr>
             <p:ph type="sldImg"/>
@@ -485,7 +501,7 @@
       </p:sp>
       <p:sp>
         <p:nvSpPr>
-          <p:cNvPr id="1048658" name="Notes Placeholder 2"/>
+          <p:cNvPr id="3" name="Notes Placeholder 2"/>
           <p:cNvSpPr>
             <a:spLocks noGrp="1"/>
           </p:cNvSpPr>
@@ -496,14 +512,19 @@
         <p:spPr/>
         <p:txBody>
           <a:bodyPr/>
-          <a:p>
-            <a:endParaRPr dirty="0" lang="en-US"/>
-          </a:p>
-        </p:txBody>
-      </p:sp>
-      <p:sp>
-        <p:nvSpPr>
-          <p:cNvPr id="1048659" name="Slide Number Placeholder 3"/>
+          <a:lstStyle/>
+          <a:p>
+            <a:r>
+              <a:rPr lang="en-US" dirty="0"/>
+              <a:t/>
+            </a:r>
+            <a:endParaRPr lang="en-US" dirty="0"/>
+          </a:p>
+        </p:txBody>
+      </p:sp>
+      <p:sp>
+        <p:nvSpPr>
+          <p:cNvPr id="4" name="Slide Number Placeholder 3"/>
           <p:cNvSpPr>
             <a:spLocks noGrp="1"/>
           </p:cNvSpPr>
@@ -514,15 +535,22 @@
         <p:spPr/>
         <p:txBody>
           <a:bodyPr/>
+          <a:lstStyle/>
           <a:p>
             <a:fld id="{F7021451-1387-4CA6-816F-3879F97B5CBC}" type="slidenum">
               <a:rPr lang="en-US"/>
+              <a:t>1</a:t>
             </a:fld>
             <a:endParaRPr lang="en-US"/>
           </a:p>
         </p:txBody>
       </p:sp>
     </p:spTree>
+    <p:extLst>
+      <p:ext uri="{BB962C8B-B14F-4D97-AF65-F5344CB8AC3E}">
+        <p14:creationId xmlns:p14="http://schemas.microsoft.com/office/powerpoint/2010/main" val="1024086991"/>
+      </p:ext>
+    </p:extLst>
   </p:cSld>
   <p:clrMapOvr>
     <a:masterClrMapping/>
@@ -535,7 +563,7 @@
   <p:cSld>
     <p:spTree>
       <p:nvGrpSpPr>
-        <p:cNvPr id="25" name=""/>
+        <p:cNvPr id="1" name=""/>
         <p:cNvGrpSpPr/>
         <p:nvPr/>
       </p:nvGrpSpPr>
@@ -549,9 +577,9 @@
       </p:grpSpPr>
       <p:sp>
         <p:nvSpPr>
-          <p:cNvPr id="1048596" name="Slide Image Placeholder 1"/>
+          <p:cNvPr id="2" name="Slide Image Placeholder 1"/>
           <p:cNvSpPr>
-            <a:spLocks noChangeAspect="1" noRot="1" noGrp="1"/>
+            <a:spLocks noGrp="1" noRot="1" noChangeAspect="1"/>
           </p:cNvSpPr>
           <p:nvPr>
             <p:ph type="sldImg"/>
@@ -561,7 +589,7 @@
       </p:sp>
       <p:sp>
         <p:nvSpPr>
-          <p:cNvPr id="1048597" name="Notes Placeholder 2"/>
+          <p:cNvPr id="3" name="Notes Placeholder 2"/>
           <p:cNvSpPr>
             <a:spLocks noGrp="1"/>
           </p:cNvSpPr>
@@ -572,14 +600,19 @@
         <p:spPr/>
         <p:txBody>
           <a:bodyPr/>
-          <a:p>
-            <a:endParaRPr dirty="0" lang="en-US"/>
-          </a:p>
-        </p:txBody>
-      </p:sp>
-      <p:sp>
-        <p:nvSpPr>
-          <p:cNvPr id="1048598" name="Slide Number Placeholder 3"/>
+          <a:lstStyle/>
+          <a:p>
+            <a:r>
+              <a:rPr lang="en-US" dirty="0"/>
+              <a:t/>
+            </a:r>
+            <a:endParaRPr lang="en-US" dirty="0"/>
+          </a:p>
+        </p:txBody>
+      </p:sp>
+      <p:sp>
+        <p:nvSpPr>
+          <p:cNvPr id="4" name="Slide Number Placeholder 3"/>
           <p:cNvSpPr>
             <a:spLocks noGrp="1"/>
           </p:cNvSpPr>
@@ -590,15 +623,22 @@
         <p:spPr/>
         <p:txBody>
           <a:bodyPr/>
+          <a:lstStyle/>
           <a:p>
             <a:fld id="{F7021451-1387-4CA6-816F-3879F97B5CBC}" type="slidenum">
               <a:rPr lang="en-US"/>
+              <a:t>10</a:t>
             </a:fld>
             <a:endParaRPr lang="en-US"/>
           </a:p>
         </p:txBody>
       </p:sp>
     </p:spTree>
+    <p:extLst>
+      <p:ext uri="{BB962C8B-B14F-4D97-AF65-F5344CB8AC3E}">
+        <p14:creationId xmlns:p14="http://schemas.microsoft.com/office/powerpoint/2010/main" val="1024086991"/>
+      </p:ext>
+    </p:extLst>
   </p:cSld>
   <p:clrMapOvr>
     <a:masterClrMapping/>
@@ -611,7 +651,7 @@
   <p:cSld>
     <p:spTree>
       <p:nvGrpSpPr>
-        <p:cNvPr id="31" name=""/>
+        <p:cNvPr id="1" name=""/>
         <p:cNvGrpSpPr/>
         <p:nvPr/>
       </p:nvGrpSpPr>
@@ -625,9 +665,9 @@
       </p:grpSpPr>
       <p:sp>
         <p:nvSpPr>
-          <p:cNvPr id="1048619" name="Slide Image Placeholder 1"/>
+          <p:cNvPr id="2" name="Slide Image Placeholder 1"/>
           <p:cNvSpPr>
-            <a:spLocks noChangeAspect="1" noRot="1" noGrp="1"/>
+            <a:spLocks noGrp="1" noRot="1" noChangeAspect="1"/>
           </p:cNvSpPr>
           <p:nvPr>
             <p:ph type="sldImg"/>
@@ -637,7 +677,7 @@
       </p:sp>
       <p:sp>
         <p:nvSpPr>
-          <p:cNvPr id="1048620" name="Notes Placeholder 2"/>
+          <p:cNvPr id="3" name="Notes Placeholder 2"/>
           <p:cNvSpPr>
             <a:spLocks noGrp="1"/>
           </p:cNvSpPr>
@@ -648,14 +688,19 @@
         <p:spPr/>
         <p:txBody>
           <a:bodyPr/>
-          <a:p>
-            <a:endParaRPr dirty="0" lang="en-US"/>
-          </a:p>
-        </p:txBody>
-      </p:sp>
-      <p:sp>
-        <p:nvSpPr>
-          <p:cNvPr id="1048621" name="Slide Number Placeholder 3"/>
+          <a:lstStyle/>
+          <a:p>
+            <a:r>
+              <a:rPr lang="en-US" dirty="0"/>
+              <a:t/>
+            </a:r>
+            <a:endParaRPr lang="en-US" dirty="0"/>
+          </a:p>
+        </p:txBody>
+      </p:sp>
+      <p:sp>
+        <p:nvSpPr>
+          <p:cNvPr id="4" name="Slide Number Placeholder 3"/>
           <p:cNvSpPr>
             <a:spLocks noGrp="1"/>
           </p:cNvSpPr>
@@ -666,15 +711,22 @@
         <p:spPr/>
         <p:txBody>
           <a:bodyPr/>
+          <a:lstStyle/>
           <a:p>
             <a:fld id="{F7021451-1387-4CA6-816F-3879F97B5CBC}" type="slidenum">
               <a:rPr lang="en-US"/>
+              <a:t>11</a:t>
             </a:fld>
             <a:endParaRPr lang="en-US"/>
           </a:p>
         </p:txBody>
       </p:sp>
     </p:spTree>
+    <p:extLst>
+      <p:ext uri="{BB962C8B-B14F-4D97-AF65-F5344CB8AC3E}">
+        <p14:creationId xmlns:p14="http://schemas.microsoft.com/office/powerpoint/2010/main" val="1024086991"/>
+      </p:ext>
+    </p:extLst>
   </p:cSld>
   <p:clrMapOvr>
     <a:masterClrMapping/>
@@ -687,7 +739,7 @@
   <p:cSld>
     <p:spTree>
       <p:nvGrpSpPr>
-        <p:cNvPr id="37" name=""/>
+        <p:cNvPr id="1" name=""/>
         <p:cNvGrpSpPr/>
         <p:nvPr/>
       </p:nvGrpSpPr>
@@ -701,9 +753,9 @@
       </p:grpSpPr>
       <p:sp>
         <p:nvSpPr>
-          <p:cNvPr id="1048639" name="Slide Image Placeholder 1"/>
+          <p:cNvPr id="2" name="Slide Image Placeholder 1"/>
           <p:cNvSpPr>
-            <a:spLocks noChangeAspect="1" noRot="1" noGrp="1"/>
+            <a:spLocks noGrp="1" noRot="1" noChangeAspect="1"/>
           </p:cNvSpPr>
           <p:nvPr>
             <p:ph type="sldImg"/>
@@ -713,7 +765,7 @@
       </p:sp>
       <p:sp>
         <p:nvSpPr>
-          <p:cNvPr id="1048640" name="Notes Placeholder 2"/>
+          <p:cNvPr id="3" name="Notes Placeholder 2"/>
           <p:cNvSpPr>
             <a:spLocks noGrp="1"/>
           </p:cNvSpPr>
@@ -724,14 +776,19 @@
         <p:spPr/>
         <p:txBody>
           <a:bodyPr/>
-          <a:p>
-            <a:endParaRPr dirty="0" lang="en-US"/>
-          </a:p>
-        </p:txBody>
-      </p:sp>
-      <p:sp>
-        <p:nvSpPr>
-          <p:cNvPr id="1048641" name="Slide Number Placeholder 3"/>
+          <a:lstStyle/>
+          <a:p>
+            <a:r>
+              <a:rPr lang="en-US" dirty="0"/>
+              <a:t/>
+            </a:r>
+            <a:endParaRPr lang="en-US" dirty="0"/>
+          </a:p>
+        </p:txBody>
+      </p:sp>
+      <p:sp>
+        <p:nvSpPr>
+          <p:cNvPr id="4" name="Slide Number Placeholder 3"/>
           <p:cNvSpPr>
             <a:spLocks noGrp="1"/>
           </p:cNvSpPr>
@@ -742,15 +799,22 @@
         <p:spPr/>
         <p:txBody>
           <a:bodyPr/>
+          <a:lstStyle/>
           <a:p>
             <a:fld id="{F7021451-1387-4CA6-816F-3879F97B5CBC}" type="slidenum">
               <a:rPr lang="en-US"/>
+              <a:t>12</a:t>
             </a:fld>
             <a:endParaRPr lang="en-US"/>
           </a:p>
         </p:txBody>
       </p:sp>
     </p:spTree>
+    <p:extLst>
+      <p:ext uri="{BB962C8B-B14F-4D97-AF65-F5344CB8AC3E}">
+        <p14:creationId xmlns:p14="http://schemas.microsoft.com/office/powerpoint/2010/main" val="1024086991"/>
+      </p:ext>
+    </p:extLst>
   </p:cSld>
   <p:clrMapOvr>
     <a:masterClrMapping/>
@@ -763,7 +827,7 @@
   <p:cSld>
     <p:spTree>
       <p:nvGrpSpPr>
-        <p:cNvPr id="58" name=""/>
+        <p:cNvPr id="1" name=""/>
         <p:cNvGrpSpPr/>
         <p:nvPr/>
       </p:nvGrpSpPr>
@@ -777,9 +841,9 @@
       </p:grpSpPr>
       <p:sp>
         <p:nvSpPr>
-          <p:cNvPr id="1048712" name="Slide Image Placeholder 1"/>
+          <p:cNvPr id="2" name="Slide Image Placeholder 1"/>
           <p:cNvSpPr>
-            <a:spLocks noChangeAspect="1" noRot="1" noGrp="1"/>
+            <a:spLocks noGrp="1" noRot="1" noChangeAspect="1"/>
           </p:cNvSpPr>
           <p:nvPr>
             <p:ph type="sldImg"/>
@@ -789,7 +853,7 @@
       </p:sp>
       <p:sp>
         <p:nvSpPr>
-          <p:cNvPr id="1048713" name="Notes Placeholder 2"/>
+          <p:cNvPr id="3" name="Notes Placeholder 2"/>
           <p:cNvSpPr>
             <a:spLocks noGrp="1"/>
           </p:cNvSpPr>
@@ -800,14 +864,19 @@
         <p:spPr/>
         <p:txBody>
           <a:bodyPr/>
-          <a:p>
-            <a:endParaRPr dirty="0" lang="en-US"/>
-          </a:p>
-        </p:txBody>
-      </p:sp>
-      <p:sp>
-        <p:nvSpPr>
-          <p:cNvPr id="1048714" name="Slide Number Placeholder 3"/>
+          <a:lstStyle/>
+          <a:p>
+            <a:r>
+              <a:rPr lang="en-US" dirty="0"/>
+              <a:t/>
+            </a:r>
+            <a:endParaRPr lang="en-US" dirty="0"/>
+          </a:p>
+        </p:txBody>
+      </p:sp>
+      <p:sp>
+        <p:nvSpPr>
+          <p:cNvPr id="4" name="Slide Number Placeholder 3"/>
           <p:cNvSpPr>
             <a:spLocks noGrp="1"/>
           </p:cNvSpPr>
@@ -818,15 +887,22 @@
         <p:spPr/>
         <p:txBody>
           <a:bodyPr/>
+          <a:lstStyle/>
           <a:p>
             <a:fld id="{F7021451-1387-4CA6-816F-3879F97B5CBC}" type="slidenum">
               <a:rPr lang="en-US"/>
+              <a:t>13</a:t>
             </a:fld>
             <a:endParaRPr lang="en-US"/>
           </a:p>
         </p:txBody>
       </p:sp>
     </p:spTree>
+    <p:extLst>
+      <p:ext uri="{BB962C8B-B14F-4D97-AF65-F5344CB8AC3E}">
+        <p14:creationId xmlns:p14="http://schemas.microsoft.com/office/powerpoint/2010/main" val="1024086991"/>
+      </p:ext>
+    </p:extLst>
   </p:cSld>
   <p:clrMapOvr>
     <a:masterClrMapping/>
@@ -839,7 +915,7 @@
   <p:cSld>
     <p:spTree>
       <p:nvGrpSpPr>
-        <p:cNvPr id="61" name=""/>
+        <p:cNvPr id="1" name=""/>
         <p:cNvGrpSpPr/>
         <p:nvPr/>
       </p:nvGrpSpPr>
@@ -853,9 +929,9 @@
       </p:grpSpPr>
       <p:sp>
         <p:nvSpPr>
-          <p:cNvPr id="1048723" name="Slide Image Placeholder 1"/>
+          <p:cNvPr id="2" name="Slide Image Placeholder 1"/>
           <p:cNvSpPr>
-            <a:spLocks noChangeAspect="1" noRot="1" noGrp="1"/>
+            <a:spLocks noGrp="1" noRot="1" noChangeAspect="1"/>
           </p:cNvSpPr>
           <p:nvPr>
             <p:ph type="sldImg"/>
@@ -865,7 +941,7 @@
       </p:sp>
       <p:sp>
         <p:nvSpPr>
-          <p:cNvPr id="1048724" name="Notes Placeholder 2"/>
+          <p:cNvPr id="3" name="Notes Placeholder 2"/>
           <p:cNvSpPr>
             <a:spLocks noGrp="1"/>
           </p:cNvSpPr>
@@ -876,14 +952,19 @@
         <p:spPr/>
         <p:txBody>
           <a:bodyPr/>
-          <a:p>
-            <a:endParaRPr dirty="0" lang="en-US"/>
-          </a:p>
-        </p:txBody>
-      </p:sp>
-      <p:sp>
-        <p:nvSpPr>
-          <p:cNvPr id="1048725" name="Slide Number Placeholder 3"/>
+          <a:lstStyle/>
+          <a:p>
+            <a:r>
+              <a:rPr lang="en-US" dirty="0"/>
+              <a:t/>
+            </a:r>
+            <a:endParaRPr lang="en-US" dirty="0"/>
+          </a:p>
+        </p:txBody>
+      </p:sp>
+      <p:sp>
+        <p:nvSpPr>
+          <p:cNvPr id="4" name="Slide Number Placeholder 3"/>
           <p:cNvSpPr>
             <a:spLocks noGrp="1"/>
           </p:cNvSpPr>
@@ -894,15 +975,22 @@
         <p:spPr/>
         <p:txBody>
           <a:bodyPr/>
+          <a:lstStyle/>
           <a:p>
             <a:fld id="{F7021451-1387-4CA6-816F-3879F97B5CBC}" type="slidenum">
               <a:rPr lang="en-US"/>
+              <a:t>14</a:t>
             </a:fld>
             <a:endParaRPr lang="en-US"/>
           </a:p>
         </p:txBody>
       </p:sp>
     </p:spTree>
+    <p:extLst>
+      <p:ext uri="{BB962C8B-B14F-4D97-AF65-F5344CB8AC3E}">
+        <p14:creationId xmlns:p14="http://schemas.microsoft.com/office/powerpoint/2010/main" val="1024086991"/>
+      </p:ext>
+    </p:extLst>
   </p:cSld>
   <p:clrMapOvr>
     <a:masterClrMapping/>
@@ -915,7 +1003,7 @@
   <p:cSld>
     <p:spTree>
       <p:nvGrpSpPr>
-        <p:cNvPr id="64" name=""/>
+        <p:cNvPr id="1" name=""/>
         <p:cNvGrpSpPr/>
         <p:nvPr/>
       </p:nvGrpSpPr>
@@ -929,9 +1017,9 @@
       </p:grpSpPr>
       <p:sp>
         <p:nvSpPr>
-          <p:cNvPr id="1048732" name="Slide Image Placeholder 1"/>
+          <p:cNvPr id="2" name="Slide Image Placeholder 1"/>
           <p:cNvSpPr>
-            <a:spLocks noChangeAspect="1" noRot="1" noGrp="1"/>
+            <a:spLocks noGrp="1" noRot="1" noChangeAspect="1"/>
           </p:cNvSpPr>
           <p:nvPr>
             <p:ph type="sldImg"/>
@@ -941,7 +1029,7 @@
       </p:sp>
       <p:sp>
         <p:nvSpPr>
-          <p:cNvPr id="1048733" name="Notes Placeholder 2"/>
+          <p:cNvPr id="3" name="Notes Placeholder 2"/>
           <p:cNvSpPr>
             <a:spLocks noGrp="1"/>
           </p:cNvSpPr>
@@ -952,14 +1040,19 @@
         <p:spPr/>
         <p:txBody>
           <a:bodyPr/>
-          <a:p>
-            <a:endParaRPr dirty="0" lang="en-US"/>
-          </a:p>
-        </p:txBody>
-      </p:sp>
-      <p:sp>
-        <p:nvSpPr>
-          <p:cNvPr id="1048734" name="Slide Number Placeholder 3"/>
+          <a:lstStyle/>
+          <a:p>
+            <a:r>
+              <a:rPr lang="en-US" dirty="0"/>
+              <a:t/>
+            </a:r>
+            <a:endParaRPr lang="en-US" dirty="0"/>
+          </a:p>
+        </p:txBody>
+      </p:sp>
+      <p:sp>
+        <p:nvSpPr>
+          <p:cNvPr id="4" name="Slide Number Placeholder 3"/>
           <p:cNvSpPr>
             <a:spLocks noGrp="1"/>
           </p:cNvSpPr>
@@ -970,15 +1063,22 @@
         <p:spPr/>
         <p:txBody>
           <a:bodyPr/>
+          <a:lstStyle/>
           <a:p>
             <a:fld id="{F7021451-1387-4CA6-816F-3879F97B5CBC}" type="slidenum">
               <a:rPr lang="en-US"/>
+              <a:t>15</a:t>
             </a:fld>
             <a:endParaRPr lang="en-US"/>
           </a:p>
         </p:txBody>
       </p:sp>
     </p:spTree>
+    <p:extLst>
+      <p:ext uri="{BB962C8B-B14F-4D97-AF65-F5344CB8AC3E}">
+        <p14:creationId xmlns:p14="http://schemas.microsoft.com/office/powerpoint/2010/main" val="1024086991"/>
+      </p:ext>
+    </p:extLst>
   </p:cSld>
   <p:clrMapOvr>
     <a:masterClrMapping/>
@@ -991,7 +1091,7 @@
   <p:cSld>
     <p:spTree>
       <p:nvGrpSpPr>
-        <p:cNvPr id="46" name=""/>
+        <p:cNvPr id="1" name=""/>
         <p:cNvGrpSpPr/>
         <p:nvPr/>
       </p:nvGrpSpPr>
@@ -1005,9 +1105,9 @@
       </p:grpSpPr>
       <p:sp>
         <p:nvSpPr>
-          <p:cNvPr id="1048670" name="Slide Image Placeholder 1"/>
+          <p:cNvPr id="2" name="Slide Image Placeholder 1"/>
           <p:cNvSpPr>
-            <a:spLocks noChangeAspect="1" noRot="1" noGrp="1"/>
+            <a:spLocks noGrp="1" noRot="1" noChangeAspect="1"/>
           </p:cNvSpPr>
           <p:nvPr>
             <p:ph type="sldImg"/>
@@ -1017,7 +1117,7 @@
       </p:sp>
       <p:sp>
         <p:nvSpPr>
-          <p:cNvPr id="1048671" name="Notes Placeholder 2"/>
+          <p:cNvPr id="3" name="Notes Placeholder 2"/>
           <p:cNvSpPr>
             <a:spLocks noGrp="1"/>
           </p:cNvSpPr>
@@ -1028,14 +1128,19 @@
         <p:spPr/>
         <p:txBody>
           <a:bodyPr/>
-          <a:p>
-            <a:endParaRPr dirty="0" lang="en-US"/>
-          </a:p>
-        </p:txBody>
-      </p:sp>
-      <p:sp>
-        <p:nvSpPr>
-          <p:cNvPr id="1048672" name="Slide Number Placeholder 3"/>
+          <a:lstStyle/>
+          <a:p>
+            <a:r>
+              <a:rPr lang="en-US" dirty="0"/>
+              <a:t/>
+            </a:r>
+            <a:endParaRPr lang="en-US" dirty="0"/>
+          </a:p>
+        </p:txBody>
+      </p:sp>
+      <p:sp>
+        <p:nvSpPr>
+          <p:cNvPr id="4" name="Slide Number Placeholder 3"/>
           <p:cNvSpPr>
             <a:spLocks noGrp="1"/>
           </p:cNvSpPr>
@@ -1046,15 +1151,22 @@
         <p:spPr/>
         <p:txBody>
           <a:bodyPr/>
+          <a:lstStyle/>
           <a:p>
             <a:fld id="{F7021451-1387-4CA6-816F-3879F97B5CBC}" type="slidenum">
               <a:rPr lang="en-US"/>
+              <a:t>2</a:t>
             </a:fld>
             <a:endParaRPr lang="en-US"/>
           </a:p>
         </p:txBody>
       </p:sp>
     </p:spTree>
+    <p:extLst>
+      <p:ext uri="{BB962C8B-B14F-4D97-AF65-F5344CB8AC3E}">
+        <p14:creationId xmlns:p14="http://schemas.microsoft.com/office/powerpoint/2010/main" val="1024086991"/>
+      </p:ext>
+    </p:extLst>
   </p:cSld>
   <p:clrMapOvr>
     <a:masterClrMapping/>
@@ -1067,7 +1179,7 @@
   <p:cSld>
     <p:spTree>
       <p:nvGrpSpPr>
-        <p:cNvPr id="49" name=""/>
+        <p:cNvPr id="1" name=""/>
         <p:cNvGrpSpPr/>
         <p:nvPr/>
       </p:nvGrpSpPr>
@@ -1081,9 +1193,9 @@
       </p:grpSpPr>
       <p:sp>
         <p:nvSpPr>
-          <p:cNvPr id="1048681" name="Slide Image Placeholder 1"/>
+          <p:cNvPr id="2" name="Slide Image Placeholder 1"/>
           <p:cNvSpPr>
-            <a:spLocks noChangeAspect="1" noRot="1" noGrp="1"/>
+            <a:spLocks noGrp="1" noRot="1" noChangeAspect="1"/>
           </p:cNvSpPr>
           <p:nvPr>
             <p:ph type="sldImg"/>
@@ -1093,7 +1205,7 @@
       </p:sp>
       <p:sp>
         <p:nvSpPr>
-          <p:cNvPr id="1048682" name="Notes Placeholder 2"/>
+          <p:cNvPr id="3" name="Notes Placeholder 2"/>
           <p:cNvSpPr>
             <a:spLocks noGrp="1"/>
           </p:cNvSpPr>
@@ -1104,14 +1216,19 @@
         <p:spPr/>
         <p:txBody>
           <a:bodyPr/>
-          <a:p>
-            <a:endParaRPr dirty="0" lang="en-US"/>
-          </a:p>
-        </p:txBody>
-      </p:sp>
-      <p:sp>
-        <p:nvSpPr>
-          <p:cNvPr id="1048683" name="Slide Number Placeholder 3"/>
+          <a:lstStyle/>
+          <a:p>
+            <a:r>
+              <a:rPr lang="en-US" dirty="0"/>
+              <a:t/>
+            </a:r>
+            <a:endParaRPr lang="en-US" dirty="0"/>
+          </a:p>
+        </p:txBody>
+      </p:sp>
+      <p:sp>
+        <p:nvSpPr>
+          <p:cNvPr id="4" name="Slide Number Placeholder 3"/>
           <p:cNvSpPr>
             <a:spLocks noGrp="1"/>
           </p:cNvSpPr>
@@ -1122,15 +1239,22 @@
         <p:spPr/>
         <p:txBody>
           <a:bodyPr/>
+          <a:lstStyle/>
           <a:p>
             <a:fld id="{F7021451-1387-4CA6-816F-3879F97B5CBC}" type="slidenum">
               <a:rPr lang="en-US"/>
+              <a:t>3</a:t>
             </a:fld>
             <a:endParaRPr lang="en-US"/>
           </a:p>
         </p:txBody>
       </p:sp>
     </p:spTree>
+    <p:extLst>
+      <p:ext uri="{BB962C8B-B14F-4D97-AF65-F5344CB8AC3E}">
+        <p14:creationId xmlns:p14="http://schemas.microsoft.com/office/powerpoint/2010/main" val="1024086991"/>
+      </p:ext>
+    </p:extLst>
   </p:cSld>
   <p:clrMapOvr>
     <a:masterClrMapping/>
@@ -1143,7 +1267,7 @@
   <p:cSld>
     <p:spTree>
       <p:nvGrpSpPr>
-        <p:cNvPr id="52" name=""/>
+        <p:cNvPr id="1" name=""/>
         <p:cNvGrpSpPr/>
         <p:nvPr/>
       </p:nvGrpSpPr>
@@ -1157,9 +1281,9 @@
       </p:grpSpPr>
       <p:sp>
         <p:nvSpPr>
-          <p:cNvPr id="1048692" name="Slide Image Placeholder 1"/>
+          <p:cNvPr id="2" name="Slide Image Placeholder 1"/>
           <p:cNvSpPr>
-            <a:spLocks noChangeAspect="1" noRot="1" noGrp="1"/>
+            <a:spLocks noGrp="1" noRot="1" noChangeAspect="1"/>
           </p:cNvSpPr>
           <p:nvPr>
             <p:ph type="sldImg"/>
@@ -1169,7 +1293,7 @@
       </p:sp>
       <p:sp>
         <p:nvSpPr>
-          <p:cNvPr id="1048693" name="Notes Placeholder 2"/>
+          <p:cNvPr id="3" name="Notes Placeholder 2"/>
           <p:cNvSpPr>
             <a:spLocks noGrp="1"/>
           </p:cNvSpPr>
@@ -1180,14 +1304,19 @@
         <p:spPr/>
         <p:txBody>
           <a:bodyPr/>
-          <a:p>
-            <a:endParaRPr dirty="0" lang="en-US"/>
-          </a:p>
-        </p:txBody>
-      </p:sp>
-      <p:sp>
-        <p:nvSpPr>
-          <p:cNvPr id="1048694" name="Slide Number Placeholder 3"/>
+          <a:lstStyle/>
+          <a:p>
+            <a:r>
+              <a:rPr lang="en-US" dirty="0"/>
+              <a:t/>
+            </a:r>
+            <a:endParaRPr lang="en-US" dirty="0"/>
+          </a:p>
+        </p:txBody>
+      </p:sp>
+      <p:sp>
+        <p:nvSpPr>
+          <p:cNvPr id="4" name="Slide Number Placeholder 3"/>
           <p:cNvSpPr>
             <a:spLocks noGrp="1"/>
           </p:cNvSpPr>
@@ -1198,15 +1327,22 @@
         <p:spPr/>
         <p:txBody>
           <a:bodyPr/>
+          <a:lstStyle/>
           <a:p>
             <a:fld id="{F7021451-1387-4CA6-816F-3879F97B5CBC}" type="slidenum">
               <a:rPr lang="en-US"/>
+              <a:t>4</a:t>
             </a:fld>
             <a:endParaRPr lang="en-US"/>
           </a:p>
         </p:txBody>
       </p:sp>
     </p:spTree>
+    <p:extLst>
+      <p:ext uri="{BB962C8B-B14F-4D97-AF65-F5344CB8AC3E}">
+        <p14:creationId xmlns:p14="http://schemas.microsoft.com/office/powerpoint/2010/main" val="1024086991"/>
+      </p:ext>
+    </p:extLst>
   </p:cSld>
   <p:clrMapOvr>
     <a:masterClrMapping/>
@@ -1219,7 +1355,7 @@
   <p:cSld>
     <p:spTree>
       <p:nvGrpSpPr>
-        <p:cNvPr id="55" name=""/>
+        <p:cNvPr id="1" name=""/>
         <p:cNvGrpSpPr/>
         <p:nvPr/>
       </p:nvGrpSpPr>
@@ -1233,9 +1369,9 @@
       </p:grpSpPr>
       <p:sp>
         <p:nvSpPr>
-          <p:cNvPr id="1048703" name="Slide Image Placeholder 1"/>
+          <p:cNvPr id="2" name="Slide Image Placeholder 1"/>
           <p:cNvSpPr>
-            <a:spLocks noChangeAspect="1" noRot="1" noGrp="1"/>
+            <a:spLocks noGrp="1" noRot="1" noChangeAspect="1"/>
           </p:cNvSpPr>
           <p:nvPr>
             <p:ph type="sldImg"/>
@@ -1245,7 +1381,7 @@
       </p:sp>
       <p:sp>
         <p:nvSpPr>
-          <p:cNvPr id="1048704" name="Notes Placeholder 2"/>
+          <p:cNvPr id="3" name="Notes Placeholder 2"/>
           <p:cNvSpPr>
             <a:spLocks noGrp="1"/>
           </p:cNvSpPr>
@@ -1256,14 +1392,19 @@
         <p:spPr/>
         <p:txBody>
           <a:bodyPr/>
-          <a:p>
-            <a:endParaRPr dirty="0" lang="en-US"/>
-          </a:p>
-        </p:txBody>
-      </p:sp>
-      <p:sp>
-        <p:nvSpPr>
-          <p:cNvPr id="1048705" name="Slide Number Placeholder 3"/>
+          <a:lstStyle/>
+          <a:p>
+            <a:r>
+              <a:rPr lang="en-US" dirty="0"/>
+              <a:t/>
+            </a:r>
+            <a:endParaRPr lang="en-US" dirty="0"/>
+          </a:p>
+        </p:txBody>
+      </p:sp>
+      <p:sp>
+        <p:nvSpPr>
+          <p:cNvPr id="4" name="Slide Number Placeholder 3"/>
           <p:cNvSpPr>
             <a:spLocks noGrp="1"/>
           </p:cNvSpPr>
@@ -1274,15 +1415,22 @@
         <p:spPr/>
         <p:txBody>
           <a:bodyPr/>
+          <a:lstStyle/>
           <a:p>
             <a:fld id="{F7021451-1387-4CA6-816F-3879F97B5CBC}" type="slidenum">
               <a:rPr lang="en-US"/>
+              <a:t>5</a:t>
             </a:fld>
             <a:endParaRPr lang="en-US"/>
           </a:p>
         </p:txBody>
       </p:sp>
     </p:spTree>
+    <p:extLst>
+      <p:ext uri="{BB962C8B-B14F-4D97-AF65-F5344CB8AC3E}">
+        <p14:creationId xmlns:p14="http://schemas.microsoft.com/office/powerpoint/2010/main" val="1024086991"/>
+      </p:ext>
+    </p:extLst>
   </p:cSld>
   <p:clrMapOvr>
     <a:masterClrMapping/>
@@ -1295,7 +1443,7 @@
   <p:cSld>
     <p:spTree>
       <p:nvGrpSpPr>
-        <p:cNvPr id="40" name=""/>
+        <p:cNvPr id="1" name=""/>
         <p:cNvGrpSpPr/>
         <p:nvPr/>
       </p:nvGrpSpPr>
@@ -1309,9 +1457,9 @@
       </p:grpSpPr>
       <p:sp>
         <p:nvSpPr>
-          <p:cNvPr id="1048649" name="Slide Image Placeholder 1"/>
+          <p:cNvPr id="2" name="Slide Image Placeholder 1"/>
           <p:cNvSpPr>
-            <a:spLocks noChangeAspect="1" noRot="1" noGrp="1"/>
+            <a:spLocks noGrp="1" noRot="1" noChangeAspect="1"/>
           </p:cNvSpPr>
           <p:nvPr>
             <p:ph type="sldImg"/>
@@ -1321,7 +1469,7 @@
       </p:sp>
       <p:sp>
         <p:nvSpPr>
-          <p:cNvPr id="1048650" name="Notes Placeholder 2"/>
+          <p:cNvPr id="3" name="Notes Placeholder 2"/>
           <p:cNvSpPr>
             <a:spLocks noGrp="1"/>
           </p:cNvSpPr>
@@ -1332,14 +1480,19 @@
         <p:spPr/>
         <p:txBody>
           <a:bodyPr/>
-          <a:p>
-            <a:endParaRPr dirty="0" lang="en-US"/>
-          </a:p>
-        </p:txBody>
-      </p:sp>
-      <p:sp>
-        <p:nvSpPr>
-          <p:cNvPr id="1048651" name="Slide Number Placeholder 3"/>
+          <a:lstStyle/>
+          <a:p>
+            <a:r>
+              <a:rPr lang="en-US" dirty="0"/>
+              <a:t/>
+            </a:r>
+            <a:endParaRPr lang="en-US" dirty="0"/>
+          </a:p>
+        </p:txBody>
+      </p:sp>
+      <p:sp>
+        <p:nvSpPr>
+          <p:cNvPr id="4" name="Slide Number Placeholder 3"/>
           <p:cNvSpPr>
             <a:spLocks noGrp="1"/>
           </p:cNvSpPr>
@@ -1350,15 +1503,22 @@
         <p:spPr/>
         <p:txBody>
           <a:bodyPr/>
+          <a:lstStyle/>
           <a:p>
             <a:fld id="{F7021451-1387-4CA6-816F-3879F97B5CBC}" type="slidenum">
               <a:rPr lang="en-US"/>
+              <a:t>6</a:t>
             </a:fld>
             <a:endParaRPr lang="en-US"/>
           </a:p>
         </p:txBody>
       </p:sp>
     </p:spTree>
+    <p:extLst>
+      <p:ext uri="{BB962C8B-B14F-4D97-AF65-F5344CB8AC3E}">
+        <p14:creationId xmlns:p14="http://schemas.microsoft.com/office/powerpoint/2010/main" val="1024086991"/>
+      </p:ext>
+    </p:extLst>
   </p:cSld>
   <p:clrMapOvr>
     <a:masterClrMapping/>
@@ -1371,7 +1531,7 @@
   <p:cSld>
     <p:spTree>
       <p:nvGrpSpPr>
-        <p:cNvPr id="34" name=""/>
+        <p:cNvPr id="1" name=""/>
         <p:cNvGrpSpPr/>
         <p:nvPr/>
       </p:nvGrpSpPr>
@@ -1385,9 +1545,9 @@
       </p:grpSpPr>
       <p:sp>
         <p:nvSpPr>
-          <p:cNvPr id="1048630" name="Slide Image Placeholder 1"/>
+          <p:cNvPr id="2" name="Slide Image Placeholder 1"/>
           <p:cNvSpPr>
-            <a:spLocks noChangeAspect="1" noRot="1" noGrp="1"/>
+            <a:spLocks noGrp="1" noRot="1" noChangeAspect="1"/>
           </p:cNvSpPr>
           <p:nvPr>
             <p:ph type="sldImg"/>
@@ -1397,7 +1557,7 @@
       </p:sp>
       <p:sp>
         <p:nvSpPr>
-          <p:cNvPr id="1048631" name="Notes Placeholder 2"/>
+          <p:cNvPr id="3" name="Notes Placeholder 2"/>
           <p:cNvSpPr>
             <a:spLocks noGrp="1"/>
           </p:cNvSpPr>
@@ -1408,14 +1568,19 @@
         <p:spPr/>
         <p:txBody>
           <a:bodyPr/>
-          <a:p>
-            <a:endParaRPr dirty="0" lang="en-US"/>
-          </a:p>
-        </p:txBody>
-      </p:sp>
-      <p:sp>
-        <p:nvSpPr>
-          <p:cNvPr id="1048632" name="Slide Number Placeholder 3"/>
+          <a:lstStyle/>
+          <a:p>
+            <a:r>
+              <a:rPr lang="en-US" dirty="0"/>
+              <a:t/>
+            </a:r>
+            <a:endParaRPr lang="en-US" dirty="0"/>
+          </a:p>
+        </p:txBody>
+      </p:sp>
+      <p:sp>
+        <p:nvSpPr>
+          <p:cNvPr id="4" name="Slide Number Placeholder 3"/>
           <p:cNvSpPr>
             <a:spLocks noGrp="1"/>
           </p:cNvSpPr>
@@ -1426,15 +1591,22 @@
         <p:spPr/>
         <p:txBody>
           <a:bodyPr/>
+          <a:lstStyle/>
           <a:p>
             <a:fld id="{F7021451-1387-4CA6-816F-3879F97B5CBC}" type="slidenum">
               <a:rPr lang="en-US"/>
+              <a:t>7</a:t>
             </a:fld>
             <a:endParaRPr lang="en-US"/>
           </a:p>
         </p:txBody>
       </p:sp>
     </p:spTree>
+    <p:extLst>
+      <p:ext uri="{BB962C8B-B14F-4D97-AF65-F5344CB8AC3E}">
+        <p14:creationId xmlns:p14="http://schemas.microsoft.com/office/powerpoint/2010/main" val="1024086991"/>
+      </p:ext>
+    </p:extLst>
   </p:cSld>
   <p:clrMapOvr>
     <a:masterClrMapping/>
@@ -1447,7 +1619,7 @@
   <p:cSld>
     <p:spTree>
       <p:nvGrpSpPr>
-        <p:cNvPr id="28" name=""/>
+        <p:cNvPr id="1" name=""/>
         <p:cNvGrpSpPr/>
         <p:nvPr/>
       </p:nvGrpSpPr>
@@ -1461,9 +1633,9 @@
       </p:grpSpPr>
       <p:sp>
         <p:nvSpPr>
-          <p:cNvPr id="1048608" name="Slide Image Placeholder 1"/>
+          <p:cNvPr id="2" name="Slide Image Placeholder 1"/>
           <p:cNvSpPr>
-            <a:spLocks noChangeAspect="1" noRot="1" noGrp="1"/>
+            <a:spLocks noGrp="1" noRot="1" noChangeAspect="1"/>
           </p:cNvSpPr>
           <p:nvPr>
             <p:ph type="sldImg"/>
@@ -1473,7 +1645,7 @@
       </p:sp>
       <p:sp>
         <p:nvSpPr>
-          <p:cNvPr id="1048609" name="Notes Placeholder 2"/>
+          <p:cNvPr id="3" name="Notes Placeholder 2"/>
           <p:cNvSpPr>
             <a:spLocks noGrp="1"/>
           </p:cNvSpPr>
@@ -1484,14 +1656,19 @@
         <p:spPr/>
         <p:txBody>
           <a:bodyPr/>
-          <a:p>
-            <a:endParaRPr dirty="0" lang="en-US"/>
-          </a:p>
-        </p:txBody>
-      </p:sp>
-      <p:sp>
-        <p:nvSpPr>
-          <p:cNvPr id="1048610" name="Slide Number Placeholder 3"/>
+          <a:lstStyle/>
+          <a:p>
+            <a:r>
+              <a:rPr lang="en-US" dirty="0"/>
+              <a:t/>
+            </a:r>
+            <a:endParaRPr lang="en-US" dirty="0"/>
+          </a:p>
+        </p:txBody>
+      </p:sp>
+      <p:sp>
+        <p:nvSpPr>
+          <p:cNvPr id="4" name="Slide Number Placeholder 3"/>
           <p:cNvSpPr>
             <a:spLocks noGrp="1"/>
           </p:cNvSpPr>
@@ -1502,15 +1679,22 @@
         <p:spPr/>
         <p:txBody>
           <a:bodyPr/>
+          <a:lstStyle/>
           <a:p>
             <a:fld id="{F7021451-1387-4CA6-816F-3879F97B5CBC}" type="slidenum">
               <a:rPr lang="en-US"/>
+              <a:t>8</a:t>
             </a:fld>
             <a:endParaRPr lang="en-US"/>
           </a:p>
         </p:txBody>
       </p:sp>
     </p:spTree>
+    <p:extLst>
+      <p:ext uri="{BB962C8B-B14F-4D97-AF65-F5344CB8AC3E}">
+        <p14:creationId xmlns:p14="http://schemas.microsoft.com/office/powerpoint/2010/main" val="1024086991"/>
+      </p:ext>
+    </p:extLst>
   </p:cSld>
   <p:clrMapOvr>
     <a:masterClrMapping/>
@@ -1523,7 +1707,7 @@
   <p:cSld>
     <p:spTree>
       <p:nvGrpSpPr>
-        <p:cNvPr id="17" name=""/>
+        <p:cNvPr id="1" name=""/>
         <p:cNvGrpSpPr/>
         <p:nvPr/>
       </p:nvGrpSpPr>
@@ -1537,9 +1721,9 @@
       </p:grpSpPr>
       <p:sp>
         <p:nvSpPr>
-          <p:cNvPr id="1048585" name="Slide Image Placeholder 1"/>
+          <p:cNvPr id="2" name="Slide Image Placeholder 1"/>
           <p:cNvSpPr>
-            <a:spLocks noChangeAspect="1" noRot="1" noGrp="1"/>
+            <a:spLocks noGrp="1" noRot="1" noChangeAspect="1"/>
           </p:cNvSpPr>
           <p:nvPr>
             <p:ph type="sldImg"/>
@@ -1549,7 +1733,7 @@
       </p:sp>
       <p:sp>
         <p:nvSpPr>
-          <p:cNvPr id="1048586" name="Notes Placeholder 2"/>
+          <p:cNvPr id="3" name="Notes Placeholder 2"/>
           <p:cNvSpPr>
             <a:spLocks noGrp="1"/>
           </p:cNvSpPr>
@@ -1560,14 +1744,19 @@
         <p:spPr/>
         <p:txBody>
           <a:bodyPr/>
-          <a:p>
-            <a:endParaRPr dirty="0" lang="en-US"/>
-          </a:p>
-        </p:txBody>
-      </p:sp>
-      <p:sp>
-        <p:nvSpPr>
-          <p:cNvPr id="1048587" name="Slide Number Placeholder 3"/>
+          <a:lstStyle/>
+          <a:p>
+            <a:r>
+              <a:rPr lang="en-US" dirty="0"/>
+              <a:t/>
+            </a:r>
+            <a:endParaRPr lang="en-US" dirty="0"/>
+          </a:p>
+        </p:txBody>
+      </p:sp>
+      <p:sp>
+        <p:nvSpPr>
+          <p:cNvPr id="4" name="Slide Number Placeholder 3"/>
           <p:cNvSpPr>
             <a:spLocks noGrp="1"/>
           </p:cNvSpPr>
@@ -1578,15 +1767,22 @@
         <p:spPr/>
         <p:txBody>
           <a:bodyPr/>
+          <a:lstStyle/>
           <a:p>
             <a:fld id="{F7021451-1387-4CA6-816F-3879F97B5CBC}" type="slidenum">
               <a:rPr lang="en-US"/>
+              <a:t>9</a:t>
             </a:fld>
             <a:endParaRPr lang="en-US"/>
           </a:p>
         </p:txBody>
       </p:sp>
     </p:spTree>
+    <p:extLst>
+      <p:ext uri="{BB962C8B-B14F-4D97-AF65-F5344CB8AC3E}">
+        <p14:creationId xmlns:p14="http://schemas.microsoft.com/office/powerpoint/2010/main" val="1024086991"/>
+      </p:ext>
+    </p:extLst>
   </p:cSld>
   <p:clrMapOvr>
     <a:masterClrMapping/>
@@ -1604,7 +1800,7 @@
     </p:bg>
     <p:spTree>
       <p:nvGrpSpPr>
-        <p:cNvPr id="14" name=""/>
+        <p:cNvPr id="1" name=""/>
         <p:cNvGrpSpPr/>
         <p:nvPr/>
       </p:nvGrpSpPr>
@@ -1627,14 +1823,9 @@
 <file path=ppt/slideMasters/slideMaster1.xml><?xml version="1.0" encoding="utf-8"?>
 <p:sldMaster xmlns:a="http://schemas.openxmlformats.org/drawingml/2006/main" xmlns:r="http://schemas.openxmlformats.org/officeDocument/2006/relationships" xmlns:p="http://schemas.openxmlformats.org/presentationml/2006/main">
   <p:cSld>
-    <p:bg>
-      <p:bgRef idx="1001">
-        <a:schemeClr val="bg1"/>
-      </p:bgRef>
-    </p:bg>
     <p:spTree>
       <p:nvGrpSpPr>
-        <p:cNvPr id="12" name=""/>
+        <p:cNvPr id="1" name=""/>
         <p:cNvGrpSpPr/>
         <p:nvPr/>
       </p:nvGrpSpPr>
@@ -1648,14 +1839,14 @@
       </p:grpSpPr>
     </p:spTree>
   </p:cSld>
-  <p:clrMap accent1="accent1" accent2="accent2" accent3="accent3" accent4="accent4" accent5="accent5" accent6="accent6" bg1="lt1" bg2="lt2" tx1="dk1" tx2="dk2" hlink="hlink" folHlink="folHlink"/>
+  <p:clrMap bg1="lt1" tx1="dk1" bg2="lt2" tx2="dk2" accent1="accent1" accent2="accent2" accent3="accent3" accent4="accent4" accent5="accent5" accent6="accent6" hlink="hlink" folHlink="folHlink"/>
   <p:sldLayoutIdLst>
     <p:sldLayoutId id="2147483649" r:id="rId1"/>
   </p:sldLayoutIdLst>
-  <p:hf dt="0" ftr="0" hdr="0" sldNum="0"/>
+  <p:hf sldNum="0" hdr="0" ftr="0" dt="0"/>
   <p:txStyles>
     <p:titleStyle>
-      <a:lvl1pPr algn="ctr" defTabSz="914400" eaLnBrk="1" hangingPunct="1" latinLnBrk="0" rtl="0">
+      <a:lvl1pPr algn="ctr" defTabSz="914400" rtl="0" eaLnBrk="1" latinLnBrk="0" hangingPunct="1">
         <a:spcBef>
           <a:spcPct val="0"/>
         </a:spcBef>
@@ -1671,11 +1862,11 @@
       </a:lvl1pPr>
     </p:titleStyle>
     <p:bodyStyle>
-      <a:lvl1pPr algn="l" defTabSz="914400" eaLnBrk="1" hangingPunct="1" indent="-342900" latinLnBrk="0" marL="342900" rtl="0">
+      <a:lvl1pPr marL="342900" indent="-342900" algn="l" defTabSz="914400" rtl="0" eaLnBrk="1" latinLnBrk="0" hangingPunct="1">
         <a:spcBef>
           <a:spcPct val="20000"/>
         </a:spcBef>
-        <a:buFont typeface="Arial" panose="020B0604020202020204" pitchFamily="34" charset="0"/>
+        <a:buFont typeface="Arial" pitchFamily="34" charset="0"/>
         <a:buChar char="•"/>
         <a:defRPr sz="3200" kern="1200">
           <a:solidFill>
@@ -1686,11 +1877,11 @@
           <a:cs typeface="+mn-cs"/>
         </a:defRPr>
       </a:lvl1pPr>
-      <a:lvl2pPr algn="l" defTabSz="914400" eaLnBrk="1" hangingPunct="1" indent="-285750" latinLnBrk="0" marL="742950" rtl="0">
+      <a:lvl2pPr marL="742950" indent="-285750" algn="l" defTabSz="914400" rtl="0" eaLnBrk="1" latinLnBrk="0" hangingPunct="1">
         <a:spcBef>
           <a:spcPct val="20000"/>
         </a:spcBef>
-        <a:buFont typeface="Arial" panose="020B0604020202020204" pitchFamily="34" charset="0"/>
+        <a:buFont typeface="Arial" pitchFamily="34" charset="0"/>
         <a:buChar char="–"/>
         <a:defRPr sz="2800" kern="1200">
           <a:solidFill>
@@ -1701,11 +1892,11 @@
           <a:cs typeface="+mn-cs"/>
         </a:defRPr>
       </a:lvl2pPr>
-      <a:lvl3pPr algn="l" defTabSz="914400" eaLnBrk="1" hangingPunct="1" indent="-228600" latinLnBrk="0" marL="1143000" rtl="0">
+      <a:lvl3pPr marL="1143000" indent="-228600" algn="l" defTabSz="914400" rtl="0" eaLnBrk="1" latinLnBrk="0" hangingPunct="1">
         <a:spcBef>
           <a:spcPct val="20000"/>
         </a:spcBef>
-        <a:buFont typeface="Arial" panose="020B0604020202020204" pitchFamily="34" charset="0"/>
+        <a:buFont typeface="Arial" pitchFamily="34" charset="0"/>
         <a:buChar char="•"/>
         <a:defRPr sz="2400" kern="1200">
           <a:solidFill>
@@ -1716,11 +1907,11 @@
           <a:cs typeface="+mn-cs"/>
         </a:defRPr>
       </a:lvl3pPr>
-      <a:lvl4pPr algn="l" defTabSz="914400" eaLnBrk="1" hangingPunct="1" indent="-228600" latinLnBrk="0" marL="1600200" rtl="0">
+      <a:lvl4pPr marL="1600200" indent="-228600" algn="l" defTabSz="914400" rtl="0" eaLnBrk="1" latinLnBrk="0" hangingPunct="1">
         <a:spcBef>
           <a:spcPct val="20000"/>
         </a:spcBef>
-        <a:buFont typeface="Arial" panose="020B0604020202020204" pitchFamily="34" charset="0"/>
+        <a:buFont typeface="Arial" pitchFamily="34" charset="0"/>
         <a:buChar char="–"/>
         <a:defRPr sz="2000" kern="1200">
           <a:solidFill>
@@ -1731,11 +1922,11 @@
           <a:cs typeface="+mn-cs"/>
         </a:defRPr>
       </a:lvl4pPr>
-      <a:lvl5pPr algn="l" defTabSz="914400" eaLnBrk="1" hangingPunct="1" indent="-228600" latinLnBrk="0" marL="2057400" rtl="0">
+      <a:lvl5pPr marL="2057400" indent="-228600" algn="l" defTabSz="914400" rtl="0" eaLnBrk="1" latinLnBrk="0" hangingPunct="1">
         <a:spcBef>
           <a:spcPct val="20000"/>
         </a:spcBef>
-        <a:buFont typeface="Arial" panose="020B0604020202020204" pitchFamily="34" charset="0"/>
+        <a:buFont typeface="Arial" pitchFamily="34" charset="0"/>
         <a:buChar char="»"/>
         <a:defRPr sz="2000" kern="1200">
           <a:solidFill>
@@ -1746,11 +1937,11 @@
           <a:cs typeface="+mn-cs"/>
         </a:defRPr>
       </a:lvl5pPr>
-      <a:lvl6pPr algn="l" defTabSz="914400" eaLnBrk="1" hangingPunct="1" indent="-228600" latinLnBrk="0" marL="2514600" rtl="0">
+      <a:lvl6pPr marL="2514600" indent="-228600" algn="l" defTabSz="914400" rtl="0" eaLnBrk="1" latinLnBrk="0" hangingPunct="1">
         <a:spcBef>
           <a:spcPct val="20000"/>
         </a:spcBef>
-        <a:buFont typeface="Arial" panose="020B0604020202020204" pitchFamily="34" charset="0"/>
+        <a:buFont typeface="Arial" pitchFamily="34" charset="0"/>
         <a:buChar char="•"/>
         <a:defRPr sz="2000" kern="1200">
           <a:solidFill>
@@ -1761,11 +1952,11 @@
           <a:cs typeface="+mn-cs"/>
         </a:defRPr>
       </a:lvl6pPr>
-      <a:lvl7pPr algn="l" defTabSz="914400" eaLnBrk="1" hangingPunct="1" indent="-228600" latinLnBrk="0" marL="2971800" rtl="0">
+      <a:lvl7pPr marL="2971800" indent="-228600" algn="l" defTabSz="914400" rtl="0" eaLnBrk="1" latinLnBrk="0" hangingPunct="1">
         <a:spcBef>
           <a:spcPct val="20000"/>
         </a:spcBef>
-        <a:buFont typeface="Arial" panose="020B0604020202020204" pitchFamily="34" charset="0"/>
+        <a:buFont typeface="Arial" pitchFamily="34" charset="0"/>
         <a:buChar char="•"/>
         <a:defRPr sz="2000" kern="1200">
           <a:solidFill>
@@ -1776,11 +1967,11 @@
           <a:cs typeface="+mn-cs"/>
         </a:defRPr>
       </a:lvl7pPr>
-      <a:lvl8pPr algn="l" defTabSz="914400" eaLnBrk="1" hangingPunct="1" indent="-228600" latinLnBrk="0" marL="3429000" rtl="0">
+      <a:lvl8pPr marL="3429000" indent="-228600" algn="l" defTabSz="914400" rtl="0" eaLnBrk="1" latinLnBrk="0" hangingPunct="1">
         <a:spcBef>
           <a:spcPct val="20000"/>
         </a:spcBef>
-        <a:buFont typeface="Arial" panose="020B0604020202020204" pitchFamily="34" charset="0"/>
+        <a:buFont typeface="Arial" pitchFamily="34" charset="0"/>
         <a:buChar char="•"/>
         <a:defRPr sz="2000" kern="1200">
           <a:solidFill>
@@ -1791,11 +1982,11 @@
           <a:cs typeface="+mn-cs"/>
         </a:defRPr>
       </a:lvl8pPr>
-      <a:lvl9pPr algn="l" defTabSz="914400" eaLnBrk="1" hangingPunct="1" indent="-228600" latinLnBrk="0" marL="3886200" rtl="0">
+      <a:lvl9pPr marL="3886200" indent="-228600" algn="l" defTabSz="914400" rtl="0" eaLnBrk="1" latinLnBrk="0" hangingPunct="1">
         <a:spcBef>
           <a:spcPct val="20000"/>
         </a:spcBef>
-        <a:buFont typeface="Arial" panose="020B0604020202020204" pitchFamily="34" charset="0"/>
+        <a:buFont typeface="Arial" pitchFamily="34" charset="0"/>
         <a:buChar char="•"/>
         <a:defRPr sz="2000" kern="1200">
           <a:solidFill>
@@ -1811,7 +2002,7 @@
       <a:defPPr>
         <a:defRPr lang="en-US"/>
       </a:defPPr>
-      <a:lvl1pPr algn="l" defTabSz="914400" eaLnBrk="1" hangingPunct="1" latinLnBrk="0" marL="0" rtl="0">
+      <a:lvl1pPr marL="0" algn="l" defTabSz="914400" rtl="0" eaLnBrk="1" latinLnBrk="0" hangingPunct="1">
         <a:defRPr sz="1800" kern="1200">
           <a:solidFill>
             <a:schemeClr val="tx1"/>
@@ -1821,7 +2012,7 @@
           <a:cs typeface="+mn-cs"/>
         </a:defRPr>
       </a:lvl1pPr>
-      <a:lvl2pPr algn="l" defTabSz="914400" eaLnBrk="1" hangingPunct="1" latinLnBrk="0" marL="457200" rtl="0">
+      <a:lvl2pPr marL="457200" algn="l" defTabSz="914400" rtl="0" eaLnBrk="1" latinLnBrk="0" hangingPunct="1">
         <a:defRPr sz="1800" kern="1200">
           <a:solidFill>
             <a:schemeClr val="tx1"/>
@@ -1831,7 +2022,7 @@
           <a:cs typeface="+mn-cs"/>
         </a:defRPr>
       </a:lvl2pPr>
-      <a:lvl3pPr algn="l" defTabSz="914400" eaLnBrk="1" hangingPunct="1" latinLnBrk="0" marL="914400" rtl="0">
+      <a:lvl3pPr marL="914400" algn="l" defTabSz="914400" rtl="0" eaLnBrk="1" latinLnBrk="0" hangingPunct="1">
         <a:defRPr sz="1800" kern="1200">
           <a:solidFill>
             <a:schemeClr val="tx1"/>
@@ -1841,7 +2032,7 @@
           <a:cs typeface="+mn-cs"/>
         </a:defRPr>
       </a:lvl3pPr>
-      <a:lvl4pPr algn="l" defTabSz="914400" eaLnBrk="1" hangingPunct="1" latinLnBrk="0" marL="1371600" rtl="0">
+      <a:lvl4pPr marL="1371600" algn="l" defTabSz="914400" rtl="0" eaLnBrk="1" latinLnBrk="0" hangingPunct="1">
         <a:defRPr sz="1800" kern="1200">
           <a:solidFill>
             <a:schemeClr val="tx1"/>
@@ -1851,7 +2042,7 @@
           <a:cs typeface="+mn-cs"/>
         </a:defRPr>
       </a:lvl4pPr>
-      <a:lvl5pPr algn="l" defTabSz="914400" eaLnBrk="1" hangingPunct="1" latinLnBrk="0" marL="1828800" rtl="0">
+      <a:lvl5pPr marL="1828800" algn="l" defTabSz="914400" rtl="0" eaLnBrk="1" latinLnBrk="0" hangingPunct="1">
         <a:defRPr sz="1800" kern="1200">
           <a:solidFill>
             <a:schemeClr val="tx1"/>
@@ -1861,7 +2052,7 @@
           <a:cs typeface="+mn-cs"/>
         </a:defRPr>
       </a:lvl5pPr>
-      <a:lvl6pPr algn="l" defTabSz="914400" eaLnBrk="1" hangingPunct="1" latinLnBrk="0" marL="2286000" rtl="0">
+      <a:lvl6pPr marL="2286000" algn="l" defTabSz="914400" rtl="0" eaLnBrk="1" latinLnBrk="0" hangingPunct="1">
         <a:defRPr sz="1800" kern="1200">
           <a:solidFill>
             <a:schemeClr val="tx1"/>
@@ -1871,7 +2062,7 @@
           <a:cs typeface="+mn-cs"/>
         </a:defRPr>
       </a:lvl6pPr>
-      <a:lvl7pPr algn="l" defTabSz="914400" eaLnBrk="1" hangingPunct="1" latinLnBrk="0" marL="2743200" rtl="0">
+      <a:lvl7pPr marL="2743200" algn="l" defTabSz="914400" rtl="0" eaLnBrk="1" latinLnBrk="0" hangingPunct="1">
         <a:defRPr sz="1800" kern="1200">
           <a:solidFill>
             <a:schemeClr val="tx1"/>
@@ -1881,7 +2072,7 @@
           <a:cs typeface="+mn-cs"/>
         </a:defRPr>
       </a:lvl7pPr>
-      <a:lvl8pPr algn="l" defTabSz="914400" eaLnBrk="1" hangingPunct="1" latinLnBrk="0" marL="3200400" rtl="0">
+      <a:lvl8pPr marL="3200400" algn="l" defTabSz="914400" rtl="0" eaLnBrk="1" latinLnBrk="0" hangingPunct="1">
         <a:defRPr sz="1800" kern="1200">
           <a:solidFill>
             <a:schemeClr val="tx1"/>
@@ -1891,7 +2082,7 @@
           <a:cs typeface="+mn-cs"/>
         </a:defRPr>
       </a:lvl8pPr>
-      <a:lvl9pPr algn="l" defTabSz="914400" eaLnBrk="1" hangingPunct="1" latinLnBrk="0" marL="3657600" rtl="0">
+      <a:lvl9pPr marL="3657600" algn="l" defTabSz="914400" rtl="0" eaLnBrk="1" latinLnBrk="0" hangingPunct="1">
         <a:defRPr sz="1800" kern="1200">
           <a:solidFill>
             <a:schemeClr val="tx1"/>
@@ -1908,11 +2099,11 @@
 
 <file path=ppt/slides/slide1.xml><?xml version="1.0" encoding="utf-8"?>
 <p:sld xmlns:a="http://schemas.openxmlformats.org/drawingml/2006/main" xmlns:r="http://schemas.openxmlformats.org/officeDocument/2006/relationships" xmlns:p="http://schemas.openxmlformats.org/presentationml/2006/main">
-  <p:cSld>
+  <p:cSld name="Slide 1">
     <p:bg>
       <p:bgPr>
-        <a:blipFill rotWithShape="1" dpi="0">
-          <a:blip xmlns:r="http://schemas.openxmlformats.org/officeDocument/2006/relationships" r:embed="rId1">
+        <a:blipFill dpi="0" rotWithShape="1">
+          <a:blip r:embed="rId1">
             <a:lum/>
           </a:blip>
           <a:srcRect/>
@@ -1925,7 +2116,7 @@
     </p:bg>
     <p:spTree>
       <p:nvGrpSpPr>
-        <p:cNvPr id="41" name=""/>
+        <p:cNvPr id="1" name=""/>
         <p:cNvGrpSpPr/>
         <p:nvPr/>
       </p:nvGrpSpPr>
@@ -1939,7 +2130,7 @@
       </p:grpSpPr>
       <p:sp>
         <p:nvSpPr>
-          <p:cNvPr id="1048652" name="Text 0"/>
+          <p:cNvPr id="2" name="Text 0"/>
           <p:cNvSpPr/>
           <p:nvPr/>
         </p:nvSpPr>
@@ -1948,33 +2139,37 @@
             <a:off x="10362895" y="6016752"/>
             <a:ext cx="1463040" cy="320040"/>
           </a:xfrm>
-          <a:prstGeom prst="rect"/>
-          <a:noFill/>
-        </p:spPr>
-        <p:txBody>
-          <a:bodyPr anchor="ctr" rtlCol="0" wrap="square"/>
+          <a:prstGeom prst="rect">
+            <a:avLst/>
+          </a:prstGeom>
+          <a:noFill/>
+          <a:ln/>
+        </p:spPr>
+        <p:txBody>
+          <a:bodyPr wrap="square" rtlCol="0" anchor="ctr"/>
+          <a:lstStyle/>
           <a:p>
             <a:pPr algn="r" indent="0" marL="0">
               <a:buNone/>
             </a:pPr>
             <a:r>
-              <a:rPr dirty="0" sz="1000" lang="en-US">
+              <a:rPr lang="en-US" sz="1000" dirty="0">
                 <a:solidFill>
                   <a:srgbClr val="8A9099"/>
                 </a:solidFill>
-                <a:latin typeface="微软雅黑" panose="020B0503020204020204" pitchFamily="34" charset="-122"/>
-                <a:ea typeface="微软雅黑" panose="020B0503020204020204" pitchFamily="34" charset="-122"/>
-                <a:cs typeface="微软雅黑" panose="020B0503020204020204" pitchFamily="34" charset="-120"/>
+                <a:latin typeface="微软雅黑" pitchFamily="34" charset="0"/>
+                <a:ea typeface="微软雅黑" pitchFamily="34" charset="-122"/>
+                <a:cs typeface="微软雅黑" pitchFamily="34" charset="-120"/>
               </a:rPr>
               <a:t>1 / 15</a:t>
             </a:r>
-            <a:endParaRPr dirty="0" sz="1000" lang="en-US"/>
-          </a:p>
-        </p:txBody>
-      </p:sp>
-      <p:sp>
-        <p:nvSpPr>
-          <p:cNvPr id="1048653" name="Text 1"/>
+            <a:endParaRPr lang="en-US" sz="1000" dirty="0"/>
+          </a:p>
+        </p:txBody>
+      </p:sp>
+      <p:sp>
+        <p:nvSpPr>
+          <p:cNvPr id="3" name="Text 1"/>
           <p:cNvSpPr/>
           <p:nvPr/>
         </p:nvSpPr>
@@ -1983,33 +2178,37 @@
             <a:off x="0" y="2148840"/>
             <a:ext cx="12191695" cy="457200"/>
           </a:xfrm>
-          <a:prstGeom prst="rect"/>
-          <a:noFill/>
-        </p:spPr>
-        <p:txBody>
-          <a:bodyPr anchor="ctr" rtlCol="0" wrap="square"/>
+          <a:prstGeom prst="rect">
+            <a:avLst/>
+          </a:prstGeom>
+          <a:noFill/>
+          <a:ln/>
+        </p:spPr>
+        <p:txBody>
+          <a:bodyPr wrap="square" rtlCol="0" anchor="ctr"/>
+          <a:lstStyle/>
           <a:p>
             <a:pPr algn="ctr" indent="0" marL="0">
               <a:buNone/>
             </a:pPr>
             <a:r>
-              <a:rPr b="1" dirty="0" sz="1800" lang="en-US">
+              <a:rPr lang="en-US" sz="1800" b="1" dirty="0">
                 <a:solidFill>
                   <a:srgbClr val="1F4E9C"/>
                 </a:solidFill>
-                <a:latin typeface="微软雅黑" panose="020B0503020204020204" pitchFamily="34" charset="-122"/>
-                <a:ea typeface="微软雅黑" panose="020B0503020204020204" pitchFamily="34" charset="-122"/>
-                <a:cs typeface="微软雅黑" panose="020B0503020204020204" pitchFamily="34" charset="-120"/>
+                <a:latin typeface="微软雅黑" pitchFamily="34" charset="0"/>
+                <a:ea typeface="微软雅黑" pitchFamily="34" charset="-122"/>
+                <a:cs typeface="微软雅黑" pitchFamily="34" charset="-120"/>
               </a:rPr>
               <a:t>重邮802 数据结构代码课程</a:t>
             </a:r>
-            <a:endParaRPr dirty="0" sz="1800" lang="en-US"/>
-          </a:p>
-        </p:txBody>
-      </p:sp>
-      <p:sp>
-        <p:nvSpPr>
-          <p:cNvPr id="1048654" name="Text 2"/>
+            <a:endParaRPr lang="en-US" sz="1800" dirty="0"/>
+          </a:p>
+        </p:txBody>
+      </p:sp>
+      <p:sp>
+        <p:nvSpPr>
+          <p:cNvPr id="4" name="Text 2"/>
           <p:cNvSpPr/>
           <p:nvPr/>
         </p:nvSpPr>
@@ -2018,33 +2217,37 @@
             <a:off x="0" y="2834640"/>
             <a:ext cx="12191695" cy="1143000"/>
           </a:xfrm>
-          <a:prstGeom prst="rect"/>
-          <a:noFill/>
-        </p:spPr>
-        <p:txBody>
-          <a:bodyPr anchor="ctr" rtlCol="0" wrap="square"/>
+          <a:prstGeom prst="rect">
+            <a:avLst/>
+          </a:prstGeom>
+          <a:noFill/>
+          <a:ln/>
+        </p:spPr>
+        <p:txBody>
+          <a:bodyPr wrap="square" rtlCol="0" anchor="ctr"/>
+          <a:lstStyle/>
           <a:p>
             <a:pPr algn="ctr" indent="0" marL="0">
               <a:buNone/>
             </a:pPr>
             <a:r>
-              <a:rPr b="1" dirty="0" sz="4800" lang="en-US">
+              <a:rPr lang="en-US" sz="4800" b="1" dirty="0">
                 <a:solidFill>
                   <a:srgbClr val="1F2329"/>
                 </a:solidFill>
-                <a:latin typeface="微软雅黑" panose="020B0503020204020204" pitchFamily="34" charset="-122"/>
-                <a:ea typeface="微软雅黑" panose="020B0503020204020204" pitchFamily="34" charset="-122"/>
-                <a:cs typeface="微软雅黑" panose="020B0503020204020204" pitchFamily="34" charset="-120"/>
+                <a:latin typeface="微软雅黑" pitchFamily="34" charset="0"/>
+                <a:ea typeface="微软雅黑" pitchFamily="34" charset="-122"/>
+                <a:cs typeface="微软雅黑" pitchFamily="34" charset="-120"/>
               </a:rPr>
               <a:t>C语言基础阶段</a:t>
             </a:r>
-            <a:endParaRPr dirty="0" sz="4800" lang="en-US"/>
-          </a:p>
-        </p:txBody>
-      </p:sp>
-      <p:sp>
-        <p:nvSpPr>
-          <p:cNvPr id="1048655" name="Text 3"/>
+            <a:endParaRPr lang="en-US" sz="4800" dirty="0"/>
+          </a:p>
+        </p:txBody>
+      </p:sp>
+      <p:sp>
+        <p:nvSpPr>
+          <p:cNvPr id="5" name="Text 3"/>
           <p:cNvSpPr/>
           <p:nvPr/>
         </p:nvSpPr>
@@ -2053,33 +2256,37 @@
             <a:off x="0" y="4114800"/>
             <a:ext cx="12191695" cy="548640"/>
           </a:xfrm>
-          <a:prstGeom prst="rect"/>
-          <a:noFill/>
-        </p:spPr>
-        <p:txBody>
-          <a:bodyPr anchor="ctr" rtlCol="0" wrap="square"/>
+          <a:prstGeom prst="rect">
+            <a:avLst/>
+          </a:prstGeom>
+          <a:noFill/>
+          <a:ln/>
+        </p:spPr>
+        <p:txBody>
+          <a:bodyPr wrap="square" rtlCol="0" anchor="ctr"/>
+          <a:lstStyle/>
           <a:p>
             <a:pPr algn="ctr" indent="0" marL="0">
               <a:buNone/>
             </a:pPr>
             <a:r>
-              <a:rPr dirty="0" sz="2000" lang="en-US">
+              <a:rPr lang="en-US" sz="2000" dirty="0">
                 <a:solidFill>
                   <a:srgbClr val="1F2329"/>
                 </a:solidFill>
-                <a:latin typeface="微软雅黑" panose="020B0503020204020204" pitchFamily="34" charset="-122"/>
-                <a:ea typeface="微软雅黑" panose="020B0503020204020204" pitchFamily="34" charset="-122"/>
-                <a:cs typeface="微软雅黑" panose="020B0503020204020204" pitchFamily="34" charset="-120"/>
+                <a:latin typeface="微软雅黑" pitchFamily="34" charset="0"/>
+                <a:ea typeface="微软雅黑" pitchFamily="34" charset="-122"/>
+                <a:cs typeface="微软雅黑" pitchFamily="34" charset="-120"/>
               </a:rPr>
               <a:t>第3节 运算符与表达式</a:t>
             </a:r>
-            <a:endParaRPr dirty="0" sz="2000" lang="en-US"/>
-          </a:p>
-        </p:txBody>
-      </p:sp>
-      <p:sp>
-        <p:nvSpPr>
-          <p:cNvPr id="1048656" name="Text 4"/>
+            <a:endParaRPr lang="en-US" sz="2000" dirty="0"/>
+          </a:p>
+        </p:txBody>
+      </p:sp>
+      <p:sp>
+        <p:nvSpPr>
+          <p:cNvPr id="6" name="Text 4"/>
           <p:cNvSpPr/>
           <p:nvPr/>
         </p:nvSpPr>
@@ -2088,27 +2295,31 @@
             <a:off x="0" y="4846320"/>
             <a:ext cx="12191695" cy="457200"/>
           </a:xfrm>
-          <a:prstGeom prst="rect"/>
-          <a:noFill/>
-        </p:spPr>
-        <p:txBody>
-          <a:bodyPr anchor="ctr" rtlCol="0" wrap="square"/>
+          <a:prstGeom prst="rect">
+            <a:avLst/>
+          </a:prstGeom>
+          <a:noFill/>
+          <a:ln/>
+        </p:spPr>
+        <p:txBody>
+          <a:bodyPr wrap="square" rtlCol="0" anchor="ctr"/>
+          <a:lstStyle/>
           <a:p>
             <a:pPr algn="ctr" indent="0" marL="0">
               <a:buNone/>
             </a:pPr>
             <a:r>
-              <a:rPr dirty="0" sz="1400" lang="en-US">
+              <a:rPr lang="en-US" sz="1400" dirty="0">
                 <a:solidFill>
                   <a:srgbClr val="8A9099"/>
                 </a:solidFill>
-                <a:latin typeface="微软雅黑" panose="020B0503020204020204" pitchFamily="34" charset="-122"/>
-                <a:ea typeface="微软雅黑" panose="020B0503020204020204" pitchFamily="34" charset="-122"/>
-                <a:cs typeface="微软雅黑" panose="020B0503020204020204" pitchFamily="34" charset="-120"/>
+                <a:latin typeface="微软雅黑" pitchFamily="34" charset="0"/>
+                <a:ea typeface="微软雅黑" pitchFamily="34" charset="-122"/>
+                <a:cs typeface="微软雅黑" pitchFamily="34" charset="-120"/>
               </a:rPr>
               <a:t>阶段：基础 ｜ 主讲：牙膏学长 ｜ 预计30分钟 ｜ 资料答疑：伴梦研途QQ群</a:t>
             </a:r>
-            <a:endParaRPr dirty="0" sz="1400" lang="en-US"/>
+            <a:endParaRPr lang="en-US" sz="1400" dirty="0"/>
           </a:p>
         </p:txBody>
       </p:sp>
@@ -2122,11 +2333,11 @@
 
 <file path=ppt/slides/slide10.xml><?xml version="1.0" encoding="utf-8"?>
 <p:sld xmlns:a="http://schemas.openxmlformats.org/drawingml/2006/main" xmlns:r="http://schemas.openxmlformats.org/officeDocument/2006/relationships" xmlns:p="http://schemas.openxmlformats.org/presentationml/2006/main">
-  <p:cSld>
+  <p:cSld name="Slide 10">
     <p:bg>
       <p:bgPr>
-        <a:blipFill rotWithShape="1" dpi="0">
-          <a:blip xmlns:r="http://schemas.openxmlformats.org/officeDocument/2006/relationships" r:embed="rId1">
+        <a:blipFill dpi="0" rotWithShape="1">
+          <a:blip r:embed="rId1">
             <a:lum/>
           </a:blip>
           <a:srcRect/>
@@ -2139,7 +2350,7 @@
     </p:bg>
     <p:spTree>
       <p:nvGrpSpPr>
-        <p:cNvPr id="23" name=""/>
+        <p:cNvPr id="1" name=""/>
         <p:cNvGrpSpPr/>
         <p:nvPr/>
       </p:nvGrpSpPr>
@@ -2153,7 +2364,7 @@
       </p:grpSpPr>
       <p:sp>
         <p:nvSpPr>
-          <p:cNvPr id="1048588" name="Text 0"/>
+          <p:cNvPr id="2" name="Text 0"/>
           <p:cNvSpPr/>
           <p:nvPr/>
         </p:nvSpPr>
@@ -2162,33 +2373,37 @@
             <a:off x="10362895" y="6016752"/>
             <a:ext cx="1463040" cy="320040"/>
           </a:xfrm>
-          <a:prstGeom prst="rect"/>
-          <a:noFill/>
-        </p:spPr>
-        <p:txBody>
-          <a:bodyPr anchor="ctr" rtlCol="0" wrap="square"/>
+          <a:prstGeom prst="rect">
+            <a:avLst/>
+          </a:prstGeom>
+          <a:noFill/>
+          <a:ln/>
+        </p:spPr>
+        <p:txBody>
+          <a:bodyPr wrap="square" rtlCol="0" anchor="ctr"/>
+          <a:lstStyle/>
           <a:p>
             <a:pPr algn="r" indent="0" marL="0">
               <a:buNone/>
             </a:pPr>
             <a:r>
-              <a:rPr dirty="0" sz="1000" lang="en-US">
+              <a:rPr lang="en-US" sz="1000" dirty="0">
                 <a:solidFill>
                   <a:srgbClr val="8A9099"/>
                 </a:solidFill>
-                <a:latin typeface="微软雅黑" panose="020B0503020204020204" pitchFamily="34" charset="-122"/>
-                <a:ea typeface="微软雅黑" panose="020B0503020204020204" pitchFamily="34" charset="-122"/>
-                <a:cs typeface="微软雅黑" panose="020B0503020204020204" pitchFamily="34" charset="-120"/>
+                <a:latin typeface="微软雅黑" pitchFamily="34" charset="0"/>
+                <a:ea typeface="微软雅黑" pitchFamily="34" charset="-122"/>
+                <a:cs typeface="微软雅黑" pitchFamily="34" charset="-120"/>
               </a:rPr>
               <a:t>10 / 15</a:t>
             </a:r>
-            <a:endParaRPr dirty="0" sz="1000" lang="en-US"/>
-          </a:p>
-        </p:txBody>
-      </p:sp>
-      <p:sp>
-        <p:nvSpPr>
-          <p:cNvPr id="1048589" name="Text 1"/>
+            <a:endParaRPr lang="en-US" sz="1000" dirty="0"/>
+          </a:p>
+        </p:txBody>
+      </p:sp>
+      <p:sp>
+        <p:nvSpPr>
+          <p:cNvPr id="3" name="Text 1"/>
           <p:cNvSpPr/>
           <p:nvPr/>
         </p:nvSpPr>
@@ -2197,33 +2412,37 @@
             <a:off x="822960" y="960120"/>
             <a:ext cx="10545775" cy="365760"/>
           </a:xfrm>
-          <a:prstGeom prst="rect"/>
-          <a:noFill/>
-        </p:spPr>
-        <p:txBody>
-          <a:bodyPr anchor="ctr" rtlCol="0" wrap="square"/>
-          <a:p>
-            <a:pPr algn="l" indent="0" marL="0">
-              <a:buNone/>
-            </a:pPr>
-            <a:r>
-              <a:rPr b="1" dirty="0" sz="1400" lang="en-US">
+          <a:prstGeom prst="rect">
+            <a:avLst/>
+          </a:prstGeom>
+          <a:noFill/>
+          <a:ln/>
+        </p:spPr>
+        <p:txBody>
+          <a:bodyPr wrap="square" rtlCol="0" anchor="ctr"/>
+          <a:lstStyle/>
+          <a:p>
+            <a:pPr algn="l" indent="0" marL="0">
+              <a:buNone/>
+            </a:pPr>
+            <a:r>
+              <a:rPr lang="en-US" sz="1400" b="1" dirty="0">
                 <a:solidFill>
                   <a:srgbClr val="1F4E9C"/>
                 </a:solidFill>
-                <a:latin typeface="微软雅黑" panose="020B0503020204020204" pitchFamily="34" charset="-122"/>
-                <a:ea typeface="微软雅黑" panose="020B0503020204020204" pitchFamily="34" charset="-122"/>
-                <a:cs typeface="微软雅黑" panose="020B0503020204020204" pitchFamily="34" charset="-120"/>
+                <a:latin typeface="微软雅黑" pitchFamily="34" charset="0"/>
+                <a:ea typeface="微软雅黑" pitchFamily="34" charset="-122"/>
+                <a:cs typeface="微软雅黑" pitchFamily="34" charset="-120"/>
               </a:rPr>
               <a:t>自增自减</a:t>
             </a:r>
-            <a:endParaRPr dirty="0" sz="1400" lang="en-US"/>
-          </a:p>
-        </p:txBody>
-      </p:sp>
-      <p:sp>
-        <p:nvSpPr>
-          <p:cNvPr id="1048590" name="Text 2"/>
+            <a:endParaRPr lang="en-US" sz="1400" dirty="0"/>
+          </a:p>
+        </p:txBody>
+      </p:sp>
+      <p:sp>
+        <p:nvSpPr>
+          <p:cNvPr id="4" name="Text 2"/>
           <p:cNvSpPr/>
           <p:nvPr/>
         </p:nvSpPr>
@@ -2232,33 +2451,37 @@
             <a:off x="822960" y="1344168"/>
             <a:ext cx="10545775" cy="731520"/>
           </a:xfrm>
-          <a:prstGeom prst="rect"/>
-          <a:noFill/>
-        </p:spPr>
-        <p:txBody>
-          <a:bodyPr anchor="ctr" rtlCol="0" wrap="square"/>
-          <a:p>
-            <a:pPr algn="l" indent="0" marL="0">
-              <a:buNone/>
-            </a:pPr>
-            <a:r>
-              <a:rPr b="1" dirty="0" sz="2800" lang="en-US">
+          <a:prstGeom prst="rect">
+            <a:avLst/>
+          </a:prstGeom>
+          <a:noFill/>
+          <a:ln/>
+        </p:spPr>
+        <p:txBody>
+          <a:bodyPr wrap="square" rtlCol="0" anchor="ctr"/>
+          <a:lstStyle/>
+          <a:p>
+            <a:pPr algn="l" indent="0" marL="0">
+              <a:buNone/>
+            </a:pPr>
+            <a:r>
+              <a:rPr lang="en-US" sz="2800" b="1" dirty="0">
                 <a:solidFill>
                   <a:srgbClr val="1F2329"/>
                 </a:solidFill>
-                <a:latin typeface="微软雅黑" panose="020B0503020204020204" pitchFamily="34" charset="-122"/>
-                <a:ea typeface="微软雅黑" panose="020B0503020204020204" pitchFamily="34" charset="-122"/>
-                <a:cs typeface="微软雅黑" panose="020B0503020204020204" pitchFamily="34" charset="-120"/>
+                <a:latin typeface="微软雅黑" pitchFamily="34" charset="0"/>
+                <a:ea typeface="微软雅黑" pitchFamily="34" charset="-122"/>
+                <a:cs typeface="微软雅黑" pitchFamily="34" charset="-120"/>
               </a:rPr>
               <a:t>++ 和 --：给自己加1减1</a:t>
             </a:r>
-            <a:endParaRPr dirty="0" sz="2800" lang="en-US"/>
-          </a:p>
-        </p:txBody>
-      </p:sp>
-      <p:sp>
-        <p:nvSpPr>
-          <p:cNvPr id="1048591" name="Shape 3"/>
+            <a:endParaRPr lang="en-US" sz="2800" dirty="0"/>
+          </a:p>
+        </p:txBody>
+      </p:sp>
+      <p:sp>
+        <p:nvSpPr>
+          <p:cNvPr id="5" name="Shape 3"/>
           <p:cNvSpPr/>
           <p:nvPr/>
         </p:nvSpPr>
@@ -2267,7 +2490,9 @@
             <a:off x="822960" y="2395728"/>
             <a:ext cx="10545775" cy="1033272"/>
           </a:xfrm>
-          <a:prstGeom prst="rect"/>
+          <a:prstGeom prst="rect">
+            <a:avLst/>
+          </a:prstGeom>
           <a:solidFill>
             <a:srgbClr val="F5F6F7"/>
           </a:solidFill>
@@ -2281,7 +2506,7 @@
       </p:sp>
       <p:sp>
         <p:nvSpPr>
-          <p:cNvPr id="1048592" name="Text 4"/>
+          <p:cNvPr id="6" name="Text 4"/>
           <p:cNvSpPr/>
           <p:nvPr/>
         </p:nvSpPr>
@@ -2290,11 +2515,15 @@
             <a:off x="1078992" y="2505456"/>
             <a:ext cx="10033711" cy="813816"/>
           </a:xfrm>
-          <a:prstGeom prst="rect"/>
-          <a:noFill/>
-        </p:spPr>
-        <p:txBody>
-          <a:bodyPr anchor="t" rtlCol="0" wrap="square"/>
+          <a:prstGeom prst="rect">
+            <a:avLst/>
+          </a:prstGeom>
+          <a:noFill/>
+          <a:ln/>
+        </p:spPr>
+        <p:txBody>
+          <a:bodyPr wrap="square" rtlCol="0" anchor="t"/>
+          <a:lstStyle/>
           <a:p>
             <a:pPr algn="l" indent="0" marL="0">
               <a:lnSpc>
@@ -2303,25 +2532,25 @@
               <a:buNone/>
             </a:pPr>
             <a:r>
-              <a:rPr dirty="0" sz="1400" lang="en-US">
+              <a:rPr lang="en-US" sz="1400" dirty="0">
                 <a:solidFill>
                   <a:srgbClr val="1F2329"/>
                 </a:solidFill>
-                <a:latin typeface="Consolas" panose="020B0609020204030204" pitchFamily="34" charset="0"/>
-                <a:ea typeface="Consolas" panose="020B0609020204030204" pitchFamily="34" charset="-122"/>
-                <a:cs typeface="Consolas" panose="020B0609020204030204" pitchFamily="34" charset="-120"/>
+                <a:latin typeface="Consolas" pitchFamily="34" charset="0"/>
+                <a:ea typeface="Consolas" pitchFamily="34" charset="-122"/>
+                <a:cs typeface="Consolas" pitchFamily="34" charset="-120"/>
               </a:rPr>
               <a:t>i++;        // i = i + 1
 i--;        // i = i - 1
 </a:t>
             </a:r>
-            <a:endParaRPr dirty="0" sz="1400" lang="en-US"/>
-          </a:p>
-        </p:txBody>
-      </p:sp>
-      <p:sp>
-        <p:nvSpPr>
-          <p:cNvPr id="1048593" name="Text 5"/>
+            <a:endParaRPr lang="en-US" sz="1400" dirty="0"/>
+          </a:p>
+        </p:txBody>
+      </p:sp>
+      <p:sp>
+        <p:nvSpPr>
+          <p:cNvPr id="7" name="Text 5"/>
           <p:cNvSpPr/>
           <p:nvPr/>
         </p:nvSpPr>
@@ -2330,44 +2559,54 @@
             <a:off x="896112" y="3630168"/>
             <a:ext cx="10454335" cy="397764"/>
           </a:xfrm>
-          <a:prstGeom prst="rect"/>
-          <a:noFill/>
-        </p:spPr>
-        <p:txBody>
-          <a:bodyPr anchor="t" rtlCol="0" wrap="square"/>
-          <a:p>
-            <a:pPr algn="l" indent="0" marL="0">
-              <a:lnSpc>
-                <a:spcPct val="115000"/>
-              </a:lnSpc>
-              <a:buNone/>
-            </a:pPr>
-            <a:r>
-              <a:rPr b="1" dirty="0" sz="1800" lang="en-US">
+          <a:prstGeom prst="rect">
+            <a:avLst/>
+          </a:prstGeom>
+          <a:noFill/>
+          <a:ln/>
+        </p:spPr>
+        <p:txBody>
+          <a:bodyPr wrap="square" rtlCol="0" anchor="t"/>
+          <a:lstStyle/>
+          <a:p>
+            <a:pPr algn="l" indent="0" marL="0">
+              <a:lnSpc>
+                <a:spcPct val="115000"/>
+              </a:lnSpc>
+              <a:buNone/>
+            </a:pPr>
+            <a:r>
+              <a:rPr lang="en-US" sz="1800" b="1" dirty="0">
                 <a:solidFill>
                   <a:srgbClr val="1F4E9C"/>
                 </a:solidFill>
-                <a:latin typeface="微软雅黑" panose="020B0503020204020204" pitchFamily="34" charset="-122"/>
-                <a:ea typeface="微软雅黑" panose="020B0503020204020204" pitchFamily="34" charset="-122"/>
-                <a:cs typeface="微软雅黑" panose="020B0503020204020204" pitchFamily="34" charset="-120"/>
+                <a:latin typeface="微软雅黑" pitchFamily="34" charset="0"/>
+                <a:ea typeface="微软雅黑" pitchFamily="34" charset="-122"/>
+                <a:cs typeface="微软雅黑" pitchFamily="34" charset="-120"/>
               </a:rPr>
               <a:t>•  </a:t>
             </a:r>
-            <a:r>
-              <a:rPr dirty="0" sz="1800" lang="en-US">
+            <a:pPr algn="l" indent="0" marL="0">
+              <a:lnSpc>
+                <a:spcPct val="115000"/>
+              </a:lnSpc>
+              <a:buNone/>
+            </a:pPr>
+            <a:r>
+              <a:rPr lang="en-US" sz="1800" dirty="0">
                 <a:solidFill>
                   <a:srgbClr val="000000"/>
                 </a:solidFill>
               </a:rPr>
               <a:t>++就是自己加1，--就是自己减1，没别的</a:t>
             </a:r>
-            <a:endParaRPr dirty="0" sz="1800" lang="en-US"/>
-          </a:p>
-        </p:txBody>
-      </p:sp>
-      <p:sp>
-        <p:nvSpPr>
-          <p:cNvPr id="1048594" name="Text 6"/>
+            <a:endParaRPr lang="en-US" sz="1800" dirty="0"/>
+          </a:p>
+        </p:txBody>
+      </p:sp>
+      <p:sp>
+        <p:nvSpPr>
+          <p:cNvPr id="8" name="Text 6"/>
           <p:cNvSpPr/>
           <p:nvPr/>
         </p:nvSpPr>
@@ -2376,44 +2615,54 @@
             <a:off x="896112" y="4101084"/>
             <a:ext cx="10454335" cy="397764"/>
           </a:xfrm>
-          <a:prstGeom prst="rect"/>
-          <a:noFill/>
-        </p:spPr>
-        <p:txBody>
-          <a:bodyPr anchor="t" rtlCol="0" wrap="square"/>
-          <a:p>
-            <a:pPr algn="l" indent="0" marL="0">
-              <a:lnSpc>
-                <a:spcPct val="115000"/>
-              </a:lnSpc>
-              <a:buNone/>
-            </a:pPr>
-            <a:r>
-              <a:rPr b="1" dirty="0" sz="1800" lang="en-US">
+          <a:prstGeom prst="rect">
+            <a:avLst/>
+          </a:prstGeom>
+          <a:noFill/>
+          <a:ln/>
+        </p:spPr>
+        <p:txBody>
+          <a:bodyPr wrap="square" rtlCol="0" anchor="t"/>
+          <a:lstStyle/>
+          <a:p>
+            <a:pPr algn="l" indent="0" marL="0">
+              <a:lnSpc>
+                <a:spcPct val="115000"/>
+              </a:lnSpc>
+              <a:buNone/>
+            </a:pPr>
+            <a:r>
+              <a:rPr lang="en-US" sz="1800" b="1" dirty="0">
                 <a:solidFill>
                   <a:srgbClr val="1F4E9C"/>
                 </a:solidFill>
-                <a:latin typeface="微软雅黑" panose="020B0503020204020204" pitchFamily="34" charset="-122"/>
-                <a:ea typeface="微软雅黑" panose="020B0503020204020204" pitchFamily="34" charset="-122"/>
-                <a:cs typeface="微软雅黑" panose="020B0503020204020204" pitchFamily="34" charset="-120"/>
+                <a:latin typeface="微软雅黑" pitchFamily="34" charset="0"/>
+                <a:ea typeface="微软雅黑" pitchFamily="34" charset="-122"/>
+                <a:cs typeface="微软雅黑" pitchFamily="34" charset="-120"/>
               </a:rPr>
               <a:t>•  </a:t>
             </a:r>
-            <a:r>
-              <a:rPr dirty="0" sz="1800" lang="en-US">
+            <a:pPr algn="l" indent="0" marL="0">
+              <a:lnSpc>
+                <a:spcPct val="115000"/>
+              </a:lnSpc>
+              <a:buNone/>
+            </a:pPr>
+            <a:r>
+              <a:rPr lang="en-US" sz="1800" dirty="0">
                 <a:solidFill>
                   <a:srgbClr val="000000"/>
                 </a:solidFill>
               </a:rPr>
               <a:t>数据结构代码里到处是它：i++、j--、length++ 数都数不过来</a:t>
             </a:r>
-            <a:endParaRPr dirty="0" sz="1800" lang="en-US"/>
-          </a:p>
-        </p:txBody>
-      </p:sp>
-      <p:sp>
-        <p:nvSpPr>
-          <p:cNvPr id="1048595" name="Text 7"/>
+            <a:endParaRPr lang="en-US" sz="1800" dirty="0"/>
+          </a:p>
+        </p:txBody>
+      </p:sp>
+      <p:sp>
+        <p:nvSpPr>
+          <p:cNvPr id="9" name="Text 7"/>
           <p:cNvSpPr/>
           <p:nvPr/>
         </p:nvSpPr>
@@ -2422,54 +2671,76 @@
             <a:off x="896112" y="4572000"/>
             <a:ext cx="10454335" cy="397764"/>
           </a:xfrm>
-          <a:prstGeom prst="rect"/>
-          <a:noFill/>
-        </p:spPr>
-        <p:txBody>
-          <a:bodyPr anchor="t" rtlCol="0" wrap="square"/>
-          <a:p>
-            <a:pPr algn="l" indent="0" marL="0">
-              <a:lnSpc>
-                <a:spcPct val="115000"/>
-              </a:lnSpc>
-              <a:buNone/>
-            </a:pPr>
-            <a:r>
-              <a:rPr b="1" dirty="0" sz="1800" lang="en-US">
+          <a:prstGeom prst="rect">
+            <a:avLst/>
+          </a:prstGeom>
+          <a:noFill/>
+          <a:ln/>
+        </p:spPr>
+        <p:txBody>
+          <a:bodyPr wrap="square" rtlCol="0" anchor="t"/>
+          <a:lstStyle/>
+          <a:p>
+            <a:pPr algn="l" indent="0" marL="0">
+              <a:lnSpc>
+                <a:spcPct val="115000"/>
+              </a:lnSpc>
+              <a:buNone/>
+            </a:pPr>
+            <a:r>
+              <a:rPr lang="en-US" sz="1800" b="1" dirty="0">
                 <a:solidFill>
                   <a:srgbClr val="1F4E9C"/>
                 </a:solidFill>
-                <a:latin typeface="微软雅黑" panose="020B0503020204020204" pitchFamily="34" charset="-122"/>
-                <a:ea typeface="微软雅黑" panose="020B0503020204020204" pitchFamily="34" charset="-122"/>
-                <a:cs typeface="微软雅黑" panose="020B0503020204020204" pitchFamily="34" charset="-120"/>
+                <a:latin typeface="微软雅黑" pitchFamily="34" charset="0"/>
+                <a:ea typeface="微软雅黑" pitchFamily="34" charset="-122"/>
+                <a:cs typeface="微软雅黑" pitchFamily="34" charset="-120"/>
               </a:rPr>
               <a:t>•  </a:t>
             </a:r>
-            <a:r>
-              <a:rPr dirty="0" sz="1800" lang="en-US">
+            <a:pPr algn="l" indent="0" marL="0">
+              <a:lnSpc>
+                <a:spcPct val="115000"/>
+              </a:lnSpc>
+              <a:buNone/>
+            </a:pPr>
+            <a:r>
+              <a:rPr lang="en-US" sz="1800" dirty="0">
                 <a:solidFill>
                   <a:srgbClr val="000000"/>
                 </a:solidFill>
               </a:rPr>
               <a:t>i++ 和 ++i 有细微区别，</a:t>
             </a:r>
-            <a:r>
-              <a:rPr b="1" dirty="0" sz="1800" lang="en-US">
+            <a:pPr algn="l" indent="0" marL="0">
+              <a:lnSpc>
+                <a:spcPct val="115000"/>
+              </a:lnSpc>
+              <a:buNone/>
+            </a:pPr>
+            <a:r>
+              <a:rPr lang="en-US" sz="1800" b="1" dirty="0">
                 <a:solidFill>
                   <a:srgbClr val="000000"/>
                 </a:solidFill>
               </a:rPr>
               <a:t>等真用到了再说</a:t>
             </a:r>
-            <a:r>
-              <a:rPr dirty="0" sz="1800" lang="en-US">
+            <a:pPr algn="l" indent="0" marL="0">
+              <a:lnSpc>
+                <a:spcPct val="115000"/>
+              </a:lnSpc>
+              <a:buNone/>
+            </a:pPr>
+            <a:r>
+              <a:rPr lang="en-US" sz="1800" dirty="0">
                 <a:solidFill>
                   <a:srgbClr val="000000"/>
                 </a:solidFill>
               </a:rPr>
               <a:t>，现在只需要"加1"这个直觉</a:t>
             </a:r>
-            <a:endParaRPr dirty="0" sz="1800" lang="en-US"/>
+            <a:endParaRPr lang="en-US" sz="1800" dirty="0"/>
           </a:p>
         </p:txBody>
       </p:sp>
@@ -2483,11 +2754,11 @@
 
 <file path=ppt/slides/slide11.xml><?xml version="1.0" encoding="utf-8"?>
 <p:sld xmlns:a="http://schemas.openxmlformats.org/drawingml/2006/main" xmlns:r="http://schemas.openxmlformats.org/officeDocument/2006/relationships" xmlns:p="http://schemas.openxmlformats.org/presentationml/2006/main">
-  <p:cSld>
+  <p:cSld name="Slide 11">
     <p:bg>
       <p:bgPr>
-        <a:blipFill rotWithShape="1" dpi="0">
-          <a:blip xmlns:r="http://schemas.openxmlformats.org/officeDocument/2006/relationships" r:embed="rId1">
+        <a:blipFill dpi="0" rotWithShape="1">
+          <a:blip r:embed="rId1">
             <a:lum/>
           </a:blip>
           <a:srcRect/>
@@ -2500,7 +2771,7 @@
     </p:bg>
     <p:spTree>
       <p:nvGrpSpPr>
-        <p:cNvPr id="29" name=""/>
+        <p:cNvPr id="1" name=""/>
         <p:cNvGrpSpPr/>
         <p:nvPr/>
       </p:nvGrpSpPr>
@@ -2514,7 +2785,7 @@
       </p:grpSpPr>
       <p:sp>
         <p:nvSpPr>
-          <p:cNvPr id="1048611" name="Text 0"/>
+          <p:cNvPr id="2" name="Text 0"/>
           <p:cNvSpPr/>
           <p:nvPr/>
         </p:nvSpPr>
@@ -2523,33 +2794,37 @@
             <a:off x="10362895" y="6016752"/>
             <a:ext cx="1463040" cy="320040"/>
           </a:xfrm>
-          <a:prstGeom prst="rect"/>
-          <a:noFill/>
-        </p:spPr>
-        <p:txBody>
-          <a:bodyPr anchor="ctr" rtlCol="0" wrap="square"/>
+          <a:prstGeom prst="rect">
+            <a:avLst/>
+          </a:prstGeom>
+          <a:noFill/>
+          <a:ln/>
+        </p:spPr>
+        <p:txBody>
+          <a:bodyPr wrap="square" rtlCol="0" anchor="ctr"/>
+          <a:lstStyle/>
           <a:p>
             <a:pPr algn="r" indent="0" marL="0">
               <a:buNone/>
             </a:pPr>
             <a:r>
-              <a:rPr dirty="0" sz="1000" lang="en-US">
+              <a:rPr lang="en-US" sz="1000" dirty="0">
                 <a:solidFill>
                   <a:srgbClr val="8A9099"/>
                 </a:solidFill>
-                <a:latin typeface="微软雅黑" panose="020B0503020204020204" pitchFamily="34" charset="-122"/>
-                <a:ea typeface="微软雅黑" panose="020B0503020204020204" pitchFamily="34" charset="-122"/>
-                <a:cs typeface="微软雅黑" panose="020B0503020204020204" pitchFamily="34" charset="-120"/>
+                <a:latin typeface="微软雅黑" pitchFamily="34" charset="0"/>
+                <a:ea typeface="微软雅黑" pitchFamily="34" charset="-122"/>
+                <a:cs typeface="微软雅黑" pitchFamily="34" charset="-120"/>
               </a:rPr>
               <a:t>11 / 15</a:t>
             </a:r>
-            <a:endParaRPr dirty="0" sz="1000" lang="en-US"/>
-          </a:p>
-        </p:txBody>
-      </p:sp>
-      <p:sp>
-        <p:nvSpPr>
-          <p:cNvPr id="1048612" name="Text 1"/>
+            <a:endParaRPr lang="en-US" sz="1000" dirty="0"/>
+          </a:p>
+        </p:txBody>
+      </p:sp>
+      <p:sp>
+        <p:nvSpPr>
+          <p:cNvPr id="3" name="Text 1"/>
           <p:cNvSpPr/>
           <p:nvPr/>
         </p:nvSpPr>
@@ -2558,33 +2833,37 @@
             <a:off x="822960" y="960120"/>
             <a:ext cx="10545775" cy="365760"/>
           </a:xfrm>
-          <a:prstGeom prst="rect"/>
-          <a:noFill/>
-        </p:spPr>
-        <p:txBody>
-          <a:bodyPr anchor="ctr" rtlCol="0" wrap="square"/>
-          <a:p>
-            <a:pPr algn="l" indent="0" marL="0">
-              <a:buNone/>
-            </a:pPr>
-            <a:r>
-              <a:rPr b="1" dirty="0" sz="1400" lang="en-US">
+          <a:prstGeom prst="rect">
+            <a:avLst/>
+          </a:prstGeom>
+          <a:noFill/>
+          <a:ln/>
+        </p:spPr>
+        <p:txBody>
+          <a:bodyPr wrap="square" rtlCol="0" anchor="ctr"/>
+          <a:lstStyle/>
+          <a:p>
+            <a:pPr algn="l" indent="0" marL="0">
+              <a:buNone/>
+            </a:pPr>
+            <a:r>
+              <a:rPr lang="en-US" sz="1400" b="1" dirty="0">
                 <a:solidFill>
                   <a:srgbClr val="1F4E9C"/>
                 </a:solidFill>
-                <a:latin typeface="微软雅黑" panose="020B0503020204020204" pitchFamily="34" charset="-122"/>
-                <a:ea typeface="微软雅黑" panose="020B0503020204020204" pitchFamily="34" charset="-122"/>
-                <a:cs typeface="微软雅黑" panose="020B0503020204020204" pitchFamily="34" charset="-120"/>
+                <a:latin typeface="微软雅黑" pitchFamily="34" charset="0"/>
+                <a:ea typeface="微软雅黑" pitchFamily="34" charset="-122"/>
+                <a:cs typeface="微软雅黑" pitchFamily="34" charset="-120"/>
               </a:rPr>
               <a:t>优先级</a:t>
             </a:r>
-            <a:endParaRPr dirty="0" sz="1400" lang="en-US"/>
-          </a:p>
-        </p:txBody>
-      </p:sp>
-      <p:sp>
-        <p:nvSpPr>
-          <p:cNvPr id="1048613" name="Text 2"/>
+            <a:endParaRPr lang="en-US" sz="1400" dirty="0"/>
+          </a:p>
+        </p:txBody>
+      </p:sp>
+      <p:sp>
+        <p:nvSpPr>
+          <p:cNvPr id="4" name="Text 2"/>
           <p:cNvSpPr/>
           <p:nvPr/>
         </p:nvSpPr>
@@ -2593,117 +2872,37 @@
             <a:off x="822960" y="1344168"/>
             <a:ext cx="10545775" cy="731520"/>
           </a:xfrm>
-          <a:prstGeom prst="rect"/>
-          <a:noFill/>
-        </p:spPr>
-        <p:txBody>
-          <a:bodyPr anchor="ctr" rtlCol="0" wrap="square"/>
-          <a:p>
-            <a:pPr algn="l" indent="0" marL="0">
-              <a:buNone/>
-            </a:pPr>
-            <a:r>
-              <a:rPr b="1" dirty="0" sz="2800" lang="en-US">
+          <a:prstGeom prst="rect">
+            <a:avLst/>
+          </a:prstGeom>
+          <a:noFill/>
+          <a:ln/>
+        </p:spPr>
+        <p:txBody>
+          <a:bodyPr wrap="square" rtlCol="0" anchor="ctr"/>
+          <a:lstStyle/>
+          <a:p>
+            <a:pPr algn="l" indent="0" marL="0">
+              <a:buNone/>
+            </a:pPr>
+            <a:r>
+              <a:rPr lang="en-US" sz="2800" b="1" dirty="0">
                 <a:solidFill>
                   <a:srgbClr val="1F2329"/>
                 </a:solidFill>
-                <a:latin typeface="微软雅黑" panose="020B0503020204020204" pitchFamily="34" charset="-122"/>
-                <a:ea typeface="微软雅黑" panose="020B0503020204020204" pitchFamily="34" charset="-122"/>
-                <a:cs typeface="微软雅黑" panose="020B0503020204020204" pitchFamily="34" charset="-120"/>
-              </a:rPr>
-              <a:t>只记这一句： </a:t>
-            </a:r>
-            <a:r>
-              <a:rPr altLang="en-US" b="1" dirty="0" sz="2800" lang="zh-CN">
-                <a:solidFill>
-                  <a:srgbClr val="1F2329"/>
-                </a:solidFill>
-                <a:latin typeface="微软雅黑" panose="020B0503020204020204" pitchFamily="34" charset="-122"/>
-                <a:ea typeface="微软雅黑" panose="020B0503020204020204" pitchFamily="34" charset="-122"/>
-                <a:cs typeface="微软雅黑" panose="020B0503020204020204" pitchFamily="34" charset="-120"/>
-              </a:rPr>
-              <a:t>自增减</a:t>
-            </a:r>
-            <a:r>
-              <a:rPr b="1" dirty="0" sz="2800" lang="en-US">
-                <a:solidFill>
-                  <a:srgbClr val="1F2329"/>
-                </a:solidFill>
-                <a:latin typeface="微软雅黑" panose="020B0503020204020204" pitchFamily="34" charset="-122"/>
-                <a:ea typeface="微软雅黑" panose="020B0503020204020204" pitchFamily="34" charset="-122"/>
-                <a:cs typeface="微软雅黑" panose="020B0503020204020204" pitchFamily="34" charset="-120"/>
-              </a:rPr>
-              <a:t> &gt; ! &gt; </a:t>
-            </a:r>
-            <a:r>
-              <a:rPr altLang="en-US" b="1" dirty="0" sz="2800" lang="zh-CN">
-                <a:solidFill>
-                  <a:srgbClr val="1F2329"/>
-                </a:solidFill>
-                <a:latin typeface="微软雅黑" panose="020B0503020204020204" pitchFamily="34" charset="-122"/>
-                <a:ea typeface="微软雅黑" panose="020B0503020204020204" pitchFamily="34" charset="-122"/>
-                <a:cs typeface="微软雅黑" panose="020B0503020204020204" pitchFamily="34" charset="-120"/>
-              </a:rPr>
-              <a:t>算数</a:t>
-            </a:r>
-            <a:r>
-              <a:rPr altLang="zh-CN" b="1" dirty="0" sz="2800" lang="en-US">
-                <a:solidFill>
-                  <a:srgbClr val="1F2329"/>
-                </a:solidFill>
-                <a:latin typeface="微软雅黑" panose="020B0503020204020204" pitchFamily="34" charset="-122"/>
-                <a:ea typeface="微软雅黑" panose="020B0503020204020204" pitchFamily="34" charset="-122"/>
-                <a:cs typeface="微软雅黑" panose="020B0503020204020204" pitchFamily="34" charset="-120"/>
-              </a:rPr>
-              <a:t> &gt; </a:t>
-            </a:r>
-            <a:r>
-              <a:rPr altLang="en-US" b="1" dirty="0" sz="2800" lang="zh-CN">
-                <a:solidFill>
-                  <a:srgbClr val="1F2329"/>
-                </a:solidFill>
-                <a:latin typeface="微软雅黑" panose="020B0503020204020204" pitchFamily="34" charset="-122"/>
-                <a:ea typeface="微软雅黑" panose="020B0503020204020204" pitchFamily="34" charset="-122"/>
-                <a:cs typeface="微软雅黑" panose="020B0503020204020204" pitchFamily="34" charset="-120"/>
-              </a:rPr>
-              <a:t>关系</a:t>
-            </a:r>
-            <a:r>
-              <a:rPr altLang="zh-CN" b="1" dirty="0" sz="2800" lang="en-US">
-                <a:solidFill>
-                  <a:srgbClr val="1F2329"/>
-                </a:solidFill>
-                <a:latin typeface="微软雅黑" panose="020B0503020204020204" pitchFamily="34" charset="-122"/>
-                <a:ea typeface="微软雅黑" panose="020B0503020204020204" pitchFamily="34" charset="-122"/>
-                <a:cs typeface="微软雅黑" panose="020B0503020204020204" pitchFamily="34" charset="-120"/>
-              </a:rPr>
-              <a:t> &gt; </a:t>
-            </a:r>
-            <a:r>
-              <a:rPr altLang="en-US" b="1" dirty="0" sz="2800" lang="zh-CN">
-                <a:solidFill>
-                  <a:srgbClr val="1F2329"/>
-                </a:solidFill>
-                <a:latin typeface="微软雅黑" panose="020B0503020204020204" pitchFamily="34" charset="-122"/>
-                <a:ea typeface="微软雅黑" panose="020B0503020204020204" pitchFamily="34" charset="-122"/>
-                <a:cs typeface="微软雅黑" panose="020B0503020204020204" pitchFamily="34" charset="-120"/>
-              </a:rPr>
-              <a:t>逻辑</a:t>
-            </a:r>
-            <a:endParaRPr altLang="en-US" b="1" dirty="0" sz="2800" lang="zh-CN">
-              <a:solidFill>
-                <a:srgbClr val="1F2329"/>
-              </a:solidFill>
-              <a:latin typeface="微软雅黑" panose="020B0503020204020204" pitchFamily="34" charset="-122"/>
-              <a:ea typeface="微软雅黑" panose="020B0503020204020204" pitchFamily="34" charset="-122"/>
-              <a:cs typeface="微软雅黑" panose="020B0503020204020204" pitchFamily="34" charset="-120"/>
-            </a:endParaRPr>
-          </a:p>
-        </p:txBody>
-      </p:sp>
-      <p:sp>
-        <p:nvSpPr>
-          <p:cNvPr id="1048614" name="Shape 3"/>
+                <a:latin typeface="微软雅黑" pitchFamily="34" charset="0"/>
+                <a:ea typeface="微软雅黑" pitchFamily="34" charset="-122"/>
+                <a:cs typeface="微软雅黑" pitchFamily="34" charset="-120"/>
+              </a:rPr>
+              <a:t>只记这一句：括号 &gt; 乘除取余 &gt; 加减</a:t>
+            </a:r>
+            <a:endParaRPr lang="en-US" sz="2800" dirty="0"/>
+          </a:p>
+        </p:txBody>
+      </p:sp>
+      <p:sp>
+        <p:nvSpPr>
+          <p:cNvPr id="5" name="Shape 3"/>
           <p:cNvSpPr/>
           <p:nvPr/>
         </p:nvSpPr>
@@ -2712,7 +2911,9 @@
             <a:off x="822960" y="2395728"/>
             <a:ext cx="10545775" cy="1033272"/>
           </a:xfrm>
-          <a:prstGeom prst="rect"/>
+          <a:prstGeom prst="rect">
+            <a:avLst/>
+          </a:prstGeom>
           <a:solidFill>
             <a:srgbClr val="F5F6F7"/>
           </a:solidFill>
@@ -2726,7 +2927,7 @@
       </p:sp>
       <p:sp>
         <p:nvSpPr>
-          <p:cNvPr id="1048615" name="Text 4"/>
+          <p:cNvPr id="6" name="Text 4"/>
           <p:cNvSpPr/>
           <p:nvPr/>
         </p:nvSpPr>
@@ -2735,11 +2936,15 @@
             <a:off x="1078992" y="2505456"/>
             <a:ext cx="10033711" cy="813816"/>
           </a:xfrm>
-          <a:prstGeom prst="rect"/>
-          <a:noFill/>
-        </p:spPr>
-        <p:txBody>
-          <a:bodyPr anchor="t" rtlCol="0" wrap="square"/>
+          <a:prstGeom prst="rect">
+            <a:avLst/>
+          </a:prstGeom>
+          <a:noFill/>
+          <a:ln/>
+        </p:spPr>
+        <p:txBody>
+          <a:bodyPr wrap="square" rtlCol="0" anchor="t"/>
+          <a:lstStyle/>
           <a:p>
             <a:pPr algn="l" indent="0" marL="0">
               <a:lnSpc>
@@ -2748,25 +2953,25 @@
               <a:buNone/>
             </a:pPr>
             <a:r>
-              <a:rPr dirty="0" sz="1400" lang="en-US">
+              <a:rPr lang="en-US" sz="1400" dirty="0">
                 <a:solidFill>
                   <a:srgbClr val="1F2329"/>
                 </a:solidFill>
-                <a:latin typeface="Consolas" panose="020B0609020204030204" pitchFamily="34" charset="0"/>
-                <a:ea typeface="Consolas" panose="020B0609020204030204" pitchFamily="34" charset="-122"/>
-                <a:cs typeface="Consolas" panose="020B0609020204030204" pitchFamily="34" charset="-120"/>
+                <a:latin typeface="Consolas" pitchFamily="34" charset="0"/>
+                <a:ea typeface="Consolas" pitchFamily="34" charset="-122"/>
+                <a:cs typeface="Consolas" pitchFamily="34" charset="-120"/>
               </a:rPr>
               <a:t>2 + 3 * 4        // 先算 3 * 4，再加 2，得 14
 (2 + 3) * 4      // 有括号先算括号，得 20
 </a:t>
             </a:r>
-            <a:endParaRPr dirty="0" sz="1400" lang="en-US"/>
-          </a:p>
-        </p:txBody>
-      </p:sp>
-      <p:sp>
-        <p:nvSpPr>
-          <p:cNvPr id="1048616" name="Text 5"/>
+            <a:endParaRPr lang="en-US" sz="1400" dirty="0"/>
+          </a:p>
+        </p:txBody>
+      </p:sp>
+      <p:sp>
+        <p:nvSpPr>
+          <p:cNvPr id="7" name="Text 5"/>
           <p:cNvSpPr/>
           <p:nvPr/>
         </p:nvSpPr>
@@ -2775,128 +2980,68 @@
             <a:off x="896112" y="3630168"/>
             <a:ext cx="10454335" cy="397764"/>
           </a:xfrm>
-          <a:prstGeom prst="rect"/>
-          <a:noFill/>
-        </p:spPr>
-        <p:txBody>
-          <a:bodyPr anchor="t" rtlCol="0" wrap="square"/>
-          <a:p>
-            <a:pPr algn="l" indent="0" marL="0">
-              <a:lnSpc>
-                <a:spcPct val="115000"/>
-              </a:lnSpc>
-              <a:buNone/>
-            </a:pPr>
-            <a:r>
-              <a:rPr b="1" dirty="0" sz="1800" lang="en-US">
+          <a:prstGeom prst="rect">
+            <a:avLst/>
+          </a:prstGeom>
+          <a:noFill/>
+          <a:ln/>
+        </p:spPr>
+        <p:txBody>
+          <a:bodyPr wrap="square" rtlCol="0" anchor="t"/>
+          <a:lstStyle/>
+          <a:p>
+            <a:pPr algn="l" indent="0" marL="0">
+              <a:lnSpc>
+                <a:spcPct val="115000"/>
+              </a:lnSpc>
+              <a:buNone/>
+            </a:pPr>
+            <a:r>
+              <a:rPr lang="en-US" sz="1800" b="1" dirty="0">
                 <a:solidFill>
                   <a:srgbClr val="1F4E9C"/>
                 </a:solidFill>
-                <a:latin typeface="微软雅黑" panose="020B0503020204020204" pitchFamily="34" charset="-122"/>
-                <a:ea typeface="微软雅黑" panose="020B0503020204020204" pitchFamily="34" charset="-122"/>
-                <a:cs typeface="微软雅黑" panose="020B0503020204020204" pitchFamily="34" charset="-120"/>
+                <a:latin typeface="微软雅黑" pitchFamily="34" charset="0"/>
+                <a:ea typeface="微软雅黑" pitchFamily="34" charset="-122"/>
+                <a:cs typeface="微软雅黑" pitchFamily="34" charset="-120"/>
               </a:rPr>
               <a:t>•  </a:t>
             </a:r>
-            <a:r>
-              <a:rPr dirty="0" sz="1800" lang="en-US">
+            <a:pPr algn="l" indent="0" marL="0">
+              <a:lnSpc>
+                <a:spcPct val="115000"/>
+              </a:lnSpc>
+              <a:buNone/>
+            </a:pPr>
+            <a:r>
+              <a:rPr lang="en-US" sz="1800" dirty="0">
                 <a:solidFill>
                   <a:srgbClr val="000000"/>
                 </a:solidFill>
               </a:rPr>
               <a:t>优先级不背全表，记住口诀：</a:t>
             </a:r>
-            <a:r>
-              <a:rPr altLang="en-US" b="1" dirty="0" lang="zh-CN">
-                <a:solidFill>
-                  <a:srgbClr val="1F2329"/>
-                </a:solidFill>
-                <a:latin typeface="微软雅黑" panose="020B0503020204020204" pitchFamily="34" charset="-122"/>
-                <a:ea typeface="微软雅黑" panose="020B0503020204020204" pitchFamily="34" charset="-122"/>
-                <a:cs typeface="微软雅黑" panose="020B0503020204020204" pitchFamily="34" charset="-120"/>
-                <a:sym typeface="+mn-ea"/>
-              </a:rPr>
-              <a:t>自增减</a:t>
-            </a:r>
-            <a:r>
-              <a:rPr b="1" dirty="0" lang="en-US">
-                <a:solidFill>
-                  <a:srgbClr val="1F2329"/>
-                </a:solidFill>
-                <a:latin typeface="微软雅黑" panose="020B0503020204020204" pitchFamily="34" charset="-122"/>
-                <a:ea typeface="微软雅黑" panose="020B0503020204020204" pitchFamily="34" charset="-122"/>
-                <a:cs typeface="微软雅黑" panose="020B0503020204020204" pitchFamily="34" charset="-120"/>
-                <a:sym typeface="+mn-ea"/>
-              </a:rPr>
-              <a:t> &gt; ! &gt; </a:t>
-            </a:r>
-            <a:r>
-              <a:rPr altLang="en-US" b="1" dirty="0" lang="zh-CN">
-                <a:solidFill>
-                  <a:srgbClr val="1F2329"/>
-                </a:solidFill>
-                <a:latin typeface="微软雅黑" panose="020B0503020204020204" pitchFamily="34" charset="-122"/>
-                <a:ea typeface="微软雅黑" panose="020B0503020204020204" pitchFamily="34" charset="-122"/>
-                <a:cs typeface="微软雅黑" panose="020B0503020204020204" pitchFamily="34" charset="-120"/>
-                <a:sym typeface="+mn-ea"/>
-              </a:rPr>
-              <a:t>算数</a:t>
-            </a:r>
-            <a:r>
-              <a:rPr altLang="zh-CN" b="1" dirty="0" lang="en-US">
-                <a:solidFill>
-                  <a:srgbClr val="1F2329"/>
-                </a:solidFill>
-                <a:latin typeface="微软雅黑" panose="020B0503020204020204" pitchFamily="34" charset="-122"/>
-                <a:ea typeface="微软雅黑" panose="020B0503020204020204" pitchFamily="34" charset="-122"/>
-                <a:cs typeface="微软雅黑" panose="020B0503020204020204" pitchFamily="34" charset="-120"/>
-                <a:sym typeface="+mn-ea"/>
-              </a:rPr>
-              <a:t> &gt; </a:t>
-            </a:r>
-            <a:r>
-              <a:rPr altLang="en-US" b="1" dirty="0" lang="zh-CN">
-                <a:solidFill>
-                  <a:srgbClr val="1F2329"/>
-                </a:solidFill>
-                <a:latin typeface="微软雅黑" panose="020B0503020204020204" pitchFamily="34" charset="-122"/>
-                <a:ea typeface="微软雅黑" panose="020B0503020204020204" pitchFamily="34" charset="-122"/>
-                <a:cs typeface="微软雅黑" panose="020B0503020204020204" pitchFamily="34" charset="-120"/>
-                <a:sym typeface="+mn-ea"/>
-              </a:rPr>
-              <a:t>关系</a:t>
-            </a:r>
-            <a:r>
-              <a:rPr altLang="zh-CN" b="1" dirty="0" lang="en-US">
-                <a:solidFill>
-                  <a:srgbClr val="1F2329"/>
-                </a:solidFill>
-                <a:latin typeface="微软雅黑" panose="020B0503020204020204" pitchFamily="34" charset="-122"/>
-                <a:ea typeface="微软雅黑" panose="020B0503020204020204" pitchFamily="34" charset="-122"/>
-                <a:cs typeface="微软雅黑" panose="020B0503020204020204" pitchFamily="34" charset="-120"/>
-                <a:sym typeface="+mn-ea"/>
-              </a:rPr>
-              <a:t> &gt; </a:t>
-            </a:r>
-            <a:r>
-              <a:rPr altLang="en-US" b="1" dirty="0" lang="zh-CN">
-                <a:solidFill>
-                  <a:srgbClr val="1F2329"/>
-                </a:solidFill>
-                <a:latin typeface="微软雅黑" panose="020B0503020204020204" pitchFamily="34" charset="-122"/>
-                <a:ea typeface="微软雅黑" panose="020B0503020204020204" pitchFamily="34" charset="-122"/>
-                <a:cs typeface="微软雅黑" panose="020B0503020204020204" pitchFamily="34" charset="-120"/>
-                <a:sym typeface="+mn-ea"/>
-              </a:rPr>
-              <a:t>逻辑</a:t>
-            </a:r>
-            <a:endParaRPr dirty="0" sz="1800" lang="en-US"/>
-          </a:p>
-        </p:txBody>
-      </p:sp>
-      <p:sp>
-        <p:nvSpPr>
-          <p:cNvPr id="1048617" name="Text 6"/>
+            <a:pPr algn="l" indent="0" marL="0">
+              <a:lnSpc>
+                <a:spcPct val="115000"/>
+              </a:lnSpc>
+              <a:buNone/>
+            </a:pPr>
+            <a:r>
+              <a:rPr lang="en-US" sz="1800" b="1" dirty="0">
+                <a:solidFill>
+                  <a:srgbClr val="000000"/>
+                </a:solidFill>
+              </a:rPr>
+              <a:t>括号最大，乘除取余次之，加减最小</a:t>
+            </a:r>
+            <a:endParaRPr lang="en-US" sz="1800" dirty="0"/>
+          </a:p>
+        </p:txBody>
+      </p:sp>
+      <p:sp>
+        <p:nvSpPr>
+          <p:cNvPr id="8" name="Text 6"/>
           <p:cNvSpPr/>
           <p:nvPr/>
         </p:nvSpPr>
@@ -2905,44 +3050,54 @@
             <a:off x="896112" y="4101084"/>
             <a:ext cx="10454335" cy="397764"/>
           </a:xfrm>
-          <a:prstGeom prst="rect"/>
-          <a:noFill/>
-        </p:spPr>
-        <p:txBody>
-          <a:bodyPr anchor="t" rtlCol="0" wrap="square"/>
-          <a:p>
-            <a:pPr algn="l" indent="0" marL="0">
-              <a:lnSpc>
-                <a:spcPct val="115000"/>
-              </a:lnSpc>
-              <a:buNone/>
-            </a:pPr>
-            <a:r>
-              <a:rPr b="1" dirty="0" sz="1800" lang="en-US">
+          <a:prstGeom prst="rect">
+            <a:avLst/>
+          </a:prstGeom>
+          <a:noFill/>
+          <a:ln/>
+        </p:spPr>
+        <p:txBody>
+          <a:bodyPr wrap="square" rtlCol="0" anchor="t"/>
+          <a:lstStyle/>
+          <a:p>
+            <a:pPr algn="l" indent="0" marL="0">
+              <a:lnSpc>
+                <a:spcPct val="115000"/>
+              </a:lnSpc>
+              <a:buNone/>
+            </a:pPr>
+            <a:r>
+              <a:rPr lang="en-US" sz="1800" b="1" dirty="0">
                 <a:solidFill>
                   <a:srgbClr val="1F4E9C"/>
                 </a:solidFill>
-                <a:latin typeface="微软雅黑" panose="020B0503020204020204" pitchFamily="34" charset="-122"/>
-                <a:ea typeface="微软雅黑" panose="020B0503020204020204" pitchFamily="34" charset="-122"/>
-                <a:cs typeface="微软雅黑" panose="020B0503020204020204" pitchFamily="34" charset="-120"/>
+                <a:latin typeface="微软雅黑" pitchFamily="34" charset="0"/>
+                <a:ea typeface="微软雅黑" pitchFamily="34" charset="-122"/>
+                <a:cs typeface="微软雅黑" pitchFamily="34" charset="-120"/>
               </a:rPr>
               <a:t>•  </a:t>
             </a:r>
-            <a:r>
-              <a:rPr dirty="0" sz="1800" lang="en-US">
+            <a:pPr algn="l" indent="0" marL="0">
+              <a:lnSpc>
+                <a:spcPct val="115000"/>
+              </a:lnSpc>
+              <a:buNone/>
+            </a:pPr>
+            <a:r>
+              <a:rPr lang="en-US" sz="1800" dirty="0">
                 <a:solidFill>
                   <a:srgbClr val="000000"/>
                 </a:solidFill>
               </a:rPr>
               <a:t>拿不准就加括号，多写一对括号不丢人</a:t>
             </a:r>
-            <a:endParaRPr dirty="0" sz="1800" lang="en-US"/>
-          </a:p>
-        </p:txBody>
-      </p:sp>
-      <p:sp>
-        <p:nvSpPr>
-          <p:cNvPr id="1048618" name="Text 7"/>
+            <a:endParaRPr lang="en-US" sz="1800" dirty="0"/>
+          </a:p>
+        </p:txBody>
+      </p:sp>
+      <p:sp>
+        <p:nvSpPr>
+          <p:cNvPr id="9" name="Text 7"/>
           <p:cNvSpPr/>
           <p:nvPr/>
         </p:nvSpPr>
@@ -2951,38 +3106,48 @@
             <a:off x="896112" y="4572000"/>
             <a:ext cx="10454335" cy="397764"/>
           </a:xfrm>
-          <a:prstGeom prst="rect"/>
-          <a:noFill/>
-        </p:spPr>
-        <p:txBody>
-          <a:bodyPr anchor="t" rtlCol="0" wrap="square"/>
-          <a:p>
-            <a:pPr algn="l" indent="0" marL="0">
-              <a:lnSpc>
-                <a:spcPct val="115000"/>
-              </a:lnSpc>
-              <a:buNone/>
-            </a:pPr>
-            <a:r>
-              <a:rPr b="1" dirty="0" sz="1800" lang="en-US">
+          <a:prstGeom prst="rect">
+            <a:avLst/>
+          </a:prstGeom>
+          <a:noFill/>
+          <a:ln/>
+        </p:spPr>
+        <p:txBody>
+          <a:bodyPr wrap="square" rtlCol="0" anchor="t"/>
+          <a:lstStyle/>
+          <a:p>
+            <a:pPr algn="l" indent="0" marL="0">
+              <a:lnSpc>
+                <a:spcPct val="115000"/>
+              </a:lnSpc>
+              <a:buNone/>
+            </a:pPr>
+            <a:r>
+              <a:rPr lang="en-US" sz="1800" b="1" dirty="0">
                 <a:solidFill>
                   <a:srgbClr val="1F4E9C"/>
                 </a:solidFill>
-                <a:latin typeface="微软雅黑" panose="020B0503020204020204" pitchFamily="34" charset="-122"/>
-                <a:ea typeface="微软雅黑" panose="020B0503020204020204" pitchFamily="34" charset="-122"/>
-                <a:cs typeface="微软雅黑" panose="020B0503020204020204" pitchFamily="34" charset="-120"/>
+                <a:latin typeface="微软雅黑" pitchFamily="34" charset="0"/>
+                <a:ea typeface="微软雅黑" pitchFamily="34" charset="-122"/>
+                <a:cs typeface="微软雅黑" pitchFamily="34" charset="-120"/>
               </a:rPr>
               <a:t>•  </a:t>
             </a:r>
-            <a:r>
-              <a:rPr dirty="0" sz="1800" lang="en-US">
+            <a:pPr algn="l" indent="0" marL="0">
+              <a:lnSpc>
+                <a:spcPct val="115000"/>
+              </a:lnSpc>
+              <a:buNone/>
+            </a:pPr>
+            <a:r>
+              <a:rPr lang="en-US" sz="1800" dirty="0">
                 <a:solidFill>
                   <a:srgbClr val="000000"/>
                 </a:solidFill>
               </a:rPr>
               <a:t>完整的优先级表等你用到的时候再翻，现在够用</a:t>
             </a:r>
-            <a:endParaRPr dirty="0" sz="1800" lang="en-US"/>
+            <a:endParaRPr lang="en-US" sz="1800" dirty="0"/>
           </a:p>
         </p:txBody>
       </p:sp>
@@ -2996,11 +3161,11 @@
 
 <file path=ppt/slides/slide12.xml><?xml version="1.0" encoding="utf-8"?>
 <p:sld xmlns:a="http://schemas.openxmlformats.org/drawingml/2006/main" xmlns:r="http://schemas.openxmlformats.org/officeDocument/2006/relationships" xmlns:p="http://schemas.openxmlformats.org/presentationml/2006/main">
-  <p:cSld>
+  <p:cSld name="Slide 12">
     <p:bg>
       <p:bgPr>
-        <a:blipFill rotWithShape="1" dpi="0">
-          <a:blip xmlns:r="http://schemas.openxmlformats.org/officeDocument/2006/relationships" r:embed="rId1">
+        <a:blipFill dpi="0" rotWithShape="1">
+          <a:blip r:embed="rId1">
             <a:lum/>
           </a:blip>
           <a:srcRect/>
@@ -3013,7 +3178,7 @@
     </p:bg>
     <p:spTree>
       <p:nvGrpSpPr>
-        <p:cNvPr id="35" name=""/>
+        <p:cNvPr id="1" name=""/>
         <p:cNvGrpSpPr/>
         <p:nvPr/>
       </p:nvGrpSpPr>
@@ -3027,7 +3192,7 @@
       </p:grpSpPr>
       <p:sp>
         <p:nvSpPr>
-          <p:cNvPr id="1048633" name="Text 0"/>
+          <p:cNvPr id="2" name="Text 0"/>
           <p:cNvSpPr/>
           <p:nvPr/>
         </p:nvSpPr>
@@ -3036,33 +3201,37 @@
             <a:off x="10362895" y="6016752"/>
             <a:ext cx="1463040" cy="320040"/>
           </a:xfrm>
-          <a:prstGeom prst="rect"/>
-          <a:noFill/>
-        </p:spPr>
-        <p:txBody>
-          <a:bodyPr anchor="ctr" rtlCol="0" wrap="square"/>
+          <a:prstGeom prst="rect">
+            <a:avLst/>
+          </a:prstGeom>
+          <a:noFill/>
+          <a:ln/>
+        </p:spPr>
+        <p:txBody>
+          <a:bodyPr wrap="square" rtlCol="0" anchor="ctr"/>
+          <a:lstStyle/>
           <a:p>
             <a:pPr algn="r" indent="0" marL="0">
               <a:buNone/>
             </a:pPr>
             <a:r>
-              <a:rPr dirty="0" sz="1000" lang="en-US">
+              <a:rPr lang="en-US" sz="1000" dirty="0">
                 <a:solidFill>
                   <a:srgbClr val="8A9099"/>
                 </a:solidFill>
-                <a:latin typeface="微软雅黑" panose="020B0503020204020204" pitchFamily="34" charset="-122"/>
-                <a:ea typeface="微软雅黑" panose="020B0503020204020204" pitchFamily="34" charset="-122"/>
-                <a:cs typeface="微软雅黑" panose="020B0503020204020204" pitchFamily="34" charset="-120"/>
+                <a:latin typeface="微软雅黑" pitchFamily="34" charset="0"/>
+                <a:ea typeface="微软雅黑" pitchFamily="34" charset="-122"/>
+                <a:cs typeface="微软雅黑" pitchFamily="34" charset="-120"/>
               </a:rPr>
               <a:t>12 / 15</a:t>
             </a:r>
-            <a:endParaRPr dirty="0" sz="1000" lang="en-US"/>
-          </a:p>
-        </p:txBody>
-      </p:sp>
-      <p:sp>
-        <p:nvSpPr>
-          <p:cNvPr id="1048634" name="Text 1"/>
+            <a:endParaRPr lang="en-US" sz="1000" dirty="0"/>
+          </a:p>
+        </p:txBody>
+      </p:sp>
+      <p:sp>
+        <p:nvSpPr>
+          <p:cNvPr id="3" name="Text 1"/>
           <p:cNvSpPr/>
           <p:nvPr/>
         </p:nvSpPr>
@@ -3071,33 +3240,37 @@
             <a:off x="822960" y="960120"/>
             <a:ext cx="10545775" cy="365760"/>
           </a:xfrm>
-          <a:prstGeom prst="rect"/>
-          <a:noFill/>
-        </p:spPr>
-        <p:txBody>
-          <a:bodyPr anchor="ctr" rtlCol="0" wrap="square"/>
-          <a:p>
-            <a:pPr algn="l" indent="0" marL="0">
-              <a:buNone/>
-            </a:pPr>
-            <a:r>
-              <a:rPr b="1" dirty="0" sz="1400" lang="en-US">
+          <a:prstGeom prst="rect">
+            <a:avLst/>
+          </a:prstGeom>
+          <a:noFill/>
+          <a:ln/>
+        </p:spPr>
+        <p:txBody>
+          <a:bodyPr wrap="square" rtlCol="0" anchor="ctr"/>
+          <a:lstStyle/>
+          <a:p>
+            <a:pPr algn="l" indent="0" marL="0">
+              <a:buNone/>
+            </a:pPr>
+            <a:r>
+              <a:rPr lang="en-US" sz="1400" b="1" dirty="0">
                 <a:solidFill>
                   <a:srgbClr val="1F4E9C"/>
                 </a:solidFill>
-                <a:latin typeface="微软雅黑" panose="020B0503020204020204" pitchFamily="34" charset="-122"/>
-                <a:ea typeface="微软雅黑" panose="020B0503020204020204" pitchFamily="34" charset="-122"/>
-                <a:cs typeface="微软雅黑" panose="020B0503020204020204" pitchFamily="34" charset="-120"/>
+                <a:latin typeface="微软雅黑" pitchFamily="34" charset="0"/>
+                <a:ea typeface="微软雅黑" pitchFamily="34" charset="-122"/>
+                <a:cs typeface="微软雅黑" pitchFamily="34" charset="-120"/>
               </a:rPr>
               <a:t>板书推演</a:t>
             </a:r>
-            <a:endParaRPr dirty="0" sz="1400" lang="en-US"/>
-          </a:p>
-        </p:txBody>
-      </p:sp>
-      <p:sp>
-        <p:nvSpPr>
-          <p:cNvPr id="1048635" name="Text 2"/>
+            <a:endParaRPr lang="en-US" sz="1400" dirty="0"/>
+          </a:p>
+        </p:txBody>
+      </p:sp>
+      <p:sp>
+        <p:nvSpPr>
+          <p:cNvPr id="4" name="Text 2"/>
           <p:cNvSpPr/>
           <p:nvPr/>
         </p:nvSpPr>
@@ -3106,33 +3279,37 @@
             <a:off x="822960" y="1344168"/>
             <a:ext cx="10545775" cy="731520"/>
           </a:xfrm>
-          <a:prstGeom prst="rect"/>
-          <a:noFill/>
-        </p:spPr>
-        <p:txBody>
-          <a:bodyPr anchor="ctr" rtlCol="0" wrap="square"/>
-          <a:p>
-            <a:pPr algn="l" indent="0" marL="0">
-              <a:buNone/>
-            </a:pPr>
-            <a:r>
-              <a:rPr b="1" dirty="0" sz="2800" lang="en-US">
+          <a:prstGeom prst="rect">
+            <a:avLst/>
+          </a:prstGeom>
+          <a:noFill/>
+          <a:ln/>
+        </p:spPr>
+        <p:txBody>
+          <a:bodyPr wrap="square" rtlCol="0" anchor="ctr"/>
+          <a:lstStyle/>
+          <a:p>
+            <a:pPr algn="l" indent="0" marL="0">
+              <a:buNone/>
+            </a:pPr>
+            <a:r>
+              <a:rPr lang="en-US" sz="2800" b="1" dirty="0">
                 <a:solidFill>
                   <a:srgbClr val="1F2329"/>
                 </a:solidFill>
-                <a:latin typeface="微软雅黑" panose="020B0503020204020204" pitchFamily="34" charset="-122"/>
-                <a:ea typeface="微软雅黑" panose="020B0503020204020204" pitchFamily="34" charset="-122"/>
-                <a:cs typeface="微软雅黑" panose="020B0503020204020204" pitchFamily="34" charset="-120"/>
+                <a:latin typeface="微软雅黑" pitchFamily="34" charset="0"/>
+                <a:ea typeface="微软雅黑" pitchFamily="34" charset="-122"/>
+                <a:cs typeface="微软雅黑" pitchFamily="34" charset="-120"/>
               </a:rPr>
               <a:t>从零写：读入一个整数，拆出个位和十位</a:t>
             </a:r>
-            <a:endParaRPr dirty="0" sz="2800" lang="en-US"/>
-          </a:p>
-        </p:txBody>
-      </p:sp>
-      <p:sp>
-        <p:nvSpPr>
-          <p:cNvPr id="1048636" name="Text 3"/>
+            <a:endParaRPr lang="en-US" sz="2800" dirty="0"/>
+          </a:p>
+        </p:txBody>
+      </p:sp>
+      <p:sp>
+        <p:nvSpPr>
+          <p:cNvPr id="5" name="Text 3"/>
           <p:cNvSpPr/>
           <p:nvPr/>
         </p:nvSpPr>
@@ -3141,33 +3318,37 @@
             <a:off x="822960" y="2194560"/>
             <a:ext cx="10545775" cy="685800"/>
           </a:xfrm>
-          <a:prstGeom prst="rect"/>
-          <a:noFill/>
-        </p:spPr>
-        <p:txBody>
-          <a:bodyPr anchor="t" rtlCol="0" wrap="square"/>
-          <a:p>
-            <a:pPr algn="l" indent="0" marL="0">
-              <a:buNone/>
-            </a:pPr>
-            <a:r>
-              <a:rPr dirty="0" sz="1600" lang="en-US">
+          <a:prstGeom prst="rect">
+            <a:avLst/>
+          </a:prstGeom>
+          <a:noFill/>
+          <a:ln/>
+        </p:spPr>
+        <p:txBody>
+          <a:bodyPr wrap="square" rtlCol="0" anchor="t"/>
+          <a:lstStyle/>
+          <a:p>
+            <a:pPr algn="l" indent="0" marL="0">
+              <a:buNone/>
+            </a:pPr>
+            <a:r>
+              <a:rPr lang="en-US" sz="1600" dirty="0">
                 <a:solidFill>
                   <a:srgbClr val="1F2329"/>
                 </a:solidFill>
-                <a:latin typeface="微软雅黑" panose="020B0503020204020204" pitchFamily="34" charset="-122"/>
-                <a:ea typeface="微软雅黑" panose="020B0503020204020204" pitchFamily="34" charset="-122"/>
-                <a:cs typeface="微软雅黑" panose="020B0503020204020204" pitchFamily="34" charset="-120"/>
+                <a:latin typeface="微软雅黑" pitchFamily="34" charset="0"/>
+                <a:ea typeface="微软雅黑" pitchFamily="34" charset="-122"/>
+                <a:cs typeface="微软雅黑" pitchFamily="34" charset="-120"/>
               </a:rPr>
               <a:t>任务：写一个完整程序，scanf读入一个整数n，用%和/拆出个位（n%10）、十位（n/10%10），分别打印。分六步：头文件 → main开头 → 声明n并scanf读入 → 算个位十位 → printf打印 → return 0 补花括号</a:t>
             </a:r>
-            <a:endParaRPr dirty="0" sz="1600" lang="en-US"/>
-          </a:p>
-        </p:txBody>
-      </p:sp>
-      <p:sp>
-        <p:nvSpPr>
-          <p:cNvPr id="1048637" name="Shape 4"/>
+            <a:endParaRPr lang="en-US" sz="1600" dirty="0"/>
+          </a:p>
+        </p:txBody>
+      </p:sp>
+      <p:sp>
+        <p:nvSpPr>
+          <p:cNvPr id="6" name="Shape 4"/>
           <p:cNvSpPr/>
           <p:nvPr/>
         </p:nvSpPr>
@@ -3176,7 +3357,9 @@
             <a:off x="822960" y="3017520"/>
             <a:ext cx="10545775" cy="2788920"/>
           </a:xfrm>
-          <a:prstGeom prst="rect"/>
+          <a:prstGeom prst="rect">
+            <a:avLst/>
+          </a:prstGeom>
           <a:solidFill>
             <a:srgbClr val="FFFFFF"/>
           </a:solidFill>
@@ -3190,7 +3373,7 @@
       </p:sp>
       <p:sp>
         <p:nvSpPr>
-          <p:cNvPr id="1048638" name="Text 5"/>
+          <p:cNvPr id="7" name="Text 5"/>
           <p:cNvSpPr/>
           <p:nvPr/>
         </p:nvSpPr>
@@ -3199,27 +3382,31 @@
             <a:off x="822960" y="5349240"/>
             <a:ext cx="10545775" cy="365760"/>
           </a:xfrm>
-          <a:prstGeom prst="rect"/>
-          <a:noFill/>
-        </p:spPr>
-        <p:txBody>
-          <a:bodyPr anchor="ctr" rtlCol="0" wrap="square"/>
+          <a:prstGeom prst="rect">
+            <a:avLst/>
+          </a:prstGeom>
+          <a:noFill/>
+          <a:ln/>
+        </p:spPr>
+        <p:txBody>
+          <a:bodyPr wrap="square" rtlCol="0" anchor="ctr"/>
+          <a:lstStyle/>
           <a:p>
             <a:pPr algn="r" indent="0" marL="0">
               <a:buNone/>
             </a:pPr>
             <a:r>
-              <a:rPr dirty="0" sz="1200" lang="en-US">
+              <a:rPr lang="en-US" sz="1200" dirty="0">
                 <a:solidFill>
                   <a:srgbClr val="8A9099"/>
                 </a:solidFill>
-                <a:latin typeface="微软雅黑" panose="020B0503020204020204" pitchFamily="34" charset="-122"/>
-                <a:ea typeface="微软雅黑" panose="020B0503020204020204" pitchFamily="34" charset="-122"/>
-                <a:cs typeface="微软雅黑" panose="020B0503020204020204" pitchFamily="34" charset="-120"/>
+                <a:latin typeface="微软雅黑" pitchFamily="34" charset="0"/>
+                <a:ea typeface="微软雅黑" pitchFamily="34" charset="-122"/>
+                <a:cs typeface="微软雅黑" pitchFamily="34" charset="-120"/>
               </a:rPr>
               <a:t>此处板书推演</a:t>
             </a:r>
-            <a:endParaRPr dirty="0" sz="1200" lang="en-US"/>
+            <a:endParaRPr lang="en-US" sz="1200" dirty="0"/>
           </a:p>
         </p:txBody>
       </p:sp>
@@ -3233,11 +3420,11 @@
 
 <file path=ppt/slides/slide13.xml><?xml version="1.0" encoding="utf-8"?>
 <p:sld xmlns:a="http://schemas.openxmlformats.org/drawingml/2006/main" xmlns:r="http://schemas.openxmlformats.org/officeDocument/2006/relationships" xmlns:p="http://schemas.openxmlformats.org/presentationml/2006/main">
-  <p:cSld>
+  <p:cSld name="Slide 13">
     <p:bg>
       <p:bgPr>
-        <a:blipFill rotWithShape="1" dpi="0">
-          <a:blip xmlns:r="http://schemas.openxmlformats.org/officeDocument/2006/relationships" r:embed="rId1">
+        <a:blipFill dpi="0" rotWithShape="1">
+          <a:blip r:embed="rId1">
             <a:lum/>
           </a:blip>
           <a:srcRect/>
@@ -3250,7 +3437,7 @@
     </p:bg>
     <p:spTree>
       <p:nvGrpSpPr>
-        <p:cNvPr id="56" name=""/>
+        <p:cNvPr id="1" name=""/>
         <p:cNvGrpSpPr/>
         <p:nvPr/>
       </p:nvGrpSpPr>
@@ -3264,7 +3451,7 @@
       </p:grpSpPr>
       <p:sp>
         <p:nvSpPr>
-          <p:cNvPr id="1048706" name="Text 0"/>
+          <p:cNvPr id="2" name="Text 0"/>
           <p:cNvSpPr/>
           <p:nvPr/>
         </p:nvSpPr>
@@ -3273,33 +3460,37 @@
             <a:off x="10362895" y="6016752"/>
             <a:ext cx="1463040" cy="320040"/>
           </a:xfrm>
-          <a:prstGeom prst="rect"/>
-          <a:noFill/>
-        </p:spPr>
-        <p:txBody>
-          <a:bodyPr anchor="ctr" rtlCol="0" wrap="square"/>
+          <a:prstGeom prst="rect">
+            <a:avLst/>
+          </a:prstGeom>
+          <a:noFill/>
+          <a:ln/>
+        </p:spPr>
+        <p:txBody>
+          <a:bodyPr wrap="square" rtlCol="0" anchor="ctr"/>
+          <a:lstStyle/>
           <a:p>
             <a:pPr algn="r" indent="0" marL="0">
               <a:buNone/>
             </a:pPr>
             <a:r>
-              <a:rPr dirty="0" sz="1000" lang="en-US">
+              <a:rPr lang="en-US" sz="1000" dirty="0">
                 <a:solidFill>
                   <a:srgbClr val="8A9099"/>
                 </a:solidFill>
-                <a:latin typeface="微软雅黑" panose="020B0503020204020204" pitchFamily="34" charset="-122"/>
-                <a:ea typeface="微软雅黑" panose="020B0503020204020204" pitchFamily="34" charset="-122"/>
-                <a:cs typeface="微软雅黑" panose="020B0503020204020204" pitchFamily="34" charset="-120"/>
+                <a:latin typeface="微软雅黑" pitchFamily="34" charset="0"/>
+                <a:ea typeface="微软雅黑" pitchFamily="34" charset="-122"/>
+                <a:cs typeface="微软雅黑" pitchFamily="34" charset="-120"/>
               </a:rPr>
               <a:t>13 / 15</a:t>
             </a:r>
-            <a:endParaRPr dirty="0" sz="1000" lang="en-US"/>
-          </a:p>
-        </p:txBody>
-      </p:sp>
-      <p:sp>
-        <p:nvSpPr>
-          <p:cNvPr id="1048707" name="Text 1"/>
+            <a:endParaRPr lang="en-US" sz="1000" dirty="0"/>
+          </a:p>
+        </p:txBody>
+      </p:sp>
+      <p:sp>
+        <p:nvSpPr>
+          <p:cNvPr id="3" name="Text 1"/>
           <p:cNvSpPr/>
           <p:nvPr/>
         </p:nvSpPr>
@@ -3308,33 +3499,37 @@
             <a:off x="822960" y="960120"/>
             <a:ext cx="10545775" cy="365760"/>
           </a:xfrm>
-          <a:prstGeom prst="rect"/>
-          <a:noFill/>
-        </p:spPr>
-        <p:txBody>
-          <a:bodyPr anchor="ctr" rtlCol="0" wrap="square"/>
-          <a:p>
-            <a:pPr algn="l" indent="0" marL="0">
-              <a:buNone/>
-            </a:pPr>
-            <a:r>
-              <a:rPr b="1" dirty="0" sz="1400" lang="en-US">
+          <a:prstGeom prst="rect">
+            <a:avLst/>
+          </a:prstGeom>
+          <a:noFill/>
+          <a:ln/>
+        </p:spPr>
+        <p:txBody>
+          <a:bodyPr wrap="square" rtlCol="0" anchor="ctr"/>
+          <a:lstStyle/>
+          <a:p>
+            <a:pPr algn="l" indent="0" marL="0">
+              <a:buNone/>
+            </a:pPr>
+            <a:r>
+              <a:rPr lang="en-US" sz="1400" b="1" dirty="0">
                 <a:solidFill>
                   <a:srgbClr val="1F4E9C"/>
                 </a:solidFill>
-                <a:latin typeface="微软雅黑" panose="020B0503020204020204" pitchFamily="34" charset="-122"/>
-                <a:ea typeface="微软雅黑" panose="020B0503020204020204" pitchFamily="34" charset="-122"/>
-                <a:cs typeface="微软雅黑" panose="020B0503020204020204" pitchFamily="34" charset="-120"/>
+                <a:latin typeface="微软雅黑" pitchFamily="34" charset="0"/>
+                <a:ea typeface="微软雅黑" pitchFamily="34" charset="-122"/>
+                <a:cs typeface="微软雅黑" pitchFamily="34" charset="-120"/>
               </a:rPr>
               <a:t>板书结论</a:t>
             </a:r>
-            <a:endParaRPr dirty="0" sz="1400" lang="en-US"/>
-          </a:p>
-        </p:txBody>
-      </p:sp>
-      <p:sp>
-        <p:nvSpPr>
-          <p:cNvPr id="1048708" name="Text 2"/>
+            <a:endParaRPr lang="en-US" sz="1400" dirty="0"/>
+          </a:p>
+        </p:txBody>
+      </p:sp>
+      <p:sp>
+        <p:nvSpPr>
+          <p:cNvPr id="4" name="Text 2"/>
           <p:cNvSpPr/>
           <p:nvPr/>
         </p:nvSpPr>
@@ -3343,33 +3538,37 @@
             <a:off x="822960" y="1344168"/>
             <a:ext cx="10545775" cy="731520"/>
           </a:xfrm>
-          <a:prstGeom prst="rect"/>
-          <a:noFill/>
-        </p:spPr>
-        <p:txBody>
-          <a:bodyPr anchor="ctr" rtlCol="0" wrap="square"/>
-          <a:p>
-            <a:pPr algn="l" indent="0" marL="0">
-              <a:buNone/>
-            </a:pPr>
-            <a:r>
-              <a:rPr b="1" dirty="0" sz="2800" lang="en-US">
+          <a:prstGeom prst="rect">
+            <a:avLst/>
+          </a:prstGeom>
+          <a:noFill/>
+          <a:ln/>
+        </p:spPr>
+        <p:txBody>
+          <a:bodyPr wrap="square" rtlCol="0" anchor="ctr"/>
+          <a:lstStyle/>
+          <a:p>
+            <a:pPr algn="l" indent="0" marL="0">
+              <a:buNone/>
+            </a:pPr>
+            <a:r>
+              <a:rPr lang="en-US" sz="2800" b="1" dirty="0">
                 <a:solidFill>
                   <a:srgbClr val="1F2329"/>
                 </a:solidFill>
-                <a:latin typeface="微软雅黑" panose="020B0503020204020204" pitchFamily="34" charset="-122"/>
-                <a:ea typeface="微软雅黑" panose="020B0503020204020204" pitchFamily="34" charset="-122"/>
-                <a:cs typeface="微软雅黑" panose="020B0503020204020204" pitchFamily="34" charset="-120"/>
+                <a:latin typeface="微软雅黑" pitchFamily="34" charset="0"/>
+                <a:ea typeface="微软雅黑" pitchFamily="34" charset="-122"/>
+                <a:cs typeface="微软雅黑" pitchFamily="34" charset="-120"/>
               </a:rPr>
               <a:t>程序长这样</a:t>
             </a:r>
-            <a:endParaRPr dirty="0" sz="2800" lang="en-US"/>
-          </a:p>
-        </p:txBody>
-      </p:sp>
-      <p:sp>
-        <p:nvSpPr>
-          <p:cNvPr id="1048709" name="Shape 3"/>
+            <a:endParaRPr lang="en-US" sz="2800" dirty="0"/>
+          </a:p>
+        </p:txBody>
+      </p:sp>
+      <p:sp>
+        <p:nvSpPr>
+          <p:cNvPr id="5" name="Shape 3"/>
           <p:cNvSpPr/>
           <p:nvPr/>
         </p:nvSpPr>
@@ -3378,7 +3577,9 @@
             <a:off x="822960" y="2395728"/>
             <a:ext cx="10545775" cy="2459736"/>
           </a:xfrm>
-          <a:prstGeom prst="rect"/>
+          <a:prstGeom prst="rect">
+            <a:avLst/>
+          </a:prstGeom>
           <a:solidFill>
             <a:srgbClr val="F5F6F7"/>
           </a:solidFill>
@@ -3392,7 +3593,7 @@
       </p:sp>
       <p:sp>
         <p:nvSpPr>
-          <p:cNvPr id="1048710" name="Text 4"/>
+          <p:cNvPr id="6" name="Text 4"/>
           <p:cNvSpPr/>
           <p:nvPr/>
         </p:nvSpPr>
@@ -3401,11 +3602,15 @@
             <a:off x="1078992" y="2505456"/>
             <a:ext cx="10033711" cy="2240280"/>
           </a:xfrm>
-          <a:prstGeom prst="rect"/>
-          <a:noFill/>
-        </p:spPr>
-        <p:txBody>
-          <a:bodyPr anchor="t" rtlCol="0" wrap="square"/>
+          <a:prstGeom prst="rect">
+            <a:avLst/>
+          </a:prstGeom>
+          <a:noFill/>
+          <a:ln/>
+        </p:spPr>
+        <p:txBody>
+          <a:bodyPr wrap="square" rtlCol="0" anchor="t"/>
+          <a:lstStyle/>
           <a:p>
             <a:pPr algn="l" indent="0" marL="0">
               <a:lnSpc>
@@ -3414,13 +3619,13 @@
               <a:buNone/>
             </a:pPr>
             <a:r>
-              <a:rPr dirty="0" sz="1400" lang="en-US">
+              <a:rPr lang="en-US" sz="1400" dirty="0">
                 <a:solidFill>
                   <a:srgbClr val="1F2329"/>
                 </a:solidFill>
-                <a:latin typeface="Consolas" panose="020B0609020204030204" pitchFamily="34" charset="0"/>
-                <a:ea typeface="Consolas" panose="020B0609020204030204" pitchFamily="34" charset="-122"/>
-                <a:cs typeface="Consolas" panose="020B0609020204030204" pitchFamily="34" charset="-120"/>
+                <a:latin typeface="Consolas" pitchFamily="34" charset="0"/>
+                <a:ea typeface="Consolas" pitchFamily="34" charset="-122"/>
+                <a:cs typeface="Consolas" pitchFamily="34" charset="-120"/>
               </a:rPr>
               <a:t>#include &lt;stdio.h&gt;
 int main(){
@@ -3432,13 +3637,13 @@
 }
 </a:t>
             </a:r>
-            <a:endParaRPr dirty="0" sz="1400" lang="en-US"/>
-          </a:p>
-        </p:txBody>
-      </p:sp>
-      <p:sp>
-        <p:nvSpPr>
-          <p:cNvPr id="1048711" name="Text 5"/>
+            <a:endParaRPr lang="en-US" sz="1400" dirty="0"/>
+          </a:p>
+        </p:txBody>
+      </p:sp>
+      <p:sp>
+        <p:nvSpPr>
+          <p:cNvPr id="7" name="Text 5"/>
           <p:cNvSpPr/>
           <p:nvPr/>
         </p:nvSpPr>
@@ -3447,27 +3652,31 @@
             <a:off x="822960" y="5056632"/>
             <a:ext cx="10545775" cy="358902"/>
           </a:xfrm>
-          <a:prstGeom prst="rect"/>
-          <a:noFill/>
-        </p:spPr>
-        <p:txBody>
-          <a:bodyPr anchor="t" rtlCol="0" wrap="square"/>
-          <a:p>
-            <a:pPr algn="l" indent="0" marL="0">
-              <a:buNone/>
-            </a:pPr>
-            <a:r>
-              <a:rPr dirty="0" sz="1500" lang="en-US">
+          <a:prstGeom prst="rect">
+            <a:avLst/>
+          </a:prstGeom>
+          <a:noFill/>
+          <a:ln/>
+        </p:spPr>
+        <p:txBody>
+          <a:bodyPr wrap="square" rtlCol="0" anchor="t"/>
+          <a:lstStyle/>
+          <a:p>
+            <a:pPr algn="l" indent="0" marL="0">
+              <a:buNone/>
+            </a:pPr>
+            <a:r>
+              <a:rPr lang="en-US" sz="1500" dirty="0">
                 <a:solidFill>
                   <a:srgbClr val="8A9099"/>
                 </a:solidFill>
-                <a:latin typeface="微软雅黑" panose="020B0503020204020204" pitchFamily="34" charset="-122"/>
-                <a:ea typeface="微软雅黑" panose="020B0503020204020204" pitchFamily="34" charset="-122"/>
-                <a:cs typeface="微软雅黑" panose="020B0503020204020204" pitchFamily="34" charset="-120"/>
+                <a:latin typeface="微软雅黑" pitchFamily="34" charset="0"/>
+                <a:ea typeface="微软雅黑" pitchFamily="34" charset="-122"/>
+                <a:cs typeface="微软雅黑" pitchFamily="34" charset="-120"/>
               </a:rPr>
               <a:t>输入125，输出：个位5、十位2。%和/配合就是拆数字的组合拳</a:t>
             </a:r>
-            <a:endParaRPr dirty="0" sz="1500" lang="en-US"/>
+            <a:endParaRPr lang="en-US" sz="1500" dirty="0"/>
           </a:p>
         </p:txBody>
       </p:sp>
@@ -3481,11 +3690,11 @@
 
 <file path=ppt/slides/slide14.xml><?xml version="1.0" encoding="utf-8"?>
 <p:sld xmlns:a="http://schemas.openxmlformats.org/drawingml/2006/main" xmlns:r="http://schemas.openxmlformats.org/officeDocument/2006/relationships" xmlns:p="http://schemas.openxmlformats.org/presentationml/2006/main">
-  <p:cSld>
+  <p:cSld name="Slide 14">
     <p:bg>
       <p:bgPr>
-        <a:blipFill rotWithShape="1" dpi="0">
-          <a:blip xmlns:r="http://schemas.openxmlformats.org/officeDocument/2006/relationships" r:embed="rId1">
+        <a:blipFill dpi="0" rotWithShape="1">
+          <a:blip r:embed="rId1">
             <a:lum/>
           </a:blip>
           <a:srcRect/>
@@ -3498,7 +3707,7 @@
     </p:bg>
     <p:spTree>
       <p:nvGrpSpPr>
-        <p:cNvPr id="59" name=""/>
+        <p:cNvPr id="1" name=""/>
         <p:cNvGrpSpPr/>
         <p:nvPr/>
       </p:nvGrpSpPr>
@@ -3512,7 +3721,7 @@
       </p:grpSpPr>
       <p:sp>
         <p:nvSpPr>
-          <p:cNvPr id="1048715" name="Text 0"/>
+          <p:cNvPr id="2" name="Text 0"/>
           <p:cNvSpPr/>
           <p:nvPr/>
         </p:nvSpPr>
@@ -3521,33 +3730,37 @@
             <a:off x="10362895" y="6016752"/>
             <a:ext cx="1463040" cy="320040"/>
           </a:xfrm>
-          <a:prstGeom prst="rect"/>
-          <a:noFill/>
-        </p:spPr>
-        <p:txBody>
-          <a:bodyPr anchor="ctr" rtlCol="0" wrap="square"/>
+          <a:prstGeom prst="rect">
+            <a:avLst/>
+          </a:prstGeom>
+          <a:noFill/>
+          <a:ln/>
+        </p:spPr>
+        <p:txBody>
+          <a:bodyPr wrap="square" rtlCol="0" anchor="ctr"/>
+          <a:lstStyle/>
           <a:p>
             <a:pPr algn="r" indent="0" marL="0">
               <a:buNone/>
             </a:pPr>
             <a:r>
-              <a:rPr dirty="0" sz="1000" lang="en-US">
+              <a:rPr lang="en-US" sz="1000" dirty="0">
                 <a:solidFill>
                   <a:srgbClr val="8A9099"/>
                 </a:solidFill>
-                <a:latin typeface="微软雅黑" panose="020B0503020204020204" pitchFamily="34" charset="-122"/>
-                <a:ea typeface="微软雅黑" panose="020B0503020204020204" pitchFamily="34" charset="-122"/>
-                <a:cs typeface="微软雅黑" panose="020B0503020204020204" pitchFamily="34" charset="-120"/>
+                <a:latin typeface="微软雅黑" pitchFamily="34" charset="0"/>
+                <a:ea typeface="微软雅黑" pitchFamily="34" charset="-122"/>
+                <a:cs typeface="微软雅黑" pitchFamily="34" charset="-120"/>
               </a:rPr>
               <a:t>14 / 15</a:t>
             </a:r>
-            <a:endParaRPr dirty="0" sz="1000" lang="en-US"/>
-          </a:p>
-        </p:txBody>
-      </p:sp>
-      <p:sp>
-        <p:nvSpPr>
-          <p:cNvPr id="1048716" name="Text 1"/>
+            <a:endParaRPr lang="en-US" sz="1000" dirty="0"/>
+          </a:p>
+        </p:txBody>
+      </p:sp>
+      <p:sp>
+        <p:nvSpPr>
+          <p:cNvPr id="3" name="Text 1"/>
           <p:cNvSpPr/>
           <p:nvPr/>
         </p:nvSpPr>
@@ -3556,33 +3769,37 @@
             <a:off x="822960" y="960120"/>
             <a:ext cx="10545775" cy="365760"/>
           </a:xfrm>
-          <a:prstGeom prst="rect"/>
-          <a:noFill/>
-        </p:spPr>
-        <p:txBody>
-          <a:bodyPr anchor="ctr" rtlCol="0" wrap="square"/>
-          <a:p>
-            <a:pPr algn="l" indent="0" marL="0">
-              <a:buNone/>
-            </a:pPr>
-            <a:r>
-              <a:rPr b="1" dirty="0" sz="1400" lang="en-US">
+          <a:prstGeom prst="rect">
+            <a:avLst/>
+          </a:prstGeom>
+          <a:noFill/>
+          <a:ln/>
+        </p:spPr>
+        <p:txBody>
+          <a:bodyPr wrap="square" rtlCol="0" anchor="ctr"/>
+          <a:lstStyle/>
+          <a:p>
+            <a:pPr algn="l" indent="0" marL="0">
+              <a:buNone/>
+            </a:pPr>
+            <a:r>
+              <a:rPr lang="en-US" sz="1400" b="1" dirty="0">
                 <a:solidFill>
                   <a:srgbClr val="1F4E9C"/>
                 </a:solidFill>
-                <a:latin typeface="微软雅黑" panose="020B0503020204020204" pitchFamily="34" charset="-122"/>
-                <a:ea typeface="微软雅黑" panose="020B0503020204020204" pitchFamily="34" charset="-122"/>
-                <a:cs typeface="微软雅黑" panose="020B0503020204020204" pitchFamily="34" charset="-120"/>
+                <a:latin typeface="微软雅黑" pitchFamily="34" charset="0"/>
+                <a:ea typeface="微软雅黑" pitchFamily="34" charset="-122"/>
+                <a:cs typeface="微软雅黑" pitchFamily="34" charset="-120"/>
               </a:rPr>
               <a:t>本节总结</a:t>
             </a:r>
-            <a:endParaRPr dirty="0" sz="1400" lang="en-US"/>
-          </a:p>
-        </p:txBody>
-      </p:sp>
-      <p:sp>
-        <p:nvSpPr>
-          <p:cNvPr id="1048717" name="Text 2"/>
+            <a:endParaRPr lang="en-US" sz="1400" dirty="0"/>
+          </a:p>
+        </p:txBody>
+      </p:sp>
+      <p:sp>
+        <p:nvSpPr>
+          <p:cNvPr id="4" name="Text 2"/>
           <p:cNvSpPr/>
           <p:nvPr/>
         </p:nvSpPr>
@@ -3591,33 +3808,37 @@
             <a:off x="822960" y="1344168"/>
             <a:ext cx="10545775" cy="731520"/>
           </a:xfrm>
-          <a:prstGeom prst="rect"/>
-          <a:noFill/>
-        </p:spPr>
-        <p:txBody>
-          <a:bodyPr anchor="ctr" rtlCol="0" wrap="square"/>
-          <a:p>
-            <a:pPr algn="l" indent="0" marL="0">
-              <a:buNone/>
-            </a:pPr>
-            <a:r>
-              <a:rPr b="1" dirty="0" sz="2800" lang="en-US">
+          <a:prstGeom prst="rect">
+            <a:avLst/>
+          </a:prstGeom>
+          <a:noFill/>
+          <a:ln/>
+        </p:spPr>
+        <p:txBody>
+          <a:bodyPr wrap="square" rtlCol="0" anchor="ctr"/>
+          <a:lstStyle/>
+          <a:p>
+            <a:pPr algn="l" indent="0" marL="0">
+              <a:buNone/>
+            </a:pPr>
+            <a:r>
+              <a:rPr lang="en-US" sz="2800" b="1" dirty="0">
                 <a:solidFill>
                   <a:srgbClr val="1F2329"/>
                 </a:solidFill>
-                <a:latin typeface="微软雅黑" panose="020B0503020204020204" pitchFamily="34" charset="-122"/>
-                <a:ea typeface="微软雅黑" panose="020B0503020204020204" pitchFamily="34" charset="-122"/>
-                <a:cs typeface="微软雅黑" panose="020B0503020204020204" pitchFamily="34" charset="-120"/>
+                <a:latin typeface="微软雅黑" pitchFamily="34" charset="0"/>
+                <a:ea typeface="微软雅黑" pitchFamily="34" charset="-122"/>
+                <a:cs typeface="微软雅黑" pitchFamily="34" charset="-120"/>
               </a:rPr>
               <a:t>这节记这四条</a:t>
             </a:r>
-            <a:endParaRPr dirty="0" sz="2800" lang="en-US"/>
-          </a:p>
-        </p:txBody>
-      </p:sp>
-      <p:sp>
-        <p:nvSpPr>
-          <p:cNvPr id="1048718" name="Text 3"/>
+            <a:endParaRPr lang="en-US" sz="2800" dirty="0"/>
+          </a:p>
+        </p:txBody>
+      </p:sp>
+      <p:sp>
+        <p:nvSpPr>
+          <p:cNvPr id="5" name="Text 3"/>
           <p:cNvSpPr/>
           <p:nvPr/>
         </p:nvSpPr>
@@ -3626,44 +3847,54 @@
             <a:off x="896112" y="2395728"/>
             <a:ext cx="10454335" cy="397764"/>
           </a:xfrm>
-          <a:prstGeom prst="rect"/>
-          <a:noFill/>
-        </p:spPr>
-        <p:txBody>
-          <a:bodyPr anchor="t" rtlCol="0" wrap="square"/>
-          <a:p>
-            <a:pPr algn="l" indent="0" marL="0">
-              <a:lnSpc>
-                <a:spcPct val="115000"/>
-              </a:lnSpc>
-              <a:buNone/>
-            </a:pPr>
-            <a:r>
-              <a:rPr b="1" dirty="0" sz="1800" lang="en-US">
+          <a:prstGeom prst="rect">
+            <a:avLst/>
+          </a:prstGeom>
+          <a:noFill/>
+          <a:ln/>
+        </p:spPr>
+        <p:txBody>
+          <a:bodyPr wrap="square" rtlCol="0" anchor="t"/>
+          <a:lstStyle/>
+          <a:p>
+            <a:pPr algn="l" indent="0" marL="0">
+              <a:lnSpc>
+                <a:spcPct val="115000"/>
+              </a:lnSpc>
+              <a:buNone/>
+            </a:pPr>
+            <a:r>
+              <a:rPr lang="en-US" sz="1800" b="1" dirty="0">
                 <a:solidFill>
                   <a:srgbClr val="1F4E9C"/>
                 </a:solidFill>
-                <a:latin typeface="微软雅黑" panose="020B0503020204020204" pitchFamily="34" charset="-122"/>
-                <a:ea typeface="微软雅黑" panose="020B0503020204020204" pitchFamily="34" charset="-122"/>
-                <a:cs typeface="微软雅黑" panose="020B0503020204020204" pitchFamily="34" charset="-120"/>
+                <a:latin typeface="微软雅黑" pitchFamily="34" charset="0"/>
+                <a:ea typeface="微软雅黑" pitchFamily="34" charset="-122"/>
+                <a:cs typeface="微软雅黑" pitchFamily="34" charset="-120"/>
               </a:rPr>
               <a:t>•  </a:t>
             </a:r>
-            <a:r>
-              <a:rPr dirty="0" sz="1800" lang="en-US">
+            <a:pPr algn="l" indent="0" marL="0">
+              <a:lnSpc>
+                <a:spcPct val="115000"/>
+              </a:lnSpc>
+              <a:buNone/>
+            </a:pPr>
+            <a:r>
+              <a:rPr lang="en-US" sz="1800" dirty="0">
                 <a:solidFill>
                   <a:srgbClr val="000000"/>
                 </a:solidFill>
               </a:rPr>
               <a:t>整数除法丢小数；取余只能对整数用</a:t>
             </a:r>
-            <a:endParaRPr dirty="0" sz="1800" lang="en-US"/>
-          </a:p>
-        </p:txBody>
-      </p:sp>
-      <p:sp>
-        <p:nvSpPr>
-          <p:cNvPr id="1048719" name="Text 4"/>
+            <a:endParaRPr lang="en-US" sz="1800" dirty="0"/>
+          </a:p>
+        </p:txBody>
+      </p:sp>
+      <p:sp>
+        <p:nvSpPr>
+          <p:cNvPr id="6" name="Text 4"/>
           <p:cNvSpPr/>
           <p:nvPr/>
         </p:nvSpPr>
@@ -3672,44 +3903,54 @@
             <a:off x="896112" y="2866644"/>
             <a:ext cx="10454335" cy="397764"/>
           </a:xfrm>
-          <a:prstGeom prst="rect"/>
-          <a:noFill/>
-        </p:spPr>
-        <p:txBody>
-          <a:bodyPr anchor="t" rtlCol="0" wrap="square"/>
-          <a:p>
-            <a:pPr algn="l" indent="0" marL="0">
-              <a:lnSpc>
-                <a:spcPct val="115000"/>
-              </a:lnSpc>
-              <a:buNone/>
-            </a:pPr>
-            <a:r>
-              <a:rPr b="1" dirty="0" sz="1800" lang="en-US">
+          <a:prstGeom prst="rect">
+            <a:avLst/>
+          </a:prstGeom>
+          <a:noFill/>
+          <a:ln/>
+        </p:spPr>
+        <p:txBody>
+          <a:bodyPr wrap="square" rtlCol="0" anchor="t"/>
+          <a:lstStyle/>
+          <a:p>
+            <a:pPr algn="l" indent="0" marL="0">
+              <a:lnSpc>
+                <a:spcPct val="115000"/>
+              </a:lnSpc>
+              <a:buNone/>
+            </a:pPr>
+            <a:r>
+              <a:rPr lang="en-US" sz="1800" b="1" dirty="0">
                 <a:solidFill>
                   <a:srgbClr val="1F4E9C"/>
                 </a:solidFill>
-                <a:latin typeface="微软雅黑" panose="020B0503020204020204" pitchFamily="34" charset="-122"/>
-                <a:ea typeface="微软雅黑" panose="020B0503020204020204" pitchFamily="34" charset="-122"/>
-                <a:cs typeface="微软雅黑" panose="020B0503020204020204" pitchFamily="34" charset="-120"/>
+                <a:latin typeface="微软雅黑" pitchFamily="34" charset="0"/>
+                <a:ea typeface="微软雅黑" pitchFamily="34" charset="-122"/>
+                <a:cs typeface="微软雅黑" pitchFamily="34" charset="-120"/>
               </a:rPr>
               <a:t>•  </a:t>
             </a:r>
-            <a:r>
-              <a:rPr dirty="0" sz="1800" lang="en-US">
+            <a:pPr algn="l" indent="0" marL="0">
+              <a:lnSpc>
+                <a:spcPct val="115000"/>
+              </a:lnSpc>
+              <a:buNone/>
+            </a:pPr>
+            <a:r>
+              <a:rPr lang="en-US" sz="1800" dirty="0">
                 <a:solidFill>
                   <a:srgbClr val="000000"/>
                 </a:solidFill>
               </a:rPr>
               <a:t>x%2判奇偶，x%10取个位，焊死</a:t>
             </a:r>
-            <a:endParaRPr dirty="0" sz="1800" lang="en-US"/>
-          </a:p>
-        </p:txBody>
-      </p:sp>
-      <p:sp>
-        <p:nvSpPr>
-          <p:cNvPr id="1048720" name="Text 5"/>
+            <a:endParaRPr lang="en-US" sz="1800" dirty="0"/>
+          </a:p>
+        </p:txBody>
+      </p:sp>
+      <p:sp>
+        <p:nvSpPr>
+          <p:cNvPr id="7" name="Text 5"/>
           <p:cNvSpPr/>
           <p:nvPr/>
         </p:nvSpPr>
@@ -3718,44 +3959,54 @@
             <a:off x="896112" y="3337560"/>
             <a:ext cx="10454335" cy="397764"/>
           </a:xfrm>
-          <a:prstGeom prst="rect"/>
-          <a:noFill/>
-        </p:spPr>
-        <p:txBody>
-          <a:bodyPr anchor="t" rtlCol="0" wrap="square"/>
-          <a:p>
-            <a:pPr algn="l" indent="0" marL="0">
-              <a:lnSpc>
-                <a:spcPct val="115000"/>
-              </a:lnSpc>
-              <a:buNone/>
-            </a:pPr>
-            <a:r>
-              <a:rPr b="1" dirty="0" sz="1800" lang="en-US">
+          <a:prstGeom prst="rect">
+            <a:avLst/>
+          </a:prstGeom>
+          <a:noFill/>
+          <a:ln/>
+        </p:spPr>
+        <p:txBody>
+          <a:bodyPr wrap="square" rtlCol="0" anchor="t"/>
+          <a:lstStyle/>
+          <a:p>
+            <a:pPr algn="l" indent="0" marL="0">
+              <a:lnSpc>
+                <a:spcPct val="115000"/>
+              </a:lnSpc>
+              <a:buNone/>
+            </a:pPr>
+            <a:r>
+              <a:rPr lang="en-US" sz="1800" b="1" dirty="0">
                 <a:solidFill>
                   <a:srgbClr val="1F4E9C"/>
                 </a:solidFill>
-                <a:latin typeface="微软雅黑" panose="020B0503020204020204" pitchFamily="34" charset="-122"/>
-                <a:ea typeface="微软雅黑" panose="020B0503020204020204" pitchFamily="34" charset="-122"/>
-                <a:cs typeface="微软雅黑" panose="020B0503020204020204" pitchFamily="34" charset="-120"/>
+                <a:latin typeface="微软雅黑" pitchFamily="34" charset="0"/>
+                <a:ea typeface="微软雅黑" pitchFamily="34" charset="-122"/>
+                <a:cs typeface="微软雅黑" pitchFamily="34" charset="-120"/>
               </a:rPr>
               <a:t>•  </a:t>
             </a:r>
-            <a:r>
-              <a:rPr dirty="0" sz="1800" lang="en-US">
+            <a:pPr algn="l" indent="0" marL="0">
+              <a:lnSpc>
+                <a:spcPct val="115000"/>
+              </a:lnSpc>
+              <a:buNone/>
+            </a:pPr>
+            <a:r>
+              <a:rPr lang="en-US" sz="1800" dirty="0">
                 <a:solidFill>
                   <a:srgbClr val="000000"/>
                 </a:solidFill>
               </a:rPr>
               <a:t>一个=是动作，两个==是问题；范围判断不能连着写</a:t>
             </a:r>
-            <a:endParaRPr dirty="0" sz="1800" lang="en-US"/>
-          </a:p>
-        </p:txBody>
-      </p:sp>
-      <p:sp>
-        <p:nvSpPr>
-          <p:cNvPr id="1048721" name="Text 6"/>
+            <a:endParaRPr lang="en-US" sz="1800" dirty="0"/>
+          </a:p>
+        </p:txBody>
+      </p:sp>
+      <p:sp>
+        <p:nvSpPr>
+          <p:cNvPr id="8" name="Text 6"/>
           <p:cNvSpPr/>
           <p:nvPr/>
         </p:nvSpPr>
@@ -3764,44 +4015,54 @@
             <a:off x="896112" y="3808476"/>
             <a:ext cx="10454335" cy="397764"/>
           </a:xfrm>
-          <a:prstGeom prst="rect"/>
-          <a:noFill/>
-        </p:spPr>
-        <p:txBody>
-          <a:bodyPr anchor="t" rtlCol="0" wrap="square"/>
-          <a:p>
-            <a:pPr algn="l" indent="0" marL="0">
-              <a:lnSpc>
-                <a:spcPct val="115000"/>
-              </a:lnSpc>
-              <a:buNone/>
-            </a:pPr>
-            <a:r>
-              <a:rPr b="1" dirty="0" sz="1800" lang="en-US">
+          <a:prstGeom prst="rect">
+            <a:avLst/>
+          </a:prstGeom>
+          <a:noFill/>
+          <a:ln/>
+        </p:spPr>
+        <p:txBody>
+          <a:bodyPr wrap="square" rtlCol="0" anchor="t"/>
+          <a:lstStyle/>
+          <a:p>
+            <a:pPr algn="l" indent="0" marL="0">
+              <a:lnSpc>
+                <a:spcPct val="115000"/>
+              </a:lnSpc>
+              <a:buNone/>
+            </a:pPr>
+            <a:r>
+              <a:rPr lang="en-US" sz="1800" b="1" dirty="0">
                 <a:solidFill>
                   <a:srgbClr val="1F4E9C"/>
                 </a:solidFill>
-                <a:latin typeface="微软雅黑" panose="020B0503020204020204" pitchFamily="34" charset="-122"/>
-                <a:ea typeface="微软雅黑" panose="020B0503020204020204" pitchFamily="34" charset="-122"/>
-                <a:cs typeface="微软雅黑" panose="020B0503020204020204" pitchFamily="34" charset="-120"/>
+                <a:latin typeface="微软雅黑" pitchFamily="34" charset="0"/>
+                <a:ea typeface="微软雅黑" pitchFamily="34" charset="-122"/>
+                <a:cs typeface="微软雅黑" pitchFamily="34" charset="-120"/>
               </a:rPr>
               <a:t>•  </a:t>
             </a:r>
-            <a:r>
-              <a:rPr dirty="0" sz="1800" lang="en-US">
+            <a:pPr algn="l" indent="0" marL="0">
+              <a:lnSpc>
+                <a:spcPct val="115000"/>
+              </a:lnSpc>
+              <a:buNone/>
+            </a:pPr>
+            <a:r>
+              <a:rPr lang="en-US" sz="1800" dirty="0">
                 <a:solidFill>
                   <a:srgbClr val="000000"/>
                 </a:solidFill>
               </a:rPr>
               <a:t>优先级就一句：括号 &gt; 乘除取余 &gt; 加减</a:t>
             </a:r>
-            <a:endParaRPr dirty="0" sz="1800" lang="en-US"/>
-          </a:p>
-        </p:txBody>
-      </p:sp>
-      <p:sp>
-        <p:nvSpPr>
-          <p:cNvPr id="1048722" name="Text 7"/>
+            <a:endParaRPr lang="en-US" sz="1800" dirty="0"/>
+          </a:p>
+        </p:txBody>
+      </p:sp>
+      <p:sp>
+        <p:nvSpPr>
+          <p:cNvPr id="9" name="Text 7"/>
           <p:cNvSpPr/>
           <p:nvPr/>
         </p:nvSpPr>
@@ -3810,27 +4071,31 @@
             <a:off x="822960" y="4370832"/>
             <a:ext cx="10545775" cy="358902"/>
           </a:xfrm>
-          <a:prstGeom prst="rect"/>
-          <a:noFill/>
-        </p:spPr>
-        <p:txBody>
-          <a:bodyPr anchor="t" rtlCol="0" wrap="square"/>
-          <a:p>
-            <a:pPr algn="l" indent="0" marL="0">
-              <a:buNone/>
-            </a:pPr>
-            <a:r>
-              <a:rPr dirty="0" sz="1500" lang="en-US">
+          <a:prstGeom prst="rect">
+            <a:avLst/>
+          </a:prstGeom>
+          <a:noFill/>
+          <a:ln/>
+        </p:spPr>
+        <p:txBody>
+          <a:bodyPr wrap="square" rtlCol="0" anchor="t"/>
+          <a:lstStyle/>
+          <a:p>
+            <a:pPr algn="l" indent="0" marL="0">
+              <a:buNone/>
+            </a:pPr>
+            <a:r>
+              <a:rPr lang="en-US" sz="1500" dirty="0">
                 <a:solidFill>
                   <a:srgbClr val="8A9099"/>
                 </a:solidFill>
-                <a:latin typeface="微软雅黑" panose="020B0503020204020204" pitchFamily="34" charset="-122"/>
-                <a:ea typeface="微软雅黑" panose="020B0503020204020204" pitchFamily="34" charset="-122"/>
-                <a:cs typeface="微软雅黑" panose="020B0503020204020204" pitchFamily="34" charset="-120"/>
+                <a:latin typeface="微软雅黑" pitchFamily="34" charset="0"/>
+                <a:ea typeface="微软雅黑" pitchFamily="34" charset="-122"/>
+                <a:cs typeface="微软雅黑" pitchFamily="34" charset="-120"/>
               </a:rPr>
               <a:t>下一节：分支与循环，程序会自己做判断、自己重复</a:t>
             </a:r>
-            <a:endParaRPr dirty="0" sz="1500" lang="en-US"/>
+            <a:endParaRPr lang="en-US" sz="1500" dirty="0"/>
           </a:p>
         </p:txBody>
       </p:sp>
@@ -3844,11 +4109,11 @@
 
 <file path=ppt/slides/slide15.xml><?xml version="1.0" encoding="utf-8"?>
 <p:sld xmlns:a="http://schemas.openxmlformats.org/drawingml/2006/main" xmlns:r="http://schemas.openxmlformats.org/officeDocument/2006/relationships" xmlns:p="http://schemas.openxmlformats.org/presentationml/2006/main">
-  <p:cSld>
+  <p:cSld name="Slide 15">
     <p:bg>
       <p:bgPr>
-        <a:blipFill rotWithShape="1" dpi="0">
-          <a:blip xmlns:r="http://schemas.openxmlformats.org/officeDocument/2006/relationships" r:embed="rId1">
+        <a:blipFill dpi="0" rotWithShape="1">
+          <a:blip r:embed="rId1">
             <a:lum/>
           </a:blip>
           <a:srcRect/>
@@ -3861,7 +4126,7 @@
     </p:bg>
     <p:spTree>
       <p:nvGrpSpPr>
-        <p:cNvPr id="62" name=""/>
+        <p:cNvPr id="1" name=""/>
         <p:cNvGrpSpPr/>
         <p:nvPr/>
       </p:nvGrpSpPr>
@@ -3875,7 +4140,7 @@
       </p:grpSpPr>
       <p:sp>
         <p:nvSpPr>
-          <p:cNvPr id="1048726" name="Text 0"/>
+          <p:cNvPr id="2" name="Text 0"/>
           <p:cNvSpPr/>
           <p:nvPr/>
         </p:nvSpPr>
@@ -3884,33 +4149,37 @@
             <a:off x="10362895" y="6016752"/>
             <a:ext cx="1463040" cy="320040"/>
           </a:xfrm>
-          <a:prstGeom prst="rect"/>
-          <a:noFill/>
-        </p:spPr>
-        <p:txBody>
-          <a:bodyPr anchor="ctr" rtlCol="0" wrap="square"/>
+          <a:prstGeom prst="rect">
+            <a:avLst/>
+          </a:prstGeom>
+          <a:noFill/>
+          <a:ln/>
+        </p:spPr>
+        <p:txBody>
+          <a:bodyPr wrap="square" rtlCol="0" anchor="ctr"/>
+          <a:lstStyle/>
           <a:p>
             <a:pPr algn="r" indent="0" marL="0">
               <a:buNone/>
             </a:pPr>
             <a:r>
-              <a:rPr dirty="0" sz="1000" lang="en-US">
+              <a:rPr lang="en-US" sz="1000" dirty="0">
                 <a:solidFill>
                   <a:srgbClr val="8A9099"/>
                 </a:solidFill>
-                <a:latin typeface="微软雅黑" panose="020B0503020204020204" pitchFamily="34" charset="-122"/>
-                <a:ea typeface="微软雅黑" panose="020B0503020204020204" pitchFamily="34" charset="-122"/>
-                <a:cs typeface="微软雅黑" panose="020B0503020204020204" pitchFamily="34" charset="-120"/>
+                <a:latin typeface="微软雅黑" pitchFamily="34" charset="0"/>
+                <a:ea typeface="微软雅黑" pitchFamily="34" charset="-122"/>
+                <a:cs typeface="微软雅黑" pitchFamily="34" charset="-120"/>
               </a:rPr>
               <a:t>15 / 15</a:t>
             </a:r>
-            <a:endParaRPr dirty="0" sz="1000" lang="en-US"/>
-          </a:p>
-        </p:txBody>
-      </p:sp>
-      <p:sp>
-        <p:nvSpPr>
-          <p:cNvPr id="1048727" name="Text 1"/>
+            <a:endParaRPr lang="en-US" sz="1000" dirty="0"/>
+          </a:p>
+        </p:txBody>
+      </p:sp>
+      <p:sp>
+        <p:nvSpPr>
+          <p:cNvPr id="3" name="Text 1"/>
           <p:cNvSpPr/>
           <p:nvPr/>
         </p:nvSpPr>
@@ -3919,33 +4188,37 @@
             <a:off x="822960" y="960120"/>
             <a:ext cx="10545775" cy="365760"/>
           </a:xfrm>
-          <a:prstGeom prst="rect"/>
-          <a:noFill/>
-        </p:spPr>
-        <p:txBody>
-          <a:bodyPr anchor="ctr" rtlCol="0" wrap="square"/>
-          <a:p>
-            <a:pPr algn="l" indent="0" marL="0">
-              <a:buNone/>
-            </a:pPr>
-            <a:r>
-              <a:rPr b="1" dirty="0" sz="1400" lang="en-US">
+          <a:prstGeom prst="rect">
+            <a:avLst/>
+          </a:prstGeom>
+          <a:noFill/>
+          <a:ln/>
+        </p:spPr>
+        <p:txBody>
+          <a:bodyPr wrap="square" rtlCol="0" anchor="ctr"/>
+          <a:lstStyle/>
+          <a:p>
+            <a:pPr algn="l" indent="0" marL="0">
+              <a:buNone/>
+            </a:pPr>
+            <a:r>
+              <a:rPr lang="en-US" sz="1400" b="1" dirty="0">
                 <a:solidFill>
                   <a:srgbClr val="1F4E9C"/>
                 </a:solidFill>
-                <a:latin typeface="微软雅黑" panose="020B0503020204020204" pitchFamily="34" charset="-122"/>
-                <a:ea typeface="微软雅黑" panose="020B0503020204020204" pitchFamily="34" charset="-122"/>
-                <a:cs typeface="微软雅黑" panose="020B0503020204020204" pitchFamily="34" charset="-120"/>
+                <a:latin typeface="微软雅黑" pitchFamily="34" charset="0"/>
+                <a:ea typeface="微软雅黑" pitchFamily="34" charset="-122"/>
+                <a:cs typeface="微软雅黑" pitchFamily="34" charset="-120"/>
               </a:rPr>
               <a:t>课后任务</a:t>
             </a:r>
-            <a:endParaRPr dirty="0" sz="1400" lang="en-US"/>
-          </a:p>
-        </p:txBody>
-      </p:sp>
-      <p:sp>
-        <p:nvSpPr>
-          <p:cNvPr id="1048728" name="Text 2"/>
+            <a:endParaRPr lang="en-US" sz="1400" dirty="0"/>
+          </a:p>
+        </p:txBody>
+      </p:sp>
+      <p:sp>
+        <p:nvSpPr>
+          <p:cNvPr id="4" name="Text 2"/>
           <p:cNvSpPr/>
           <p:nvPr/>
         </p:nvSpPr>
@@ -3954,33 +4227,37 @@
             <a:off x="822960" y="1344168"/>
             <a:ext cx="10545775" cy="731520"/>
           </a:xfrm>
-          <a:prstGeom prst="rect"/>
-          <a:noFill/>
-        </p:spPr>
-        <p:txBody>
-          <a:bodyPr anchor="ctr" rtlCol="0" wrap="square"/>
-          <a:p>
-            <a:pPr algn="l" indent="0" marL="0">
-              <a:buNone/>
-            </a:pPr>
-            <a:r>
-              <a:rPr b="1" dirty="0" sz="2800" lang="en-US">
+          <a:prstGeom prst="rect">
+            <a:avLst/>
+          </a:prstGeom>
+          <a:noFill/>
+          <a:ln/>
+        </p:spPr>
+        <p:txBody>
+          <a:bodyPr wrap="square" rtlCol="0" anchor="ctr"/>
+          <a:lstStyle/>
+          <a:p>
+            <a:pPr algn="l" indent="0" marL="0">
+              <a:buNone/>
+            </a:pPr>
+            <a:r>
+              <a:rPr lang="en-US" sz="2800" b="1" dirty="0">
                 <a:solidFill>
                   <a:srgbClr val="1F2329"/>
                 </a:solidFill>
-                <a:latin typeface="微软雅黑" panose="020B0503020204020204" pitchFamily="34" charset="-122"/>
-                <a:ea typeface="微软雅黑" panose="020B0503020204020204" pitchFamily="34" charset="-122"/>
-                <a:cs typeface="微软雅黑" panose="020B0503020204020204" pitchFamily="34" charset="-120"/>
+                <a:latin typeface="微软雅黑" pitchFamily="34" charset="0"/>
+                <a:ea typeface="微软雅黑" pitchFamily="34" charset="-122"/>
+                <a:cs typeface="微软雅黑" pitchFamily="34" charset="-120"/>
               </a:rPr>
               <a:t>1道跟练 ＋ 1道模仿</a:t>
             </a:r>
-            <a:endParaRPr dirty="0" sz="2800" lang="en-US"/>
-          </a:p>
-        </p:txBody>
-      </p:sp>
-      <p:sp>
-        <p:nvSpPr>
-          <p:cNvPr id="1048729" name="Text 3"/>
+            <a:endParaRPr lang="en-US" sz="2800" dirty="0"/>
+          </a:p>
+        </p:txBody>
+      </p:sp>
+      <p:sp>
+        <p:nvSpPr>
+          <p:cNvPr id="5" name="Text 3"/>
           <p:cNvSpPr/>
           <p:nvPr/>
         </p:nvSpPr>
@@ -3989,52 +4266,68 @@
             <a:off x="896112" y="2395728"/>
             <a:ext cx="10454335" cy="740664"/>
           </a:xfrm>
-          <a:prstGeom prst="rect"/>
-          <a:noFill/>
-        </p:spPr>
-        <p:txBody>
-          <a:bodyPr anchor="t" rtlCol="0" wrap="square"/>
-          <a:p>
-            <a:pPr algn="l" indent="0" marL="0">
-              <a:lnSpc>
-                <a:spcPct val="115000"/>
-              </a:lnSpc>
-              <a:buNone/>
-            </a:pPr>
-            <a:r>
-              <a:rPr b="1" dirty="0" sz="1800" lang="en-US">
+          <a:prstGeom prst="rect">
+            <a:avLst/>
+          </a:prstGeom>
+          <a:noFill/>
+          <a:ln/>
+        </p:spPr>
+        <p:txBody>
+          <a:bodyPr wrap="square" rtlCol="0" anchor="t"/>
+          <a:lstStyle/>
+          <a:p>
+            <a:pPr algn="l" indent="0" marL="0">
+              <a:lnSpc>
+                <a:spcPct val="115000"/>
+              </a:lnSpc>
+              <a:buNone/>
+            </a:pPr>
+            <a:r>
+              <a:rPr lang="en-US" sz="1800" b="1" dirty="0">
                 <a:solidFill>
                   <a:srgbClr val="1F4E9C"/>
                 </a:solidFill>
-                <a:latin typeface="微软雅黑" panose="020B0503020204020204" pitchFamily="34" charset="-122"/>
-                <a:ea typeface="微软雅黑" panose="020B0503020204020204" pitchFamily="34" charset="-122"/>
-                <a:cs typeface="微软雅黑" panose="020B0503020204020204" pitchFamily="34" charset="-120"/>
+                <a:latin typeface="微软雅黑" pitchFamily="34" charset="0"/>
+                <a:ea typeface="微软雅黑" pitchFamily="34" charset="-122"/>
+                <a:cs typeface="微软雅黑" pitchFamily="34" charset="-120"/>
               </a:rPr>
               <a:t>•  </a:t>
             </a:r>
-            <a:r>
-              <a:rPr b="1" dirty="0" sz="1800" lang="en-US">
+            <a:pPr algn="l" indent="0" marL="0">
+              <a:lnSpc>
+                <a:spcPct val="115000"/>
+              </a:lnSpc>
+              <a:buNone/>
+            </a:pPr>
+            <a:r>
+              <a:rPr lang="en-US" sz="1800" b="1" dirty="0">
                 <a:solidFill>
                   <a:srgbClr val="000000"/>
                 </a:solidFill>
               </a:rPr>
               <a:t>跟练题</a:t>
             </a:r>
-            <a:r>
-              <a:rPr dirty="0" sz="1800" lang="en-US">
+            <a:pPr algn="l" indent="0" marL="0">
+              <a:lnSpc>
+                <a:spcPct val="115000"/>
+              </a:lnSpc>
+              <a:buNone/>
+            </a:pPr>
+            <a:r>
+              <a:rPr lang="en-US" sz="1800" dirty="0">
                 <a:solidFill>
                   <a:srgbClr val="000000"/>
                 </a:solidFill>
               </a:rPr>
               <a:t>：写一个程序，scanf读入一个整数，打印它的个位和十位（就是课上程序，自己从零敲一遍）</a:t>
             </a:r>
-            <a:endParaRPr dirty="0" sz="1800" lang="en-US"/>
-          </a:p>
-        </p:txBody>
-      </p:sp>
-      <p:sp>
-        <p:nvSpPr>
-          <p:cNvPr id="1048730" name="Text 4"/>
+            <a:endParaRPr lang="en-US" sz="1800" dirty="0"/>
+          </a:p>
+        </p:txBody>
+      </p:sp>
+      <p:sp>
+        <p:nvSpPr>
+          <p:cNvPr id="6" name="Text 4"/>
           <p:cNvSpPr/>
           <p:nvPr/>
         </p:nvSpPr>
@@ -4043,52 +4336,68 @@
             <a:off x="896112" y="3209544"/>
             <a:ext cx="10454335" cy="397764"/>
           </a:xfrm>
-          <a:prstGeom prst="rect"/>
-          <a:noFill/>
-        </p:spPr>
-        <p:txBody>
-          <a:bodyPr anchor="t" rtlCol="0" wrap="square"/>
-          <a:p>
-            <a:pPr algn="l" indent="0" marL="0">
-              <a:lnSpc>
-                <a:spcPct val="115000"/>
-              </a:lnSpc>
-              <a:buNone/>
-            </a:pPr>
-            <a:r>
-              <a:rPr b="1" dirty="0" sz="1800" lang="en-US">
+          <a:prstGeom prst="rect">
+            <a:avLst/>
+          </a:prstGeom>
+          <a:noFill/>
+          <a:ln/>
+        </p:spPr>
+        <p:txBody>
+          <a:bodyPr wrap="square" rtlCol="0" anchor="t"/>
+          <a:lstStyle/>
+          <a:p>
+            <a:pPr algn="l" indent="0" marL="0">
+              <a:lnSpc>
+                <a:spcPct val="115000"/>
+              </a:lnSpc>
+              <a:buNone/>
+            </a:pPr>
+            <a:r>
+              <a:rPr lang="en-US" sz="1800" b="1" dirty="0">
                 <a:solidFill>
                   <a:srgbClr val="1F4E9C"/>
                 </a:solidFill>
-                <a:latin typeface="微软雅黑" panose="020B0503020204020204" pitchFamily="34" charset="-122"/>
-                <a:ea typeface="微软雅黑" panose="020B0503020204020204" pitchFamily="34" charset="-122"/>
-                <a:cs typeface="微软雅黑" panose="020B0503020204020204" pitchFamily="34" charset="-120"/>
+                <a:latin typeface="微软雅黑" pitchFamily="34" charset="0"/>
+                <a:ea typeface="微软雅黑" pitchFamily="34" charset="-122"/>
+                <a:cs typeface="微软雅黑" pitchFamily="34" charset="-120"/>
               </a:rPr>
               <a:t>•  </a:t>
             </a:r>
-            <a:r>
-              <a:rPr b="1" dirty="0" sz="1800" lang="en-US">
+            <a:pPr algn="l" indent="0" marL="0">
+              <a:lnSpc>
+                <a:spcPct val="115000"/>
+              </a:lnSpc>
+              <a:buNone/>
+            </a:pPr>
+            <a:r>
+              <a:rPr lang="en-US" sz="1800" b="1" dirty="0">
                 <a:solidFill>
                   <a:srgbClr val="000000"/>
                 </a:solidFill>
               </a:rPr>
               <a:t>模仿题</a:t>
             </a:r>
-            <a:r>
-              <a:rPr dirty="0" sz="1800" lang="en-US">
+            <a:pPr algn="l" indent="0" marL="0">
+              <a:lnSpc>
+                <a:spcPct val="115000"/>
+              </a:lnSpc>
+              <a:buNone/>
+            </a:pPr>
+            <a:r>
+              <a:rPr lang="en-US" sz="1800" dirty="0">
                 <a:solidFill>
                   <a:srgbClr val="000000"/>
                 </a:solidFill>
               </a:rPr>
               <a:t>：读入一个整数n，打印 n%2 的值，输入奇数看输出什么，输入偶数看输出什么</a:t>
             </a:r>
-            <a:endParaRPr dirty="0" sz="1800" lang="en-US"/>
-          </a:p>
-        </p:txBody>
-      </p:sp>
-      <p:sp>
-        <p:nvSpPr>
-          <p:cNvPr id="1048731" name="Text 5"/>
+            <a:endParaRPr lang="en-US" sz="1800" dirty="0"/>
+          </a:p>
+        </p:txBody>
+      </p:sp>
+      <p:sp>
+        <p:nvSpPr>
+          <p:cNvPr id="7" name="Text 5"/>
           <p:cNvSpPr/>
           <p:nvPr/>
         </p:nvSpPr>
@@ -4097,27 +4406,31 @@
             <a:off x="822960" y="3771900"/>
             <a:ext cx="10545775" cy="358902"/>
           </a:xfrm>
-          <a:prstGeom prst="rect"/>
-          <a:noFill/>
-        </p:spPr>
-        <p:txBody>
-          <a:bodyPr anchor="t" rtlCol="0" wrap="square"/>
-          <a:p>
-            <a:pPr algn="l" indent="0" marL="0">
-              <a:buNone/>
-            </a:pPr>
-            <a:r>
-              <a:rPr dirty="0" sz="1500" lang="en-US">
+          <a:prstGeom prst="rect">
+            <a:avLst/>
+          </a:prstGeom>
+          <a:noFill/>
+          <a:ln/>
+        </p:spPr>
+        <p:txBody>
+          <a:bodyPr wrap="square" rtlCol="0" anchor="t"/>
+          <a:lstStyle/>
+          <a:p>
+            <a:pPr algn="l" indent="0" marL="0">
+              <a:buNone/>
+            </a:pPr>
+            <a:r>
+              <a:rPr lang="en-US" sz="1500" dirty="0">
                 <a:solidFill>
                   <a:srgbClr val="8A9099"/>
                 </a:solidFill>
-                <a:latin typeface="微软雅黑" panose="020B0503020204020204" pitchFamily="34" charset="-122"/>
-                <a:ea typeface="微软雅黑" panose="020B0503020204020204" pitchFamily="34" charset="-122"/>
-                <a:cs typeface="微软雅黑" panose="020B0503020204020204" pitchFamily="34" charset="-120"/>
+                <a:latin typeface="微软雅黑" pitchFamily="34" charset="0"/>
+                <a:ea typeface="微软雅黑" pitchFamily="34" charset="-122"/>
+                <a:cs typeface="微软雅黑" pitchFamily="34" charset="-120"/>
               </a:rPr>
               <a:t>写完对照讲稿附录的参考答案；要求：合上笔记能默写出%的两个用法</a:t>
             </a:r>
-            <a:endParaRPr dirty="0" sz="1500" lang="en-US"/>
+            <a:endParaRPr lang="en-US" sz="1500" dirty="0"/>
           </a:p>
         </p:txBody>
       </p:sp>
@@ -4131,11 +4444,11 @@
 
 <file path=ppt/slides/slide2.xml><?xml version="1.0" encoding="utf-8"?>
 <p:sld xmlns:a="http://schemas.openxmlformats.org/drawingml/2006/main" xmlns:r="http://schemas.openxmlformats.org/officeDocument/2006/relationships" xmlns:p="http://schemas.openxmlformats.org/presentationml/2006/main">
-  <p:cSld>
+  <p:cSld name="Slide 2">
     <p:bg>
       <p:bgPr>
-        <a:blipFill rotWithShape="1" dpi="0">
-          <a:blip xmlns:r="http://schemas.openxmlformats.org/officeDocument/2006/relationships" r:embed="rId1">
+        <a:blipFill dpi="0" rotWithShape="1">
+          <a:blip r:embed="rId1">
             <a:lum/>
           </a:blip>
           <a:srcRect/>
@@ -4148,7 +4461,7 @@
     </p:bg>
     <p:spTree>
       <p:nvGrpSpPr>
-        <p:cNvPr id="44" name=""/>
+        <p:cNvPr id="1" name=""/>
         <p:cNvGrpSpPr/>
         <p:nvPr/>
       </p:nvGrpSpPr>
@@ -4162,7 +4475,7 @@
       </p:grpSpPr>
       <p:sp>
         <p:nvSpPr>
-          <p:cNvPr id="1048660" name="Text 0"/>
+          <p:cNvPr id="2" name="Text 0"/>
           <p:cNvSpPr/>
           <p:nvPr/>
         </p:nvSpPr>
@@ -4171,33 +4484,37 @@
             <a:off x="10362895" y="6016752"/>
             <a:ext cx="1463040" cy="320040"/>
           </a:xfrm>
-          <a:prstGeom prst="rect"/>
-          <a:noFill/>
-        </p:spPr>
-        <p:txBody>
-          <a:bodyPr anchor="ctr" rtlCol="0" wrap="square"/>
+          <a:prstGeom prst="rect">
+            <a:avLst/>
+          </a:prstGeom>
+          <a:noFill/>
+          <a:ln/>
+        </p:spPr>
+        <p:txBody>
+          <a:bodyPr wrap="square" rtlCol="0" anchor="ctr"/>
+          <a:lstStyle/>
           <a:p>
             <a:pPr algn="r" indent="0" marL="0">
               <a:buNone/>
             </a:pPr>
             <a:r>
-              <a:rPr dirty="0" sz="1000" lang="en-US">
+              <a:rPr lang="en-US" sz="1000" dirty="0">
                 <a:solidFill>
                   <a:srgbClr val="8A9099"/>
                 </a:solidFill>
-                <a:latin typeface="微软雅黑" panose="020B0503020204020204" pitchFamily="34" charset="-122"/>
-                <a:ea typeface="微软雅黑" panose="020B0503020204020204" pitchFamily="34" charset="-122"/>
-                <a:cs typeface="微软雅黑" panose="020B0503020204020204" pitchFamily="34" charset="-120"/>
+                <a:latin typeface="微软雅黑" pitchFamily="34" charset="0"/>
+                <a:ea typeface="微软雅黑" pitchFamily="34" charset="-122"/>
+                <a:cs typeface="微软雅黑" pitchFamily="34" charset="-120"/>
               </a:rPr>
               <a:t>2 / 15</a:t>
             </a:r>
-            <a:endParaRPr dirty="0" sz="1000" lang="en-US"/>
-          </a:p>
-        </p:txBody>
-      </p:sp>
-      <p:sp>
-        <p:nvSpPr>
-          <p:cNvPr id="1048661" name="Shape 1"/>
+            <a:endParaRPr lang="en-US" sz="1000" dirty="0"/>
+          </a:p>
+        </p:txBody>
+      </p:sp>
+      <p:sp>
+        <p:nvSpPr>
+          <p:cNvPr id="3" name="Shape 1"/>
           <p:cNvSpPr/>
           <p:nvPr/>
         </p:nvSpPr>
@@ -4224,7 +4541,7 @@
       </p:sp>
       <p:sp>
         <p:nvSpPr>
-          <p:cNvPr id="1048662" name="Text 2"/>
+          <p:cNvPr id="4" name="Text 2"/>
           <p:cNvSpPr/>
           <p:nvPr/>
         </p:nvSpPr>
@@ -4233,33 +4550,37 @@
             <a:off x="9082735" y="960120"/>
             <a:ext cx="2286000" cy="457200"/>
           </a:xfrm>
-          <a:prstGeom prst="rect"/>
-          <a:noFill/>
-        </p:spPr>
-        <p:txBody>
-          <a:bodyPr anchor="ctr" rtlCol="0" wrap="square"/>
+          <a:prstGeom prst="rect">
+            <a:avLst/>
+          </a:prstGeom>
+          <a:noFill/>
+          <a:ln/>
+        </p:spPr>
+        <p:txBody>
+          <a:bodyPr wrap="square" rtlCol="0" anchor="ctr"/>
+          <a:lstStyle/>
           <a:p>
             <a:pPr algn="ctr" indent="0" marL="0">
               <a:buNone/>
             </a:pPr>
             <a:r>
-              <a:rPr b="1" dirty="0" sz="1300" lang="en-US">
+              <a:rPr lang="en-US" sz="1300" b="1" dirty="0">
                 <a:solidFill>
                   <a:srgbClr val="C0392B"/>
                 </a:solidFill>
-                <a:latin typeface="微软雅黑" panose="020B0503020204020204" pitchFamily="34" charset="-122"/>
-                <a:ea typeface="微软雅黑" panose="020B0503020204020204" pitchFamily="34" charset="-122"/>
-                <a:cs typeface="微软雅黑" panose="020B0503020204020204" pitchFamily="34" charset="-120"/>
+                <a:latin typeface="微软雅黑" pitchFamily="34" charset="0"/>
+                <a:ea typeface="微软雅黑" pitchFamily="34" charset="-122"/>
+                <a:cs typeface="微软雅黑" pitchFamily="34" charset="-120"/>
               </a:rPr>
               <a:t>第3节</a:t>
             </a:r>
-            <a:endParaRPr dirty="0" sz="1300" lang="en-US"/>
-          </a:p>
-        </p:txBody>
-      </p:sp>
-      <p:sp>
-        <p:nvSpPr>
-          <p:cNvPr id="1048663" name="Text 3"/>
+            <a:endParaRPr lang="en-US" sz="1300" dirty="0"/>
+          </a:p>
+        </p:txBody>
+      </p:sp>
+      <p:sp>
+        <p:nvSpPr>
+          <p:cNvPr id="5" name="Text 3"/>
           <p:cNvSpPr/>
           <p:nvPr/>
         </p:nvSpPr>
@@ -4268,33 +4589,37 @@
             <a:off x="822960" y="960120"/>
             <a:ext cx="10545775" cy="365760"/>
           </a:xfrm>
-          <a:prstGeom prst="rect"/>
-          <a:noFill/>
-        </p:spPr>
-        <p:txBody>
-          <a:bodyPr anchor="ctr" rtlCol="0" wrap="square"/>
-          <a:p>
-            <a:pPr algn="l" indent="0" marL="0">
-              <a:buNone/>
-            </a:pPr>
-            <a:r>
-              <a:rPr b="1" dirty="0" sz="1400" lang="en-US">
+          <a:prstGeom prst="rect">
+            <a:avLst/>
+          </a:prstGeom>
+          <a:noFill/>
+          <a:ln/>
+        </p:spPr>
+        <p:txBody>
+          <a:bodyPr wrap="square" rtlCol="0" anchor="ctr"/>
+          <a:lstStyle/>
+          <a:p>
+            <a:pPr algn="l" indent="0" marL="0">
+              <a:buNone/>
+            </a:pPr>
+            <a:r>
+              <a:rPr lang="en-US" sz="1400" b="1" dirty="0">
                 <a:solidFill>
                   <a:srgbClr val="1F4E9C"/>
                 </a:solidFill>
-                <a:latin typeface="微软雅黑" panose="020B0503020204020204" pitchFamily="34" charset="-122"/>
-                <a:ea typeface="微软雅黑" panose="020B0503020204020204" pitchFamily="34" charset="-122"/>
-                <a:cs typeface="微软雅黑" panose="020B0503020204020204" pitchFamily="34" charset="-120"/>
+                <a:latin typeface="微软雅黑" pitchFamily="34" charset="0"/>
+                <a:ea typeface="微软雅黑" pitchFamily="34" charset="-122"/>
+                <a:cs typeface="微软雅黑" pitchFamily="34" charset="-120"/>
               </a:rPr>
               <a:t>先看上一节写到哪</a:t>
             </a:r>
-            <a:endParaRPr dirty="0" sz="1400" lang="en-US"/>
-          </a:p>
-        </p:txBody>
-      </p:sp>
-      <p:sp>
-        <p:nvSpPr>
-          <p:cNvPr id="1048664" name="Text 4"/>
+            <a:endParaRPr lang="en-US" sz="1400" dirty="0"/>
+          </a:p>
+        </p:txBody>
+      </p:sp>
+      <p:sp>
+        <p:nvSpPr>
+          <p:cNvPr id="6" name="Text 4"/>
           <p:cNvSpPr/>
           <p:nvPr/>
         </p:nvSpPr>
@@ -4303,33 +4628,37 @@
             <a:off x="822960" y="1344168"/>
             <a:ext cx="10545775" cy="731520"/>
           </a:xfrm>
-          <a:prstGeom prst="rect"/>
-          <a:noFill/>
-        </p:spPr>
-        <p:txBody>
-          <a:bodyPr anchor="ctr" rtlCol="0" wrap="square"/>
-          <a:p>
-            <a:pPr algn="l" indent="0" marL="0">
-              <a:buNone/>
-            </a:pPr>
-            <a:r>
-              <a:rPr b="1" dirty="0" sz="2800" lang="en-US">
+          <a:prstGeom prst="rect">
+            <a:avLst/>
+          </a:prstGeom>
+          <a:noFill/>
+          <a:ln/>
+        </p:spPr>
+        <p:txBody>
+          <a:bodyPr wrap="square" rtlCol="0" anchor="ctr"/>
+          <a:lstStyle/>
+          <a:p>
+            <a:pPr algn="l" indent="0" marL="0">
+              <a:buNone/>
+            </a:pPr>
+            <a:r>
+              <a:rPr lang="en-US" sz="2800" b="1" dirty="0">
                 <a:solidFill>
                   <a:srgbClr val="1F2329"/>
                 </a:solidFill>
-                <a:latin typeface="微软雅黑" panose="020B0503020204020204" pitchFamily="34" charset="-122"/>
-                <a:ea typeface="微软雅黑" panose="020B0503020204020204" pitchFamily="34" charset="-122"/>
-                <a:cs typeface="微软雅黑" panose="020B0503020204020204" pitchFamily="34" charset="-120"/>
+                <a:latin typeface="微软雅黑" pitchFamily="34" charset="0"/>
+                <a:ea typeface="微软雅黑" pitchFamily="34" charset="-122"/>
+                <a:cs typeface="微软雅黑" pitchFamily="34" charset="-120"/>
               </a:rPr>
               <a:t>程序光会存，不会算</a:t>
             </a:r>
-            <a:endParaRPr dirty="0" sz="2800" lang="en-US"/>
-          </a:p>
-        </p:txBody>
-      </p:sp>
-      <p:sp>
-        <p:nvSpPr>
-          <p:cNvPr id="1048665" name="Shape 5"/>
+            <a:endParaRPr lang="en-US" sz="2800" dirty="0"/>
+          </a:p>
+        </p:txBody>
+      </p:sp>
+      <p:sp>
+        <p:nvSpPr>
+          <p:cNvPr id="7" name="Shape 5"/>
           <p:cNvSpPr/>
           <p:nvPr/>
         </p:nvSpPr>
@@ -4338,7 +4667,9 @@
             <a:off x="822960" y="2395728"/>
             <a:ext cx="10545775" cy="1271016"/>
           </a:xfrm>
-          <a:prstGeom prst="rect"/>
+          <a:prstGeom prst="rect">
+            <a:avLst/>
+          </a:prstGeom>
           <a:solidFill>
             <a:srgbClr val="F5F6F7"/>
           </a:solidFill>
@@ -4352,7 +4683,7 @@
       </p:sp>
       <p:sp>
         <p:nvSpPr>
-          <p:cNvPr id="1048666" name="Text 6"/>
+          <p:cNvPr id="8" name="Text 6"/>
           <p:cNvSpPr/>
           <p:nvPr/>
         </p:nvSpPr>
@@ -4361,11 +4692,15 @@
             <a:off x="1078992" y="2505456"/>
             <a:ext cx="10033711" cy="1051560"/>
           </a:xfrm>
-          <a:prstGeom prst="rect"/>
-          <a:noFill/>
-        </p:spPr>
-        <p:txBody>
-          <a:bodyPr anchor="t" rtlCol="0" wrap="square"/>
+          <a:prstGeom prst="rect">
+            <a:avLst/>
+          </a:prstGeom>
+          <a:noFill/>
+          <a:ln/>
+        </p:spPr>
+        <p:txBody>
+          <a:bodyPr wrap="square" rtlCol="0" anchor="t"/>
+          <a:lstStyle/>
           <a:p>
             <a:pPr algn="l" indent="0" marL="0">
               <a:lnSpc>
@@ -4374,26 +4709,26 @@
               <a:buNone/>
             </a:pPr>
             <a:r>
-              <a:rPr dirty="0" sz="1400" lang="en-US">
+              <a:rPr lang="en-US" sz="1400" dirty="0">
                 <a:solidFill>
                   <a:srgbClr val="1F2329"/>
                 </a:solidFill>
-                <a:latin typeface="Consolas" panose="020B0609020204030204" pitchFamily="34" charset="0"/>
-                <a:ea typeface="Consolas" panose="020B0609020204030204" pitchFamily="34" charset="-122"/>
-                <a:cs typeface="Consolas" panose="020B0609020204030204" pitchFamily="34" charset="-120"/>
+                <a:latin typeface="Consolas" pitchFamily="34" charset="0"/>
+                <a:ea typeface="Consolas" pitchFamily="34" charset="-122"/>
+                <a:cs typeface="Consolas" pitchFamily="34" charset="-120"/>
               </a:rPr>
               <a:t>int score;
 scanf("%d", &amp;score);      // 上一节：数据进来了
 printf("%d", score);      // 只能原样打出去
 </a:t>
             </a:r>
-            <a:endParaRPr dirty="0" sz="1400" lang="en-US"/>
-          </a:p>
-        </p:txBody>
-      </p:sp>
-      <p:sp>
-        <p:nvSpPr>
-          <p:cNvPr id="1048667" name="Text 7"/>
+            <a:endParaRPr lang="en-US" sz="1400" dirty="0"/>
+          </a:p>
+        </p:txBody>
+      </p:sp>
+      <p:sp>
+        <p:nvSpPr>
+          <p:cNvPr id="9" name="Text 7"/>
           <p:cNvSpPr/>
           <p:nvPr/>
         </p:nvSpPr>
@@ -4402,60 +4737,82 @@
             <a:off x="896112" y="3867912"/>
             <a:ext cx="10454335" cy="397764"/>
           </a:xfrm>
-          <a:prstGeom prst="rect"/>
-          <a:noFill/>
-        </p:spPr>
-        <p:txBody>
-          <a:bodyPr anchor="t" rtlCol="0" wrap="square"/>
-          <a:p>
-            <a:pPr algn="l" indent="0" marL="0">
-              <a:lnSpc>
-                <a:spcPct val="115000"/>
-              </a:lnSpc>
-              <a:buNone/>
-            </a:pPr>
-            <a:r>
-              <a:rPr b="1" dirty="0" sz="1800" lang="en-US">
+          <a:prstGeom prst="rect">
+            <a:avLst/>
+          </a:prstGeom>
+          <a:noFill/>
+          <a:ln/>
+        </p:spPr>
+        <p:txBody>
+          <a:bodyPr wrap="square" rtlCol="0" anchor="t"/>
+          <a:lstStyle/>
+          <a:p>
+            <a:pPr algn="l" indent="0" marL="0">
+              <a:lnSpc>
+                <a:spcPct val="115000"/>
+              </a:lnSpc>
+              <a:buNone/>
+            </a:pPr>
+            <a:r>
+              <a:rPr lang="en-US" sz="1800" b="1" dirty="0">
                 <a:solidFill>
                   <a:srgbClr val="1F4E9C"/>
                 </a:solidFill>
-                <a:latin typeface="微软雅黑" panose="020B0503020204020204" pitchFamily="34" charset="-122"/>
-                <a:ea typeface="微软雅黑" panose="020B0503020204020204" pitchFamily="34" charset="-122"/>
-                <a:cs typeface="微软雅黑" panose="020B0503020204020204" pitchFamily="34" charset="-120"/>
+                <a:latin typeface="微软雅黑" pitchFamily="34" charset="0"/>
+                <a:ea typeface="微软雅黑" pitchFamily="34" charset="-122"/>
+                <a:cs typeface="微软雅黑" pitchFamily="34" charset="-120"/>
               </a:rPr>
               <a:t>•  </a:t>
             </a:r>
-            <a:r>
-              <a:rPr dirty="0" sz="1800" lang="en-US">
+            <a:pPr algn="l" indent="0" marL="0">
+              <a:lnSpc>
+                <a:spcPct val="115000"/>
+              </a:lnSpc>
+              <a:buNone/>
+            </a:pPr>
+            <a:r>
+              <a:rPr lang="en-US" sz="1800" dirty="0">
                 <a:solidFill>
                   <a:srgbClr val="000000"/>
                 </a:solidFill>
               </a:rPr>
               <a:t>上一节的程序会存数据、会打印，但</a:t>
             </a:r>
-            <a:r>
-              <a:rPr b="1" dirty="0" sz="1800" lang="en-US">
+            <a:pPr algn="l" indent="0" marL="0">
+              <a:lnSpc>
+                <a:spcPct val="115000"/>
+              </a:lnSpc>
+              <a:buNone/>
+            </a:pPr>
+            <a:r>
+              <a:rPr lang="en-US" sz="1800" b="1" dirty="0">
                 <a:solidFill>
                   <a:srgbClr val="000000"/>
                 </a:solidFill>
               </a:rPr>
               <a:t>什么也算不了</a:t>
             </a:r>
-            <a:r>
-              <a:rPr dirty="0" sz="1800" lang="en-US">
+            <a:pPr algn="l" indent="0" marL="0">
+              <a:lnSpc>
+                <a:spcPct val="115000"/>
+              </a:lnSpc>
+              <a:buNone/>
+            </a:pPr>
+            <a:r>
+              <a:rPr lang="en-US" sz="1800" dirty="0">
                 <a:solidFill>
                   <a:srgbClr val="000000"/>
                 </a:solidFill>
               </a:rPr>
               <a:t>，就是个传声筒</a:t>
             </a:r>
-            <a:endParaRPr dirty="0" sz="1800" lang="en-US"/>
-          </a:p>
-        </p:txBody>
-      </p:sp>
-      <p:sp>
-        <p:nvSpPr>
-          <p:cNvPr id="1048668" name="Text 8"/>
+            <a:endParaRPr lang="en-US" sz="1800" dirty="0"/>
+          </a:p>
+        </p:txBody>
+      </p:sp>
+      <p:sp>
+        <p:nvSpPr>
+          <p:cNvPr id="10" name="Text 8"/>
           <p:cNvSpPr/>
           <p:nvPr/>
         </p:nvSpPr>
@@ -4464,44 +4821,54 @@
             <a:off x="896112" y="4338828"/>
             <a:ext cx="10454335" cy="397764"/>
           </a:xfrm>
-          <a:prstGeom prst="rect"/>
-          <a:noFill/>
-        </p:spPr>
-        <p:txBody>
-          <a:bodyPr anchor="t" rtlCol="0" wrap="square"/>
-          <a:p>
-            <a:pPr algn="l" indent="0" marL="0">
-              <a:lnSpc>
-                <a:spcPct val="115000"/>
-              </a:lnSpc>
-              <a:buNone/>
-            </a:pPr>
-            <a:r>
-              <a:rPr b="1" dirty="0" sz="1800" lang="en-US">
+          <a:prstGeom prst="rect">
+            <a:avLst/>
+          </a:prstGeom>
+          <a:noFill/>
+          <a:ln/>
+        </p:spPr>
+        <p:txBody>
+          <a:bodyPr wrap="square" rtlCol="0" anchor="t"/>
+          <a:lstStyle/>
+          <a:p>
+            <a:pPr algn="l" indent="0" marL="0">
+              <a:lnSpc>
+                <a:spcPct val="115000"/>
+              </a:lnSpc>
+              <a:buNone/>
+            </a:pPr>
+            <a:r>
+              <a:rPr lang="en-US" sz="1800" b="1" dirty="0">
                 <a:solidFill>
                   <a:srgbClr val="1F4E9C"/>
                 </a:solidFill>
-                <a:latin typeface="微软雅黑" panose="020B0503020204020204" pitchFamily="34" charset="-122"/>
-                <a:ea typeface="微软雅黑" panose="020B0503020204020204" pitchFamily="34" charset="-122"/>
-                <a:cs typeface="微软雅黑" panose="020B0503020204020204" pitchFamily="34" charset="-120"/>
+                <a:latin typeface="微软雅黑" pitchFamily="34" charset="0"/>
+                <a:ea typeface="微软雅黑" pitchFamily="34" charset="-122"/>
+                <a:cs typeface="微软雅黑" pitchFamily="34" charset="-120"/>
               </a:rPr>
               <a:t>•  </a:t>
             </a:r>
-            <a:r>
-              <a:rPr dirty="0" sz="1800" lang="en-US">
+            <a:pPr algn="l" indent="0" marL="0">
+              <a:lnSpc>
+                <a:spcPct val="115000"/>
+              </a:lnSpc>
+              <a:buNone/>
+            </a:pPr>
+            <a:r>
+              <a:rPr lang="en-US" sz="1800" dirty="0">
                 <a:solidFill>
                   <a:srgbClr val="000000"/>
                 </a:solidFill>
               </a:rPr>
-              <a:t>代码里到处是计算：判断奇偶、取个位、比较大小、数结点个数</a:t>
-            </a:r>
-            <a:endParaRPr dirty="0" sz="1800" lang="en-US"/>
-          </a:p>
-        </p:txBody>
-      </p:sp>
-      <p:sp>
-        <p:nvSpPr>
-          <p:cNvPr id="1048669" name="Text 9"/>
+              <a:t>802代码里到处是计算：判断奇偶、取个位、比较大小、数结点个数</a:t>
+            </a:r>
+            <a:endParaRPr lang="en-US" sz="1800" dirty="0"/>
+          </a:p>
+        </p:txBody>
+      </p:sp>
+      <p:sp>
+        <p:nvSpPr>
+          <p:cNvPr id="11" name="Text 9"/>
           <p:cNvSpPr/>
           <p:nvPr/>
         </p:nvSpPr>
@@ -4510,54 +4877,76 @@
             <a:off x="896112" y="4809744"/>
             <a:ext cx="10454335" cy="397764"/>
           </a:xfrm>
-          <a:prstGeom prst="rect"/>
-          <a:noFill/>
-        </p:spPr>
-        <p:txBody>
-          <a:bodyPr anchor="t" rtlCol="0" wrap="square"/>
-          <a:p>
-            <a:pPr algn="l" indent="0" marL="0">
-              <a:lnSpc>
-                <a:spcPct val="115000"/>
-              </a:lnSpc>
-              <a:buNone/>
-            </a:pPr>
-            <a:r>
-              <a:rPr b="1" dirty="0" sz="1800" lang="en-US">
+          <a:prstGeom prst="rect">
+            <a:avLst/>
+          </a:prstGeom>
+          <a:noFill/>
+          <a:ln/>
+        </p:spPr>
+        <p:txBody>
+          <a:bodyPr wrap="square" rtlCol="0" anchor="t"/>
+          <a:lstStyle/>
+          <a:p>
+            <a:pPr algn="l" indent="0" marL="0">
+              <a:lnSpc>
+                <a:spcPct val="115000"/>
+              </a:lnSpc>
+              <a:buNone/>
+            </a:pPr>
+            <a:r>
+              <a:rPr lang="en-US" sz="1800" b="1" dirty="0">
                 <a:solidFill>
                   <a:srgbClr val="1F4E9C"/>
                 </a:solidFill>
-                <a:latin typeface="微软雅黑" panose="020B0503020204020204" pitchFamily="34" charset="-122"/>
-                <a:ea typeface="微软雅黑" panose="020B0503020204020204" pitchFamily="34" charset="-122"/>
-                <a:cs typeface="微软雅黑" panose="020B0503020204020204" pitchFamily="34" charset="-120"/>
+                <a:latin typeface="微软雅黑" pitchFamily="34" charset="0"/>
+                <a:ea typeface="微软雅黑" pitchFamily="34" charset="-122"/>
+                <a:cs typeface="微软雅黑" pitchFamily="34" charset="-120"/>
               </a:rPr>
               <a:t>•  </a:t>
             </a:r>
-            <a:r>
-              <a:rPr dirty="0" sz="1800" lang="en-US">
+            <a:pPr algn="l" indent="0" marL="0">
+              <a:lnSpc>
+                <a:spcPct val="115000"/>
+              </a:lnSpc>
+              <a:buNone/>
+            </a:pPr>
+            <a:r>
+              <a:rPr lang="en-US" sz="1800" dirty="0">
                 <a:solidFill>
                   <a:srgbClr val="000000"/>
                 </a:solidFill>
               </a:rPr>
               <a:t>本节目标：学完你能用</a:t>
             </a:r>
-            <a:r>
-              <a:rPr b="1" dirty="0" sz="1800" lang="en-US">
+            <a:pPr algn="l" indent="0" marL="0">
+              <a:lnSpc>
+                <a:spcPct val="115000"/>
+              </a:lnSpc>
+              <a:buNone/>
+            </a:pPr>
+            <a:r>
+              <a:rPr lang="en-US" sz="1800" b="1" dirty="0">
                 <a:solidFill>
                   <a:srgbClr val="000000"/>
                 </a:solidFill>
               </a:rPr>
               <a:t>五类运算符</a:t>
             </a:r>
-            <a:r>
-              <a:rPr dirty="0" sz="1800" lang="en-US">
+            <a:pPr algn="l" indent="0" marL="0">
+              <a:lnSpc>
+                <a:spcPct val="115000"/>
+              </a:lnSpc>
+              <a:buNone/>
+            </a:pPr>
+            <a:r>
+              <a:rPr lang="en-US" sz="1800" dirty="0">
                 <a:solidFill>
                   <a:srgbClr val="000000"/>
                 </a:solidFill>
               </a:rPr>
               <a:t>让程序会算</a:t>
             </a:r>
-            <a:endParaRPr dirty="0" sz="1800" lang="en-US"/>
+            <a:endParaRPr lang="en-US" sz="1800" dirty="0"/>
           </a:p>
         </p:txBody>
       </p:sp>
@@ -4571,11 +4960,11 @@
 
 <file path=ppt/slides/slide3.xml><?xml version="1.0" encoding="utf-8"?>
 <p:sld xmlns:a="http://schemas.openxmlformats.org/drawingml/2006/main" xmlns:r="http://schemas.openxmlformats.org/officeDocument/2006/relationships" xmlns:p="http://schemas.openxmlformats.org/presentationml/2006/main">
-  <p:cSld>
+  <p:cSld name="Slide 3">
     <p:bg>
       <p:bgPr>
-        <a:blipFill rotWithShape="1" dpi="0">
-          <a:blip xmlns:r="http://schemas.openxmlformats.org/officeDocument/2006/relationships" r:embed="rId1">
+        <a:blipFill dpi="0" rotWithShape="1">
+          <a:blip r:embed="rId1">
             <a:lum/>
           </a:blip>
           <a:srcRect/>
@@ -4588,7 +4977,7 @@
     </p:bg>
     <p:spTree>
       <p:nvGrpSpPr>
-        <p:cNvPr id="47" name=""/>
+        <p:cNvPr id="1" name=""/>
         <p:cNvGrpSpPr/>
         <p:nvPr/>
       </p:nvGrpSpPr>
@@ -4602,7 +4991,7 @@
       </p:grpSpPr>
       <p:sp>
         <p:nvSpPr>
-          <p:cNvPr id="1048673" name="Text 0"/>
+          <p:cNvPr id="2" name="Text 0"/>
           <p:cNvSpPr/>
           <p:nvPr/>
         </p:nvSpPr>
@@ -4611,33 +5000,37 @@
             <a:off x="10362895" y="6016752"/>
             <a:ext cx="1463040" cy="320040"/>
           </a:xfrm>
-          <a:prstGeom prst="rect"/>
-          <a:noFill/>
-        </p:spPr>
-        <p:txBody>
-          <a:bodyPr anchor="ctr" rtlCol="0" wrap="square"/>
+          <a:prstGeom prst="rect">
+            <a:avLst/>
+          </a:prstGeom>
+          <a:noFill/>
+          <a:ln/>
+        </p:spPr>
+        <p:txBody>
+          <a:bodyPr wrap="square" rtlCol="0" anchor="ctr"/>
+          <a:lstStyle/>
           <a:p>
             <a:pPr algn="r" indent="0" marL="0">
               <a:buNone/>
             </a:pPr>
             <a:r>
-              <a:rPr dirty="0" sz="1000" lang="en-US">
+              <a:rPr lang="en-US" sz="1000" dirty="0">
                 <a:solidFill>
                   <a:srgbClr val="8A9099"/>
                 </a:solidFill>
-                <a:latin typeface="微软雅黑" panose="020B0503020204020204" pitchFamily="34" charset="-122"/>
-                <a:ea typeface="微软雅黑" panose="020B0503020204020204" pitchFamily="34" charset="-122"/>
-                <a:cs typeface="微软雅黑" panose="020B0503020204020204" pitchFamily="34" charset="-120"/>
+                <a:latin typeface="微软雅黑" pitchFamily="34" charset="0"/>
+                <a:ea typeface="微软雅黑" pitchFamily="34" charset="-122"/>
+                <a:cs typeface="微软雅黑" pitchFamily="34" charset="-120"/>
               </a:rPr>
               <a:t>3 / 15</a:t>
             </a:r>
-            <a:endParaRPr dirty="0" sz="1000" lang="en-US"/>
-          </a:p>
-        </p:txBody>
-      </p:sp>
-      <p:sp>
-        <p:nvSpPr>
-          <p:cNvPr id="1048674" name="Text 1"/>
+            <a:endParaRPr lang="en-US" sz="1000" dirty="0"/>
+          </a:p>
+        </p:txBody>
+      </p:sp>
+      <p:sp>
+        <p:nvSpPr>
+          <p:cNvPr id="3" name="Text 1"/>
           <p:cNvSpPr/>
           <p:nvPr/>
         </p:nvSpPr>
@@ -4646,33 +5039,37 @@
             <a:off x="822960" y="960120"/>
             <a:ext cx="10545775" cy="365760"/>
           </a:xfrm>
-          <a:prstGeom prst="rect"/>
-          <a:noFill/>
-        </p:spPr>
-        <p:txBody>
-          <a:bodyPr anchor="ctr" rtlCol="0" wrap="square"/>
-          <a:p>
-            <a:pPr algn="l" indent="0" marL="0">
-              <a:buNone/>
-            </a:pPr>
-            <a:r>
-              <a:rPr b="1" dirty="0" sz="1400" lang="en-US">
+          <a:prstGeom prst="rect">
+            <a:avLst/>
+          </a:prstGeom>
+          <a:noFill/>
+          <a:ln/>
+        </p:spPr>
+        <p:txBody>
+          <a:bodyPr wrap="square" rtlCol="0" anchor="ctr"/>
+          <a:lstStyle/>
+          <a:p>
+            <a:pPr algn="l" indent="0" marL="0">
+              <a:buNone/>
+            </a:pPr>
+            <a:r>
+              <a:rPr lang="en-US" sz="1400" b="1" dirty="0">
                 <a:solidFill>
                   <a:srgbClr val="1F4E9C"/>
                 </a:solidFill>
-                <a:latin typeface="微软雅黑" panose="020B0503020204020204" pitchFamily="34" charset="-122"/>
-                <a:ea typeface="微软雅黑" panose="020B0503020204020204" pitchFamily="34" charset="-122"/>
-                <a:cs typeface="微软雅黑" panose="020B0503020204020204" pitchFamily="34" charset="-120"/>
+                <a:latin typeface="微软雅黑" pitchFamily="34" charset="0"/>
+                <a:ea typeface="微软雅黑" pitchFamily="34" charset="-122"/>
+                <a:cs typeface="微软雅黑" pitchFamily="34" charset="-120"/>
               </a:rPr>
               <a:t>算术运算符</a:t>
             </a:r>
-            <a:endParaRPr dirty="0" sz="1400" lang="en-US"/>
-          </a:p>
-        </p:txBody>
-      </p:sp>
-      <p:sp>
-        <p:nvSpPr>
-          <p:cNvPr id="1048675" name="Text 2"/>
+            <a:endParaRPr lang="en-US" sz="1400" dirty="0"/>
+          </a:p>
+        </p:txBody>
+      </p:sp>
+      <p:sp>
+        <p:nvSpPr>
+          <p:cNvPr id="4" name="Text 2"/>
           <p:cNvSpPr/>
           <p:nvPr/>
         </p:nvSpPr>
@@ -4681,33 +5078,37 @@
             <a:off x="822960" y="1344168"/>
             <a:ext cx="10545775" cy="731520"/>
           </a:xfrm>
-          <a:prstGeom prst="rect"/>
-          <a:noFill/>
-        </p:spPr>
-        <p:txBody>
-          <a:bodyPr anchor="ctr" rtlCol="0" wrap="square"/>
-          <a:p>
-            <a:pPr algn="l" indent="0" marL="0">
-              <a:buNone/>
-            </a:pPr>
-            <a:r>
-              <a:rPr b="1" dirty="0" sz="2800" lang="en-US">
+          <a:prstGeom prst="rect">
+            <a:avLst/>
+          </a:prstGeom>
+          <a:noFill/>
+          <a:ln/>
+        </p:spPr>
+        <p:txBody>
+          <a:bodyPr wrap="square" rtlCol="0" anchor="ctr"/>
+          <a:lstStyle/>
+          <a:p>
+            <a:pPr algn="l" indent="0" marL="0">
+              <a:buNone/>
+            </a:pPr>
+            <a:r>
+              <a:rPr lang="en-US" sz="2800" b="1" dirty="0">
                 <a:solidFill>
                   <a:srgbClr val="1F2329"/>
                 </a:solidFill>
-                <a:latin typeface="微软雅黑" panose="020B0503020204020204" pitchFamily="34" charset="-122"/>
-                <a:ea typeface="微软雅黑" panose="020B0503020204020204" pitchFamily="34" charset="-122"/>
-                <a:cs typeface="微软雅黑" panose="020B0503020204020204" pitchFamily="34" charset="-120"/>
+                <a:latin typeface="微软雅黑" pitchFamily="34" charset="0"/>
+                <a:ea typeface="微软雅黑" pitchFamily="34" charset="-122"/>
+                <a:cs typeface="微软雅黑" pitchFamily="34" charset="-120"/>
               </a:rPr>
               <a:t>加减乘除，除法有两个坑</a:t>
             </a:r>
-            <a:endParaRPr dirty="0" sz="2800" lang="en-US"/>
-          </a:p>
-        </p:txBody>
-      </p:sp>
-      <p:sp>
-        <p:nvSpPr>
-          <p:cNvPr id="1048676" name="Shape 3"/>
+            <a:endParaRPr lang="en-US" sz="2800" dirty="0"/>
+          </a:p>
+        </p:txBody>
+      </p:sp>
+      <p:sp>
+        <p:nvSpPr>
+          <p:cNvPr id="5" name="Shape 3"/>
           <p:cNvSpPr/>
           <p:nvPr/>
         </p:nvSpPr>
@@ -4716,7 +5117,9 @@
             <a:off x="822960" y="2395728"/>
             <a:ext cx="10545775" cy="1508760"/>
           </a:xfrm>
-          <a:prstGeom prst="rect"/>
+          <a:prstGeom prst="rect">
+            <a:avLst/>
+          </a:prstGeom>
           <a:solidFill>
             <a:srgbClr val="F5F6F7"/>
           </a:solidFill>
@@ -4730,7 +5133,7 @@
       </p:sp>
       <p:sp>
         <p:nvSpPr>
-          <p:cNvPr id="1048677" name="Text 4"/>
+          <p:cNvPr id="6" name="Text 4"/>
           <p:cNvSpPr/>
           <p:nvPr/>
         </p:nvSpPr>
@@ -4739,11 +5142,15 @@
             <a:off x="1078992" y="2505456"/>
             <a:ext cx="10033711" cy="1289304"/>
           </a:xfrm>
-          <a:prstGeom prst="rect"/>
-          <a:noFill/>
-        </p:spPr>
-        <p:txBody>
-          <a:bodyPr anchor="t" rtlCol="0" wrap="square"/>
+          <a:prstGeom prst="rect">
+            <a:avLst/>
+          </a:prstGeom>
+          <a:noFill/>
+          <a:ln/>
+        </p:spPr>
+        <p:txBody>
+          <a:bodyPr wrap="square" rtlCol="0" anchor="t"/>
+          <a:lstStyle/>
           <a:p>
             <a:pPr algn="l" indent="0" marL="0">
               <a:lnSpc>
@@ -4752,13 +5159,13 @@
               <a:buNone/>
             </a:pPr>
             <a:r>
-              <a:rPr dirty="0" sz="1400" lang="en-US">
+              <a:rPr lang="en-US" sz="1400" dirty="0">
                 <a:solidFill>
                   <a:srgbClr val="1F2329"/>
                 </a:solidFill>
-                <a:latin typeface="Consolas" panose="020B0609020204030204" pitchFamily="34" charset="0"/>
-                <a:ea typeface="Consolas" panose="020B0609020204030204" pitchFamily="34" charset="-122"/>
-                <a:cs typeface="Consolas" panose="020B0609020204030204" pitchFamily="34" charset="-120"/>
+                <a:latin typeface="Consolas" pitchFamily="34" charset="0"/>
+                <a:ea typeface="Consolas" pitchFamily="34" charset="-122"/>
+                <a:cs typeface="Consolas" pitchFamily="34" charset="-120"/>
               </a:rPr>
               <a:t>a + b      a - b      a * b
 a / b                  // 整数除法：9 / 2 等于 4，不是 4.5
@@ -4766,13 +5173,13 @@
 a % b                  // 取余：9 % 2 等于 1
 </a:t>
             </a:r>
-            <a:endParaRPr dirty="0" sz="1400" lang="en-US"/>
-          </a:p>
-        </p:txBody>
-      </p:sp>
-      <p:sp>
-        <p:nvSpPr>
-          <p:cNvPr id="1048678" name="Text 5"/>
+            <a:endParaRPr lang="en-US" sz="1400" dirty="0"/>
+          </a:p>
+        </p:txBody>
+      </p:sp>
+      <p:sp>
+        <p:nvSpPr>
+          <p:cNvPr id="7" name="Text 5"/>
           <p:cNvSpPr/>
           <p:nvPr/>
         </p:nvSpPr>
@@ -4781,60 +5188,82 @@
             <a:off x="896112" y="4105656"/>
             <a:ext cx="10454335" cy="397764"/>
           </a:xfrm>
-          <a:prstGeom prst="rect"/>
-          <a:noFill/>
-        </p:spPr>
-        <p:txBody>
-          <a:bodyPr anchor="t" rtlCol="0" wrap="square"/>
-          <a:p>
-            <a:pPr algn="l" indent="0" marL="0">
-              <a:lnSpc>
-                <a:spcPct val="115000"/>
-              </a:lnSpc>
-              <a:buNone/>
-            </a:pPr>
-            <a:r>
-              <a:rPr b="1" dirty="0" sz="1800" lang="en-US">
+          <a:prstGeom prst="rect">
+            <a:avLst/>
+          </a:prstGeom>
+          <a:noFill/>
+          <a:ln/>
+        </p:spPr>
+        <p:txBody>
+          <a:bodyPr wrap="square" rtlCol="0" anchor="t"/>
+          <a:lstStyle/>
+          <a:p>
+            <a:pPr algn="l" indent="0" marL="0">
+              <a:lnSpc>
+                <a:spcPct val="115000"/>
+              </a:lnSpc>
+              <a:buNone/>
+            </a:pPr>
+            <a:r>
+              <a:rPr lang="en-US" sz="1800" b="1" dirty="0">
                 <a:solidFill>
                   <a:srgbClr val="1F4E9C"/>
                 </a:solidFill>
-                <a:latin typeface="微软雅黑" panose="020B0503020204020204" pitchFamily="34" charset="-122"/>
-                <a:ea typeface="微软雅黑" panose="020B0503020204020204" pitchFamily="34" charset="-122"/>
-                <a:cs typeface="微软雅黑" panose="020B0503020204020204" pitchFamily="34" charset="-120"/>
+                <a:latin typeface="微软雅黑" pitchFamily="34" charset="0"/>
+                <a:ea typeface="微软雅黑" pitchFamily="34" charset="-122"/>
+                <a:cs typeface="微软雅黑" pitchFamily="34" charset="-120"/>
               </a:rPr>
               <a:t>•  </a:t>
             </a:r>
-            <a:r>
-              <a:rPr dirty="0" sz="1800" lang="en-US">
+            <a:pPr algn="l" indent="0" marL="0">
+              <a:lnSpc>
+                <a:spcPct val="115000"/>
+              </a:lnSpc>
+              <a:buNone/>
+            </a:pPr>
+            <a:r>
+              <a:rPr lang="en-US" sz="1800" dirty="0">
                 <a:solidFill>
                   <a:srgbClr val="000000"/>
                 </a:solidFill>
               </a:rPr>
               <a:t>乘号是 *，不是 ×；</a:t>
             </a:r>
-            <a:r>
-              <a:rPr b="1" dirty="0" sz="1800" lang="en-US">
+            <a:pPr algn="l" indent="0" marL="0">
+              <a:lnSpc>
+                <a:spcPct val="115000"/>
+              </a:lnSpc>
+              <a:buNone/>
+            </a:pPr>
+            <a:r>
+              <a:rPr lang="en-US" sz="1800" b="1" dirty="0">
                 <a:solidFill>
                   <a:srgbClr val="000000"/>
                 </a:solidFill>
               </a:rPr>
               <a:t>整数除以整数，结果还是整数</a:t>
             </a:r>
-            <a:r>
-              <a:rPr dirty="0" sz="1800" lang="en-US">
+            <a:pPr algn="l" indent="0" marL="0">
+              <a:lnSpc>
+                <a:spcPct val="115000"/>
+              </a:lnSpc>
+              <a:buNone/>
+            </a:pPr>
+            <a:r>
+              <a:rPr lang="en-US" sz="1800" dirty="0">
                 <a:solidFill>
                   <a:srgbClr val="000000"/>
                 </a:solidFill>
               </a:rPr>
               <a:t>，小数部分直接扔掉</a:t>
             </a:r>
-            <a:endParaRPr dirty="0" sz="1800" lang="en-US"/>
-          </a:p>
-        </p:txBody>
-      </p:sp>
-      <p:sp>
-        <p:nvSpPr>
-          <p:cNvPr id="1048679" name="Text 6"/>
+            <a:endParaRPr lang="en-US" sz="1800" dirty="0"/>
+          </a:p>
+        </p:txBody>
+      </p:sp>
+      <p:sp>
+        <p:nvSpPr>
+          <p:cNvPr id="8" name="Text 6"/>
           <p:cNvSpPr/>
           <p:nvPr/>
         </p:nvSpPr>
@@ -4843,44 +5272,54 @@
             <a:off x="896112" y="4576572"/>
             <a:ext cx="10454335" cy="397764"/>
           </a:xfrm>
-          <a:prstGeom prst="rect"/>
-          <a:noFill/>
-        </p:spPr>
-        <p:txBody>
-          <a:bodyPr anchor="t" rtlCol="0" wrap="square"/>
-          <a:p>
-            <a:pPr algn="l" indent="0" marL="0">
-              <a:lnSpc>
-                <a:spcPct val="115000"/>
-              </a:lnSpc>
-              <a:buNone/>
-            </a:pPr>
-            <a:r>
-              <a:rPr b="1" dirty="0" sz="1800" lang="en-US">
+          <a:prstGeom prst="rect">
+            <a:avLst/>
+          </a:prstGeom>
+          <a:noFill/>
+          <a:ln/>
+        </p:spPr>
+        <p:txBody>
+          <a:bodyPr wrap="square" rtlCol="0" anchor="t"/>
+          <a:lstStyle/>
+          <a:p>
+            <a:pPr algn="l" indent="0" marL="0">
+              <a:lnSpc>
+                <a:spcPct val="115000"/>
+              </a:lnSpc>
+              <a:buNone/>
+            </a:pPr>
+            <a:r>
+              <a:rPr lang="en-US" sz="1800" b="1" dirty="0">
                 <a:solidFill>
                   <a:srgbClr val="1F4E9C"/>
                 </a:solidFill>
-                <a:latin typeface="微软雅黑" panose="020B0503020204020204" pitchFamily="34" charset="-122"/>
-                <a:ea typeface="微软雅黑" panose="020B0503020204020204" pitchFamily="34" charset="-122"/>
-                <a:cs typeface="微软雅黑" panose="020B0503020204020204" pitchFamily="34" charset="-120"/>
+                <a:latin typeface="微软雅黑" pitchFamily="34" charset="0"/>
+                <a:ea typeface="微软雅黑" pitchFamily="34" charset="-122"/>
+                <a:cs typeface="微软雅黑" pitchFamily="34" charset="-120"/>
               </a:rPr>
               <a:t>•  </a:t>
             </a:r>
-            <a:r>
-              <a:rPr dirty="0" sz="1800" lang="en-US">
+            <a:pPr algn="l" indent="0" marL="0">
+              <a:lnSpc>
+                <a:spcPct val="115000"/>
+              </a:lnSpc>
+              <a:buNone/>
+            </a:pPr>
+            <a:r>
+              <a:rPr lang="en-US" sz="1800" dirty="0">
                 <a:solidFill>
                   <a:srgbClr val="000000"/>
                 </a:solidFill>
               </a:rPr>
               <a:t>想让除法出小数：两边只要有一个小数，结果就是小数</a:t>
             </a:r>
-            <a:endParaRPr dirty="0" sz="1800" lang="en-US"/>
-          </a:p>
-        </p:txBody>
-      </p:sp>
-      <p:sp>
-        <p:nvSpPr>
-          <p:cNvPr id="1048680" name="Text 7"/>
+            <a:endParaRPr lang="en-US" sz="1800" dirty="0"/>
+          </a:p>
+        </p:txBody>
+      </p:sp>
+      <p:sp>
+        <p:nvSpPr>
+          <p:cNvPr id="9" name="Text 7"/>
           <p:cNvSpPr/>
           <p:nvPr/>
         </p:nvSpPr>
@@ -4889,38 +5328,48 @@
             <a:off x="896112" y="5047488"/>
             <a:ext cx="10454335" cy="397764"/>
           </a:xfrm>
-          <a:prstGeom prst="rect"/>
-          <a:noFill/>
-        </p:spPr>
-        <p:txBody>
-          <a:bodyPr anchor="t" rtlCol="0" wrap="square"/>
-          <a:p>
-            <a:pPr algn="l" indent="0" marL="0">
-              <a:lnSpc>
-                <a:spcPct val="115000"/>
-              </a:lnSpc>
-              <a:buNone/>
-            </a:pPr>
-            <a:r>
-              <a:rPr b="1" dirty="0" sz="1800" lang="en-US">
+          <a:prstGeom prst="rect">
+            <a:avLst/>
+          </a:prstGeom>
+          <a:noFill/>
+          <a:ln/>
+        </p:spPr>
+        <p:txBody>
+          <a:bodyPr wrap="square" rtlCol="0" anchor="t"/>
+          <a:lstStyle/>
+          <a:p>
+            <a:pPr algn="l" indent="0" marL="0">
+              <a:lnSpc>
+                <a:spcPct val="115000"/>
+              </a:lnSpc>
+              <a:buNone/>
+            </a:pPr>
+            <a:r>
+              <a:rPr lang="en-US" sz="1800" b="1" dirty="0">
                 <a:solidFill>
                   <a:srgbClr val="1F4E9C"/>
                 </a:solidFill>
-                <a:latin typeface="微软雅黑" panose="020B0503020204020204" pitchFamily="34" charset="-122"/>
-                <a:ea typeface="微软雅黑" panose="020B0503020204020204" pitchFamily="34" charset="-122"/>
-                <a:cs typeface="微软雅黑" panose="020B0503020204020204" pitchFamily="34" charset="-120"/>
+                <a:latin typeface="微软雅黑" pitchFamily="34" charset="0"/>
+                <a:ea typeface="微软雅黑" pitchFamily="34" charset="-122"/>
+                <a:cs typeface="微软雅黑" pitchFamily="34" charset="-120"/>
               </a:rPr>
               <a:t>•  </a:t>
             </a:r>
-            <a:r>
-              <a:rPr dirty="0" sz="1800" lang="en-US">
+            <a:pPr algn="l" indent="0" marL="0">
+              <a:lnSpc>
+                <a:spcPct val="115000"/>
+              </a:lnSpc>
+              <a:buNone/>
+            </a:pPr>
+            <a:r>
+              <a:rPr lang="en-US" sz="1800" dirty="0">
                 <a:solidFill>
                   <a:srgbClr val="000000"/>
                 </a:solidFill>
               </a:rPr>
               <a:t>%是取余数：9除以2商4余1，所以 9 % 2 得 1</a:t>
             </a:r>
-            <a:endParaRPr dirty="0" sz="1800" lang="en-US"/>
+            <a:endParaRPr lang="en-US" sz="1800" dirty="0"/>
           </a:p>
         </p:txBody>
       </p:sp>
@@ -4934,11 +5383,11 @@
 
 <file path=ppt/slides/slide4.xml><?xml version="1.0" encoding="utf-8"?>
 <p:sld xmlns:a="http://schemas.openxmlformats.org/drawingml/2006/main" xmlns:r="http://schemas.openxmlformats.org/officeDocument/2006/relationships" xmlns:p="http://schemas.openxmlformats.org/presentationml/2006/main">
-  <p:cSld>
+  <p:cSld name="Slide 4">
     <p:bg>
       <p:bgPr>
-        <a:blipFill rotWithShape="1" dpi="0">
-          <a:blip xmlns:r="http://schemas.openxmlformats.org/officeDocument/2006/relationships" r:embed="rId1">
+        <a:blipFill dpi="0" rotWithShape="1">
+          <a:blip r:embed="rId1">
             <a:lum/>
           </a:blip>
           <a:srcRect/>
@@ -4951,7 +5400,7 @@
     </p:bg>
     <p:spTree>
       <p:nvGrpSpPr>
-        <p:cNvPr id="50" name=""/>
+        <p:cNvPr id="1" name=""/>
         <p:cNvGrpSpPr/>
         <p:nvPr/>
       </p:nvGrpSpPr>
@@ -4965,7 +5414,7 @@
       </p:grpSpPr>
       <p:sp>
         <p:nvSpPr>
-          <p:cNvPr id="1048684" name="Text 0"/>
+          <p:cNvPr id="2" name="Text 0"/>
           <p:cNvSpPr/>
           <p:nvPr/>
         </p:nvSpPr>
@@ -4974,33 +5423,37 @@
             <a:off x="10362895" y="6016752"/>
             <a:ext cx="1463040" cy="320040"/>
           </a:xfrm>
-          <a:prstGeom prst="rect"/>
-          <a:noFill/>
-        </p:spPr>
-        <p:txBody>
-          <a:bodyPr anchor="ctr" rtlCol="0" wrap="square"/>
+          <a:prstGeom prst="rect">
+            <a:avLst/>
+          </a:prstGeom>
+          <a:noFill/>
+          <a:ln/>
+        </p:spPr>
+        <p:txBody>
+          <a:bodyPr wrap="square" rtlCol="0" anchor="ctr"/>
+          <a:lstStyle/>
           <a:p>
             <a:pPr algn="r" indent="0" marL="0">
               <a:buNone/>
             </a:pPr>
             <a:r>
-              <a:rPr dirty="0" sz="1000" lang="en-US">
+              <a:rPr lang="en-US" sz="1000" dirty="0">
                 <a:solidFill>
                   <a:srgbClr val="8A9099"/>
                 </a:solidFill>
-                <a:latin typeface="微软雅黑" panose="020B0503020204020204" pitchFamily="34" charset="-122"/>
-                <a:ea typeface="微软雅黑" panose="020B0503020204020204" pitchFamily="34" charset="-122"/>
-                <a:cs typeface="微软雅黑" panose="020B0503020204020204" pitchFamily="34" charset="-120"/>
+                <a:latin typeface="微软雅黑" pitchFamily="34" charset="0"/>
+                <a:ea typeface="微软雅黑" pitchFamily="34" charset="-122"/>
+                <a:cs typeface="微软雅黑" pitchFamily="34" charset="-120"/>
               </a:rPr>
               <a:t>4 / 15</a:t>
             </a:r>
-            <a:endParaRPr dirty="0" sz="1000" lang="en-US"/>
-          </a:p>
-        </p:txBody>
-      </p:sp>
-      <p:sp>
-        <p:nvSpPr>
-          <p:cNvPr id="1048685" name="Text 1"/>
+            <a:endParaRPr lang="en-US" sz="1000" dirty="0"/>
+          </a:p>
+        </p:txBody>
+      </p:sp>
+      <p:sp>
+        <p:nvSpPr>
+          <p:cNvPr id="3" name="Text 1"/>
           <p:cNvSpPr/>
           <p:nvPr/>
         </p:nvSpPr>
@@ -5009,33 +5462,37 @@
             <a:off x="822960" y="960120"/>
             <a:ext cx="10545775" cy="365760"/>
           </a:xfrm>
-          <a:prstGeom prst="rect"/>
-          <a:noFill/>
-        </p:spPr>
-        <p:txBody>
-          <a:bodyPr anchor="ctr" rtlCol="0" wrap="square"/>
-          <a:p>
-            <a:pPr algn="l" indent="0" marL="0">
-              <a:buNone/>
-            </a:pPr>
-            <a:r>
-              <a:rPr b="1" dirty="0" sz="1400" lang="en-US">
+          <a:prstGeom prst="rect">
+            <a:avLst/>
+          </a:prstGeom>
+          <a:noFill/>
+          <a:ln/>
+        </p:spPr>
+        <p:txBody>
+          <a:bodyPr wrap="square" rtlCol="0" anchor="ctr"/>
+          <a:lstStyle/>
+          <a:p>
+            <a:pPr algn="l" indent="0" marL="0">
+              <a:buNone/>
+            </a:pPr>
+            <a:r>
+              <a:rPr lang="en-US" sz="1400" b="1" dirty="0">
                 <a:solidFill>
                   <a:srgbClr val="1F4E9C"/>
                 </a:solidFill>
-                <a:latin typeface="微软雅黑" panose="020B0503020204020204" pitchFamily="34" charset="-122"/>
-                <a:ea typeface="微软雅黑" panose="020B0503020204020204" pitchFamily="34" charset="-122"/>
-                <a:cs typeface="微软雅黑" panose="020B0503020204020204" pitchFamily="34" charset="-120"/>
+                <a:latin typeface="微软雅黑" pitchFamily="34" charset="0"/>
+                <a:ea typeface="微软雅黑" pitchFamily="34" charset="-122"/>
+                <a:cs typeface="微软雅黑" pitchFamily="34" charset="-120"/>
               </a:rPr>
               <a:t>取余的两个用途</a:t>
             </a:r>
-            <a:endParaRPr dirty="0" sz="1400" lang="en-US"/>
-          </a:p>
-        </p:txBody>
-      </p:sp>
-      <p:sp>
-        <p:nvSpPr>
-          <p:cNvPr id="1048686" name="Text 2"/>
+            <a:endParaRPr lang="en-US" sz="1400" dirty="0"/>
+          </a:p>
+        </p:txBody>
+      </p:sp>
+      <p:sp>
+        <p:nvSpPr>
+          <p:cNvPr id="4" name="Text 2"/>
           <p:cNvSpPr/>
           <p:nvPr/>
         </p:nvSpPr>
@@ -5044,55 +5501,37 @@
             <a:off x="822960" y="1344168"/>
             <a:ext cx="10545775" cy="731520"/>
           </a:xfrm>
-          <a:prstGeom prst="rect"/>
-          <a:noFill/>
-        </p:spPr>
-        <p:txBody>
-          <a:bodyPr anchor="ctr" rtlCol="0" wrap="square"/>
-          <a:p>
-            <a:pPr algn="l" indent="0" marL="0">
-              <a:buNone/>
-            </a:pPr>
-            <a:r>
-              <a:rPr b="1" dirty="0" sz="2800" lang="en-US">
+          <a:prstGeom prst="rect">
+            <a:avLst/>
+          </a:prstGeom>
+          <a:noFill/>
+          <a:ln/>
+        </p:spPr>
+        <p:txBody>
+          <a:bodyPr wrap="square" rtlCol="0" anchor="ctr"/>
+          <a:lstStyle/>
+          <a:p>
+            <a:pPr algn="l" indent="0" marL="0">
+              <a:buNone/>
+            </a:pPr>
+            <a:r>
+              <a:rPr lang="en-US" sz="2800" b="1" dirty="0">
                 <a:solidFill>
                   <a:srgbClr val="1F2329"/>
                 </a:solidFill>
-                <a:latin typeface="微软雅黑" panose="020B0503020204020204" pitchFamily="34" charset="-122"/>
-                <a:ea typeface="微软雅黑" panose="020B0503020204020204" pitchFamily="34" charset="-122"/>
-                <a:cs typeface="微软雅黑" panose="020B0503020204020204" pitchFamily="34" charset="-120"/>
-              </a:rPr>
-              <a:t>% 在802里</a:t>
-            </a:r>
-            <a:r>
-              <a:rPr altLang="en-US" b="1" dirty="0" sz="2800" lang="zh-CN">
-                <a:solidFill>
-                  <a:srgbClr val="1F2329"/>
-                </a:solidFill>
-                <a:latin typeface="微软雅黑" panose="020B0503020204020204" pitchFamily="34" charset="-122"/>
-                <a:ea typeface="微软雅黑" panose="020B0503020204020204" pitchFamily="34" charset="-122"/>
-                <a:cs typeface="微软雅黑" panose="020B0503020204020204" pitchFamily="34" charset="-120"/>
-              </a:rPr>
-              <a:t>的</a:t>
-            </a:r>
-            <a:r>
-              <a:rPr b="1" dirty="0" sz="2800" lang="en-US">
-                <a:solidFill>
-                  <a:srgbClr val="1F2329"/>
-                </a:solidFill>
-                <a:latin typeface="微软雅黑" panose="020B0503020204020204" pitchFamily="34" charset="-122"/>
-                <a:ea typeface="微软雅黑" panose="020B0503020204020204" pitchFamily="34" charset="-122"/>
-                <a:cs typeface="微软雅黑" panose="020B0503020204020204" pitchFamily="34" charset="-120"/>
-              </a:rPr>
-              <a:t>两个用法</a:t>
-            </a:r>
-            <a:endParaRPr dirty="0" sz="2800" lang="en-US"/>
-          </a:p>
-        </p:txBody>
-      </p:sp>
-      <p:sp>
-        <p:nvSpPr>
-          <p:cNvPr id="1048687" name="Shape 3"/>
+                <a:latin typeface="微软雅黑" pitchFamily="34" charset="0"/>
+                <a:ea typeface="微软雅黑" pitchFamily="34" charset="-122"/>
+                <a:cs typeface="微软雅黑" pitchFamily="34" charset="-120"/>
+              </a:rPr>
+              <a:t>% 在802里就这两个用法</a:t>
+            </a:r>
+            <a:endParaRPr lang="en-US" sz="2800" dirty="0"/>
+          </a:p>
+        </p:txBody>
+      </p:sp>
+      <p:sp>
+        <p:nvSpPr>
+          <p:cNvPr id="5" name="Shape 3"/>
           <p:cNvSpPr/>
           <p:nvPr/>
         </p:nvSpPr>
@@ -5101,7 +5540,9 @@
             <a:off x="822960" y="2395728"/>
             <a:ext cx="10545775" cy="1033272"/>
           </a:xfrm>
-          <a:prstGeom prst="rect"/>
+          <a:prstGeom prst="rect">
+            <a:avLst/>
+          </a:prstGeom>
           <a:solidFill>
             <a:srgbClr val="F5F6F7"/>
           </a:solidFill>
@@ -5115,7 +5556,7 @@
       </p:sp>
       <p:sp>
         <p:nvSpPr>
-          <p:cNvPr id="1048688" name="Text 4"/>
+          <p:cNvPr id="6" name="Text 4"/>
           <p:cNvSpPr/>
           <p:nvPr/>
         </p:nvSpPr>
@@ -5124,11 +5565,15 @@
             <a:off x="1078992" y="2505456"/>
             <a:ext cx="10033711" cy="813816"/>
           </a:xfrm>
-          <a:prstGeom prst="rect"/>
-          <a:noFill/>
-        </p:spPr>
-        <p:txBody>
-          <a:bodyPr anchor="t" rtlCol="0" wrap="square"/>
+          <a:prstGeom prst="rect">
+            <a:avLst/>
+          </a:prstGeom>
+          <a:noFill/>
+          <a:ln/>
+        </p:spPr>
+        <p:txBody>
+          <a:bodyPr wrap="square" rtlCol="0" anchor="t"/>
+          <a:lstStyle/>
           <a:p>
             <a:pPr algn="l" indent="0" marL="0">
               <a:lnSpc>
@@ -5137,25 +5582,25 @@
               <a:buNone/>
             </a:pPr>
             <a:r>
-              <a:rPr dirty="0" sz="1400" lang="en-US">
+              <a:rPr lang="en-US" sz="1400" dirty="0">
                 <a:solidFill>
                   <a:srgbClr val="1F2329"/>
                 </a:solidFill>
-                <a:latin typeface="Consolas" panose="020B0609020204030204" pitchFamily="34" charset="0"/>
-                <a:ea typeface="Consolas" panose="020B0609020204030204" pitchFamily="34" charset="-122"/>
-                <a:cs typeface="Consolas" panose="020B0609020204030204" pitchFamily="34" charset="-120"/>
+                <a:latin typeface="Consolas" pitchFamily="34" charset="0"/>
+                <a:ea typeface="Consolas" pitchFamily="34" charset="-122"/>
+                <a:cs typeface="Consolas" pitchFamily="34" charset="-120"/>
               </a:rPr>
               <a:t>x % 2      // 判断奇偶：得1是奇数，得0是偶数
 x % 10     // 取个位：任何整数除以10的余数就是个位
 </a:t>
             </a:r>
-            <a:endParaRPr dirty="0" sz="1400" lang="en-US"/>
-          </a:p>
-        </p:txBody>
-      </p:sp>
-      <p:sp>
-        <p:nvSpPr>
-          <p:cNvPr id="1048689" name="Text 5"/>
+            <a:endParaRPr lang="en-US" sz="1400" dirty="0"/>
+          </a:p>
+        </p:txBody>
+      </p:sp>
+      <p:sp>
+        <p:nvSpPr>
+          <p:cNvPr id="7" name="Text 5"/>
           <p:cNvSpPr/>
           <p:nvPr/>
         </p:nvSpPr>
@@ -5164,52 +5609,68 @@
             <a:off x="896112" y="3630168"/>
             <a:ext cx="10454335" cy="397764"/>
           </a:xfrm>
-          <a:prstGeom prst="rect"/>
-          <a:noFill/>
-        </p:spPr>
-        <p:txBody>
-          <a:bodyPr anchor="t" rtlCol="0" wrap="square"/>
-          <a:p>
-            <a:pPr algn="l" indent="0" marL="0">
-              <a:lnSpc>
-                <a:spcPct val="115000"/>
-              </a:lnSpc>
-              <a:buNone/>
-            </a:pPr>
-            <a:r>
-              <a:rPr b="1" dirty="0" sz="1800" lang="en-US">
+          <a:prstGeom prst="rect">
+            <a:avLst/>
+          </a:prstGeom>
+          <a:noFill/>
+          <a:ln/>
+        </p:spPr>
+        <p:txBody>
+          <a:bodyPr wrap="square" rtlCol="0" anchor="t"/>
+          <a:lstStyle/>
+          <a:p>
+            <a:pPr algn="l" indent="0" marL="0">
+              <a:lnSpc>
+                <a:spcPct val="115000"/>
+              </a:lnSpc>
+              <a:buNone/>
+            </a:pPr>
+            <a:r>
+              <a:rPr lang="en-US" sz="1800" b="1" dirty="0">
                 <a:solidFill>
                   <a:srgbClr val="1F4E9C"/>
                 </a:solidFill>
-                <a:latin typeface="微软雅黑" panose="020B0503020204020204" pitchFamily="34" charset="-122"/>
-                <a:ea typeface="微软雅黑" panose="020B0503020204020204" pitchFamily="34" charset="-122"/>
-                <a:cs typeface="微软雅黑" panose="020B0503020204020204" pitchFamily="34" charset="-120"/>
+                <a:latin typeface="微软雅黑" pitchFamily="34" charset="0"/>
+                <a:ea typeface="微软雅黑" pitchFamily="34" charset="-122"/>
+                <a:cs typeface="微软雅黑" pitchFamily="34" charset="-120"/>
               </a:rPr>
               <a:t>•  </a:t>
             </a:r>
-            <a:r>
-              <a:rPr b="1" dirty="0" sz="1800" lang="en-US">
+            <a:pPr algn="l" indent="0" marL="0">
+              <a:lnSpc>
+                <a:spcPct val="115000"/>
+              </a:lnSpc>
+              <a:buNone/>
+            </a:pPr>
+            <a:r>
+              <a:rPr lang="en-US" sz="1800" b="1" dirty="0">
                 <a:solidFill>
                   <a:srgbClr val="000000"/>
                 </a:solidFill>
               </a:rPr>
               <a:t>判断奇偶</a:t>
             </a:r>
-            <a:r>
-              <a:rPr dirty="0" sz="1800" lang="en-US">
+            <a:pPr algn="l" indent="0" marL="0">
+              <a:lnSpc>
+                <a:spcPct val="115000"/>
+              </a:lnSpc>
+              <a:buNone/>
+            </a:pPr>
+            <a:r>
+              <a:rPr lang="en-US" sz="1800" dirty="0">
                 <a:solidFill>
                   <a:srgbClr val="000000"/>
                 </a:solidFill>
               </a:rPr>
               <a:t>：x % 2 得 1 就是奇数，得 0 就是偶数</a:t>
             </a:r>
-            <a:endParaRPr dirty="0" sz="1800" lang="en-US"/>
-          </a:p>
-        </p:txBody>
-      </p:sp>
-      <p:sp>
-        <p:nvSpPr>
-          <p:cNvPr id="1048690" name="Text 6"/>
+            <a:endParaRPr lang="en-US" sz="1800" dirty="0"/>
+          </a:p>
+        </p:txBody>
+      </p:sp>
+      <p:sp>
+        <p:nvSpPr>
+          <p:cNvPr id="8" name="Text 6"/>
           <p:cNvSpPr/>
           <p:nvPr/>
         </p:nvSpPr>
@@ -5218,52 +5679,68 @@
             <a:off x="896112" y="4101084"/>
             <a:ext cx="10454335" cy="397764"/>
           </a:xfrm>
-          <a:prstGeom prst="rect"/>
-          <a:noFill/>
-        </p:spPr>
-        <p:txBody>
-          <a:bodyPr anchor="t" rtlCol="0" wrap="square"/>
-          <a:p>
-            <a:pPr algn="l" indent="0" marL="0">
-              <a:lnSpc>
-                <a:spcPct val="115000"/>
-              </a:lnSpc>
-              <a:buNone/>
-            </a:pPr>
-            <a:r>
-              <a:rPr b="1" dirty="0" sz="1800" lang="en-US">
+          <a:prstGeom prst="rect">
+            <a:avLst/>
+          </a:prstGeom>
+          <a:noFill/>
+          <a:ln/>
+        </p:spPr>
+        <p:txBody>
+          <a:bodyPr wrap="square" rtlCol="0" anchor="t"/>
+          <a:lstStyle/>
+          <a:p>
+            <a:pPr algn="l" indent="0" marL="0">
+              <a:lnSpc>
+                <a:spcPct val="115000"/>
+              </a:lnSpc>
+              <a:buNone/>
+            </a:pPr>
+            <a:r>
+              <a:rPr lang="en-US" sz="1800" b="1" dirty="0">
                 <a:solidFill>
                   <a:srgbClr val="1F4E9C"/>
                 </a:solidFill>
-                <a:latin typeface="微软雅黑" panose="020B0503020204020204" pitchFamily="34" charset="-122"/>
-                <a:ea typeface="微软雅黑" panose="020B0503020204020204" pitchFamily="34" charset="-122"/>
-                <a:cs typeface="微软雅黑" panose="020B0503020204020204" pitchFamily="34" charset="-120"/>
+                <a:latin typeface="微软雅黑" pitchFamily="34" charset="0"/>
+                <a:ea typeface="微软雅黑" pitchFamily="34" charset="-122"/>
+                <a:cs typeface="微软雅黑" pitchFamily="34" charset="-120"/>
               </a:rPr>
               <a:t>•  </a:t>
             </a:r>
-            <a:r>
-              <a:rPr b="1" dirty="0" sz="1800" lang="en-US">
+            <a:pPr algn="l" indent="0" marL="0">
+              <a:lnSpc>
+                <a:spcPct val="115000"/>
+              </a:lnSpc>
+              <a:buNone/>
+            </a:pPr>
+            <a:r>
+              <a:rPr lang="en-US" sz="1800" b="1" dirty="0">
                 <a:solidFill>
                   <a:srgbClr val="000000"/>
                 </a:solidFill>
               </a:rPr>
               <a:t>取个位</a:t>
             </a:r>
-            <a:r>
-              <a:rPr dirty="0" sz="1800" lang="en-US">
+            <a:pPr algn="l" indent="0" marL="0">
+              <a:lnSpc>
+                <a:spcPct val="115000"/>
+              </a:lnSpc>
+              <a:buNone/>
+            </a:pPr>
+            <a:r>
+              <a:rPr lang="en-US" sz="1800" dirty="0">
                 <a:solidFill>
                   <a:srgbClr val="000000"/>
                 </a:solidFill>
               </a:rPr>
               <a:t>：x % 10 直接拿到个位，取十位就 x / 10 % 10</a:t>
             </a:r>
-            <a:endParaRPr dirty="0" sz="1800" lang="en-US"/>
-          </a:p>
-        </p:txBody>
-      </p:sp>
-      <p:sp>
-        <p:nvSpPr>
-          <p:cNvPr id="1048691" name="Text 7"/>
+            <a:endParaRPr lang="en-US" sz="1800" dirty="0"/>
+          </a:p>
+        </p:txBody>
+      </p:sp>
+      <p:sp>
+        <p:nvSpPr>
+          <p:cNvPr id="9" name="Text 7"/>
           <p:cNvSpPr/>
           <p:nvPr/>
         </p:nvSpPr>
@@ -5272,38 +5749,48 @@
             <a:off x="896112" y="4572000"/>
             <a:ext cx="10454335" cy="397764"/>
           </a:xfrm>
-          <a:prstGeom prst="rect"/>
-          <a:noFill/>
-        </p:spPr>
-        <p:txBody>
-          <a:bodyPr anchor="t" rtlCol="0" wrap="square"/>
-          <a:p>
-            <a:pPr algn="l" indent="0" marL="0">
-              <a:lnSpc>
-                <a:spcPct val="115000"/>
-              </a:lnSpc>
-              <a:buNone/>
-            </a:pPr>
-            <a:r>
-              <a:rPr b="1" dirty="0" sz="1800" lang="en-US">
+          <a:prstGeom prst="rect">
+            <a:avLst/>
+          </a:prstGeom>
+          <a:noFill/>
+          <a:ln/>
+        </p:spPr>
+        <p:txBody>
+          <a:bodyPr wrap="square" rtlCol="0" anchor="t"/>
+          <a:lstStyle/>
+          <a:p>
+            <a:pPr algn="l" indent="0" marL="0">
+              <a:lnSpc>
+                <a:spcPct val="115000"/>
+              </a:lnSpc>
+              <a:buNone/>
+            </a:pPr>
+            <a:r>
+              <a:rPr lang="en-US" sz="1800" b="1" dirty="0">
                 <a:solidFill>
                   <a:srgbClr val="1F4E9C"/>
                 </a:solidFill>
-                <a:latin typeface="微软雅黑" panose="020B0503020204020204" pitchFamily="34" charset="-122"/>
-                <a:ea typeface="微软雅黑" panose="020B0503020204020204" pitchFamily="34" charset="-122"/>
-                <a:cs typeface="微软雅黑" panose="020B0503020204020204" pitchFamily="34" charset="-120"/>
+                <a:latin typeface="微软雅黑" pitchFamily="34" charset="0"/>
+                <a:ea typeface="微软雅黑" pitchFamily="34" charset="-122"/>
+                <a:cs typeface="微软雅黑" pitchFamily="34" charset="-120"/>
               </a:rPr>
               <a:t>•  </a:t>
             </a:r>
-            <a:r>
-              <a:rPr dirty="0" sz="1800" lang="en-US">
+            <a:pPr algn="l" indent="0" marL="0">
+              <a:lnSpc>
+                <a:spcPct val="115000"/>
+              </a:lnSpc>
+              <a:buNone/>
+            </a:pPr>
+            <a:r>
+              <a:rPr lang="en-US" sz="1800" dirty="0">
                 <a:solidFill>
                   <a:srgbClr val="000000"/>
                 </a:solidFill>
               </a:rPr>
               <a:t>这两个用法在802真题和手算题里反复出现，现在就记牢</a:t>
             </a:r>
-            <a:endParaRPr dirty="0" sz="1800" lang="en-US"/>
+            <a:endParaRPr lang="en-US" sz="1800" dirty="0"/>
           </a:p>
         </p:txBody>
       </p:sp>
@@ -5317,11 +5804,11 @@
 
 <file path=ppt/slides/slide5.xml><?xml version="1.0" encoding="utf-8"?>
 <p:sld xmlns:a="http://schemas.openxmlformats.org/drawingml/2006/main" xmlns:r="http://schemas.openxmlformats.org/officeDocument/2006/relationships" xmlns:p="http://schemas.openxmlformats.org/presentationml/2006/main">
-  <p:cSld>
+  <p:cSld name="Slide 5">
     <p:bg>
       <p:bgPr>
-        <a:blipFill rotWithShape="1" dpi="0">
-          <a:blip xmlns:r="http://schemas.openxmlformats.org/officeDocument/2006/relationships" r:embed="rId1">
+        <a:blipFill dpi="0" rotWithShape="1">
+          <a:blip r:embed="rId1">
             <a:lum/>
           </a:blip>
           <a:srcRect/>
@@ -5334,7 +5821,7 @@
     </p:bg>
     <p:spTree>
       <p:nvGrpSpPr>
-        <p:cNvPr id="53" name=""/>
+        <p:cNvPr id="1" name=""/>
         <p:cNvGrpSpPr/>
         <p:nvPr/>
       </p:nvGrpSpPr>
@@ -5348,7 +5835,7 @@
       </p:grpSpPr>
       <p:sp>
         <p:nvSpPr>
-          <p:cNvPr id="1048695" name="Text 0"/>
+          <p:cNvPr id="2" name="Text 0"/>
           <p:cNvSpPr/>
           <p:nvPr/>
         </p:nvSpPr>
@@ -5357,33 +5844,37 @@
             <a:off x="10362895" y="6016752"/>
             <a:ext cx="1463040" cy="320040"/>
           </a:xfrm>
-          <a:prstGeom prst="rect"/>
-          <a:noFill/>
-        </p:spPr>
-        <p:txBody>
-          <a:bodyPr anchor="ctr" rtlCol="0" wrap="square"/>
+          <a:prstGeom prst="rect">
+            <a:avLst/>
+          </a:prstGeom>
+          <a:noFill/>
+          <a:ln/>
+        </p:spPr>
+        <p:txBody>
+          <a:bodyPr wrap="square" rtlCol="0" anchor="ctr"/>
+          <a:lstStyle/>
           <a:p>
             <a:pPr algn="r" indent="0" marL="0">
               <a:buNone/>
             </a:pPr>
             <a:r>
-              <a:rPr dirty="0" sz="1000" lang="en-US">
+              <a:rPr lang="en-US" sz="1000" dirty="0">
                 <a:solidFill>
                   <a:srgbClr val="8A9099"/>
                 </a:solidFill>
-                <a:latin typeface="微软雅黑" panose="020B0503020204020204" pitchFamily="34" charset="-122"/>
-                <a:ea typeface="微软雅黑" panose="020B0503020204020204" pitchFamily="34" charset="-122"/>
-                <a:cs typeface="微软雅黑" panose="020B0503020204020204" pitchFamily="34" charset="-120"/>
+                <a:latin typeface="微软雅黑" pitchFamily="34" charset="0"/>
+                <a:ea typeface="微软雅黑" pitchFamily="34" charset="-122"/>
+                <a:cs typeface="微软雅黑" pitchFamily="34" charset="-120"/>
               </a:rPr>
               <a:t>5 / 15</a:t>
             </a:r>
-            <a:endParaRPr dirty="0" sz="1000" lang="en-US"/>
-          </a:p>
-        </p:txBody>
-      </p:sp>
-      <p:sp>
-        <p:nvSpPr>
-          <p:cNvPr id="1048696" name="Text 1"/>
+            <a:endParaRPr lang="en-US" sz="1000" dirty="0"/>
+          </a:p>
+        </p:txBody>
+      </p:sp>
+      <p:sp>
+        <p:nvSpPr>
+          <p:cNvPr id="3" name="Text 1"/>
           <p:cNvSpPr/>
           <p:nvPr/>
         </p:nvSpPr>
@@ -5392,33 +5883,37 @@
             <a:off x="822960" y="960120"/>
             <a:ext cx="10545775" cy="365760"/>
           </a:xfrm>
-          <a:prstGeom prst="rect"/>
-          <a:noFill/>
-        </p:spPr>
-        <p:txBody>
-          <a:bodyPr anchor="ctr" rtlCol="0" wrap="square"/>
-          <a:p>
-            <a:pPr algn="l" indent="0" marL="0">
-              <a:buNone/>
-            </a:pPr>
-            <a:r>
-              <a:rPr b="1" dirty="0" sz="1400" lang="en-US">
+          <a:prstGeom prst="rect">
+            <a:avLst/>
+          </a:prstGeom>
+          <a:noFill/>
+          <a:ln/>
+        </p:spPr>
+        <p:txBody>
+          <a:bodyPr wrap="square" rtlCol="0" anchor="ctr"/>
+          <a:lstStyle/>
+          <a:p>
+            <a:pPr algn="l" indent="0" marL="0">
+              <a:buNone/>
+            </a:pPr>
+            <a:r>
+              <a:rPr lang="en-US" sz="1400" b="1" dirty="0">
                 <a:solidFill>
                   <a:srgbClr val="1F4E9C"/>
                 </a:solidFill>
-                <a:latin typeface="微软雅黑" panose="020B0503020204020204" pitchFamily="34" charset="-122"/>
-                <a:ea typeface="微软雅黑" panose="020B0503020204020204" pitchFamily="34" charset="-122"/>
-                <a:cs typeface="微软雅黑" panose="020B0503020204020204" pitchFamily="34" charset="-120"/>
+                <a:latin typeface="微软雅黑" pitchFamily="34" charset="0"/>
+                <a:ea typeface="微软雅黑" pitchFamily="34" charset="-122"/>
+                <a:cs typeface="微软雅黑" pitchFamily="34" charset="-120"/>
               </a:rPr>
               <a:t>取余还能干这个</a:t>
             </a:r>
-            <a:endParaRPr dirty="0" sz="1400" lang="en-US"/>
-          </a:p>
-        </p:txBody>
-      </p:sp>
-      <p:sp>
-        <p:nvSpPr>
-          <p:cNvPr id="1048697" name="Text 2"/>
+            <a:endParaRPr lang="en-US" sz="1400" dirty="0"/>
+          </a:p>
+        </p:txBody>
+      </p:sp>
+      <p:sp>
+        <p:nvSpPr>
+          <p:cNvPr id="4" name="Text 2"/>
           <p:cNvSpPr/>
           <p:nvPr/>
         </p:nvSpPr>
@@ -5427,33 +5922,37 @@
             <a:off x="822960" y="1344168"/>
             <a:ext cx="10545775" cy="731520"/>
           </a:xfrm>
-          <a:prstGeom prst="rect"/>
-          <a:noFill/>
-        </p:spPr>
-        <p:txBody>
-          <a:bodyPr anchor="ctr" rtlCol="0" wrap="square"/>
-          <a:p>
-            <a:pPr algn="l" indent="0" marL="0">
-              <a:buNone/>
-            </a:pPr>
-            <a:r>
-              <a:rPr b="1" dirty="0" sz="2800" lang="en-US">
+          <a:prstGeom prst="rect">
+            <a:avLst/>
+          </a:prstGeom>
+          <a:noFill/>
+          <a:ln/>
+        </p:spPr>
+        <p:txBody>
+          <a:bodyPr wrap="square" rtlCol="0" anchor="ctr"/>
+          <a:lstStyle/>
+          <a:p>
+            <a:pPr algn="l" indent="0" marL="0">
+              <a:buNone/>
+            </a:pPr>
+            <a:r>
+              <a:rPr lang="en-US" sz="2800" b="1" dirty="0">
                 <a:solidFill>
                   <a:srgbClr val="1F2329"/>
                 </a:solidFill>
-                <a:latin typeface="微软雅黑" panose="020B0503020204020204" pitchFamily="34" charset="-122"/>
-                <a:ea typeface="微软雅黑" panose="020B0503020204020204" pitchFamily="34" charset="-122"/>
-                <a:cs typeface="微软雅黑" panose="020B0503020204020204" pitchFamily="34" charset="-120"/>
+                <a:latin typeface="微软雅黑" pitchFamily="34" charset="0"/>
+                <a:ea typeface="微软雅黑" pitchFamily="34" charset="-122"/>
+                <a:cs typeface="微软雅黑" pitchFamily="34" charset="-120"/>
               </a:rPr>
               <a:t>拆时间：3670秒是几分几秒</a:t>
             </a:r>
-            <a:endParaRPr dirty="0" sz="2800" lang="en-US"/>
-          </a:p>
-        </p:txBody>
-      </p:sp>
-      <p:sp>
-        <p:nvSpPr>
-          <p:cNvPr id="1048698" name="Shape 3"/>
+            <a:endParaRPr lang="en-US" sz="2800" dirty="0"/>
+          </a:p>
+        </p:txBody>
+      </p:sp>
+      <p:sp>
+        <p:nvSpPr>
+          <p:cNvPr id="5" name="Shape 3"/>
           <p:cNvSpPr/>
           <p:nvPr/>
         </p:nvSpPr>
@@ -5462,7 +5961,9 @@
             <a:off x="822960" y="2395728"/>
             <a:ext cx="10545775" cy="1033272"/>
           </a:xfrm>
-          <a:prstGeom prst="rect"/>
+          <a:prstGeom prst="rect">
+            <a:avLst/>
+          </a:prstGeom>
           <a:solidFill>
             <a:srgbClr val="F5F6F7"/>
           </a:solidFill>
@@ -5476,7 +5977,7 @@
       </p:sp>
       <p:sp>
         <p:nvSpPr>
-          <p:cNvPr id="1048699" name="Text 4"/>
+          <p:cNvPr id="6" name="Text 4"/>
           <p:cNvSpPr/>
           <p:nvPr/>
         </p:nvSpPr>
@@ -5485,11 +5986,15 @@
             <a:off x="1078992" y="2505456"/>
             <a:ext cx="10033711" cy="813816"/>
           </a:xfrm>
-          <a:prstGeom prst="rect"/>
-          <a:noFill/>
-        </p:spPr>
-        <p:txBody>
-          <a:bodyPr anchor="t" rtlCol="0" wrap="square"/>
+          <a:prstGeom prst="rect">
+            <a:avLst/>
+          </a:prstGeom>
+          <a:noFill/>
+          <a:ln/>
+        </p:spPr>
+        <p:txBody>
+          <a:bodyPr wrap="square" rtlCol="0" anchor="t"/>
+          <a:lstStyle/>
           <a:p>
             <a:pPr algn="l" indent="0" marL="0">
               <a:lnSpc>
@@ -5498,25 +6003,25 @@
               <a:buNone/>
             </a:pPr>
             <a:r>
-              <a:rPr dirty="0" sz="1400" lang="en-US">
+              <a:rPr lang="en-US" sz="1400" dirty="0">
                 <a:solidFill>
                   <a:srgbClr val="1F2329"/>
                 </a:solidFill>
-                <a:latin typeface="Consolas" panose="020B0609020204030204" pitchFamily="34" charset="0"/>
-                <a:ea typeface="Consolas" panose="020B0609020204030204" pitchFamily="34" charset="-122"/>
-                <a:cs typeface="Consolas" panose="020B0609020204030204" pitchFamily="34" charset="-120"/>
+                <a:latin typeface="Consolas" pitchFamily="34" charset="0"/>
+                <a:ea typeface="Consolas" pitchFamily="34" charset="-122"/>
+                <a:cs typeface="Consolas" pitchFamily="34" charset="-120"/>
               </a:rPr>
               <a:t>int seconds = 3670;
 printf("%d分%d秒", seconds / 60, seconds % 60);
 </a:t>
             </a:r>
-            <a:endParaRPr dirty="0" sz="1400" lang="en-US"/>
-          </a:p>
-        </p:txBody>
-      </p:sp>
-      <p:sp>
-        <p:nvSpPr>
-          <p:cNvPr id="1048700" name="Text 5"/>
+            <a:endParaRPr lang="en-US" sz="1400" dirty="0"/>
+          </a:p>
+        </p:txBody>
+      </p:sp>
+      <p:sp>
+        <p:nvSpPr>
+          <p:cNvPr id="7" name="Text 5"/>
           <p:cNvSpPr/>
           <p:nvPr/>
         </p:nvSpPr>
@@ -5525,44 +6030,54 @@
             <a:off x="896112" y="3630168"/>
             <a:ext cx="10454335" cy="397764"/>
           </a:xfrm>
-          <a:prstGeom prst="rect"/>
-          <a:noFill/>
-        </p:spPr>
-        <p:txBody>
-          <a:bodyPr anchor="t" rtlCol="0" wrap="square"/>
-          <a:p>
-            <a:pPr algn="l" indent="0" marL="0">
-              <a:lnSpc>
-                <a:spcPct val="115000"/>
-              </a:lnSpc>
-              <a:buNone/>
-            </a:pPr>
-            <a:r>
-              <a:rPr b="1" dirty="0" sz="1800" lang="en-US">
+          <a:prstGeom prst="rect">
+            <a:avLst/>
+          </a:prstGeom>
+          <a:noFill/>
+          <a:ln/>
+        </p:spPr>
+        <p:txBody>
+          <a:bodyPr wrap="square" rtlCol="0" anchor="t"/>
+          <a:lstStyle/>
+          <a:p>
+            <a:pPr algn="l" indent="0" marL="0">
+              <a:lnSpc>
+                <a:spcPct val="115000"/>
+              </a:lnSpc>
+              <a:buNone/>
+            </a:pPr>
+            <a:r>
+              <a:rPr lang="en-US" sz="1800" b="1" dirty="0">
                 <a:solidFill>
                   <a:srgbClr val="1F4E9C"/>
                 </a:solidFill>
-                <a:latin typeface="微软雅黑" panose="020B0503020204020204" pitchFamily="34" charset="-122"/>
-                <a:ea typeface="微软雅黑" panose="020B0503020204020204" pitchFamily="34" charset="-122"/>
-                <a:cs typeface="微软雅黑" panose="020B0503020204020204" pitchFamily="34" charset="-120"/>
+                <a:latin typeface="微软雅黑" pitchFamily="34" charset="0"/>
+                <a:ea typeface="微软雅黑" pitchFamily="34" charset="-122"/>
+                <a:cs typeface="微软雅黑" pitchFamily="34" charset="-120"/>
               </a:rPr>
               <a:t>•  </a:t>
             </a:r>
-            <a:r>
-              <a:rPr dirty="0" sz="1800" lang="en-US">
+            <a:pPr algn="l" indent="0" marL="0">
+              <a:lnSpc>
+                <a:spcPct val="115000"/>
+              </a:lnSpc>
+              <a:buNone/>
+            </a:pPr>
+            <a:r>
+              <a:rPr lang="en-US" sz="1800" dirty="0">
                 <a:solidFill>
                   <a:srgbClr val="000000"/>
                 </a:solidFill>
               </a:rPr>
               <a:t>3670秒：除以60取整，得61分钟；对60取余，得10秒</a:t>
             </a:r>
-            <a:endParaRPr dirty="0" sz="1800" lang="en-US"/>
-          </a:p>
-        </p:txBody>
-      </p:sp>
-      <p:sp>
-        <p:nvSpPr>
-          <p:cNvPr id="1048701" name="Text 6"/>
+            <a:endParaRPr lang="en-US" sz="1800" dirty="0"/>
+          </a:p>
+        </p:txBody>
+      </p:sp>
+      <p:sp>
+        <p:nvSpPr>
+          <p:cNvPr id="8" name="Text 6"/>
           <p:cNvSpPr/>
           <p:nvPr/>
         </p:nvSpPr>
@@ -5571,44 +6086,54 @@
             <a:off x="896112" y="4101084"/>
             <a:ext cx="10454335" cy="397764"/>
           </a:xfrm>
-          <a:prstGeom prst="rect"/>
-          <a:noFill/>
-        </p:spPr>
-        <p:txBody>
-          <a:bodyPr anchor="t" rtlCol="0" wrap="square"/>
-          <a:p>
-            <a:pPr algn="l" indent="0" marL="0">
-              <a:lnSpc>
-                <a:spcPct val="115000"/>
-              </a:lnSpc>
-              <a:buNone/>
-            </a:pPr>
-            <a:r>
-              <a:rPr b="1" dirty="0" sz="1800" lang="en-US">
+          <a:prstGeom prst="rect">
+            <a:avLst/>
+          </a:prstGeom>
+          <a:noFill/>
+          <a:ln/>
+        </p:spPr>
+        <p:txBody>
+          <a:bodyPr wrap="square" rtlCol="0" anchor="t"/>
+          <a:lstStyle/>
+          <a:p>
+            <a:pPr algn="l" indent="0" marL="0">
+              <a:lnSpc>
+                <a:spcPct val="115000"/>
+              </a:lnSpc>
+              <a:buNone/>
+            </a:pPr>
+            <a:r>
+              <a:rPr lang="en-US" sz="1800" b="1" dirty="0">
                 <a:solidFill>
                   <a:srgbClr val="1F4E9C"/>
                 </a:solidFill>
-                <a:latin typeface="微软雅黑" panose="020B0503020204020204" pitchFamily="34" charset="-122"/>
-                <a:ea typeface="微软雅黑" panose="020B0503020204020204" pitchFamily="34" charset="-122"/>
-                <a:cs typeface="微软雅黑" panose="020B0503020204020204" pitchFamily="34" charset="-120"/>
+                <a:latin typeface="微软雅黑" pitchFamily="34" charset="0"/>
+                <a:ea typeface="微软雅黑" pitchFamily="34" charset="-122"/>
+                <a:cs typeface="微软雅黑" pitchFamily="34" charset="-120"/>
               </a:rPr>
               <a:t>•  </a:t>
             </a:r>
-            <a:r>
-              <a:rPr dirty="0" sz="1800" lang="en-US">
+            <a:pPr algn="l" indent="0" marL="0">
+              <a:lnSpc>
+                <a:spcPct val="115000"/>
+              </a:lnSpc>
+              <a:buNone/>
+            </a:pPr>
+            <a:r>
+              <a:rPr lang="en-US" sz="1800" dirty="0">
                 <a:solidFill>
                   <a:srgbClr val="000000"/>
                 </a:solidFill>
               </a:rPr>
               <a:t>拆数字、拆时间，底层全是 / 和 % 这俩搭档</a:t>
             </a:r>
-            <a:endParaRPr dirty="0" sz="1800" lang="en-US"/>
-          </a:p>
-        </p:txBody>
-      </p:sp>
-      <p:sp>
-        <p:nvSpPr>
-          <p:cNvPr id="1048702" name="Text 7"/>
+            <a:endParaRPr lang="en-US" sz="1800" dirty="0"/>
+          </a:p>
+        </p:txBody>
+      </p:sp>
+      <p:sp>
+        <p:nvSpPr>
+          <p:cNvPr id="9" name="Text 7"/>
           <p:cNvSpPr/>
           <p:nvPr/>
         </p:nvSpPr>
@@ -5617,38 +6142,48 @@
             <a:off x="896112" y="4572000"/>
             <a:ext cx="10454335" cy="397764"/>
           </a:xfrm>
-          <a:prstGeom prst="rect"/>
-          <a:noFill/>
-        </p:spPr>
-        <p:txBody>
-          <a:bodyPr anchor="t" rtlCol="0" wrap="square"/>
-          <a:p>
-            <a:pPr algn="l" indent="0" marL="0">
-              <a:lnSpc>
-                <a:spcPct val="115000"/>
-              </a:lnSpc>
-              <a:buNone/>
-            </a:pPr>
-            <a:r>
-              <a:rPr b="1" dirty="0" sz="1800" lang="en-US">
+          <a:prstGeom prst="rect">
+            <a:avLst/>
+          </a:prstGeom>
+          <a:noFill/>
+          <a:ln/>
+        </p:spPr>
+        <p:txBody>
+          <a:bodyPr wrap="square" rtlCol="0" anchor="t"/>
+          <a:lstStyle/>
+          <a:p>
+            <a:pPr algn="l" indent="0" marL="0">
+              <a:lnSpc>
+                <a:spcPct val="115000"/>
+              </a:lnSpc>
+              <a:buNone/>
+            </a:pPr>
+            <a:r>
+              <a:rPr lang="en-US" sz="1800" b="1" dirty="0">
                 <a:solidFill>
                   <a:srgbClr val="1F4E9C"/>
                 </a:solidFill>
-                <a:latin typeface="微软雅黑" panose="020B0503020204020204" pitchFamily="34" charset="-122"/>
-                <a:ea typeface="微软雅黑" panose="020B0503020204020204" pitchFamily="34" charset="-122"/>
-                <a:cs typeface="微软雅黑" panose="020B0503020204020204" pitchFamily="34" charset="-120"/>
+                <a:latin typeface="微软雅黑" pitchFamily="34" charset="0"/>
+                <a:ea typeface="微软雅黑" pitchFamily="34" charset="-122"/>
+                <a:cs typeface="微软雅黑" pitchFamily="34" charset="-120"/>
               </a:rPr>
               <a:t>•  </a:t>
             </a:r>
-            <a:r>
-              <a:rPr dirty="0" sz="1800" lang="en-US">
+            <a:pPr algn="l" indent="0" marL="0">
+              <a:lnSpc>
+                <a:spcPct val="115000"/>
+              </a:lnSpc>
+              <a:buNone/>
+            </a:pPr>
+            <a:r>
+              <a:rPr lang="en-US" sz="1800" dirty="0">
                 <a:solidFill>
                   <a:srgbClr val="000000"/>
                 </a:solidFill>
               </a:rPr>
               <a:t>802手算题里凡是"换算单位"的活，思路都一样</a:t>
             </a:r>
-            <a:endParaRPr dirty="0" sz="1800" lang="en-US"/>
+            <a:endParaRPr lang="en-US" sz="1800" dirty="0"/>
           </a:p>
         </p:txBody>
       </p:sp>
@@ -5662,11 +6197,11 @@
 
 <file path=ppt/slides/slide6.xml><?xml version="1.0" encoding="utf-8"?>
 <p:sld xmlns:a="http://schemas.openxmlformats.org/drawingml/2006/main" xmlns:r="http://schemas.openxmlformats.org/officeDocument/2006/relationships" xmlns:p="http://schemas.openxmlformats.org/presentationml/2006/main">
-  <p:cSld>
+  <p:cSld name="Slide 6">
     <p:bg>
       <p:bgPr>
-        <a:blipFill rotWithShape="1" dpi="0">
-          <a:blip xmlns:r="http://schemas.openxmlformats.org/officeDocument/2006/relationships" r:embed="rId1">
+        <a:blipFill dpi="0" rotWithShape="1">
+          <a:blip r:embed="rId1">
             <a:lum/>
           </a:blip>
           <a:srcRect/>
@@ -5679,7 +6214,7 @@
     </p:bg>
     <p:spTree>
       <p:nvGrpSpPr>
-        <p:cNvPr id="38" name=""/>
+        <p:cNvPr id="1" name=""/>
         <p:cNvGrpSpPr/>
         <p:nvPr/>
       </p:nvGrpSpPr>
@@ -5693,7 +6228,7 @@
       </p:grpSpPr>
       <p:sp>
         <p:nvSpPr>
-          <p:cNvPr id="1048642" name="Text 0"/>
+          <p:cNvPr id="2" name="Text 0"/>
           <p:cNvSpPr/>
           <p:nvPr/>
         </p:nvSpPr>
@@ -5702,33 +6237,37 @@
             <a:off x="10362895" y="6016752"/>
             <a:ext cx="1463040" cy="320040"/>
           </a:xfrm>
-          <a:prstGeom prst="rect"/>
-          <a:noFill/>
-        </p:spPr>
-        <p:txBody>
-          <a:bodyPr anchor="ctr" rtlCol="0" wrap="square"/>
+          <a:prstGeom prst="rect">
+            <a:avLst/>
+          </a:prstGeom>
+          <a:noFill/>
+          <a:ln/>
+        </p:spPr>
+        <p:txBody>
+          <a:bodyPr wrap="square" rtlCol="0" anchor="ctr"/>
+          <a:lstStyle/>
           <a:p>
             <a:pPr algn="r" indent="0" marL="0">
               <a:buNone/>
             </a:pPr>
             <a:r>
-              <a:rPr dirty="0" sz="1000" lang="en-US">
+              <a:rPr lang="en-US" sz="1000" dirty="0">
                 <a:solidFill>
                   <a:srgbClr val="8A9099"/>
                 </a:solidFill>
-                <a:latin typeface="微软雅黑" panose="020B0503020204020204" pitchFamily="34" charset="-122"/>
-                <a:ea typeface="微软雅黑" panose="020B0503020204020204" pitchFamily="34" charset="-122"/>
-                <a:cs typeface="微软雅黑" panose="020B0503020204020204" pitchFamily="34" charset="-120"/>
+                <a:latin typeface="微软雅黑" pitchFamily="34" charset="0"/>
+                <a:ea typeface="微软雅黑" pitchFamily="34" charset="-122"/>
+                <a:cs typeface="微软雅黑" pitchFamily="34" charset="-120"/>
               </a:rPr>
               <a:t>6 / 15</a:t>
             </a:r>
-            <a:endParaRPr dirty="0" sz="1000" lang="en-US"/>
-          </a:p>
-        </p:txBody>
-      </p:sp>
-      <p:sp>
-        <p:nvSpPr>
-          <p:cNvPr id="1048643" name="Text 1"/>
+            <a:endParaRPr lang="en-US" sz="1000" dirty="0"/>
+          </a:p>
+        </p:txBody>
+      </p:sp>
+      <p:sp>
+        <p:nvSpPr>
+          <p:cNvPr id="3" name="Text 1"/>
           <p:cNvSpPr/>
           <p:nvPr/>
         </p:nvSpPr>
@@ -5737,33 +6276,37 @@
             <a:off x="822960" y="960120"/>
             <a:ext cx="10545775" cy="365760"/>
           </a:xfrm>
-          <a:prstGeom prst="rect"/>
-          <a:noFill/>
-        </p:spPr>
-        <p:txBody>
-          <a:bodyPr anchor="ctr" rtlCol="0" wrap="square"/>
-          <a:p>
-            <a:pPr algn="l" indent="0" marL="0">
-              <a:buNone/>
-            </a:pPr>
-            <a:r>
-              <a:rPr b="1" dirty="0" sz="1400" lang="en-US">
+          <a:prstGeom prst="rect">
+            <a:avLst/>
+          </a:prstGeom>
+          <a:noFill/>
+          <a:ln/>
+        </p:spPr>
+        <p:txBody>
+          <a:bodyPr wrap="square" rtlCol="0" anchor="ctr"/>
+          <a:lstStyle/>
+          <a:p>
+            <a:pPr algn="l" indent="0" marL="0">
+              <a:buNone/>
+            </a:pPr>
+            <a:r>
+              <a:rPr lang="en-US" sz="1400" b="1" dirty="0">
                 <a:solidFill>
                   <a:srgbClr val="1F4E9C"/>
                 </a:solidFill>
-                <a:latin typeface="微软雅黑" panose="020B0503020204020204" pitchFamily="34" charset="-122"/>
-                <a:ea typeface="微软雅黑" panose="020B0503020204020204" pitchFamily="34" charset="-122"/>
-                <a:cs typeface="微软雅黑" panose="020B0503020204020204" pitchFamily="34" charset="-120"/>
+                <a:latin typeface="微软雅黑" pitchFamily="34" charset="0"/>
+                <a:ea typeface="微软雅黑" pitchFamily="34" charset="-122"/>
+                <a:cs typeface="微软雅黑" pitchFamily="34" charset="-120"/>
               </a:rPr>
               <a:t>赋值运算符</a:t>
             </a:r>
-            <a:endParaRPr dirty="0" sz="1400" lang="en-US"/>
-          </a:p>
-        </p:txBody>
-      </p:sp>
-      <p:sp>
-        <p:nvSpPr>
-          <p:cNvPr id="1048644" name="Text 2"/>
+            <a:endParaRPr lang="en-US" sz="1400" dirty="0"/>
+          </a:p>
+        </p:txBody>
+      </p:sp>
+      <p:sp>
+        <p:nvSpPr>
+          <p:cNvPr id="4" name="Text 2"/>
           <p:cNvSpPr/>
           <p:nvPr/>
         </p:nvSpPr>
@@ -5772,33 +6315,37 @@
             <a:off x="822960" y="1344168"/>
             <a:ext cx="10545775" cy="731520"/>
           </a:xfrm>
-          <a:prstGeom prst="rect"/>
-          <a:noFill/>
-        </p:spPr>
-        <p:txBody>
-          <a:bodyPr anchor="ctr" rtlCol="0" wrap="square"/>
-          <a:p>
-            <a:pPr algn="l" indent="0" marL="0">
-              <a:buNone/>
-            </a:pPr>
-            <a:r>
-              <a:rPr b="1" dirty="0" sz="2800" lang="en-US">
+          <a:prstGeom prst="rect">
+            <a:avLst/>
+          </a:prstGeom>
+          <a:noFill/>
+          <a:ln/>
+        </p:spPr>
+        <p:txBody>
+          <a:bodyPr wrap="square" rtlCol="0" anchor="ctr"/>
+          <a:lstStyle/>
+          <a:p>
+            <a:pPr algn="l" indent="0" marL="0">
+              <a:buNone/>
+            </a:pPr>
+            <a:r>
+              <a:rPr lang="en-US" sz="2800" b="1" dirty="0">
                 <a:solidFill>
                   <a:srgbClr val="1F2329"/>
                 </a:solidFill>
-                <a:latin typeface="微软雅黑" panose="020B0503020204020204" pitchFamily="34" charset="-122"/>
-                <a:ea typeface="微软雅黑" panose="020B0503020204020204" pitchFamily="34" charset="-122"/>
-                <a:cs typeface="微软雅黑" panose="020B0503020204020204" pitchFamily="34" charset="-120"/>
+                <a:latin typeface="微软雅黑" pitchFamily="34" charset="0"/>
+                <a:ea typeface="微软雅黑" pitchFamily="34" charset="-122"/>
+                <a:cs typeface="微软雅黑" pitchFamily="34" charset="-120"/>
               </a:rPr>
               <a:t>上一节的老朋友，加几个简写</a:t>
             </a:r>
-            <a:endParaRPr dirty="0" sz="2800" lang="en-US"/>
-          </a:p>
-        </p:txBody>
-      </p:sp>
-      <p:sp>
-        <p:nvSpPr>
-          <p:cNvPr id="1048645" name="Shape 3"/>
+            <a:endParaRPr lang="en-US" sz="2800" dirty="0"/>
+          </a:p>
+        </p:txBody>
+      </p:sp>
+      <p:sp>
+        <p:nvSpPr>
+          <p:cNvPr id="5" name="Shape 3"/>
           <p:cNvSpPr/>
           <p:nvPr/>
         </p:nvSpPr>
@@ -5807,7 +6354,9 @@
             <a:off x="822960" y="2395728"/>
             <a:ext cx="10545775" cy="1746504"/>
           </a:xfrm>
-          <a:prstGeom prst="rect"/>
+          <a:prstGeom prst="rect">
+            <a:avLst/>
+          </a:prstGeom>
           <a:solidFill>
             <a:srgbClr val="F5F6F7"/>
           </a:solidFill>
@@ -5821,7 +6370,7 @@
       </p:sp>
       <p:sp>
         <p:nvSpPr>
-          <p:cNvPr id="1048646" name="Text 4"/>
+          <p:cNvPr id="6" name="Text 4"/>
           <p:cNvSpPr/>
           <p:nvPr/>
         </p:nvSpPr>
@@ -5830,11 +6379,15 @@
             <a:off x="1078992" y="2505456"/>
             <a:ext cx="10033711" cy="1527048"/>
           </a:xfrm>
-          <a:prstGeom prst="rect"/>
-          <a:noFill/>
-        </p:spPr>
-        <p:txBody>
-          <a:bodyPr anchor="t" rtlCol="0" wrap="square"/>
+          <a:prstGeom prst="rect">
+            <a:avLst/>
+          </a:prstGeom>
+          <a:noFill/>
+          <a:ln/>
+        </p:spPr>
+        <p:txBody>
+          <a:bodyPr wrap="square" rtlCol="0" anchor="t"/>
+          <a:lstStyle/>
           <a:p>
             <a:pPr algn="l" indent="0" marL="0">
               <a:lnSpc>
@@ -5843,13 +6396,13 @@
               <a:buNone/>
             </a:pPr>
             <a:r>
-              <a:rPr dirty="0" sz="1400" lang="en-US">
+              <a:rPr lang="en-US" sz="1400" dirty="0">
                 <a:solidFill>
                   <a:srgbClr val="1F2329"/>
                 </a:solidFill>
-                <a:latin typeface="Consolas" panose="020B0609020204030204" pitchFamily="34" charset="0"/>
-                <a:ea typeface="Consolas" panose="020B0609020204030204" pitchFamily="34" charset="-122"/>
-                <a:cs typeface="Consolas" panose="020B0609020204030204" pitchFamily="34" charset="-120"/>
+                <a:latin typeface="Consolas" pitchFamily="34" charset="0"/>
+                <a:ea typeface="Consolas" pitchFamily="34" charset="-122"/>
+                <a:cs typeface="Consolas" pitchFamily="34" charset="-120"/>
               </a:rPr>
               <a:t>score = 125;            // 老朋友：先算右边，再放左边
 score += 5;             // 等于 score = score + 5
@@ -5858,13 +6411,13 @@
 score /= 2;             // 等于 score = score / 2
 </a:t>
             </a:r>
-            <a:endParaRPr dirty="0" sz="1400" lang="en-US"/>
-          </a:p>
-        </p:txBody>
-      </p:sp>
-      <p:sp>
-        <p:nvSpPr>
-          <p:cNvPr id="1048647" name="Text 5"/>
+            <a:endParaRPr lang="en-US" sz="1400" dirty="0"/>
+          </a:p>
+        </p:txBody>
+      </p:sp>
+      <p:sp>
+        <p:nvSpPr>
+          <p:cNvPr id="7" name="Text 5"/>
           <p:cNvSpPr/>
           <p:nvPr/>
         </p:nvSpPr>
@@ -5873,44 +6426,54 @@
             <a:off x="896112" y="4343400"/>
             <a:ext cx="10454335" cy="397764"/>
           </a:xfrm>
-          <a:prstGeom prst="rect"/>
-          <a:noFill/>
-        </p:spPr>
-        <p:txBody>
-          <a:bodyPr anchor="t" rtlCol="0" wrap="square"/>
-          <a:p>
-            <a:pPr algn="l" indent="0" marL="0">
-              <a:lnSpc>
-                <a:spcPct val="115000"/>
-              </a:lnSpc>
-              <a:buNone/>
-            </a:pPr>
-            <a:r>
-              <a:rPr b="1" dirty="0" sz="1800" lang="en-US">
+          <a:prstGeom prst="rect">
+            <a:avLst/>
+          </a:prstGeom>
+          <a:noFill/>
+          <a:ln/>
+        </p:spPr>
+        <p:txBody>
+          <a:bodyPr wrap="square" rtlCol="0" anchor="t"/>
+          <a:lstStyle/>
+          <a:p>
+            <a:pPr algn="l" indent="0" marL="0">
+              <a:lnSpc>
+                <a:spcPct val="115000"/>
+              </a:lnSpc>
+              <a:buNone/>
+            </a:pPr>
+            <a:r>
+              <a:rPr lang="en-US" sz="1800" b="1" dirty="0">
                 <a:solidFill>
                   <a:srgbClr val="1F4E9C"/>
                 </a:solidFill>
-                <a:latin typeface="微软雅黑" panose="020B0503020204020204" pitchFamily="34" charset="-122"/>
-                <a:ea typeface="微软雅黑" panose="020B0503020204020204" pitchFamily="34" charset="-122"/>
-                <a:cs typeface="微软雅黑" panose="020B0503020204020204" pitchFamily="34" charset="-120"/>
+                <a:latin typeface="微软雅黑" pitchFamily="34" charset="0"/>
+                <a:ea typeface="微软雅黑" pitchFamily="34" charset="-122"/>
+                <a:cs typeface="微软雅黑" pitchFamily="34" charset="-120"/>
               </a:rPr>
               <a:t>•  </a:t>
             </a:r>
-            <a:r>
-              <a:rPr dirty="0" sz="1800" lang="en-US">
+            <a:pPr algn="l" indent="0" marL="0">
+              <a:lnSpc>
+                <a:spcPct val="115000"/>
+              </a:lnSpc>
+              <a:buNone/>
+            </a:pPr>
+            <a:r>
+              <a:rPr lang="en-US" sz="1800" dirty="0">
                 <a:solidFill>
                   <a:srgbClr val="000000"/>
                 </a:solidFill>
               </a:rPr>
               <a:t>+= -= *= /= 都是简写，读法跟 = 一模一样：从右往左</a:t>
             </a:r>
-            <a:endParaRPr dirty="0" sz="1800" lang="en-US"/>
-          </a:p>
-        </p:txBody>
-      </p:sp>
-      <p:sp>
-        <p:nvSpPr>
-          <p:cNvPr id="1048648" name="Text 6"/>
+            <a:endParaRPr lang="en-US" sz="1800" dirty="0"/>
+          </a:p>
+        </p:txBody>
+      </p:sp>
+      <p:sp>
+        <p:nvSpPr>
+          <p:cNvPr id="8" name="Text 6"/>
           <p:cNvSpPr/>
           <p:nvPr/>
         </p:nvSpPr>
@@ -5919,38 +6482,48 @@
             <a:off x="896112" y="4814316"/>
             <a:ext cx="10454335" cy="397764"/>
           </a:xfrm>
-          <a:prstGeom prst="rect"/>
-          <a:noFill/>
-        </p:spPr>
-        <p:txBody>
-          <a:bodyPr anchor="t" rtlCol="0" wrap="square"/>
-          <a:p>
-            <a:pPr algn="l" indent="0" marL="0">
-              <a:lnSpc>
-                <a:spcPct val="115000"/>
-              </a:lnSpc>
-              <a:buNone/>
-            </a:pPr>
-            <a:r>
-              <a:rPr b="1" dirty="0" sz="1800" lang="en-US">
+          <a:prstGeom prst="rect">
+            <a:avLst/>
+          </a:prstGeom>
+          <a:noFill/>
+          <a:ln/>
+        </p:spPr>
+        <p:txBody>
+          <a:bodyPr wrap="square" rtlCol="0" anchor="t"/>
+          <a:lstStyle/>
+          <a:p>
+            <a:pPr algn="l" indent="0" marL="0">
+              <a:lnSpc>
+                <a:spcPct val="115000"/>
+              </a:lnSpc>
+              <a:buNone/>
+            </a:pPr>
+            <a:r>
+              <a:rPr lang="en-US" sz="1800" b="1" dirty="0">
                 <a:solidFill>
                   <a:srgbClr val="1F4E9C"/>
                 </a:solidFill>
-                <a:latin typeface="微软雅黑" panose="020B0503020204020204" pitchFamily="34" charset="-122"/>
-                <a:ea typeface="微软雅黑" panose="020B0503020204020204" pitchFamily="34" charset="-122"/>
-                <a:cs typeface="微软雅黑" panose="020B0503020204020204" pitchFamily="34" charset="-120"/>
+                <a:latin typeface="微软雅黑" pitchFamily="34" charset="0"/>
+                <a:ea typeface="微软雅黑" pitchFamily="34" charset="-122"/>
+                <a:cs typeface="微软雅黑" pitchFamily="34" charset="-120"/>
               </a:rPr>
               <a:t>•  </a:t>
             </a:r>
-            <a:r>
-              <a:rPr dirty="0" sz="1800" lang="en-US">
+            <a:pPr algn="l" indent="0" marL="0">
+              <a:lnSpc>
+                <a:spcPct val="115000"/>
+              </a:lnSpc>
+              <a:buNone/>
+            </a:pPr>
+            <a:r>
+              <a:rPr lang="en-US" sz="1800" dirty="0">
                 <a:solidFill>
                   <a:srgbClr val="000000"/>
                 </a:solidFill>
               </a:rPr>
               <a:t>数据结构代码里 count++、length++ 到处都是，先认个脸熟</a:t>
             </a:r>
-            <a:endParaRPr dirty="0" sz="1800" lang="en-US"/>
+            <a:endParaRPr lang="en-US" sz="1800" dirty="0"/>
           </a:p>
         </p:txBody>
       </p:sp>
@@ -5964,11 +6537,11 @@
 
 <file path=ppt/slides/slide7.xml><?xml version="1.0" encoding="utf-8"?>
 <p:sld xmlns:a="http://schemas.openxmlformats.org/drawingml/2006/main" xmlns:r="http://schemas.openxmlformats.org/officeDocument/2006/relationships" xmlns:p="http://schemas.openxmlformats.org/presentationml/2006/main">
-  <p:cSld>
+  <p:cSld name="Slide 7">
     <p:bg>
       <p:bgPr>
-        <a:blipFill rotWithShape="1" dpi="0">
-          <a:blip xmlns:r="http://schemas.openxmlformats.org/officeDocument/2006/relationships" r:embed="rId1">
+        <a:blipFill dpi="0" rotWithShape="1">
+          <a:blip r:embed="rId1">
             <a:lum/>
           </a:blip>
           <a:srcRect/>
@@ -5981,7 +6554,7 @@
     </p:bg>
     <p:spTree>
       <p:nvGrpSpPr>
-        <p:cNvPr id="32" name=""/>
+        <p:cNvPr id="1" name=""/>
         <p:cNvGrpSpPr/>
         <p:nvPr/>
       </p:nvGrpSpPr>
@@ -5995,7 +6568,7 @@
       </p:grpSpPr>
       <p:sp>
         <p:nvSpPr>
-          <p:cNvPr id="1048622" name="Text 0"/>
+          <p:cNvPr id="2" name="Text 0"/>
           <p:cNvSpPr/>
           <p:nvPr/>
         </p:nvSpPr>
@@ -6004,33 +6577,37 @@
             <a:off x="10362895" y="6016752"/>
             <a:ext cx="1463040" cy="320040"/>
           </a:xfrm>
-          <a:prstGeom prst="rect"/>
-          <a:noFill/>
-        </p:spPr>
-        <p:txBody>
-          <a:bodyPr anchor="ctr" rtlCol="0" wrap="square"/>
+          <a:prstGeom prst="rect">
+            <a:avLst/>
+          </a:prstGeom>
+          <a:noFill/>
+          <a:ln/>
+        </p:spPr>
+        <p:txBody>
+          <a:bodyPr wrap="square" rtlCol="0" anchor="ctr"/>
+          <a:lstStyle/>
           <a:p>
             <a:pPr algn="r" indent="0" marL="0">
               <a:buNone/>
             </a:pPr>
             <a:r>
-              <a:rPr dirty="0" sz="1000" lang="en-US">
+              <a:rPr lang="en-US" sz="1000" dirty="0">
                 <a:solidFill>
                   <a:srgbClr val="8A9099"/>
                 </a:solidFill>
-                <a:latin typeface="微软雅黑" panose="020B0503020204020204" pitchFamily="34" charset="-122"/>
-                <a:ea typeface="微软雅黑" panose="020B0503020204020204" pitchFamily="34" charset="-122"/>
-                <a:cs typeface="微软雅黑" panose="020B0503020204020204" pitchFamily="34" charset="-120"/>
+                <a:latin typeface="微软雅黑" pitchFamily="34" charset="0"/>
+                <a:ea typeface="微软雅黑" pitchFamily="34" charset="-122"/>
+                <a:cs typeface="微软雅黑" pitchFamily="34" charset="-120"/>
               </a:rPr>
               <a:t>7 / 15</a:t>
             </a:r>
-            <a:endParaRPr dirty="0" sz="1000" lang="en-US"/>
-          </a:p>
-        </p:txBody>
-      </p:sp>
-      <p:sp>
-        <p:nvSpPr>
-          <p:cNvPr id="1048623" name="Text 1"/>
+            <a:endParaRPr lang="en-US" sz="1000" dirty="0"/>
+          </a:p>
+        </p:txBody>
+      </p:sp>
+      <p:sp>
+        <p:nvSpPr>
+          <p:cNvPr id="3" name="Text 1"/>
           <p:cNvSpPr/>
           <p:nvPr/>
         </p:nvSpPr>
@@ -6039,33 +6616,37 @@
             <a:off x="822960" y="960120"/>
             <a:ext cx="10545775" cy="365760"/>
           </a:xfrm>
-          <a:prstGeom prst="rect"/>
-          <a:noFill/>
-        </p:spPr>
-        <p:txBody>
-          <a:bodyPr anchor="ctr" rtlCol="0" wrap="square"/>
-          <a:p>
-            <a:pPr algn="l" indent="0" marL="0">
-              <a:buNone/>
-            </a:pPr>
-            <a:r>
-              <a:rPr b="1" dirty="0" sz="1400" lang="en-US">
+          <a:prstGeom prst="rect">
+            <a:avLst/>
+          </a:prstGeom>
+          <a:noFill/>
+          <a:ln/>
+        </p:spPr>
+        <p:txBody>
+          <a:bodyPr wrap="square" rtlCol="0" anchor="ctr"/>
+          <a:lstStyle/>
+          <a:p>
+            <a:pPr algn="l" indent="0" marL="0">
+              <a:buNone/>
+            </a:pPr>
+            <a:r>
+              <a:rPr lang="en-US" sz="1400" b="1" dirty="0">
                 <a:solidFill>
                   <a:srgbClr val="1F4E9C"/>
                 </a:solidFill>
-                <a:latin typeface="微软雅黑" panose="020B0503020204020204" pitchFamily="34" charset="-122"/>
-                <a:ea typeface="微软雅黑" panose="020B0503020204020204" pitchFamily="34" charset="-122"/>
-                <a:cs typeface="微软雅黑" panose="020B0503020204020204" pitchFamily="34" charset="-120"/>
+                <a:latin typeface="微软雅黑" pitchFamily="34" charset="0"/>
+                <a:ea typeface="微软雅黑" pitchFamily="34" charset="-122"/>
+                <a:cs typeface="微软雅黑" pitchFamily="34" charset="-120"/>
               </a:rPr>
               <a:t>关系运算符</a:t>
             </a:r>
-            <a:endParaRPr dirty="0" sz="1400" lang="en-US"/>
-          </a:p>
-        </p:txBody>
-      </p:sp>
-      <p:sp>
-        <p:nvSpPr>
-          <p:cNvPr id="1048624" name="Text 2"/>
+            <a:endParaRPr lang="en-US" sz="1400" dirty="0"/>
+          </a:p>
+        </p:txBody>
+      </p:sp>
+      <p:sp>
+        <p:nvSpPr>
+          <p:cNvPr id="4" name="Text 2"/>
           <p:cNvSpPr/>
           <p:nvPr/>
         </p:nvSpPr>
@@ -6074,33 +6655,37 @@
             <a:off x="822960" y="1344168"/>
             <a:ext cx="10545775" cy="731520"/>
           </a:xfrm>
-          <a:prstGeom prst="rect"/>
-          <a:noFill/>
-        </p:spPr>
-        <p:txBody>
-          <a:bodyPr anchor="ctr" rtlCol="0" wrap="square"/>
-          <a:p>
-            <a:pPr algn="l" indent="0" marL="0">
-              <a:buNone/>
-            </a:pPr>
-            <a:r>
-              <a:rPr b="1" dirty="0" sz="2800" lang="en-US">
+          <a:prstGeom prst="rect">
+            <a:avLst/>
+          </a:prstGeom>
+          <a:noFill/>
+          <a:ln/>
+        </p:spPr>
+        <p:txBody>
+          <a:bodyPr wrap="square" rtlCol="0" anchor="ctr"/>
+          <a:lstStyle/>
+          <a:p>
+            <a:pPr algn="l" indent="0" marL="0">
+              <a:buNone/>
+            </a:pPr>
+            <a:r>
+              <a:rPr lang="en-US" sz="2800" b="1" dirty="0">
                 <a:solidFill>
                   <a:srgbClr val="1F2329"/>
                 </a:solidFill>
-                <a:latin typeface="微软雅黑" panose="020B0503020204020204" pitchFamily="34" charset="-122"/>
-                <a:ea typeface="微软雅黑" panose="020B0503020204020204" pitchFamily="34" charset="-122"/>
-                <a:cs typeface="微软雅黑" panose="020B0503020204020204" pitchFamily="34" charset="-120"/>
+                <a:latin typeface="微软雅黑" pitchFamily="34" charset="0"/>
+                <a:ea typeface="微软雅黑" pitchFamily="34" charset="-122"/>
+                <a:cs typeface="微软雅黑" pitchFamily="34" charset="-120"/>
               </a:rPr>
               <a:t>比较大小，结果是个bool</a:t>
             </a:r>
-            <a:endParaRPr dirty="0" sz="2800" lang="en-US"/>
-          </a:p>
-        </p:txBody>
-      </p:sp>
-      <p:sp>
-        <p:nvSpPr>
-          <p:cNvPr id="1048625" name="Shape 3"/>
+            <a:endParaRPr lang="en-US" sz="2800" dirty="0"/>
+          </a:p>
+        </p:txBody>
+      </p:sp>
+      <p:sp>
+        <p:nvSpPr>
+          <p:cNvPr id="5" name="Shape 3"/>
           <p:cNvSpPr/>
           <p:nvPr/>
         </p:nvSpPr>
@@ -6109,7 +6694,9 @@
             <a:off x="822960" y="2395728"/>
             <a:ext cx="10545775" cy="1271016"/>
           </a:xfrm>
-          <a:prstGeom prst="rect"/>
+          <a:prstGeom prst="rect">
+            <a:avLst/>
+          </a:prstGeom>
           <a:solidFill>
             <a:srgbClr val="F5F6F7"/>
           </a:solidFill>
@@ -6123,7 +6710,7 @@
       </p:sp>
       <p:sp>
         <p:nvSpPr>
-          <p:cNvPr id="1048626" name="Text 4"/>
+          <p:cNvPr id="6" name="Text 4"/>
           <p:cNvSpPr/>
           <p:nvPr/>
         </p:nvSpPr>
@@ -6132,11 +6719,15 @@
             <a:off x="1078992" y="2505456"/>
             <a:ext cx="10033711" cy="1051560"/>
           </a:xfrm>
-          <a:prstGeom prst="rect"/>
-          <a:noFill/>
-        </p:spPr>
-        <p:txBody>
-          <a:bodyPr anchor="t" rtlCol="0" wrap="square"/>
+          <a:prstGeom prst="rect">
+            <a:avLst/>
+          </a:prstGeom>
+          <a:noFill/>
+          <a:ln/>
+        </p:spPr>
+        <p:txBody>
+          <a:bodyPr wrap="square" rtlCol="0" anchor="t"/>
+          <a:lstStyle/>
           <a:p>
             <a:pPr algn="l" indent="0" marL="0">
               <a:lnSpc>
@@ -6145,26 +6736,26 @@
               <a:buNone/>
             </a:pPr>
             <a:r>
-              <a:rPr dirty="0" sz="1400" lang="en-US">
+              <a:rPr lang="en-US" sz="1400" dirty="0">
                 <a:solidFill>
                   <a:srgbClr val="1F2329"/>
                 </a:solidFill>
-                <a:latin typeface="Consolas" panose="020B0609020204030204" pitchFamily="34" charset="0"/>
-                <a:ea typeface="Consolas" panose="020B0609020204030204" pitchFamily="34" charset="-122"/>
-                <a:cs typeface="Consolas" panose="020B0609020204030204" pitchFamily="34" charset="-120"/>
+                <a:latin typeface="Consolas" pitchFamily="34" charset="0"/>
+                <a:ea typeface="Consolas" pitchFamily="34" charset="-122"/>
+                <a:cs typeface="Consolas" pitchFamily="34" charset="-120"/>
               </a:rPr>
               <a:t>a &gt; b    a &lt; b    a &gt;= b    a &lt;= b
 a == b                             // 等于，两个等号！
 a != b                             // 不等于
 </a:t>
             </a:r>
-            <a:endParaRPr dirty="0" sz="1400" lang="en-US"/>
-          </a:p>
-        </p:txBody>
-      </p:sp>
-      <p:sp>
-        <p:nvSpPr>
-          <p:cNvPr id="1048627" name="Text 5"/>
+            <a:endParaRPr lang="en-US" sz="1400" dirty="0"/>
+          </a:p>
+        </p:txBody>
+      </p:sp>
+      <p:sp>
+        <p:nvSpPr>
+          <p:cNvPr id="7" name="Text 5"/>
           <p:cNvSpPr/>
           <p:nvPr/>
         </p:nvSpPr>
@@ -6173,52 +6764,68 @@
             <a:off x="896112" y="3867912"/>
             <a:ext cx="10454335" cy="397764"/>
           </a:xfrm>
-          <a:prstGeom prst="rect"/>
-          <a:noFill/>
-        </p:spPr>
-        <p:txBody>
-          <a:bodyPr anchor="t" rtlCol="0" wrap="square"/>
-          <a:p>
-            <a:pPr algn="l" indent="0" marL="0">
-              <a:lnSpc>
-                <a:spcPct val="115000"/>
-              </a:lnSpc>
-              <a:buNone/>
-            </a:pPr>
-            <a:r>
-              <a:rPr b="1" dirty="0" sz="1800" lang="en-US">
+          <a:prstGeom prst="rect">
+            <a:avLst/>
+          </a:prstGeom>
+          <a:noFill/>
+          <a:ln/>
+        </p:spPr>
+        <p:txBody>
+          <a:bodyPr wrap="square" rtlCol="0" anchor="t"/>
+          <a:lstStyle/>
+          <a:p>
+            <a:pPr algn="l" indent="0" marL="0">
+              <a:lnSpc>
+                <a:spcPct val="115000"/>
+              </a:lnSpc>
+              <a:buNone/>
+            </a:pPr>
+            <a:r>
+              <a:rPr lang="en-US" sz="1800" b="1" dirty="0">
                 <a:solidFill>
                   <a:srgbClr val="1F4E9C"/>
                 </a:solidFill>
-                <a:latin typeface="微软雅黑" panose="020B0503020204020204" pitchFamily="34" charset="-122"/>
-                <a:ea typeface="微软雅黑" panose="020B0503020204020204" pitchFamily="34" charset="-122"/>
-                <a:cs typeface="微软雅黑" panose="020B0503020204020204" pitchFamily="34" charset="-120"/>
+                <a:latin typeface="微软雅黑" pitchFamily="34" charset="0"/>
+                <a:ea typeface="微软雅黑" pitchFamily="34" charset="-122"/>
+                <a:cs typeface="微软雅黑" pitchFamily="34" charset="-120"/>
               </a:rPr>
               <a:t>•  </a:t>
             </a:r>
-            <a:r>
-              <a:rPr dirty="0" sz="1800" lang="en-US">
+            <a:pPr algn="l" indent="0" marL="0">
+              <a:lnSpc>
+                <a:spcPct val="115000"/>
+              </a:lnSpc>
+              <a:buNone/>
+            </a:pPr>
+            <a:r>
+              <a:rPr lang="en-US" sz="1800" dirty="0">
                 <a:solidFill>
                   <a:srgbClr val="000000"/>
                 </a:solidFill>
               </a:rPr>
               <a:t>关系运算的结果是上一节讲的bool：</a:t>
             </a:r>
-            <a:r>
-              <a:rPr b="1" dirty="0" sz="1800" lang="en-US">
+            <a:pPr algn="l" indent="0" marL="0">
+              <a:lnSpc>
+                <a:spcPct val="115000"/>
+              </a:lnSpc>
+              <a:buNone/>
+            </a:pPr>
+            <a:r>
+              <a:rPr lang="en-US" sz="1800" b="1" dirty="0">
                 <a:solidFill>
                   <a:srgbClr val="000000"/>
                 </a:solidFill>
               </a:rPr>
               <a:t>对就是true，错就是false</a:t>
             </a:r>
-            <a:endParaRPr dirty="0" sz="1800" lang="en-US"/>
-          </a:p>
-        </p:txBody>
-      </p:sp>
-      <p:sp>
-        <p:nvSpPr>
-          <p:cNvPr id="1048628" name="Text 6"/>
+            <a:endParaRPr lang="en-US" sz="1800" dirty="0"/>
+          </a:p>
+        </p:txBody>
+      </p:sp>
+      <p:sp>
+        <p:nvSpPr>
+          <p:cNvPr id="8" name="Text 6"/>
           <p:cNvSpPr/>
           <p:nvPr/>
         </p:nvSpPr>
@@ -6227,52 +6834,68 @@
             <a:off x="896112" y="4338828"/>
             <a:ext cx="10454335" cy="397764"/>
           </a:xfrm>
-          <a:prstGeom prst="rect"/>
-          <a:noFill/>
-        </p:spPr>
-        <p:txBody>
-          <a:bodyPr anchor="t" rtlCol="0" wrap="square"/>
-          <a:p>
-            <a:pPr algn="l" indent="0" marL="0">
-              <a:lnSpc>
-                <a:spcPct val="115000"/>
-              </a:lnSpc>
-              <a:buNone/>
-            </a:pPr>
-            <a:r>
-              <a:rPr b="1" dirty="0" sz="1800" lang="en-US">
+          <a:prstGeom prst="rect">
+            <a:avLst/>
+          </a:prstGeom>
+          <a:noFill/>
+          <a:ln/>
+        </p:spPr>
+        <p:txBody>
+          <a:bodyPr wrap="square" rtlCol="0" anchor="t"/>
+          <a:lstStyle/>
+          <a:p>
+            <a:pPr algn="l" indent="0" marL="0">
+              <a:lnSpc>
+                <a:spcPct val="115000"/>
+              </a:lnSpc>
+              <a:buNone/>
+            </a:pPr>
+            <a:r>
+              <a:rPr lang="en-US" sz="1800" b="1" dirty="0">
                 <a:solidFill>
                   <a:srgbClr val="1F4E9C"/>
                 </a:solidFill>
-                <a:latin typeface="微软雅黑" panose="020B0503020204020204" pitchFamily="34" charset="-122"/>
-                <a:ea typeface="微软雅黑" panose="020B0503020204020204" pitchFamily="34" charset="-122"/>
-                <a:cs typeface="微软雅黑" panose="020B0503020204020204" pitchFamily="34" charset="-120"/>
+                <a:latin typeface="微软雅黑" pitchFamily="34" charset="0"/>
+                <a:ea typeface="微软雅黑" pitchFamily="34" charset="-122"/>
+                <a:cs typeface="微软雅黑" pitchFamily="34" charset="-120"/>
               </a:rPr>
               <a:t>•  </a:t>
             </a:r>
-            <a:r>
-              <a:rPr b="1" dirty="0" sz="1800" lang="en-US">
+            <a:pPr algn="l" indent="0" marL="0">
+              <a:lnSpc>
+                <a:spcPct val="115000"/>
+              </a:lnSpc>
+              <a:buNone/>
+            </a:pPr>
+            <a:r>
+              <a:rPr lang="en-US" sz="1800" b="1" dirty="0">
                 <a:solidFill>
                   <a:srgbClr val="000000"/>
                 </a:solidFill>
               </a:rPr>
               <a:t>== 和 = 不是一回事</a:t>
             </a:r>
-            <a:r>
-              <a:rPr dirty="0" sz="1800" lang="en-US">
+            <a:pPr algn="l" indent="0" marL="0">
+              <a:lnSpc>
+                <a:spcPct val="115000"/>
+              </a:lnSpc>
+              <a:buNone/>
+            </a:pPr>
+            <a:r>
+              <a:rPr lang="en-US" sz="1800" dirty="0">
                 <a:solidFill>
                   <a:srgbClr val="000000"/>
                 </a:solidFill>
               </a:rPr>
               <a:t>：=是赋值，==才是比较</a:t>
             </a:r>
-            <a:endParaRPr dirty="0" sz="1800" lang="en-US"/>
-          </a:p>
-        </p:txBody>
-      </p:sp>
-      <p:sp>
-        <p:nvSpPr>
-          <p:cNvPr id="1048629" name="Text 7"/>
+            <a:endParaRPr lang="en-US" sz="1800" dirty="0"/>
+          </a:p>
+        </p:txBody>
+      </p:sp>
+      <p:sp>
+        <p:nvSpPr>
+          <p:cNvPr id="9" name="Text 7"/>
           <p:cNvSpPr/>
           <p:nvPr/>
         </p:nvSpPr>
@@ -6281,38 +6904,48 @@
             <a:off x="896112" y="4809744"/>
             <a:ext cx="10454335" cy="740664"/>
           </a:xfrm>
-          <a:prstGeom prst="rect"/>
-          <a:noFill/>
-        </p:spPr>
-        <p:txBody>
-          <a:bodyPr anchor="t" rtlCol="0" wrap="square"/>
-          <a:p>
-            <a:pPr algn="l" indent="0" marL="0">
-              <a:lnSpc>
-                <a:spcPct val="115000"/>
-              </a:lnSpc>
-              <a:buNone/>
-            </a:pPr>
-            <a:r>
-              <a:rPr b="1" dirty="0" sz="1800" lang="en-US">
+          <a:prstGeom prst="rect">
+            <a:avLst/>
+          </a:prstGeom>
+          <a:noFill/>
+          <a:ln/>
+        </p:spPr>
+        <p:txBody>
+          <a:bodyPr wrap="square" rtlCol="0" anchor="t"/>
+          <a:lstStyle/>
+          <a:p>
+            <a:pPr algn="l" indent="0" marL="0">
+              <a:lnSpc>
+                <a:spcPct val="115000"/>
+              </a:lnSpc>
+              <a:buNone/>
+            </a:pPr>
+            <a:r>
+              <a:rPr lang="en-US" sz="1800" b="1" dirty="0">
                 <a:solidFill>
                   <a:srgbClr val="1F4E9C"/>
                 </a:solidFill>
-                <a:latin typeface="微软雅黑" panose="020B0503020204020204" pitchFamily="34" charset="-122"/>
-                <a:ea typeface="微软雅黑" panose="020B0503020204020204" pitchFamily="34" charset="-122"/>
-                <a:cs typeface="微软雅黑" panose="020B0503020204020204" pitchFamily="34" charset="-120"/>
+                <a:latin typeface="微软雅黑" pitchFamily="34" charset="0"/>
+                <a:ea typeface="微软雅黑" pitchFamily="34" charset="-122"/>
+                <a:cs typeface="微软雅黑" pitchFamily="34" charset="-120"/>
               </a:rPr>
               <a:t>•  </a:t>
             </a:r>
-            <a:r>
-              <a:rPr dirty="0" sz="1800" lang="en-US">
+            <a:pPr algn="l" indent="0" marL="0">
+              <a:lnSpc>
+                <a:spcPct val="115000"/>
+              </a:lnSpc>
+              <a:buNone/>
+            </a:pPr>
+            <a:r>
+              <a:rPr lang="en-US" sz="1800" dirty="0">
                 <a:solidFill>
                   <a:srgbClr val="000000"/>
                 </a:solidFill>
               </a:rPr>
               <a:t>写成 a = 3 是往盒子里放3，a == 3 才是问"a是不是3"——混用是初学头号错误</a:t>
             </a:r>
-            <a:endParaRPr dirty="0" sz="1800" lang="en-US"/>
+            <a:endParaRPr lang="en-US" sz="1800" dirty="0"/>
           </a:p>
         </p:txBody>
       </p:sp>
@@ -6326,11 +6959,11 @@
 
 <file path=ppt/slides/slide8.xml><?xml version="1.0" encoding="utf-8"?>
 <p:sld xmlns:a="http://schemas.openxmlformats.org/drawingml/2006/main" xmlns:r="http://schemas.openxmlformats.org/officeDocument/2006/relationships" xmlns:p="http://schemas.openxmlformats.org/presentationml/2006/main">
-  <p:cSld>
+  <p:cSld name="Slide 8">
     <p:bg>
       <p:bgPr>
-        <a:blipFill rotWithShape="1" dpi="0">
-          <a:blip xmlns:r="http://schemas.openxmlformats.org/officeDocument/2006/relationships" r:embed="rId1">
+        <a:blipFill dpi="0" rotWithShape="1">
+          <a:blip r:embed="rId1">
             <a:lum/>
           </a:blip>
           <a:srcRect/>
@@ -6343,7 +6976,7 @@
     </p:bg>
     <p:spTree>
       <p:nvGrpSpPr>
-        <p:cNvPr id="26" name=""/>
+        <p:cNvPr id="1" name=""/>
         <p:cNvGrpSpPr/>
         <p:nvPr/>
       </p:nvGrpSpPr>
@@ -6357,7 +6990,7 @@
       </p:grpSpPr>
       <p:sp>
         <p:nvSpPr>
-          <p:cNvPr id="1048599" name="Text 0"/>
+          <p:cNvPr id="2" name="Text 0"/>
           <p:cNvSpPr/>
           <p:nvPr/>
         </p:nvSpPr>
@@ -6366,33 +6999,37 @@
             <a:off x="10362895" y="6016752"/>
             <a:ext cx="1463040" cy="320040"/>
           </a:xfrm>
-          <a:prstGeom prst="rect"/>
-          <a:noFill/>
-        </p:spPr>
-        <p:txBody>
-          <a:bodyPr anchor="ctr" rtlCol="0" wrap="square"/>
+          <a:prstGeom prst="rect">
+            <a:avLst/>
+          </a:prstGeom>
+          <a:noFill/>
+          <a:ln/>
+        </p:spPr>
+        <p:txBody>
+          <a:bodyPr wrap="square" rtlCol="0" anchor="ctr"/>
+          <a:lstStyle/>
           <a:p>
             <a:pPr algn="r" indent="0" marL="0">
               <a:buNone/>
             </a:pPr>
             <a:r>
-              <a:rPr dirty="0" sz="1000" lang="en-US">
+              <a:rPr lang="en-US" sz="1000" dirty="0">
                 <a:solidFill>
                   <a:srgbClr val="8A9099"/>
                 </a:solidFill>
-                <a:latin typeface="微软雅黑" panose="020B0503020204020204" pitchFamily="34" charset="-122"/>
-                <a:ea typeface="微软雅黑" panose="020B0503020204020204" pitchFamily="34" charset="-122"/>
-                <a:cs typeface="微软雅黑" panose="020B0503020204020204" pitchFamily="34" charset="-120"/>
+                <a:latin typeface="微软雅黑" pitchFamily="34" charset="0"/>
+                <a:ea typeface="微软雅黑" pitchFamily="34" charset="-122"/>
+                <a:cs typeface="微软雅黑" pitchFamily="34" charset="-120"/>
               </a:rPr>
               <a:t>8 / 15</a:t>
             </a:r>
-            <a:endParaRPr dirty="0" sz="1000" lang="en-US"/>
-          </a:p>
-        </p:txBody>
-      </p:sp>
-      <p:sp>
-        <p:nvSpPr>
-          <p:cNvPr id="1048600" name="Text 1"/>
+            <a:endParaRPr lang="en-US" sz="1000" dirty="0"/>
+          </a:p>
+        </p:txBody>
+      </p:sp>
+      <p:sp>
+        <p:nvSpPr>
+          <p:cNvPr id="3" name="Text 1"/>
           <p:cNvSpPr/>
           <p:nvPr/>
         </p:nvSpPr>
@@ -6401,33 +7038,37 @@
             <a:off x="822960" y="960120"/>
             <a:ext cx="10545775" cy="365760"/>
           </a:xfrm>
-          <a:prstGeom prst="rect"/>
-          <a:noFill/>
-        </p:spPr>
-        <p:txBody>
-          <a:bodyPr anchor="ctr" rtlCol="0" wrap="square"/>
-          <a:p>
-            <a:pPr algn="l" indent="0" marL="0">
-              <a:buNone/>
-            </a:pPr>
-            <a:r>
-              <a:rPr b="1" dirty="0" sz="1400" lang="en-US">
+          <a:prstGeom prst="rect">
+            <a:avLst/>
+          </a:prstGeom>
+          <a:noFill/>
+          <a:ln/>
+        </p:spPr>
+        <p:txBody>
+          <a:bodyPr wrap="square" rtlCol="0" anchor="ctr"/>
+          <a:lstStyle/>
+          <a:p>
+            <a:pPr algn="l" indent="0" marL="0">
+              <a:buNone/>
+            </a:pPr>
+            <a:r>
+              <a:rPr lang="en-US" sz="1400" b="1" dirty="0">
                 <a:solidFill>
                   <a:srgbClr val="1F4E9C"/>
                 </a:solidFill>
-                <a:latin typeface="微软雅黑" panose="020B0503020204020204" pitchFamily="34" charset="-122"/>
-                <a:ea typeface="微软雅黑" panose="020B0503020204020204" pitchFamily="34" charset="-122"/>
-                <a:cs typeface="微软雅黑" panose="020B0503020204020204" pitchFamily="34" charset="-120"/>
+                <a:latin typeface="微软雅黑" pitchFamily="34" charset="0"/>
+                <a:ea typeface="微软雅黑" pitchFamily="34" charset="-122"/>
+                <a:cs typeface="微软雅黑" pitchFamily="34" charset="-120"/>
               </a:rPr>
               <a:t>本节难忘时刻</a:t>
             </a:r>
-            <a:endParaRPr dirty="0" sz="1400" lang="en-US"/>
-          </a:p>
-        </p:txBody>
-      </p:sp>
-      <p:sp>
-        <p:nvSpPr>
-          <p:cNvPr id="1048601" name="Text 2"/>
+            <a:endParaRPr lang="en-US" sz="1400" dirty="0"/>
+          </a:p>
+        </p:txBody>
+      </p:sp>
+      <p:sp>
+        <p:nvSpPr>
+          <p:cNvPr id="4" name="Text 2"/>
           <p:cNvSpPr/>
           <p:nvPr/>
         </p:nvSpPr>
@@ -6436,33 +7077,37 @@
             <a:off x="822960" y="1344168"/>
             <a:ext cx="10545775" cy="731520"/>
           </a:xfrm>
-          <a:prstGeom prst="rect"/>
-          <a:noFill/>
-        </p:spPr>
-        <p:txBody>
-          <a:bodyPr anchor="ctr" rtlCol="0" wrap="square"/>
-          <a:p>
-            <a:pPr algn="l" indent="0" marL="0">
-              <a:buNone/>
-            </a:pPr>
-            <a:r>
-              <a:rPr b="1" dirty="0" sz="2800" lang="en-US">
+          <a:prstGeom prst="rect">
+            <a:avLst/>
+          </a:prstGeom>
+          <a:noFill/>
+          <a:ln/>
+        </p:spPr>
+        <p:txBody>
+          <a:bodyPr wrap="square" rtlCol="0" anchor="ctr"/>
+          <a:lstStyle/>
+          <a:p>
+            <a:pPr algn="l" indent="0" marL="0">
+              <a:buNone/>
+            </a:pPr>
+            <a:r>
+              <a:rPr lang="en-US" sz="2800" b="1" dirty="0">
                 <a:solidFill>
                   <a:srgbClr val="1F2329"/>
                 </a:solidFill>
-                <a:latin typeface="微软雅黑" panose="020B0503020204020204" pitchFamily="34" charset="-122"/>
-                <a:ea typeface="微软雅黑" panose="020B0503020204020204" pitchFamily="34" charset="-122"/>
-                <a:cs typeface="微软雅黑" panose="020B0503020204020204" pitchFamily="34" charset="-120"/>
+                <a:latin typeface="微软雅黑" pitchFamily="34" charset="0"/>
+                <a:ea typeface="微软雅黑" pitchFamily="34" charset="-122"/>
+                <a:cs typeface="微软雅黑" pitchFamily="34" charset="-120"/>
               </a:rPr>
               <a:t>0 &lt; x &lt; 10 不是你以为的意思</a:t>
             </a:r>
-            <a:endParaRPr dirty="0" sz="2800" lang="en-US"/>
-          </a:p>
-        </p:txBody>
-      </p:sp>
-      <p:sp>
-        <p:nvSpPr>
-          <p:cNvPr id="1048602" name="Shape 3"/>
+            <a:endParaRPr lang="en-US" sz="2800" dirty="0"/>
+          </a:p>
+        </p:txBody>
+      </p:sp>
+      <p:sp>
+        <p:nvSpPr>
+          <p:cNvPr id="5" name="Shape 3"/>
           <p:cNvSpPr/>
           <p:nvPr/>
         </p:nvSpPr>
@@ -6471,7 +7116,9 @@
             <a:off x="822960" y="2395728"/>
             <a:ext cx="10545775" cy="795528"/>
           </a:xfrm>
-          <a:prstGeom prst="rect"/>
+          <a:prstGeom prst="rect">
+            <a:avLst/>
+          </a:prstGeom>
           <a:solidFill>
             <a:srgbClr val="F5F6F7"/>
           </a:solidFill>
@@ -6485,7 +7132,7 @@
       </p:sp>
       <p:sp>
         <p:nvSpPr>
-          <p:cNvPr id="1048603" name="Text 4"/>
+          <p:cNvPr id="6" name="Text 4"/>
           <p:cNvSpPr/>
           <p:nvPr/>
         </p:nvSpPr>
@@ -6494,11 +7141,15 @@
             <a:off x="1078992" y="2505456"/>
             <a:ext cx="10033711" cy="576072"/>
           </a:xfrm>
-          <a:prstGeom prst="rect"/>
-          <a:noFill/>
-        </p:spPr>
-        <p:txBody>
-          <a:bodyPr anchor="t" rtlCol="0" wrap="square"/>
+          <a:prstGeom prst="rect">
+            <a:avLst/>
+          </a:prstGeom>
+          <a:noFill/>
+          <a:ln/>
+        </p:spPr>
+        <p:txBody>
+          <a:bodyPr wrap="square" rtlCol="0" anchor="t"/>
+          <a:lstStyle/>
           <a:p>
             <a:pPr algn="l" indent="0" marL="0">
               <a:lnSpc>
@@ -6507,24 +7158,24 @@
               <a:buNone/>
             </a:pPr>
             <a:r>
-              <a:rPr dirty="0" sz="1400" lang="en-US">
+              <a:rPr lang="en-US" sz="1400" dirty="0">
                 <a:solidFill>
                   <a:srgbClr val="1F2329"/>
                 </a:solidFill>
-                <a:latin typeface="Consolas" panose="020B0609020204030204" pitchFamily="34" charset="0"/>
-                <a:ea typeface="Consolas" panose="020B0609020204030204" pitchFamily="34" charset="-122"/>
-                <a:cs typeface="Consolas" panose="020B0609020204030204" pitchFamily="34" charset="-120"/>
+                <a:latin typeface="Consolas" pitchFamily="34" charset="0"/>
+                <a:ea typeface="Consolas" pitchFamily="34" charset="-122"/>
+                <a:cs typeface="Consolas" pitchFamily="34" charset="-120"/>
               </a:rPr>
               <a:t>0 &lt; x &lt; 10       // 从左往右算：先算 0&lt;x，结果再和10比
 </a:t>
             </a:r>
-            <a:endParaRPr dirty="0" sz="1400" lang="en-US"/>
-          </a:p>
-        </p:txBody>
-      </p:sp>
-      <p:sp>
-        <p:nvSpPr>
-          <p:cNvPr id="1048604" name="Text 5"/>
+            <a:endParaRPr lang="en-US" sz="1400" dirty="0"/>
+          </a:p>
+        </p:txBody>
+      </p:sp>
+      <p:sp>
+        <p:nvSpPr>
+          <p:cNvPr id="7" name="Text 5"/>
           <p:cNvSpPr/>
           <p:nvPr/>
         </p:nvSpPr>
@@ -6533,44 +7184,54 @@
             <a:off x="896112" y="3392424"/>
             <a:ext cx="10454335" cy="397764"/>
           </a:xfrm>
-          <a:prstGeom prst="rect"/>
-          <a:noFill/>
-        </p:spPr>
-        <p:txBody>
-          <a:bodyPr anchor="t" rtlCol="0" wrap="square"/>
-          <a:p>
-            <a:pPr algn="l" indent="0" marL="0">
-              <a:lnSpc>
-                <a:spcPct val="115000"/>
-              </a:lnSpc>
-              <a:buNone/>
-            </a:pPr>
-            <a:r>
-              <a:rPr b="1" dirty="0" sz="1800" lang="en-US">
+          <a:prstGeom prst="rect">
+            <a:avLst/>
+          </a:prstGeom>
+          <a:noFill/>
+          <a:ln/>
+        </p:spPr>
+        <p:txBody>
+          <a:bodyPr wrap="square" rtlCol="0" anchor="t"/>
+          <a:lstStyle/>
+          <a:p>
+            <a:pPr algn="l" indent="0" marL="0">
+              <a:lnSpc>
+                <a:spcPct val="115000"/>
+              </a:lnSpc>
+              <a:buNone/>
+            </a:pPr>
+            <a:r>
+              <a:rPr lang="en-US" sz="1800" b="1" dirty="0">
                 <a:solidFill>
                   <a:srgbClr val="1F4E9C"/>
                 </a:solidFill>
-                <a:latin typeface="微软雅黑" panose="020B0503020204020204" pitchFamily="34" charset="-122"/>
-                <a:ea typeface="微软雅黑" panose="020B0503020204020204" pitchFamily="34" charset="-122"/>
-                <a:cs typeface="微软雅黑" panose="020B0503020204020204" pitchFamily="34" charset="-120"/>
+                <a:latin typeface="微软雅黑" pitchFamily="34" charset="0"/>
+                <a:ea typeface="微软雅黑" pitchFamily="34" charset="-122"/>
+                <a:cs typeface="微软雅黑" pitchFamily="34" charset="-120"/>
               </a:rPr>
               <a:t>•  </a:t>
             </a:r>
-            <a:r>
-              <a:rPr dirty="0" sz="1800" lang="en-US">
+            <a:pPr algn="l" indent="0" marL="0">
+              <a:lnSpc>
+                <a:spcPct val="115000"/>
+              </a:lnSpc>
+              <a:buNone/>
+            </a:pPr>
+            <a:r>
+              <a:rPr lang="en-US" sz="1800" dirty="0">
                 <a:solidFill>
                   <a:srgbClr val="000000"/>
                 </a:solidFill>
               </a:rPr>
               <a:t>C语言不能连着写比较，它从左往右一步一步算</a:t>
             </a:r>
-            <a:endParaRPr dirty="0" sz="1800" lang="en-US"/>
-          </a:p>
-        </p:txBody>
-      </p:sp>
-      <p:sp>
-        <p:nvSpPr>
-          <p:cNvPr id="1048605" name="Text 6"/>
+            <a:endParaRPr lang="en-US" sz="1800" dirty="0"/>
+          </a:p>
+        </p:txBody>
+      </p:sp>
+      <p:sp>
+        <p:nvSpPr>
+          <p:cNvPr id="8" name="Text 6"/>
           <p:cNvSpPr/>
           <p:nvPr/>
         </p:nvSpPr>
@@ -6579,52 +7240,68 @@
             <a:off x="896112" y="3863340"/>
             <a:ext cx="10454335" cy="397764"/>
           </a:xfrm>
-          <a:prstGeom prst="rect"/>
-          <a:noFill/>
-        </p:spPr>
-        <p:txBody>
-          <a:bodyPr anchor="t" rtlCol="0" wrap="square"/>
-          <a:p>
-            <a:pPr algn="l" indent="0" marL="0">
-              <a:lnSpc>
-                <a:spcPct val="115000"/>
-              </a:lnSpc>
-              <a:buNone/>
-            </a:pPr>
-            <a:r>
-              <a:rPr b="1" dirty="0" sz="1800" lang="en-US">
+          <a:prstGeom prst="rect">
+            <a:avLst/>
+          </a:prstGeom>
+          <a:noFill/>
+          <a:ln/>
+        </p:spPr>
+        <p:txBody>
+          <a:bodyPr wrap="square" rtlCol="0" anchor="t"/>
+          <a:lstStyle/>
+          <a:p>
+            <a:pPr algn="l" indent="0" marL="0">
+              <a:lnSpc>
+                <a:spcPct val="115000"/>
+              </a:lnSpc>
+              <a:buNone/>
+            </a:pPr>
+            <a:r>
+              <a:rPr lang="en-US" sz="1800" b="1" dirty="0">
                 <a:solidFill>
                   <a:srgbClr val="1F4E9C"/>
                 </a:solidFill>
-                <a:latin typeface="微软雅黑" panose="020B0503020204020204" pitchFamily="34" charset="-122"/>
-                <a:ea typeface="微软雅黑" panose="020B0503020204020204" pitchFamily="34" charset="-122"/>
-                <a:cs typeface="微软雅黑" panose="020B0503020204020204" pitchFamily="34" charset="-120"/>
+                <a:latin typeface="微软雅黑" pitchFamily="34" charset="0"/>
+                <a:ea typeface="微软雅黑" pitchFamily="34" charset="-122"/>
+                <a:cs typeface="微软雅黑" pitchFamily="34" charset="-120"/>
               </a:rPr>
               <a:t>•  </a:t>
             </a:r>
-            <a:r>
-              <a:rPr dirty="0" sz="1800" lang="en-US">
+            <a:pPr algn="l" indent="0" marL="0">
+              <a:lnSpc>
+                <a:spcPct val="115000"/>
+              </a:lnSpc>
+              <a:buNone/>
+            </a:pPr>
+            <a:r>
+              <a:rPr lang="en-US" sz="1800" dirty="0">
                 <a:solidFill>
                   <a:srgbClr val="000000"/>
                 </a:solidFill>
               </a:rPr>
               <a:t>0&lt;x 的结果是1或0，再拿1和10比——</a:t>
             </a:r>
-            <a:r>
-              <a:rPr b="1" dirty="0" sz="1800" lang="en-US">
+            <a:pPr algn="l" indent="0" marL="0">
+              <a:lnSpc>
+                <a:spcPct val="115000"/>
+              </a:lnSpc>
+              <a:buNone/>
+            </a:pPr>
+            <a:r>
+              <a:rPr lang="en-US" sz="1800" b="1" dirty="0">
                 <a:solidFill>
                   <a:srgbClr val="000000"/>
                 </a:solidFill>
               </a:rPr>
               <a:t>1&lt;10 永远成立</a:t>
             </a:r>
-            <a:endParaRPr dirty="0" sz="1800" lang="en-US"/>
-          </a:p>
-        </p:txBody>
-      </p:sp>
-      <p:sp>
-        <p:nvSpPr>
-          <p:cNvPr id="1048606" name="Text 7"/>
+            <a:endParaRPr lang="en-US" sz="1800" dirty="0"/>
+          </a:p>
+        </p:txBody>
+      </p:sp>
+      <p:sp>
+        <p:nvSpPr>
+          <p:cNvPr id="9" name="Text 7"/>
           <p:cNvSpPr/>
           <p:nvPr/>
         </p:nvSpPr>
@@ -6633,44 +7310,54 @@
             <a:off x="896112" y="4334256"/>
             <a:ext cx="10454335" cy="397764"/>
           </a:xfrm>
-          <a:prstGeom prst="rect"/>
-          <a:noFill/>
-        </p:spPr>
-        <p:txBody>
-          <a:bodyPr anchor="t" rtlCol="0" wrap="square"/>
-          <a:p>
-            <a:pPr algn="l" indent="0" marL="0">
-              <a:lnSpc>
-                <a:spcPct val="115000"/>
-              </a:lnSpc>
-              <a:buNone/>
-            </a:pPr>
-            <a:r>
-              <a:rPr b="1" dirty="0" sz="1800" lang="en-US">
+          <a:prstGeom prst="rect">
+            <a:avLst/>
+          </a:prstGeom>
+          <a:noFill/>
+          <a:ln/>
+        </p:spPr>
+        <p:txBody>
+          <a:bodyPr wrap="square" rtlCol="0" anchor="t"/>
+          <a:lstStyle/>
+          <a:p>
+            <a:pPr algn="l" indent="0" marL="0">
+              <a:lnSpc>
+                <a:spcPct val="115000"/>
+              </a:lnSpc>
+              <a:buNone/>
+            </a:pPr>
+            <a:r>
+              <a:rPr lang="en-US" sz="1800" b="1" dirty="0">
                 <a:solidFill>
                   <a:srgbClr val="1F4E9C"/>
                 </a:solidFill>
-                <a:latin typeface="微软雅黑" panose="020B0503020204020204" pitchFamily="34" charset="-122"/>
-                <a:ea typeface="微软雅黑" panose="020B0503020204020204" pitchFamily="34" charset="-122"/>
-                <a:cs typeface="微软雅黑" panose="020B0503020204020204" pitchFamily="34" charset="-120"/>
+                <a:latin typeface="微软雅黑" pitchFamily="34" charset="0"/>
+                <a:ea typeface="微软雅黑" pitchFamily="34" charset="-122"/>
+                <a:cs typeface="微软雅黑" pitchFamily="34" charset="-120"/>
               </a:rPr>
               <a:t>•  </a:t>
             </a:r>
-            <a:r>
-              <a:rPr dirty="0" sz="1800" lang="en-US">
+            <a:pPr algn="l" indent="0" marL="0">
+              <a:lnSpc>
+                <a:spcPct val="115000"/>
+              </a:lnSpc>
+              <a:buNone/>
+            </a:pPr>
+            <a:r>
+              <a:rPr lang="en-US" sz="1800" dirty="0">
                 <a:solidFill>
                   <a:srgbClr val="000000"/>
                 </a:solidFill>
               </a:rPr>
               <a:t>你以为在判断范围，其实在判断一句废话</a:t>
             </a:r>
-            <a:endParaRPr dirty="0" sz="1800" lang="en-US"/>
-          </a:p>
-        </p:txBody>
-      </p:sp>
-      <p:sp>
-        <p:nvSpPr>
-          <p:cNvPr id="1048607" name="Text 8"/>
+            <a:endParaRPr lang="en-US" sz="1800" dirty="0"/>
+          </a:p>
+        </p:txBody>
+      </p:sp>
+      <p:sp>
+        <p:nvSpPr>
+          <p:cNvPr id="10" name="Text 8"/>
           <p:cNvSpPr/>
           <p:nvPr/>
         </p:nvSpPr>
@@ -6679,38 +7366,48 @@
             <a:off x="896112" y="4805172"/>
             <a:ext cx="10454335" cy="397764"/>
           </a:xfrm>
-          <a:prstGeom prst="rect"/>
-          <a:noFill/>
-        </p:spPr>
-        <p:txBody>
-          <a:bodyPr anchor="t" rtlCol="0" wrap="square"/>
-          <a:p>
-            <a:pPr algn="l" indent="0" marL="0">
-              <a:lnSpc>
-                <a:spcPct val="115000"/>
-              </a:lnSpc>
-              <a:buNone/>
-            </a:pPr>
-            <a:r>
-              <a:rPr b="1" dirty="0" sz="1800" lang="en-US">
+          <a:prstGeom prst="rect">
+            <a:avLst/>
+          </a:prstGeom>
+          <a:noFill/>
+          <a:ln/>
+        </p:spPr>
+        <p:txBody>
+          <a:bodyPr wrap="square" rtlCol="0" anchor="t"/>
+          <a:lstStyle/>
+          <a:p>
+            <a:pPr algn="l" indent="0" marL="0">
+              <a:lnSpc>
+                <a:spcPct val="115000"/>
+              </a:lnSpc>
+              <a:buNone/>
+            </a:pPr>
+            <a:r>
+              <a:rPr lang="en-US" sz="1800" b="1" dirty="0">
                 <a:solidFill>
                   <a:srgbClr val="1F4E9C"/>
                 </a:solidFill>
-                <a:latin typeface="微软雅黑" panose="020B0503020204020204" pitchFamily="34" charset="-122"/>
-                <a:ea typeface="微软雅黑" panose="020B0503020204020204" pitchFamily="34" charset="-122"/>
-                <a:cs typeface="微软雅黑" panose="020B0503020204020204" pitchFamily="34" charset="-120"/>
+                <a:latin typeface="微软雅黑" pitchFamily="34" charset="0"/>
+                <a:ea typeface="微软雅黑" pitchFamily="34" charset="-122"/>
+                <a:cs typeface="微软雅黑" pitchFamily="34" charset="-120"/>
               </a:rPr>
               <a:t>•  </a:t>
             </a:r>
-            <a:r>
-              <a:rPr dirty="0" sz="1800" lang="en-US">
+            <a:pPr algn="l" indent="0" marL="0">
+              <a:lnSpc>
+                <a:spcPct val="115000"/>
+              </a:lnSpc>
+              <a:buNone/>
+            </a:pPr>
+            <a:r>
+              <a:rPr lang="en-US" sz="1800" dirty="0">
                 <a:solidFill>
                   <a:srgbClr val="000000"/>
                 </a:solidFill>
               </a:rPr>
               <a:t>正确写法：x &gt; 0 &amp;&amp; x &lt; 10，用&amp;&amp;把两个条件接起来（下一页就讲）</a:t>
             </a:r>
-            <a:endParaRPr dirty="0" sz="1800" lang="en-US"/>
+            <a:endParaRPr lang="en-US" sz="1800" dirty="0"/>
           </a:p>
         </p:txBody>
       </p:sp>
@@ -6724,11 +7421,11 @@
 
 <file path=ppt/slides/slide9.xml><?xml version="1.0" encoding="utf-8"?>
 <p:sld xmlns:a="http://schemas.openxmlformats.org/drawingml/2006/main" xmlns:r="http://schemas.openxmlformats.org/officeDocument/2006/relationships" xmlns:p="http://schemas.openxmlformats.org/presentationml/2006/main">
-  <p:cSld>
+  <p:cSld name="Slide 9">
     <p:bg>
       <p:bgPr>
-        <a:blipFill rotWithShape="1" dpi="0">
-          <a:blip xmlns:r="http://schemas.openxmlformats.org/officeDocument/2006/relationships" r:embed="rId1">
+        <a:blipFill dpi="0" rotWithShape="1">
+          <a:blip r:embed="rId1">
             <a:lum/>
           </a:blip>
           <a:srcRect/>
@@ -6741,7 +7438,7 @@
     </p:bg>
     <p:spTree>
       <p:nvGrpSpPr>
-        <p:cNvPr id="15" name=""/>
+        <p:cNvPr id="1" name=""/>
         <p:cNvGrpSpPr/>
         <p:nvPr/>
       </p:nvGrpSpPr>
@@ -6755,7 +7452,7 @@
       </p:grpSpPr>
       <p:sp>
         <p:nvSpPr>
-          <p:cNvPr id="1048576" name="Text 0"/>
+          <p:cNvPr id="2" name="Text 0"/>
           <p:cNvSpPr/>
           <p:nvPr/>
         </p:nvSpPr>
@@ -6764,33 +7461,37 @@
             <a:off x="10362895" y="6016752"/>
             <a:ext cx="1463040" cy="320040"/>
           </a:xfrm>
-          <a:prstGeom prst="rect"/>
-          <a:noFill/>
-        </p:spPr>
-        <p:txBody>
-          <a:bodyPr anchor="ctr" rtlCol="0" wrap="square"/>
+          <a:prstGeom prst="rect">
+            <a:avLst/>
+          </a:prstGeom>
+          <a:noFill/>
+          <a:ln/>
+        </p:spPr>
+        <p:txBody>
+          <a:bodyPr wrap="square" rtlCol="0" anchor="ctr"/>
+          <a:lstStyle/>
           <a:p>
             <a:pPr algn="r" indent="0" marL="0">
               <a:buNone/>
             </a:pPr>
             <a:r>
-              <a:rPr dirty="0" sz="1000" lang="en-US">
+              <a:rPr lang="en-US" sz="1000" dirty="0">
                 <a:solidFill>
                   <a:srgbClr val="8A9099"/>
                 </a:solidFill>
-                <a:latin typeface="微软雅黑" panose="020B0503020204020204" pitchFamily="34" charset="-122"/>
-                <a:ea typeface="微软雅黑" panose="020B0503020204020204" pitchFamily="34" charset="-122"/>
-                <a:cs typeface="微软雅黑" panose="020B0503020204020204" pitchFamily="34" charset="-120"/>
+                <a:latin typeface="微软雅黑" pitchFamily="34" charset="0"/>
+                <a:ea typeface="微软雅黑" pitchFamily="34" charset="-122"/>
+                <a:cs typeface="微软雅黑" pitchFamily="34" charset="-120"/>
               </a:rPr>
               <a:t>9 / 15</a:t>
             </a:r>
-            <a:endParaRPr dirty="0" sz="1000" lang="en-US"/>
-          </a:p>
-        </p:txBody>
-      </p:sp>
-      <p:sp>
-        <p:nvSpPr>
-          <p:cNvPr id="1048577" name="Text 1"/>
+            <a:endParaRPr lang="en-US" sz="1000" dirty="0"/>
+          </a:p>
+        </p:txBody>
+      </p:sp>
+      <p:sp>
+        <p:nvSpPr>
+          <p:cNvPr id="3" name="Text 1"/>
           <p:cNvSpPr/>
           <p:nvPr/>
         </p:nvSpPr>
@@ -6799,33 +7500,37 @@
             <a:off x="822960" y="960120"/>
             <a:ext cx="10545775" cy="365760"/>
           </a:xfrm>
-          <a:prstGeom prst="rect"/>
-          <a:noFill/>
-        </p:spPr>
-        <p:txBody>
-          <a:bodyPr anchor="ctr" rtlCol="0" wrap="square"/>
-          <a:p>
-            <a:pPr algn="l" indent="0" marL="0">
-              <a:buNone/>
-            </a:pPr>
-            <a:r>
-              <a:rPr b="1" dirty="0" sz="1400" lang="en-US">
+          <a:prstGeom prst="rect">
+            <a:avLst/>
+          </a:prstGeom>
+          <a:noFill/>
+          <a:ln/>
+        </p:spPr>
+        <p:txBody>
+          <a:bodyPr wrap="square" rtlCol="0" anchor="ctr"/>
+          <a:lstStyle/>
+          <a:p>
+            <a:pPr algn="l" indent="0" marL="0">
+              <a:buNone/>
+            </a:pPr>
+            <a:r>
+              <a:rPr lang="en-US" sz="1400" b="1" dirty="0">
                 <a:solidFill>
                   <a:srgbClr val="1F4E9C"/>
                 </a:solidFill>
-                <a:latin typeface="微软雅黑" panose="020B0503020204020204" pitchFamily="34" charset="-122"/>
-                <a:ea typeface="微软雅黑" panose="020B0503020204020204" pitchFamily="34" charset="-122"/>
-                <a:cs typeface="微软雅黑" panose="020B0503020204020204" pitchFamily="34" charset="-120"/>
+                <a:latin typeface="微软雅黑" pitchFamily="34" charset="0"/>
+                <a:ea typeface="微软雅黑" pitchFamily="34" charset="-122"/>
+                <a:cs typeface="微软雅黑" pitchFamily="34" charset="-120"/>
               </a:rPr>
               <a:t>逻辑运算符</a:t>
             </a:r>
-            <a:endParaRPr dirty="0" sz="1400" lang="en-US"/>
-          </a:p>
-        </p:txBody>
-      </p:sp>
-      <p:sp>
-        <p:nvSpPr>
-          <p:cNvPr id="1048578" name="Text 2"/>
+            <a:endParaRPr lang="en-US" sz="1400" dirty="0"/>
+          </a:p>
+        </p:txBody>
+      </p:sp>
+      <p:sp>
+        <p:nvSpPr>
+          <p:cNvPr id="4" name="Text 2"/>
           <p:cNvSpPr/>
           <p:nvPr/>
         </p:nvSpPr>
@@ -6834,33 +7539,37 @@
             <a:off x="822960" y="1344168"/>
             <a:ext cx="10545775" cy="731520"/>
           </a:xfrm>
-          <a:prstGeom prst="rect"/>
-          <a:noFill/>
-        </p:spPr>
-        <p:txBody>
-          <a:bodyPr anchor="ctr" rtlCol="0" wrap="square"/>
-          <a:p>
-            <a:pPr algn="l" indent="0" marL="0">
-              <a:buNone/>
-            </a:pPr>
-            <a:r>
-              <a:rPr b="1" dirty="0" sz="2800" lang="en-US">
+          <a:prstGeom prst="rect">
+            <a:avLst/>
+          </a:prstGeom>
+          <a:noFill/>
+          <a:ln/>
+        </p:spPr>
+        <p:txBody>
+          <a:bodyPr wrap="square" rtlCol="0" anchor="ctr"/>
+          <a:lstStyle/>
+          <a:p>
+            <a:pPr algn="l" indent="0" marL="0">
+              <a:buNone/>
+            </a:pPr>
+            <a:r>
+              <a:rPr lang="en-US" sz="2800" b="1" dirty="0">
                 <a:solidFill>
                   <a:srgbClr val="1F2329"/>
                 </a:solidFill>
-                <a:latin typeface="微软雅黑" panose="020B0503020204020204" pitchFamily="34" charset="-122"/>
-                <a:ea typeface="微软雅黑" panose="020B0503020204020204" pitchFamily="34" charset="-122"/>
-                <a:cs typeface="微软雅黑" panose="020B0503020204020204" pitchFamily="34" charset="-120"/>
+                <a:latin typeface="微软雅黑" pitchFamily="34" charset="0"/>
+                <a:ea typeface="微软雅黑" pitchFamily="34" charset="-122"/>
+                <a:cs typeface="微软雅黑" pitchFamily="34" charset="-120"/>
               </a:rPr>
               <a:t>与、或、非</a:t>
             </a:r>
-            <a:endParaRPr dirty="0" sz="2800" lang="en-US"/>
-          </a:p>
-        </p:txBody>
-      </p:sp>
-      <p:sp>
-        <p:nvSpPr>
-          <p:cNvPr id="1048579" name="Shape 3"/>
+            <a:endParaRPr lang="en-US" sz="2800" dirty="0"/>
+          </a:p>
+        </p:txBody>
+      </p:sp>
+      <p:sp>
+        <p:nvSpPr>
+          <p:cNvPr id="5" name="Shape 3"/>
           <p:cNvSpPr/>
           <p:nvPr/>
         </p:nvSpPr>
@@ -6869,7 +7578,9 @@
             <a:off x="822960" y="2395728"/>
             <a:ext cx="10545775" cy="1271016"/>
           </a:xfrm>
-          <a:prstGeom prst="rect"/>
+          <a:prstGeom prst="rect">
+            <a:avLst/>
+          </a:prstGeom>
           <a:solidFill>
             <a:srgbClr val="F5F6F7"/>
           </a:solidFill>
@@ -6883,7 +7594,7 @@
       </p:sp>
       <p:sp>
         <p:nvSpPr>
-          <p:cNvPr id="1048580" name="Text 4"/>
+          <p:cNvPr id="6" name="Text 4"/>
           <p:cNvSpPr/>
           <p:nvPr/>
         </p:nvSpPr>
@@ -6892,11 +7603,15 @@
             <a:off x="1078992" y="2505456"/>
             <a:ext cx="10033711" cy="1051560"/>
           </a:xfrm>
-          <a:prstGeom prst="rect"/>
-          <a:noFill/>
-        </p:spPr>
-        <p:txBody>
-          <a:bodyPr anchor="t" rtlCol="0" wrap="square"/>
+          <a:prstGeom prst="rect">
+            <a:avLst/>
+          </a:prstGeom>
+          <a:noFill/>
+          <a:ln/>
+        </p:spPr>
+        <p:txBody>
+          <a:bodyPr wrap="square" rtlCol="0" anchor="t"/>
+          <a:lstStyle/>
           <a:p>
             <a:pPr algn="l" indent="0" marL="0">
               <a:lnSpc>
@@ -6905,26 +7620,26 @@
               <a:buNone/>
             </a:pPr>
             <a:r>
-              <a:rPr dirty="0" sz="1400" lang="en-US">
+              <a:rPr lang="en-US" sz="1400" dirty="0">
                 <a:solidFill>
                   <a:srgbClr val="1F2329"/>
                 </a:solidFill>
-                <a:latin typeface="Consolas" panose="020B0609020204030204" pitchFamily="34" charset="0"/>
-                <a:ea typeface="Consolas" panose="020B0609020204030204" pitchFamily="34" charset="-122"/>
-                <a:cs typeface="Consolas" panose="020B0609020204030204" pitchFamily="34" charset="-120"/>
+                <a:latin typeface="Consolas" pitchFamily="34" charset="0"/>
+                <a:ea typeface="Consolas" pitchFamily="34" charset="-122"/>
+                <a:cs typeface="Consolas" pitchFamily="34" charset="-120"/>
               </a:rPr>
               <a:t>a &amp;&amp; b     // 与：两边都为true，结果才true
 a || b     // 或：两边有一个true，结果就true
 !a         // 非：true变false，false变true
 </a:t>
             </a:r>
-            <a:endParaRPr dirty="0" sz="1400" lang="en-US"/>
-          </a:p>
-        </p:txBody>
-      </p:sp>
-      <p:sp>
-        <p:nvSpPr>
-          <p:cNvPr id="1048581" name="Text 5"/>
+            <a:endParaRPr lang="en-US" sz="1400" dirty="0"/>
+          </a:p>
+        </p:txBody>
+      </p:sp>
+      <p:sp>
+        <p:nvSpPr>
+          <p:cNvPr id="7" name="Text 5"/>
           <p:cNvSpPr/>
           <p:nvPr/>
         </p:nvSpPr>
@@ -6933,44 +7648,54 @@
             <a:off x="896112" y="3867912"/>
             <a:ext cx="10454335" cy="397764"/>
           </a:xfrm>
-          <a:prstGeom prst="rect"/>
-          <a:noFill/>
-        </p:spPr>
-        <p:txBody>
-          <a:bodyPr anchor="t" rtlCol="0" wrap="square"/>
-          <a:p>
-            <a:pPr algn="l" indent="0" marL="0">
-              <a:lnSpc>
-                <a:spcPct val="115000"/>
-              </a:lnSpc>
-              <a:buNone/>
-            </a:pPr>
-            <a:r>
-              <a:rPr b="1" dirty="0" sz="1800" lang="en-US">
+          <a:prstGeom prst="rect">
+            <a:avLst/>
+          </a:prstGeom>
+          <a:noFill/>
+          <a:ln/>
+        </p:spPr>
+        <p:txBody>
+          <a:bodyPr wrap="square" rtlCol="0" anchor="t"/>
+          <a:lstStyle/>
+          <a:p>
+            <a:pPr algn="l" indent="0" marL="0">
+              <a:lnSpc>
+                <a:spcPct val="115000"/>
+              </a:lnSpc>
+              <a:buNone/>
+            </a:pPr>
+            <a:r>
+              <a:rPr lang="en-US" sz="1800" b="1" dirty="0">
                 <a:solidFill>
                   <a:srgbClr val="1F4E9C"/>
                 </a:solidFill>
-                <a:latin typeface="微软雅黑" panose="020B0503020204020204" pitchFamily="34" charset="-122"/>
-                <a:ea typeface="微软雅黑" panose="020B0503020204020204" pitchFamily="34" charset="-122"/>
-                <a:cs typeface="微软雅黑" panose="020B0503020204020204" pitchFamily="34" charset="-120"/>
+                <a:latin typeface="微软雅黑" pitchFamily="34" charset="0"/>
+                <a:ea typeface="微软雅黑" pitchFamily="34" charset="-122"/>
+                <a:cs typeface="微软雅黑" pitchFamily="34" charset="-120"/>
               </a:rPr>
               <a:t>•  </a:t>
             </a:r>
-            <a:r>
-              <a:rPr dirty="0" sz="1800" lang="en-US">
+            <a:pPr algn="l" indent="0" marL="0">
+              <a:lnSpc>
+                <a:spcPct val="115000"/>
+              </a:lnSpc>
+              <a:buNone/>
+            </a:pPr>
+            <a:r>
+              <a:rPr lang="en-US" sz="1800" dirty="0">
                 <a:solidFill>
                   <a:srgbClr val="000000"/>
                 </a:solidFill>
               </a:rPr>
               <a:t>和关系运算一样，逻辑运算的结果也是bool</a:t>
             </a:r>
-            <a:endParaRPr dirty="0" sz="1800" lang="en-US"/>
-          </a:p>
-        </p:txBody>
-      </p:sp>
-      <p:sp>
-        <p:nvSpPr>
-          <p:cNvPr id="1048582" name="Text 6"/>
+            <a:endParaRPr lang="en-US" sz="1800" dirty="0"/>
+          </a:p>
+        </p:txBody>
+      </p:sp>
+      <p:sp>
+        <p:nvSpPr>
+          <p:cNvPr id="8" name="Text 6"/>
           <p:cNvSpPr/>
           <p:nvPr/>
         </p:nvSpPr>
@@ -6979,44 +7704,54 @@
             <a:off x="896112" y="4338828"/>
             <a:ext cx="10454335" cy="397764"/>
           </a:xfrm>
-          <a:prstGeom prst="rect"/>
-          <a:noFill/>
-        </p:spPr>
-        <p:txBody>
-          <a:bodyPr anchor="t" rtlCol="0" wrap="square"/>
-          <a:p>
-            <a:pPr algn="l" indent="0" marL="0">
-              <a:lnSpc>
-                <a:spcPct val="115000"/>
-              </a:lnSpc>
-              <a:buNone/>
-            </a:pPr>
-            <a:r>
-              <a:rPr b="1" dirty="0" sz="1800" lang="en-US">
+          <a:prstGeom prst="rect">
+            <a:avLst/>
+          </a:prstGeom>
+          <a:noFill/>
+          <a:ln/>
+        </p:spPr>
+        <p:txBody>
+          <a:bodyPr wrap="square" rtlCol="0" anchor="t"/>
+          <a:lstStyle/>
+          <a:p>
+            <a:pPr algn="l" indent="0" marL="0">
+              <a:lnSpc>
+                <a:spcPct val="115000"/>
+              </a:lnSpc>
+              <a:buNone/>
+            </a:pPr>
+            <a:r>
+              <a:rPr lang="en-US" sz="1800" b="1" dirty="0">
                 <a:solidFill>
                   <a:srgbClr val="1F4E9C"/>
                 </a:solidFill>
-                <a:latin typeface="微软雅黑" panose="020B0503020204020204" pitchFamily="34" charset="-122"/>
-                <a:ea typeface="微软雅黑" panose="020B0503020204020204" pitchFamily="34" charset="-122"/>
-                <a:cs typeface="微软雅黑" panose="020B0503020204020204" pitchFamily="34" charset="-120"/>
+                <a:latin typeface="微软雅黑" pitchFamily="34" charset="0"/>
+                <a:ea typeface="微软雅黑" pitchFamily="34" charset="-122"/>
+                <a:cs typeface="微软雅黑" pitchFamily="34" charset="-120"/>
               </a:rPr>
               <a:t>•  </a:t>
             </a:r>
-            <a:r>
-              <a:rPr dirty="0" sz="1800" lang="en-US">
+            <a:pPr algn="l" indent="0" marL="0">
+              <a:lnSpc>
+                <a:spcPct val="115000"/>
+              </a:lnSpc>
+              <a:buNone/>
+            </a:pPr>
+            <a:r>
+              <a:rPr lang="en-US" sz="1800" dirty="0">
                 <a:solidFill>
                   <a:srgbClr val="000000"/>
                 </a:solidFill>
               </a:rPr>
               <a:t>&amp;&amp;是"并且"，两个条件都满足才算数；||是"或者"，满足一个就行</a:t>
             </a:r>
-            <a:endParaRPr dirty="0" sz="1800" lang="en-US"/>
-          </a:p>
-        </p:txBody>
-      </p:sp>
-      <p:sp>
-        <p:nvSpPr>
-          <p:cNvPr id="1048583" name="Text 7"/>
+            <a:endParaRPr lang="en-US" sz="1800" dirty="0"/>
+          </a:p>
+        </p:txBody>
+      </p:sp>
+      <p:sp>
+        <p:nvSpPr>
+          <p:cNvPr id="9" name="Text 7"/>
           <p:cNvSpPr/>
           <p:nvPr/>
         </p:nvSpPr>
@@ -7025,112 +7760,48 @@
             <a:off x="896112" y="4809744"/>
             <a:ext cx="10454335" cy="740664"/>
           </a:xfrm>
-          <a:prstGeom prst="rect"/>
-          <a:noFill/>
-        </p:spPr>
-        <p:txBody>
-          <a:bodyPr anchor="t" rtlCol="0" wrap="square"/>
-          <a:p>
-            <a:pPr algn="l" indent="0" marL="0">
-              <a:lnSpc>
-                <a:spcPct val="115000"/>
-              </a:lnSpc>
-              <a:buNone/>
-            </a:pPr>
-            <a:r>
-              <a:rPr b="1" dirty="0" sz="1800" lang="en-US">
+          <a:prstGeom prst="rect">
+            <a:avLst/>
+          </a:prstGeom>
+          <a:noFill/>
+          <a:ln/>
+        </p:spPr>
+        <p:txBody>
+          <a:bodyPr wrap="square" rtlCol="0" anchor="t"/>
+          <a:lstStyle/>
+          <a:p>
+            <a:pPr algn="l" indent="0" marL="0">
+              <a:lnSpc>
+                <a:spcPct val="115000"/>
+              </a:lnSpc>
+              <a:buNone/>
+            </a:pPr>
+            <a:r>
+              <a:rPr lang="en-US" sz="1800" b="1" dirty="0">
                 <a:solidFill>
                   <a:srgbClr val="1F4E9C"/>
                 </a:solidFill>
-                <a:latin typeface="微软雅黑" panose="020B0503020204020204" pitchFamily="34" charset="-122"/>
-                <a:ea typeface="微软雅黑" panose="020B0503020204020204" pitchFamily="34" charset="-122"/>
-                <a:cs typeface="微软雅黑" panose="020B0503020204020204" pitchFamily="34" charset="-120"/>
+                <a:latin typeface="微软雅黑" pitchFamily="34" charset="0"/>
+                <a:ea typeface="微软雅黑" pitchFamily="34" charset="-122"/>
+                <a:cs typeface="微软雅黑" pitchFamily="34" charset="-120"/>
               </a:rPr>
               <a:t>•  </a:t>
             </a:r>
-            <a:r>
-              <a:rPr dirty="0" sz="1800" lang="en-US">
+            <a:pPr algn="l" indent="0" marL="0">
+              <a:lnSpc>
+                <a:spcPct val="115000"/>
+              </a:lnSpc>
+              <a:buNone/>
+            </a:pPr>
+            <a:r>
+              <a:rPr lang="en-US" sz="1800" dirty="0">
                 <a:solidFill>
                   <a:srgbClr val="000000"/>
                 </a:solidFill>
               </a:rPr>
               <a:t>802伪代码的边界条件全是它：i &gt;= 0 &amp;&amp; i &lt; length 就是"没越界"</a:t>
             </a:r>
-            <a:endParaRPr dirty="0" sz="1800" lang="en-US"/>
-          </a:p>
-        </p:txBody>
-      </p:sp>
-      <p:sp>
-        <p:nvSpPr>
-          <p:cNvPr id="1048584" name="Text 6"/>
-          <p:cNvSpPr/>
-          <p:nvPr/>
-        </p:nvSpPr>
-        <p:spPr>
-          <a:xfrm>
-            <a:off x="896112" y="5269738"/>
-            <a:ext cx="10454335" cy="397764"/>
-          </a:xfrm>
-          <a:prstGeom prst="rect"/>
-          <a:noFill/>
-        </p:spPr>
-        <p:txBody>
-          <a:bodyPr anchor="t" rtlCol="0" wrap="square"/>
-          <a:p>
-            <a:pPr algn="l" indent="0" marL="0">
-              <a:lnSpc>
-                <a:spcPct val="115000"/>
-              </a:lnSpc>
-              <a:buNone/>
-            </a:pPr>
-            <a:r>
-              <a:rPr b="1" dirty="0" sz="1800" lang="en-US">
-                <a:solidFill>
-                  <a:srgbClr val="1F4E9C"/>
-                </a:solidFill>
-                <a:latin typeface="微软雅黑" panose="020B0503020204020204" pitchFamily="34" charset="-122"/>
-                <a:ea typeface="微软雅黑" panose="020B0503020204020204" pitchFamily="34" charset="-122"/>
-                <a:cs typeface="微软雅黑" panose="020B0503020204020204" pitchFamily="34" charset="-120"/>
-              </a:rPr>
-              <a:t>•  </a:t>
-            </a:r>
-            <a:r>
-              <a:rPr altLang="en-US" dirty="0" sz="1800" lang="zh-CN">
-                <a:solidFill>
-                  <a:srgbClr val="000000"/>
-                </a:solidFill>
-              </a:rPr>
-              <a:t>对于语句</a:t>
-            </a:r>
-            <a:r>
-              <a:rPr altLang="zh-CN" dirty="0" sz="1800" lang="en-US">
-                <a:solidFill>
-                  <a:srgbClr val="000000"/>
-                </a:solidFill>
-              </a:rPr>
-              <a:t> p != NULL &amp;&amp; p-&gt;data != elem</a:t>
-            </a:r>
-            <a:r>
-              <a:rPr altLang="en-US" dirty="0" sz="1800" lang="zh-CN">
-                <a:solidFill>
-                  <a:srgbClr val="000000"/>
-                </a:solidFill>
-              </a:rPr>
-              <a:t>，顺序交换</a:t>
-            </a:r>
-            <a:r>
-              <a:rPr altLang="en-US" dirty="0" sz="1800" lang="zh-CN">
-                <a:solidFill>
-                  <a:srgbClr val="000000"/>
-                </a:solidFill>
-              </a:rPr>
-              <a:t>即错误</a:t>
-            </a:r>
-            <a:endParaRPr altLang="en-US" dirty="0" sz="1800" lang="zh-CN">
-              <a:solidFill>
-                <a:srgbClr val="000000"/>
-              </a:solidFill>
-            </a:endParaRPr>
+            <a:endParaRPr lang="en-US" sz="1800" dirty="0"/>
           </a:p>
         </p:txBody>
       </p:sp>
@@ -7147,10 +7818,10 @@
   <a:themeElements>
     <a:clrScheme name="Office">
       <a:dk1>
-        <a:sysClr lastClr="000000" val="windowText"/>
+        <a:sysClr val="windowText" lastClr="000000"/>
       </a:dk1>
       <a:lt1>
-        <a:sysClr lastClr="FFFFFF" val="window"/>
+        <a:sysClr val="window" lastClr="FFFFFF"/>
       </a:lt1>
       <a:dk2>
         <a:srgbClr val="44546A"/>
@@ -7185,7 +7856,7 @@
     </a:clrScheme>
     <a:fontScheme name="Office">
       <a:majorFont>
-        <a:latin typeface="Calibri Light"/>
+        <a:latin typeface="Calibri Light" panose="020F0302020204030204"/>
         <a:ea typeface=""/>
         <a:cs typeface=""/>
         <a:font script="Jpan" typeface="游ゴシック Light"/>
@@ -7218,9 +7889,26 @@
         <a:font script="Viet" typeface="Times New Roman"/>
         <a:font script="Uigh" typeface="Microsoft Uighur"/>
         <a:font script="Geor" typeface="Sylfaen"/>
+        <a:font script="Armn" typeface="Arial"/>
+        <a:font script="Bugi" typeface="Leelawadee UI"/>
+        <a:font script="Bopo" typeface="Microsoft JhengHei"/>
+        <a:font script="Java" typeface="Javanese Text"/>
+        <a:font script="Lisu" typeface="Segoe UI"/>
+        <a:font script="Mymr" typeface="Myanmar Text"/>
+        <a:font script="Nkoo" typeface="Ebrima"/>
+        <a:font script="Olck" typeface="Nirmala UI"/>
+        <a:font script="Osma" typeface="Ebrima"/>
+        <a:font script="Phag" typeface="Phagspa"/>
+        <a:font script="Syrn" typeface="Estrangelo Edessa"/>
+        <a:font script="Syrj" typeface="Estrangelo Edessa"/>
+        <a:font script="Syre" typeface="Estrangelo Edessa"/>
+        <a:font script="Sora" typeface="Nirmala UI"/>
+        <a:font script="Tale" typeface="Microsoft Tai Le"/>
+        <a:font script="Talu" typeface="Microsoft New Tai Lue"/>
+        <a:font script="Tfng" typeface="Ebrima"/>
       </a:majorFont>
       <a:minorFont>
-        <a:latin typeface="Calibri"/>
+        <a:latin typeface="Calibri" panose="020F0502020204030204"/>
         <a:ea typeface=""/>
         <a:cs typeface=""/>
         <a:font script="Jpan" typeface="游ゴシック"/>
@@ -7253,6 +7941,23 @@
         <a:font script="Viet" typeface="Arial"/>
         <a:font script="Uigh" typeface="Microsoft Uighur"/>
         <a:font script="Geor" typeface="Sylfaen"/>
+        <a:font script="Armn" typeface="Arial"/>
+        <a:font script="Bugi" typeface="Leelawadee UI"/>
+        <a:font script="Bopo" typeface="Microsoft JhengHei"/>
+        <a:font script="Java" typeface="Javanese Text"/>
+        <a:font script="Lisu" typeface="Segoe UI"/>
+        <a:font script="Mymr" typeface="Myanmar Text"/>
+        <a:font script="Nkoo" typeface="Ebrima"/>
+        <a:font script="Olck" typeface="Nirmala UI"/>
+        <a:font script="Osma" typeface="Ebrima"/>
+        <a:font script="Phag" typeface="Phagspa"/>
+        <a:font script="Syrn" typeface="Estrangelo Edessa"/>
+        <a:font script="Syrj" typeface="Estrangelo Edessa"/>
+        <a:font script="Syre" typeface="Estrangelo Edessa"/>
+        <a:font script="Sora" typeface="Nirmala UI"/>
+        <a:font script="Tale" typeface="Microsoft Tai Le"/>
+        <a:font script="Talu" typeface="Microsoft New Tai Lue"/>
+        <a:font script="Tfng" typeface="Ebrima"/>
       </a:minorFont>
     </a:fontScheme>
     <a:fmtScheme name="Office">
@@ -7345,7 +8050,7 @@
         </a:effectStyle>
         <a:effectStyle>
           <a:effectLst>
-            <a:outerShdw algn="ctr" blurRad="57150" dir="5400000" dist="19050" rotWithShape="0">
+            <a:outerShdw blurRad="57150" dist="19050" dir="5400000" algn="ctr" rotWithShape="0">
               <a:srgbClr val="000000">
                 <a:alpha val="63000"/>
               </a:srgbClr>
@@ -7393,259 +8098,12 @@
       </a:bgFillStyleLst>
     </a:fmtScheme>
   </a:themeElements>
-</a:theme>
-</file>
-
-<file path=ppt/theme/theme2.xml><?xml version="1.0" encoding="utf-8"?>
-<a:theme xmlns:a="http://schemas.openxmlformats.org/drawingml/2006/main" name="Office Theme">
-  <a:themeElements>
-    <a:clrScheme name="Office">
-      <a:dk1>
-        <a:sysClr lastClr="000000" val="windowText"/>
-      </a:dk1>
-      <a:lt1>
-        <a:sysClr lastClr="FFFFFF" val="window"/>
-      </a:lt1>
-      <a:dk2>
-        <a:srgbClr val="44546A"/>
-      </a:dk2>
-      <a:lt2>
-        <a:srgbClr val="E7E6E6"/>
-      </a:lt2>
-      <a:accent1>
-        <a:srgbClr val="4472C4"/>
-      </a:accent1>
-      <a:accent2>
-        <a:srgbClr val="ED7D31"/>
-      </a:accent2>
-      <a:accent3>
-        <a:srgbClr val="A5A5A5"/>
-      </a:accent3>
-      <a:accent4>
-        <a:srgbClr val="FFC000"/>
-      </a:accent4>
-      <a:accent5>
-        <a:srgbClr val="5B9BD5"/>
-      </a:accent5>
-      <a:accent6>
-        <a:srgbClr val="70AD47"/>
-      </a:accent6>
-      <a:hlink>
-        <a:srgbClr val="0563C1"/>
-      </a:hlink>
-      <a:folHlink>
-        <a:srgbClr val="954F72"/>
-      </a:folHlink>
-    </a:clrScheme>
-    <a:fontScheme name="Office">
-      <a:majorFont>
-        <a:latin typeface="Calibri Light"/>
-        <a:ea typeface=""/>
-        <a:cs typeface=""/>
-        <a:font script="Jpan" typeface="游ゴシック Light"/>
-        <a:font script="Hang" typeface="맑은 고딕"/>
-        <a:font script="Hans" typeface="等线 Light"/>
-        <a:font script="Hant" typeface="新細明體"/>
-        <a:font script="Arab" typeface="Times New Roman"/>
-        <a:font script="Hebr" typeface="Times New Roman"/>
-        <a:font script="Thai" typeface="Angsana New"/>
-        <a:font script="Ethi" typeface="Nyala"/>
-        <a:font script="Beng" typeface="Vrinda"/>
-        <a:font script="Gujr" typeface="Shruti"/>
-        <a:font script="Khmr" typeface="MoolBoran"/>
-        <a:font script="Knda" typeface="Tunga"/>
-        <a:font script="Guru" typeface="Raavi"/>
-        <a:font script="Cans" typeface="Euphemia"/>
-        <a:font script="Cher" typeface="Plantagenet Cherokee"/>
-        <a:font script="Yiii" typeface="Microsoft Yi Baiti"/>
-        <a:font script="Tibt" typeface="Microsoft Himalaya"/>
-        <a:font script="Thaa" typeface="MV Boli"/>
-        <a:font script="Deva" typeface="Mangal"/>
-        <a:font script="Telu" typeface="Gautami"/>
-        <a:font script="Taml" typeface="Latha"/>
-        <a:font script="Syrc" typeface="Estrangelo Edessa"/>
-        <a:font script="Orya" typeface="Kalinga"/>
-        <a:font script="Mlym" typeface="Kartika"/>
-        <a:font script="Laoo" typeface="DokChampa"/>
-        <a:font script="Sinh" typeface="Iskoola Pota"/>
-        <a:font script="Mong" typeface="Mongolian Baiti"/>
-        <a:font script="Viet" typeface="Times New Roman"/>
-        <a:font script="Uigh" typeface="Microsoft Uighur"/>
-        <a:font script="Geor" typeface="Sylfaen"/>
-      </a:majorFont>
-      <a:minorFont>
-        <a:latin typeface="Calibri"/>
-        <a:ea typeface=""/>
-        <a:cs typeface=""/>
-        <a:font script="Jpan" typeface="游ゴシック"/>
-        <a:font script="Hang" typeface="맑은 고딕"/>
-        <a:font script="Hans" typeface="等线"/>
-        <a:font script="Hant" typeface="新細明體"/>
-        <a:font script="Arab" typeface="Arial"/>
-        <a:font script="Hebr" typeface="Arial"/>
-        <a:font script="Thai" typeface="Cordia New"/>
-        <a:font script="Ethi" typeface="Nyala"/>
-        <a:font script="Beng" typeface="Vrinda"/>
-        <a:font script="Gujr" typeface="Shruti"/>
-        <a:font script="Khmr" typeface="DaunPenh"/>
-        <a:font script="Knda" typeface="Tunga"/>
-        <a:font script="Guru" typeface="Raavi"/>
-        <a:font script="Cans" typeface="Euphemia"/>
-        <a:font script="Cher" typeface="Plantagenet Cherokee"/>
-        <a:font script="Yiii" typeface="Microsoft Yi Baiti"/>
-        <a:font script="Tibt" typeface="Microsoft Himalaya"/>
-        <a:font script="Thaa" typeface="MV Boli"/>
-        <a:font script="Deva" typeface="Mangal"/>
-        <a:font script="Telu" typeface="Gautami"/>
-        <a:font script="Taml" typeface="Latha"/>
-        <a:font script="Syrc" typeface="Estrangelo Edessa"/>
-        <a:font script="Orya" typeface="Kalinga"/>
-        <a:font script="Mlym" typeface="Kartika"/>
-        <a:font script="Laoo" typeface="DokChampa"/>
-        <a:font script="Sinh" typeface="Iskoola Pota"/>
-        <a:font script="Mong" typeface="Mongolian Baiti"/>
-        <a:font script="Viet" typeface="Arial"/>
-        <a:font script="Uigh" typeface="Microsoft Uighur"/>
-        <a:font script="Geor" typeface="Sylfaen"/>
-      </a:minorFont>
-    </a:fontScheme>
-    <a:fmtScheme name="Office">
-      <a:fillStyleLst>
-        <a:solidFill>
-          <a:schemeClr val="phClr"/>
-        </a:solidFill>
-        <a:gradFill rotWithShape="1">
-          <a:gsLst>
-            <a:gs pos="0">
-              <a:schemeClr val="phClr">
-                <a:lumMod val="110000"/>
-                <a:satMod val="105000"/>
-                <a:tint val="67000"/>
-              </a:schemeClr>
-            </a:gs>
-            <a:gs pos="50000">
-              <a:schemeClr val="phClr">
-                <a:lumMod val="105000"/>
-                <a:satMod val="103000"/>
-                <a:tint val="73000"/>
-              </a:schemeClr>
-            </a:gs>
-            <a:gs pos="100000">
-              <a:schemeClr val="phClr">
-                <a:lumMod val="105000"/>
-                <a:satMod val="109000"/>
-                <a:tint val="81000"/>
-              </a:schemeClr>
-            </a:gs>
-          </a:gsLst>
-          <a:lin ang="5400000" scaled="0"/>
-        </a:gradFill>
-        <a:gradFill rotWithShape="1">
-          <a:gsLst>
-            <a:gs pos="0">
-              <a:schemeClr val="phClr">
-                <a:satMod val="103000"/>
-                <a:lumMod val="102000"/>
-                <a:tint val="94000"/>
-              </a:schemeClr>
-            </a:gs>
-            <a:gs pos="50000">
-              <a:schemeClr val="phClr">
-                <a:satMod val="110000"/>
-                <a:lumMod val="100000"/>
-                <a:shade val="100000"/>
-              </a:schemeClr>
-            </a:gs>
-            <a:gs pos="100000">
-              <a:schemeClr val="phClr">
-                <a:lumMod val="99000"/>
-                <a:satMod val="120000"/>
-                <a:shade val="78000"/>
-              </a:schemeClr>
-            </a:gs>
-          </a:gsLst>
-          <a:lin ang="5400000" scaled="0"/>
-        </a:gradFill>
-      </a:fillStyleLst>
-      <a:lnStyleLst>
-        <a:ln w="6350" cap="flat" cmpd="sng" algn="ctr">
-          <a:solidFill>
-            <a:schemeClr val="phClr"/>
-          </a:solidFill>
-          <a:prstDash val="solid"/>
-          <a:miter lim="800000"/>
-        </a:ln>
-        <a:ln w="12700" cap="flat" cmpd="sng" algn="ctr">
-          <a:solidFill>
-            <a:schemeClr val="phClr"/>
-          </a:solidFill>
-          <a:prstDash val="solid"/>
-          <a:miter lim="800000"/>
-        </a:ln>
-        <a:ln w="19050" cap="flat" cmpd="sng" algn="ctr">
-          <a:solidFill>
-            <a:schemeClr val="phClr"/>
-          </a:solidFill>
-          <a:prstDash val="solid"/>
-          <a:miter lim="800000"/>
-        </a:ln>
-      </a:lnStyleLst>
-      <a:effectStyleLst>
-        <a:effectStyle>
-          <a:effectLst/>
-        </a:effectStyle>
-        <a:effectStyle>
-          <a:effectLst/>
-        </a:effectStyle>
-        <a:effectStyle>
-          <a:effectLst>
-            <a:outerShdw algn="ctr" blurRad="57150" dir="5400000" dist="19050" rotWithShape="0">
-              <a:srgbClr val="000000">
-                <a:alpha val="63000"/>
-              </a:srgbClr>
-            </a:outerShdw>
-          </a:effectLst>
-        </a:effectStyle>
-      </a:effectStyleLst>
-      <a:bgFillStyleLst>
-        <a:solidFill>
-          <a:schemeClr val="phClr"/>
-        </a:solidFill>
-        <a:solidFill>
-          <a:schemeClr val="phClr">
-            <a:tint val="95000"/>
-            <a:satMod val="170000"/>
-          </a:schemeClr>
-        </a:solidFill>
-        <a:gradFill rotWithShape="1">
-          <a:gsLst>
-            <a:gs pos="0">
-              <a:schemeClr val="phClr">
-                <a:tint val="93000"/>
-                <a:satMod val="150000"/>
-                <a:shade val="98000"/>
-                <a:lumMod val="102000"/>
-              </a:schemeClr>
-            </a:gs>
-            <a:gs pos="50000">
-              <a:schemeClr val="phClr">
-                <a:tint val="98000"/>
-                <a:satMod val="130000"/>
-                <a:shade val="90000"/>
-                <a:lumMod val="103000"/>
-              </a:schemeClr>
-            </a:gs>
-            <a:gs pos="100000">
-              <a:schemeClr val="phClr">
-                <a:shade val="63000"/>
-                <a:satMod val="120000"/>
-              </a:schemeClr>
-            </a:gs>
-          </a:gsLst>
-          <a:lin ang="5400000" scaled="0"/>
-        </a:gradFill>
-      </a:bgFillStyleLst>
-    </a:fmtScheme>
-  </a:themeElements>
+  <a:objectDefaults/>
+  <a:extraClrSchemeLst/>
+  <a:extLst>
+    <a:ext uri="{05A4C25C-085E-4340-85A3-A5531E510DB2}">
+      <thm15:themeFamily xmlns:thm15="http://schemas.microsoft.com/office/thememl/2012/main" name="Office Theme" id="{62F939B6-93AF-4DB8-9C6B-D6C7DFDC589F}" vid="{4A3C46E8-61CC-4603-A589-7422A47A8E4A}"/>
+    </a:ext>
+  </a:extLst>
 </a:theme>
 </file>
--- a/课件/C1/C1-A-03/C1-A-03.pptx
+++ b/课件/C1/C1-A-03/C1-A-03.pptx
@@ -20,9 +20,11 @@
     <p:sldId id="268" r:id="rId14"/>
     <p:sldId id="269" r:id="rId15"/>
     <p:sldId id="270" r:id="rId16"/>
+    <p:sldId id="271" r:id="rId17"/>
+    <p:sldId id="272" r:id="rId18"/>
   </p:sldIdLst>
   <p:notesMasterIdLst>
-    <p:notesMasterId r:id="rId17"/>
+    <p:notesMasterId r:id="rId19"/>
   </p:notesMasterIdLst>
   <p:sldSz cx="12191695" cy="6858000"/>
   <p:notesSz cx="6858000" cy="12191695"/>
@@ -1068,6 +1070,182 @@
             <a:fld id="{F7021451-1387-4CA6-816F-3879F97B5CBC}" type="slidenum">
               <a:rPr lang="en-US"/>
               <a:t>15</a:t>
+            </a:fld>
+            <a:endParaRPr lang="en-US"/>
+          </a:p>
+        </p:txBody>
+      </p:sp>
+    </p:spTree>
+    <p:extLst>
+      <p:ext uri="{BB962C8B-B14F-4D97-AF65-F5344CB8AC3E}">
+        <p14:creationId xmlns:p14="http://schemas.microsoft.com/office/powerpoint/2010/main" val="1024086991"/>
+      </p:ext>
+    </p:extLst>
+  </p:cSld>
+  <p:clrMapOvr>
+    <a:masterClrMapping/>
+  </p:clrMapOvr>
+</p:notes>
+</file>
+
+<file path=ppt/notesSlides/notesSlide16.xml><?xml version="1.0" encoding="utf-8"?>
+<p:notes xmlns:a="http://schemas.openxmlformats.org/drawingml/2006/main" xmlns:r="http://schemas.openxmlformats.org/officeDocument/2006/relationships" xmlns:p="http://schemas.openxmlformats.org/presentationml/2006/main">
+  <p:cSld>
+    <p:spTree>
+      <p:nvGrpSpPr>
+        <p:cNvPr id="1" name=""/>
+        <p:cNvGrpSpPr/>
+        <p:nvPr/>
+      </p:nvGrpSpPr>
+      <p:grpSpPr>
+        <a:xfrm>
+          <a:off x="0" y="0"/>
+          <a:ext cx="0" cy="0"/>
+          <a:chOff x="0" y="0"/>
+          <a:chExt cx="0" cy="0"/>
+        </a:xfrm>
+      </p:grpSpPr>
+      <p:sp>
+        <p:nvSpPr>
+          <p:cNvPr id="2" name="Slide Image Placeholder 1"/>
+          <p:cNvSpPr>
+            <a:spLocks noGrp="1" noRot="1" noChangeAspect="1"/>
+          </p:cNvSpPr>
+          <p:nvPr>
+            <p:ph type="sldImg"/>
+          </p:nvPr>
+        </p:nvSpPr>
+        <p:spPr/>
+      </p:sp>
+      <p:sp>
+        <p:nvSpPr>
+          <p:cNvPr id="3" name="Notes Placeholder 2"/>
+          <p:cNvSpPr>
+            <a:spLocks noGrp="1"/>
+          </p:cNvSpPr>
+          <p:nvPr>
+            <p:ph type="body" idx="1"/>
+          </p:nvPr>
+        </p:nvSpPr>
+        <p:spPr/>
+        <p:txBody>
+          <a:bodyPr/>
+          <a:lstStyle/>
+          <a:p>
+            <a:r>
+              <a:rPr lang="en-US" dirty="0"/>
+              <a:t/>
+            </a:r>
+            <a:endParaRPr lang="en-US" dirty="0"/>
+          </a:p>
+        </p:txBody>
+      </p:sp>
+      <p:sp>
+        <p:nvSpPr>
+          <p:cNvPr id="4" name="Slide Number Placeholder 3"/>
+          <p:cNvSpPr>
+            <a:spLocks noGrp="1"/>
+          </p:cNvSpPr>
+          <p:nvPr>
+            <p:ph type="sldNum" sz="quarter" idx="10"/>
+          </p:nvPr>
+        </p:nvSpPr>
+        <p:spPr/>
+        <p:txBody>
+          <a:bodyPr/>
+          <a:lstStyle/>
+          <a:p>
+            <a:fld id="{F7021451-1387-4CA6-816F-3879F97B5CBC}" type="slidenum">
+              <a:rPr lang="en-US"/>
+              <a:t>16</a:t>
+            </a:fld>
+            <a:endParaRPr lang="en-US"/>
+          </a:p>
+        </p:txBody>
+      </p:sp>
+    </p:spTree>
+    <p:extLst>
+      <p:ext uri="{BB962C8B-B14F-4D97-AF65-F5344CB8AC3E}">
+        <p14:creationId xmlns:p14="http://schemas.microsoft.com/office/powerpoint/2010/main" val="1024086991"/>
+      </p:ext>
+    </p:extLst>
+  </p:cSld>
+  <p:clrMapOvr>
+    <a:masterClrMapping/>
+  </p:clrMapOvr>
+</p:notes>
+</file>
+
+<file path=ppt/notesSlides/notesSlide17.xml><?xml version="1.0" encoding="utf-8"?>
+<p:notes xmlns:a="http://schemas.openxmlformats.org/drawingml/2006/main" xmlns:r="http://schemas.openxmlformats.org/officeDocument/2006/relationships" xmlns:p="http://schemas.openxmlformats.org/presentationml/2006/main">
+  <p:cSld>
+    <p:spTree>
+      <p:nvGrpSpPr>
+        <p:cNvPr id="1" name=""/>
+        <p:cNvGrpSpPr/>
+        <p:nvPr/>
+      </p:nvGrpSpPr>
+      <p:grpSpPr>
+        <a:xfrm>
+          <a:off x="0" y="0"/>
+          <a:ext cx="0" cy="0"/>
+          <a:chOff x="0" y="0"/>
+          <a:chExt cx="0" cy="0"/>
+        </a:xfrm>
+      </p:grpSpPr>
+      <p:sp>
+        <p:nvSpPr>
+          <p:cNvPr id="2" name="Slide Image Placeholder 1"/>
+          <p:cNvSpPr>
+            <a:spLocks noGrp="1" noRot="1" noChangeAspect="1"/>
+          </p:cNvSpPr>
+          <p:nvPr>
+            <p:ph type="sldImg"/>
+          </p:nvPr>
+        </p:nvSpPr>
+        <p:spPr/>
+      </p:sp>
+      <p:sp>
+        <p:nvSpPr>
+          <p:cNvPr id="3" name="Notes Placeholder 2"/>
+          <p:cNvSpPr>
+            <a:spLocks noGrp="1"/>
+          </p:cNvSpPr>
+          <p:nvPr>
+            <p:ph type="body" idx="1"/>
+          </p:nvPr>
+        </p:nvSpPr>
+        <p:spPr/>
+        <p:txBody>
+          <a:bodyPr/>
+          <a:lstStyle/>
+          <a:p>
+            <a:r>
+              <a:rPr lang="en-US" dirty="0"/>
+              <a:t/>
+            </a:r>
+            <a:endParaRPr lang="en-US" dirty="0"/>
+          </a:p>
+        </p:txBody>
+      </p:sp>
+      <p:sp>
+        <p:nvSpPr>
+          <p:cNvPr id="4" name="Slide Number Placeholder 3"/>
+          <p:cNvSpPr>
+            <a:spLocks noGrp="1"/>
+          </p:cNvSpPr>
+          <p:nvPr>
+            <p:ph type="sldNum" sz="quarter" idx="10"/>
+          </p:nvPr>
+        </p:nvSpPr>
+        <p:spPr/>
+        <p:txBody>
+          <a:bodyPr/>
+          <a:lstStyle/>
+          <a:p>
+            <a:fld id="{F7021451-1387-4CA6-816F-3879F97B5CBC}" type="slidenum">
+              <a:rPr lang="en-US"/>
+              <a:t>17</a:t>
             </a:fld>
             <a:endParaRPr lang="en-US"/>
           </a:p>
@@ -2161,7 +2339,7 @@
                 <a:ea typeface="微软雅黑" pitchFamily="34" charset="-122"/>
                 <a:cs typeface="微软雅黑" pitchFamily="34" charset="-120"/>
               </a:rPr>
-              <a:t>1 / 15</a:t>
+              <a:t>1 / 17</a:t>
             </a:r>
             <a:endParaRPr lang="en-US" sz="1000" dirty="0"/>
           </a:p>
@@ -2395,7 +2573,7 @@
                 <a:ea typeface="微软雅黑" pitchFamily="34" charset="-122"/>
                 <a:cs typeface="微软雅黑" pitchFamily="34" charset="-120"/>
               </a:rPr>
-              <a:t>10 / 15</a:t>
+              <a:t>10 / 17</a:t>
             </a:r>
             <a:endParaRPr lang="en-US" sz="1000" dirty="0"/>
           </a:p>
@@ -2494,19 +2672,34 @@
             <a:avLst/>
           </a:prstGeom>
           <a:solidFill>
-            <a:srgbClr val="F5F6F7"/>
+            <a:srgbClr val="F7F9FC"/>
           </a:solidFill>
-          <a:ln w="9525">
-            <a:solidFill>
-              <a:srgbClr val="D8DBE0"/>
-            </a:solidFill>
-            <a:prstDash val="solid"/>
-          </a:ln>
-        </p:spPr>
-      </p:sp>
-      <p:sp>
-        <p:nvSpPr>
-          <p:cNvPr id="6" name="Text 4"/>
+          <a:ln/>
+        </p:spPr>
+      </p:sp>
+      <p:sp>
+        <p:nvSpPr>
+          <p:cNvPr id="6" name="Shape 4"/>
+          <p:cNvSpPr/>
+          <p:nvPr/>
+        </p:nvSpPr>
+        <p:spPr>
+          <a:xfrm>
+            <a:off x="822960" y="2395728"/>
+            <a:ext cx="50292" cy="1033272"/>
+          </a:xfrm>
+          <a:prstGeom prst="rect">
+            <a:avLst/>
+          </a:prstGeom>
+          <a:solidFill>
+            <a:srgbClr val="1F4E9C"/>
+          </a:solidFill>
+          <a:ln/>
+        </p:spPr>
+      </p:sp>
+      <p:sp>
+        <p:nvSpPr>
+          <p:cNvPr id="7" name="Text 5"/>
           <p:cNvSpPr/>
           <p:nvPr/>
         </p:nvSpPr>
@@ -2550,7 +2743,7 @@
       </p:sp>
       <p:sp>
         <p:nvSpPr>
-          <p:cNvPr id="7" name="Text 5"/>
+          <p:cNvPr id="8" name="Text 6"/>
           <p:cNvSpPr/>
           <p:nvPr/>
         </p:nvSpPr>
@@ -2606,7 +2799,7 @@
       </p:sp>
       <p:sp>
         <p:nvSpPr>
-          <p:cNvPr id="8" name="Text 6"/>
+          <p:cNvPr id="9" name="Text 7"/>
           <p:cNvSpPr/>
           <p:nvPr/>
         </p:nvSpPr>
@@ -2662,7 +2855,7 @@
       </p:sp>
       <p:sp>
         <p:nvSpPr>
-          <p:cNvPr id="9" name="Text 7"/>
+          <p:cNvPr id="10" name="Text 8"/>
           <p:cNvSpPr/>
           <p:nvPr/>
         </p:nvSpPr>
@@ -2816,7 +3009,7 @@
                 <a:ea typeface="微软雅黑" pitchFamily="34" charset="-122"/>
                 <a:cs typeface="微软雅黑" pitchFamily="34" charset="-120"/>
               </a:rPr>
-              <a:t>11 / 15</a:t>
+              <a:t>11 / 17</a:t>
             </a:r>
             <a:endParaRPr lang="en-US" sz="1000" dirty="0"/>
           </a:p>
@@ -2915,19 +3108,34 @@
             <a:avLst/>
           </a:prstGeom>
           <a:solidFill>
-            <a:srgbClr val="F5F6F7"/>
+            <a:srgbClr val="F7F9FC"/>
           </a:solidFill>
-          <a:ln w="9525">
-            <a:solidFill>
-              <a:srgbClr val="D8DBE0"/>
-            </a:solidFill>
-            <a:prstDash val="solid"/>
-          </a:ln>
-        </p:spPr>
-      </p:sp>
-      <p:sp>
-        <p:nvSpPr>
-          <p:cNvPr id="6" name="Text 4"/>
+          <a:ln/>
+        </p:spPr>
+      </p:sp>
+      <p:sp>
+        <p:nvSpPr>
+          <p:cNvPr id="6" name="Shape 4"/>
+          <p:cNvSpPr/>
+          <p:nvPr/>
+        </p:nvSpPr>
+        <p:spPr>
+          <a:xfrm>
+            <a:off x="822960" y="2395728"/>
+            <a:ext cx="50292" cy="1033272"/>
+          </a:xfrm>
+          <a:prstGeom prst="rect">
+            <a:avLst/>
+          </a:prstGeom>
+          <a:solidFill>
+            <a:srgbClr val="1F4E9C"/>
+          </a:solidFill>
+          <a:ln/>
+        </p:spPr>
+      </p:sp>
+      <p:sp>
+        <p:nvSpPr>
+          <p:cNvPr id="7" name="Text 5"/>
           <p:cNvSpPr/>
           <p:nvPr/>
         </p:nvSpPr>
@@ -2971,7 +3179,7 @@
       </p:sp>
       <p:sp>
         <p:nvSpPr>
-          <p:cNvPr id="7" name="Text 5"/>
+          <p:cNvPr id="8" name="Text 6"/>
           <p:cNvSpPr/>
           <p:nvPr/>
         </p:nvSpPr>
@@ -3041,7 +3249,7 @@
       </p:sp>
       <p:sp>
         <p:nvSpPr>
-          <p:cNvPr id="8" name="Text 6"/>
+          <p:cNvPr id="9" name="Text 7"/>
           <p:cNvSpPr/>
           <p:nvPr/>
         </p:nvSpPr>
@@ -3097,7 +3305,7 @@
       </p:sp>
       <p:sp>
         <p:nvSpPr>
-          <p:cNvPr id="9" name="Text 7"/>
+          <p:cNvPr id="10" name="Text 8"/>
           <p:cNvSpPr/>
           <p:nvPr/>
         </p:nvSpPr>
@@ -3223,7 +3431,7 @@
                 <a:ea typeface="微软雅黑" pitchFamily="34" charset="-122"/>
                 <a:cs typeface="微软雅黑" pitchFamily="34" charset="-120"/>
               </a:rPr>
-              <a:t>12 / 15</a:t>
+              <a:t>12 / 17</a:t>
             </a:r>
             <a:endParaRPr lang="en-US" sz="1000" dirty="0"/>
           </a:p>
@@ -3482,7 +3690,7 @@
                 <a:ea typeface="微软雅黑" pitchFamily="34" charset="-122"/>
                 <a:cs typeface="微软雅黑" pitchFamily="34" charset="-120"/>
               </a:rPr>
-              <a:t>13 / 15</a:t>
+              <a:t>13 / 17</a:t>
             </a:r>
             <a:endParaRPr lang="en-US" sz="1000" dirty="0"/>
           </a:p>
@@ -3581,19 +3789,34 @@
             <a:avLst/>
           </a:prstGeom>
           <a:solidFill>
-            <a:srgbClr val="F5F6F7"/>
+            <a:srgbClr val="F7F9FC"/>
           </a:solidFill>
-          <a:ln w="9525">
-            <a:solidFill>
-              <a:srgbClr val="D8DBE0"/>
-            </a:solidFill>
-            <a:prstDash val="solid"/>
-          </a:ln>
-        </p:spPr>
-      </p:sp>
-      <p:sp>
-        <p:nvSpPr>
-          <p:cNvPr id="6" name="Text 4"/>
+          <a:ln/>
+        </p:spPr>
+      </p:sp>
+      <p:sp>
+        <p:nvSpPr>
+          <p:cNvPr id="6" name="Shape 4"/>
+          <p:cNvSpPr/>
+          <p:nvPr/>
+        </p:nvSpPr>
+        <p:spPr>
+          <a:xfrm>
+            <a:off x="822960" y="2395728"/>
+            <a:ext cx="50292" cy="2459736"/>
+          </a:xfrm>
+          <a:prstGeom prst="rect">
+            <a:avLst/>
+          </a:prstGeom>
+          <a:solidFill>
+            <a:srgbClr val="1F4E9C"/>
+          </a:solidFill>
+          <a:ln/>
+        </p:spPr>
+      </p:sp>
+      <p:sp>
+        <p:nvSpPr>
+          <p:cNvPr id="7" name="Text 5"/>
           <p:cNvSpPr/>
           <p:nvPr/>
         </p:nvSpPr>
@@ -3643,7 +3866,7 @@
       </p:sp>
       <p:sp>
         <p:nvSpPr>
-          <p:cNvPr id="7" name="Text 5"/>
+          <p:cNvPr id="8" name="Text 6"/>
           <p:cNvSpPr/>
           <p:nvPr/>
         </p:nvSpPr>
@@ -3752,7 +3975,7 @@
                 <a:ea typeface="微软雅黑" pitchFamily="34" charset="-122"/>
                 <a:cs typeface="微软雅黑" pitchFamily="34" charset="-120"/>
               </a:rPr>
-              <a:t>14 / 15</a:t>
+              <a:t>14 / 17</a:t>
             </a:r>
             <a:endParaRPr lang="en-US" sz="1000" dirty="0"/>
           </a:p>
@@ -4171,7 +4394,7 @@
                 <a:ea typeface="微软雅黑" pitchFamily="34" charset="-122"/>
                 <a:cs typeface="微软雅黑" pitchFamily="34" charset="-120"/>
               </a:rPr>
-              <a:t>15 / 15</a:t>
+              <a:t>15 / 17</a:t>
             </a:r>
             <a:endParaRPr lang="en-US" sz="1000" dirty="0"/>
           </a:p>
@@ -4428,9 +4651,725 @@
                 <a:ea typeface="微软雅黑" pitchFamily="34" charset="-122"/>
                 <a:cs typeface="微软雅黑" pitchFamily="34" charset="-120"/>
               </a:rPr>
-              <a:t>写完对照讲稿附录的参考答案；要求：合上笔记能默写出%的两个用法</a:t>
+              <a:t>参考答案在本PPT最后两页，课后自行对照；要求：合上笔记能默写出%的两个用法</a:t>
             </a:r>
             <a:endParaRPr lang="en-US" sz="1500" dirty="0"/>
+          </a:p>
+        </p:txBody>
+      </p:sp>
+    </p:spTree>
+  </p:cSld>
+  <p:clrMapOvr>
+    <a:masterClrMapping/>
+  </p:clrMapOvr>
+</p:sld>
+</file>
+
+<file path=ppt/slides/slide16.xml><?xml version="1.0" encoding="utf-8"?>
+<p:sld xmlns:a="http://schemas.openxmlformats.org/drawingml/2006/main" xmlns:r="http://schemas.openxmlformats.org/officeDocument/2006/relationships" xmlns:p="http://schemas.openxmlformats.org/presentationml/2006/main">
+  <p:cSld name="Slide 16">
+    <p:bg>
+      <p:bgPr>
+        <a:blipFill dpi="0" rotWithShape="1">
+          <a:blip r:embed="rId1">
+            <a:lum/>
+          </a:blip>
+          <a:srcRect/>
+          <a:stretch>
+            <a:fillRect/>
+          </a:stretch>
+        </a:blipFill>
+        <a:effectLst/>
+      </p:bgPr>
+    </p:bg>
+    <p:spTree>
+      <p:nvGrpSpPr>
+        <p:cNvPr id="1" name=""/>
+        <p:cNvGrpSpPr/>
+        <p:nvPr/>
+      </p:nvGrpSpPr>
+      <p:grpSpPr>
+        <a:xfrm>
+          <a:off x="0" y="0"/>
+          <a:ext cx="0" cy="0"/>
+          <a:chOff x="0" y="0"/>
+          <a:chExt cx="0" cy="0"/>
+        </a:xfrm>
+      </p:grpSpPr>
+      <p:sp>
+        <p:nvSpPr>
+          <p:cNvPr id="2" name="Text 0"/>
+          <p:cNvSpPr/>
+          <p:nvPr/>
+        </p:nvSpPr>
+        <p:spPr>
+          <a:xfrm>
+            <a:off x="10362895" y="6016752"/>
+            <a:ext cx="1463040" cy="320040"/>
+          </a:xfrm>
+          <a:prstGeom prst="rect">
+            <a:avLst/>
+          </a:prstGeom>
+          <a:noFill/>
+          <a:ln/>
+        </p:spPr>
+        <p:txBody>
+          <a:bodyPr wrap="square" rtlCol="0" anchor="ctr"/>
+          <a:lstStyle/>
+          <a:p>
+            <a:pPr algn="r" indent="0" marL="0">
+              <a:buNone/>
+            </a:pPr>
+            <a:r>
+              <a:rPr lang="en-US" sz="1000" dirty="0">
+                <a:solidFill>
+                  <a:srgbClr val="8A9099"/>
+                </a:solidFill>
+                <a:latin typeface="微软雅黑" pitchFamily="34" charset="0"/>
+                <a:ea typeface="微软雅黑" pitchFamily="34" charset="-122"/>
+                <a:cs typeface="微软雅黑" pitchFamily="34" charset="-120"/>
+              </a:rPr>
+              <a:t>16 / 17</a:t>
+            </a:r>
+            <a:endParaRPr lang="en-US" sz="1000" dirty="0"/>
+          </a:p>
+        </p:txBody>
+      </p:sp>
+      <p:sp>
+        <p:nvSpPr>
+          <p:cNvPr id="3" name="Text 1"/>
+          <p:cNvSpPr/>
+          <p:nvPr/>
+        </p:nvSpPr>
+        <p:spPr>
+          <a:xfrm>
+            <a:off x="822960" y="960120"/>
+            <a:ext cx="10545775" cy="365760"/>
+          </a:xfrm>
+          <a:prstGeom prst="rect">
+            <a:avLst/>
+          </a:prstGeom>
+          <a:noFill/>
+          <a:ln/>
+        </p:spPr>
+        <p:txBody>
+          <a:bodyPr wrap="square" rtlCol="0" anchor="ctr"/>
+          <a:lstStyle/>
+          <a:p>
+            <a:pPr algn="l" indent="0" marL="0">
+              <a:buNone/>
+            </a:pPr>
+            <a:r>
+              <a:rPr lang="en-US" sz="1400" b="1" dirty="0">
+                <a:solidFill>
+                  <a:srgbClr val="1F4E9C"/>
+                </a:solidFill>
+                <a:latin typeface="微软雅黑" pitchFamily="34" charset="0"/>
+                <a:ea typeface="微软雅黑" pitchFamily="34" charset="-122"/>
+                <a:cs typeface="微软雅黑" pitchFamily="34" charset="-120"/>
+              </a:rPr>
+              <a:t>参考答案 · 跟练题</a:t>
+            </a:r>
+            <a:endParaRPr lang="en-US" sz="1400" dirty="0"/>
+          </a:p>
+        </p:txBody>
+      </p:sp>
+      <p:sp>
+        <p:nvSpPr>
+          <p:cNvPr id="4" name="Text 2"/>
+          <p:cNvSpPr/>
+          <p:nvPr/>
+        </p:nvSpPr>
+        <p:spPr>
+          <a:xfrm>
+            <a:off x="822960" y="1344168"/>
+            <a:ext cx="10545775" cy="731520"/>
+          </a:xfrm>
+          <a:prstGeom prst="rect">
+            <a:avLst/>
+          </a:prstGeom>
+          <a:noFill/>
+          <a:ln/>
+        </p:spPr>
+        <p:txBody>
+          <a:bodyPr wrap="square" rtlCol="0" anchor="ctr"/>
+          <a:lstStyle/>
+          <a:p>
+            <a:pPr algn="l" indent="0" marL="0">
+              <a:buNone/>
+            </a:pPr>
+            <a:r>
+              <a:rPr lang="en-US" sz="2800" b="1" dirty="0">
+                <a:solidFill>
+                  <a:srgbClr val="1F2329"/>
+                </a:solidFill>
+                <a:latin typeface="微软雅黑" pitchFamily="34" charset="0"/>
+                <a:ea typeface="微软雅黑" pitchFamily="34" charset="-122"/>
+                <a:cs typeface="微软雅黑" pitchFamily="34" charset="-120"/>
+              </a:rPr>
+              <a:t>跟练题参考答案（自行对照）</a:t>
+            </a:r>
+            <a:endParaRPr lang="en-US" sz="2800" dirty="0"/>
+          </a:p>
+        </p:txBody>
+      </p:sp>
+      <p:sp>
+        <p:nvSpPr>
+          <p:cNvPr id="5" name="Shape 3"/>
+          <p:cNvSpPr/>
+          <p:nvPr/>
+        </p:nvSpPr>
+        <p:spPr>
+          <a:xfrm>
+            <a:off x="822960" y="2395728"/>
+            <a:ext cx="10545775" cy="2459736"/>
+          </a:xfrm>
+          <a:prstGeom prst="rect">
+            <a:avLst/>
+          </a:prstGeom>
+          <a:solidFill>
+            <a:srgbClr val="F7F9FC"/>
+          </a:solidFill>
+          <a:ln/>
+        </p:spPr>
+      </p:sp>
+      <p:sp>
+        <p:nvSpPr>
+          <p:cNvPr id="6" name="Shape 4"/>
+          <p:cNvSpPr/>
+          <p:nvPr/>
+        </p:nvSpPr>
+        <p:spPr>
+          <a:xfrm>
+            <a:off x="822960" y="2395728"/>
+            <a:ext cx="50292" cy="2459736"/>
+          </a:xfrm>
+          <a:prstGeom prst="rect">
+            <a:avLst/>
+          </a:prstGeom>
+          <a:solidFill>
+            <a:srgbClr val="1F4E9C"/>
+          </a:solidFill>
+          <a:ln/>
+        </p:spPr>
+      </p:sp>
+      <p:sp>
+        <p:nvSpPr>
+          <p:cNvPr id="7" name="Text 5"/>
+          <p:cNvSpPr/>
+          <p:nvPr/>
+        </p:nvSpPr>
+        <p:spPr>
+          <a:xfrm>
+            <a:off x="1078992" y="2505456"/>
+            <a:ext cx="10033711" cy="2240280"/>
+          </a:xfrm>
+          <a:prstGeom prst="rect">
+            <a:avLst/>
+          </a:prstGeom>
+          <a:noFill/>
+          <a:ln/>
+        </p:spPr>
+        <p:txBody>
+          <a:bodyPr wrap="square" rtlCol="0" anchor="t"/>
+          <a:lstStyle/>
+          <a:p>
+            <a:pPr algn="l" indent="0" marL="0">
+              <a:lnSpc>
+                <a:spcPct val="125000"/>
+              </a:lnSpc>
+              <a:buNone/>
+            </a:pPr>
+            <a:r>
+              <a:rPr lang="en-US" sz="1400" dirty="0">
+                <a:solidFill>
+                  <a:srgbClr val="1F2329"/>
+                </a:solidFill>
+                <a:latin typeface="Consolas" pitchFamily="34" charset="0"/>
+                <a:ea typeface="Consolas" pitchFamily="34" charset="-122"/>
+                <a:cs typeface="Consolas" pitchFamily="34" charset="-120"/>
+              </a:rPr>
+              <a:t>#include &lt;stdio.h&gt;
+int main(){
+    int n;
+    scanf("%d", &amp;n);
+    printf("个位：%d\n", n % 10);
+    printf("十位：%d\n", n / 10 % 10);
+    return 0;
+}
+</a:t>
+            </a:r>
+            <a:endParaRPr lang="en-US" sz="1400" dirty="0"/>
+          </a:p>
+        </p:txBody>
+      </p:sp>
+      <p:sp>
+        <p:nvSpPr>
+          <p:cNvPr id="8" name="Text 6"/>
+          <p:cNvSpPr/>
+          <p:nvPr/>
+        </p:nvSpPr>
+        <p:spPr>
+          <a:xfrm>
+            <a:off x="896112" y="5056632"/>
+            <a:ext cx="10454335" cy="397764"/>
+          </a:xfrm>
+          <a:prstGeom prst="rect">
+            <a:avLst/>
+          </a:prstGeom>
+          <a:noFill/>
+          <a:ln/>
+        </p:spPr>
+        <p:txBody>
+          <a:bodyPr wrap="square" rtlCol="0" anchor="t"/>
+          <a:lstStyle/>
+          <a:p>
+            <a:pPr algn="l" indent="0" marL="0">
+              <a:lnSpc>
+                <a:spcPct val="115000"/>
+              </a:lnSpc>
+              <a:buNone/>
+            </a:pPr>
+            <a:r>
+              <a:rPr lang="en-US" sz="1800" b="1" dirty="0">
+                <a:solidFill>
+                  <a:srgbClr val="1F4E9C"/>
+                </a:solidFill>
+                <a:latin typeface="微软雅黑" pitchFamily="34" charset="0"/>
+                <a:ea typeface="微软雅黑" pitchFamily="34" charset="-122"/>
+                <a:cs typeface="微软雅黑" pitchFamily="34" charset="-120"/>
+              </a:rPr>
+              <a:t>•  </a:t>
+            </a:r>
+            <a:pPr algn="l" indent="0" marL="0">
+              <a:lnSpc>
+                <a:spcPct val="115000"/>
+              </a:lnSpc>
+              <a:buNone/>
+            </a:pPr>
+            <a:r>
+              <a:rPr lang="en-US" sz="1800" dirty="0">
+                <a:solidFill>
+                  <a:srgbClr val="000000"/>
+                </a:solidFill>
+              </a:rPr>
+              <a:t>个位用 n 对 10 取余，十位用 n 先整除 10 再对 10 取余</a:t>
+            </a:r>
+            <a:endParaRPr lang="en-US" sz="1800" dirty="0"/>
+          </a:p>
+        </p:txBody>
+      </p:sp>
+      <p:sp>
+        <p:nvSpPr>
+          <p:cNvPr id="9" name="Text 7"/>
+          <p:cNvSpPr/>
+          <p:nvPr/>
+        </p:nvSpPr>
+        <p:spPr>
+          <a:xfrm>
+            <a:off x="896112" y="5527548"/>
+            <a:ext cx="10454335" cy="397764"/>
+          </a:xfrm>
+          <a:prstGeom prst="rect">
+            <a:avLst/>
+          </a:prstGeom>
+          <a:noFill/>
+          <a:ln/>
+        </p:spPr>
+        <p:txBody>
+          <a:bodyPr wrap="square" rtlCol="0" anchor="t"/>
+          <a:lstStyle/>
+          <a:p>
+            <a:pPr algn="l" indent="0" marL="0">
+              <a:lnSpc>
+                <a:spcPct val="115000"/>
+              </a:lnSpc>
+              <a:buNone/>
+            </a:pPr>
+            <a:r>
+              <a:rPr lang="en-US" sz="1800" b="1" dirty="0">
+                <a:solidFill>
+                  <a:srgbClr val="1F4E9C"/>
+                </a:solidFill>
+                <a:latin typeface="微软雅黑" pitchFamily="34" charset="0"/>
+                <a:ea typeface="微软雅黑" pitchFamily="34" charset="-122"/>
+                <a:cs typeface="微软雅黑" pitchFamily="34" charset="-120"/>
+              </a:rPr>
+              <a:t>•  </a:t>
+            </a:r>
+            <a:pPr algn="l" indent="0" marL="0">
+              <a:lnSpc>
+                <a:spcPct val="115000"/>
+              </a:lnSpc>
+              <a:buNone/>
+            </a:pPr>
+            <a:r>
+              <a:rPr lang="en-US" sz="1800" dirty="0">
+                <a:solidFill>
+                  <a:srgbClr val="000000"/>
+                </a:solidFill>
+              </a:rPr>
+              <a:t>取余拿个位、整除砍掉个位，是后面拆位数的通用套路</a:t>
+            </a:r>
+            <a:endParaRPr lang="en-US" sz="1800" dirty="0"/>
+          </a:p>
+        </p:txBody>
+      </p:sp>
+    </p:spTree>
+  </p:cSld>
+  <p:clrMapOvr>
+    <a:masterClrMapping/>
+  </p:clrMapOvr>
+</p:sld>
+</file>
+
+<file path=ppt/slides/slide17.xml><?xml version="1.0" encoding="utf-8"?>
+<p:sld xmlns:a="http://schemas.openxmlformats.org/drawingml/2006/main" xmlns:r="http://schemas.openxmlformats.org/officeDocument/2006/relationships" xmlns:p="http://schemas.openxmlformats.org/presentationml/2006/main">
+  <p:cSld name="Slide 17">
+    <p:bg>
+      <p:bgPr>
+        <a:blipFill dpi="0" rotWithShape="1">
+          <a:blip r:embed="rId1">
+            <a:lum/>
+          </a:blip>
+          <a:srcRect/>
+          <a:stretch>
+            <a:fillRect/>
+          </a:stretch>
+        </a:blipFill>
+        <a:effectLst/>
+      </p:bgPr>
+    </p:bg>
+    <p:spTree>
+      <p:nvGrpSpPr>
+        <p:cNvPr id="1" name=""/>
+        <p:cNvGrpSpPr/>
+        <p:nvPr/>
+      </p:nvGrpSpPr>
+      <p:grpSpPr>
+        <a:xfrm>
+          <a:off x="0" y="0"/>
+          <a:ext cx="0" cy="0"/>
+          <a:chOff x="0" y="0"/>
+          <a:chExt cx="0" cy="0"/>
+        </a:xfrm>
+      </p:grpSpPr>
+      <p:sp>
+        <p:nvSpPr>
+          <p:cNvPr id="2" name="Text 0"/>
+          <p:cNvSpPr/>
+          <p:nvPr/>
+        </p:nvSpPr>
+        <p:spPr>
+          <a:xfrm>
+            <a:off x="10362895" y="6016752"/>
+            <a:ext cx="1463040" cy="320040"/>
+          </a:xfrm>
+          <a:prstGeom prst="rect">
+            <a:avLst/>
+          </a:prstGeom>
+          <a:noFill/>
+          <a:ln/>
+        </p:spPr>
+        <p:txBody>
+          <a:bodyPr wrap="square" rtlCol="0" anchor="ctr"/>
+          <a:lstStyle/>
+          <a:p>
+            <a:pPr algn="r" indent="0" marL="0">
+              <a:buNone/>
+            </a:pPr>
+            <a:r>
+              <a:rPr lang="en-US" sz="1000" dirty="0">
+                <a:solidFill>
+                  <a:srgbClr val="8A9099"/>
+                </a:solidFill>
+                <a:latin typeface="微软雅黑" pitchFamily="34" charset="0"/>
+                <a:ea typeface="微软雅黑" pitchFamily="34" charset="-122"/>
+                <a:cs typeface="微软雅黑" pitchFamily="34" charset="-120"/>
+              </a:rPr>
+              <a:t>17 / 17</a:t>
+            </a:r>
+            <a:endParaRPr lang="en-US" sz="1000" dirty="0"/>
+          </a:p>
+        </p:txBody>
+      </p:sp>
+      <p:sp>
+        <p:nvSpPr>
+          <p:cNvPr id="3" name="Text 1"/>
+          <p:cNvSpPr/>
+          <p:nvPr/>
+        </p:nvSpPr>
+        <p:spPr>
+          <a:xfrm>
+            <a:off x="822960" y="960120"/>
+            <a:ext cx="10545775" cy="365760"/>
+          </a:xfrm>
+          <a:prstGeom prst="rect">
+            <a:avLst/>
+          </a:prstGeom>
+          <a:noFill/>
+          <a:ln/>
+        </p:spPr>
+        <p:txBody>
+          <a:bodyPr wrap="square" rtlCol="0" anchor="ctr"/>
+          <a:lstStyle/>
+          <a:p>
+            <a:pPr algn="l" indent="0" marL="0">
+              <a:buNone/>
+            </a:pPr>
+            <a:r>
+              <a:rPr lang="en-US" sz="1400" b="1" dirty="0">
+                <a:solidFill>
+                  <a:srgbClr val="1F4E9C"/>
+                </a:solidFill>
+                <a:latin typeface="微软雅黑" pitchFamily="34" charset="0"/>
+                <a:ea typeface="微软雅黑" pitchFamily="34" charset="-122"/>
+                <a:cs typeface="微软雅黑" pitchFamily="34" charset="-120"/>
+              </a:rPr>
+              <a:t>参考答案 · 模仿题</a:t>
+            </a:r>
+            <a:endParaRPr lang="en-US" sz="1400" dirty="0"/>
+          </a:p>
+        </p:txBody>
+      </p:sp>
+      <p:sp>
+        <p:nvSpPr>
+          <p:cNvPr id="4" name="Text 2"/>
+          <p:cNvSpPr/>
+          <p:nvPr/>
+        </p:nvSpPr>
+        <p:spPr>
+          <a:xfrm>
+            <a:off x="822960" y="1344168"/>
+            <a:ext cx="10545775" cy="731520"/>
+          </a:xfrm>
+          <a:prstGeom prst="rect">
+            <a:avLst/>
+          </a:prstGeom>
+          <a:noFill/>
+          <a:ln/>
+        </p:spPr>
+        <p:txBody>
+          <a:bodyPr wrap="square" rtlCol="0" anchor="ctr"/>
+          <a:lstStyle/>
+          <a:p>
+            <a:pPr algn="l" indent="0" marL="0">
+              <a:buNone/>
+            </a:pPr>
+            <a:r>
+              <a:rPr lang="en-US" sz="2800" b="1" dirty="0">
+                <a:solidFill>
+                  <a:srgbClr val="1F2329"/>
+                </a:solidFill>
+                <a:latin typeface="微软雅黑" pitchFamily="34" charset="0"/>
+                <a:ea typeface="微软雅黑" pitchFamily="34" charset="-122"/>
+                <a:cs typeface="微软雅黑" pitchFamily="34" charset="-120"/>
+              </a:rPr>
+              <a:t>模仿题参考答案（自行对照）</a:t>
+            </a:r>
+            <a:endParaRPr lang="en-US" sz="2800" dirty="0"/>
+          </a:p>
+        </p:txBody>
+      </p:sp>
+      <p:sp>
+        <p:nvSpPr>
+          <p:cNvPr id="5" name="Shape 3"/>
+          <p:cNvSpPr/>
+          <p:nvPr/>
+        </p:nvSpPr>
+        <p:spPr>
+          <a:xfrm>
+            <a:off x="822960" y="2395728"/>
+            <a:ext cx="10545775" cy="2459736"/>
+          </a:xfrm>
+          <a:prstGeom prst="rect">
+            <a:avLst/>
+          </a:prstGeom>
+          <a:solidFill>
+            <a:srgbClr val="F7F9FC"/>
+          </a:solidFill>
+          <a:ln/>
+        </p:spPr>
+      </p:sp>
+      <p:sp>
+        <p:nvSpPr>
+          <p:cNvPr id="6" name="Shape 4"/>
+          <p:cNvSpPr/>
+          <p:nvPr/>
+        </p:nvSpPr>
+        <p:spPr>
+          <a:xfrm>
+            <a:off x="822960" y="2395728"/>
+            <a:ext cx="50292" cy="2459736"/>
+          </a:xfrm>
+          <a:prstGeom prst="rect">
+            <a:avLst/>
+          </a:prstGeom>
+          <a:solidFill>
+            <a:srgbClr val="1F4E9C"/>
+          </a:solidFill>
+          <a:ln/>
+        </p:spPr>
+      </p:sp>
+      <p:sp>
+        <p:nvSpPr>
+          <p:cNvPr id="7" name="Text 5"/>
+          <p:cNvSpPr/>
+          <p:nvPr/>
+        </p:nvSpPr>
+        <p:spPr>
+          <a:xfrm>
+            <a:off x="1078992" y="2505456"/>
+            <a:ext cx="10033711" cy="2240280"/>
+          </a:xfrm>
+          <a:prstGeom prst="rect">
+            <a:avLst/>
+          </a:prstGeom>
+          <a:noFill/>
+          <a:ln/>
+        </p:spPr>
+        <p:txBody>
+          <a:bodyPr wrap="square" rtlCol="0" anchor="t"/>
+          <a:lstStyle/>
+          <a:p>
+            <a:pPr algn="l" indent="0" marL="0">
+              <a:lnSpc>
+                <a:spcPct val="125000"/>
+              </a:lnSpc>
+              <a:buNone/>
+            </a:pPr>
+            <a:r>
+              <a:rPr lang="en-US" sz="1400" dirty="0">
+                <a:solidFill>
+                  <a:srgbClr val="1F2329"/>
+                </a:solidFill>
+                <a:latin typeface="Consolas" pitchFamily="34" charset="0"/>
+                <a:ea typeface="Consolas" pitchFamily="34" charset="-122"/>
+                <a:cs typeface="Consolas" pitchFamily="34" charset="-120"/>
+              </a:rPr>
+              <a:t>#include &lt;stdio.h&gt;
+int main(){
+    int n;
+    scanf("%d", &amp;n);
+    printf("%d\n", n % 2);
+    return 0;
+}
+// 输入5输出1（奇数），输入6输出0（偶数）
+</a:t>
+            </a:r>
+            <a:endParaRPr lang="en-US" sz="1400" dirty="0"/>
+          </a:p>
+        </p:txBody>
+      </p:sp>
+      <p:sp>
+        <p:nvSpPr>
+          <p:cNvPr id="8" name="Text 6"/>
+          <p:cNvSpPr/>
+          <p:nvPr/>
+        </p:nvSpPr>
+        <p:spPr>
+          <a:xfrm>
+            <a:off x="896112" y="5056632"/>
+            <a:ext cx="10454335" cy="397764"/>
+          </a:xfrm>
+          <a:prstGeom prst="rect">
+            <a:avLst/>
+          </a:prstGeom>
+          <a:noFill/>
+          <a:ln/>
+        </p:spPr>
+        <p:txBody>
+          <a:bodyPr wrap="square" rtlCol="0" anchor="t"/>
+          <a:lstStyle/>
+          <a:p>
+            <a:pPr algn="l" indent="0" marL="0">
+              <a:lnSpc>
+                <a:spcPct val="115000"/>
+              </a:lnSpc>
+              <a:buNone/>
+            </a:pPr>
+            <a:r>
+              <a:rPr lang="en-US" sz="1800" b="1" dirty="0">
+                <a:solidFill>
+                  <a:srgbClr val="1F4E9C"/>
+                </a:solidFill>
+                <a:latin typeface="微软雅黑" pitchFamily="34" charset="0"/>
+                <a:ea typeface="微软雅黑" pitchFamily="34" charset="-122"/>
+                <a:cs typeface="微软雅黑" pitchFamily="34" charset="-120"/>
+              </a:rPr>
+              <a:t>•  </a:t>
+            </a:r>
+            <a:pPr algn="l" indent="0" marL="0">
+              <a:lnSpc>
+                <a:spcPct val="115000"/>
+              </a:lnSpc>
+              <a:buNone/>
+            </a:pPr>
+            <a:r>
+              <a:rPr lang="en-US" sz="1800" dirty="0">
+                <a:solidFill>
+                  <a:srgbClr val="000000"/>
+                </a:solidFill>
+              </a:rPr>
+              <a:t>n 对 2 取余，输入奇数输出 1，输入偶数输出 0</a:t>
+            </a:r>
+            <a:endParaRPr lang="en-US" sz="1800" dirty="0"/>
+          </a:p>
+        </p:txBody>
+      </p:sp>
+      <p:sp>
+        <p:nvSpPr>
+          <p:cNvPr id="9" name="Text 7"/>
+          <p:cNvSpPr/>
+          <p:nvPr/>
+        </p:nvSpPr>
+        <p:spPr>
+          <a:xfrm>
+            <a:off x="896112" y="5527548"/>
+            <a:ext cx="10454335" cy="397764"/>
+          </a:xfrm>
+          <a:prstGeom prst="rect">
+            <a:avLst/>
+          </a:prstGeom>
+          <a:noFill/>
+          <a:ln/>
+        </p:spPr>
+        <p:txBody>
+          <a:bodyPr wrap="square" rtlCol="0" anchor="t"/>
+          <a:lstStyle/>
+          <a:p>
+            <a:pPr algn="l" indent="0" marL="0">
+              <a:lnSpc>
+                <a:spcPct val="115000"/>
+              </a:lnSpc>
+              <a:buNone/>
+            </a:pPr>
+            <a:r>
+              <a:rPr lang="en-US" sz="1800" b="1" dirty="0">
+                <a:solidFill>
+                  <a:srgbClr val="1F4E9C"/>
+                </a:solidFill>
+                <a:latin typeface="微软雅黑" pitchFamily="34" charset="0"/>
+                <a:ea typeface="微软雅黑" pitchFamily="34" charset="-122"/>
+                <a:cs typeface="微软雅黑" pitchFamily="34" charset="-120"/>
+              </a:rPr>
+              <a:t>•  </a:t>
+            </a:r>
+            <a:pPr algn="l" indent="0" marL="0">
+              <a:lnSpc>
+                <a:spcPct val="115000"/>
+              </a:lnSpc>
+              <a:buNone/>
+            </a:pPr>
+            <a:r>
+              <a:rPr lang="en-US" sz="1800" dirty="0">
+                <a:solidFill>
+                  <a:srgbClr val="000000"/>
+                </a:solidFill>
+              </a:rPr>
+              <a:t>任何整数除以 2 的余数只有 0 和 1，正好用来判奇偶</a:t>
+            </a:r>
+            <a:endParaRPr lang="en-US" sz="1800" dirty="0"/>
           </a:p>
         </p:txBody>
       </p:sp>
@@ -4506,7 +5445,7 @@
                 <a:ea typeface="微软雅黑" pitchFamily="34" charset="-122"/>
                 <a:cs typeface="微软雅黑" pitchFamily="34" charset="-120"/>
               </a:rPr>
-              <a:t>2 / 15</a:t>
+              <a:t>2 / 17</a:t>
             </a:r>
             <a:endParaRPr lang="en-US" sz="1000" dirty="0"/>
           </a:p>
@@ -4671,19 +5610,34 @@
             <a:avLst/>
           </a:prstGeom>
           <a:solidFill>
-            <a:srgbClr val="F5F6F7"/>
+            <a:srgbClr val="F7F9FC"/>
           </a:solidFill>
-          <a:ln w="9525">
-            <a:solidFill>
-              <a:srgbClr val="D8DBE0"/>
-            </a:solidFill>
-            <a:prstDash val="solid"/>
-          </a:ln>
-        </p:spPr>
-      </p:sp>
-      <p:sp>
-        <p:nvSpPr>
-          <p:cNvPr id="8" name="Text 6"/>
+          <a:ln/>
+        </p:spPr>
+      </p:sp>
+      <p:sp>
+        <p:nvSpPr>
+          <p:cNvPr id="8" name="Shape 6"/>
+          <p:cNvSpPr/>
+          <p:nvPr/>
+        </p:nvSpPr>
+        <p:spPr>
+          <a:xfrm>
+            <a:off x="822960" y="2395728"/>
+            <a:ext cx="50292" cy="1271016"/>
+          </a:xfrm>
+          <a:prstGeom prst="rect">
+            <a:avLst/>
+          </a:prstGeom>
+          <a:solidFill>
+            <a:srgbClr val="1F4E9C"/>
+          </a:solidFill>
+          <a:ln/>
+        </p:spPr>
+      </p:sp>
+      <p:sp>
+        <p:nvSpPr>
+          <p:cNvPr id="9" name="Text 7"/>
           <p:cNvSpPr/>
           <p:nvPr/>
         </p:nvSpPr>
@@ -4728,7 +5682,7 @@
       </p:sp>
       <p:sp>
         <p:nvSpPr>
-          <p:cNvPr id="9" name="Text 7"/>
+          <p:cNvPr id="10" name="Text 8"/>
           <p:cNvSpPr/>
           <p:nvPr/>
         </p:nvSpPr>
@@ -4812,7 +5766,7 @@
       </p:sp>
       <p:sp>
         <p:nvSpPr>
-          <p:cNvPr id="10" name="Text 8"/>
+          <p:cNvPr id="11" name="Text 9"/>
           <p:cNvSpPr/>
           <p:nvPr/>
         </p:nvSpPr>
@@ -4868,7 +5822,7 @@
       </p:sp>
       <p:sp>
         <p:nvSpPr>
-          <p:cNvPr id="11" name="Text 9"/>
+          <p:cNvPr id="12" name="Text 10"/>
           <p:cNvSpPr/>
           <p:nvPr/>
         </p:nvSpPr>
@@ -5022,7 +5976,7 @@
                 <a:ea typeface="微软雅黑" pitchFamily="34" charset="-122"/>
                 <a:cs typeface="微软雅黑" pitchFamily="34" charset="-120"/>
               </a:rPr>
-              <a:t>3 / 15</a:t>
+              <a:t>3 / 17</a:t>
             </a:r>
             <a:endParaRPr lang="en-US" sz="1000" dirty="0"/>
           </a:p>
@@ -5121,19 +6075,34 @@
             <a:avLst/>
           </a:prstGeom>
           <a:solidFill>
-            <a:srgbClr val="F5F6F7"/>
+            <a:srgbClr val="F7F9FC"/>
           </a:solidFill>
-          <a:ln w="9525">
-            <a:solidFill>
-              <a:srgbClr val="D8DBE0"/>
-            </a:solidFill>
-            <a:prstDash val="solid"/>
-          </a:ln>
-        </p:spPr>
-      </p:sp>
-      <p:sp>
-        <p:nvSpPr>
-          <p:cNvPr id="6" name="Text 4"/>
+          <a:ln/>
+        </p:spPr>
+      </p:sp>
+      <p:sp>
+        <p:nvSpPr>
+          <p:cNvPr id="6" name="Shape 4"/>
+          <p:cNvSpPr/>
+          <p:nvPr/>
+        </p:nvSpPr>
+        <p:spPr>
+          <a:xfrm>
+            <a:off x="822960" y="2395728"/>
+            <a:ext cx="50292" cy="1508760"/>
+          </a:xfrm>
+          <a:prstGeom prst="rect">
+            <a:avLst/>
+          </a:prstGeom>
+          <a:solidFill>
+            <a:srgbClr val="1F4E9C"/>
+          </a:solidFill>
+          <a:ln/>
+        </p:spPr>
+      </p:sp>
+      <p:sp>
+        <p:nvSpPr>
+          <p:cNvPr id="7" name="Text 5"/>
           <p:cNvSpPr/>
           <p:nvPr/>
         </p:nvSpPr>
@@ -5179,7 +6148,7 @@
       </p:sp>
       <p:sp>
         <p:nvSpPr>
-          <p:cNvPr id="7" name="Text 5"/>
+          <p:cNvPr id="8" name="Text 6"/>
           <p:cNvSpPr/>
           <p:nvPr/>
         </p:nvSpPr>
@@ -5263,7 +6232,7 @@
       </p:sp>
       <p:sp>
         <p:nvSpPr>
-          <p:cNvPr id="8" name="Text 6"/>
+          <p:cNvPr id="9" name="Text 7"/>
           <p:cNvSpPr/>
           <p:nvPr/>
         </p:nvSpPr>
@@ -5319,7 +6288,7 @@
       </p:sp>
       <p:sp>
         <p:nvSpPr>
-          <p:cNvPr id="9" name="Text 7"/>
+          <p:cNvPr id="10" name="Text 8"/>
           <p:cNvSpPr/>
           <p:nvPr/>
         </p:nvSpPr>
@@ -5445,7 +6414,7 @@
                 <a:ea typeface="微软雅黑" pitchFamily="34" charset="-122"/>
                 <a:cs typeface="微软雅黑" pitchFamily="34" charset="-120"/>
               </a:rPr>
-              <a:t>4 / 15</a:t>
+              <a:t>4 / 17</a:t>
             </a:r>
             <a:endParaRPr lang="en-US" sz="1000" dirty="0"/>
           </a:p>
@@ -5544,19 +6513,34 @@
             <a:avLst/>
           </a:prstGeom>
           <a:solidFill>
-            <a:srgbClr val="F5F6F7"/>
+            <a:srgbClr val="F7F9FC"/>
           </a:solidFill>
-          <a:ln w="9525">
-            <a:solidFill>
-              <a:srgbClr val="D8DBE0"/>
-            </a:solidFill>
-            <a:prstDash val="solid"/>
-          </a:ln>
-        </p:spPr>
-      </p:sp>
-      <p:sp>
-        <p:nvSpPr>
-          <p:cNvPr id="6" name="Text 4"/>
+          <a:ln/>
+        </p:spPr>
+      </p:sp>
+      <p:sp>
+        <p:nvSpPr>
+          <p:cNvPr id="6" name="Shape 4"/>
+          <p:cNvSpPr/>
+          <p:nvPr/>
+        </p:nvSpPr>
+        <p:spPr>
+          <a:xfrm>
+            <a:off x="822960" y="2395728"/>
+            <a:ext cx="50292" cy="1033272"/>
+          </a:xfrm>
+          <a:prstGeom prst="rect">
+            <a:avLst/>
+          </a:prstGeom>
+          <a:solidFill>
+            <a:srgbClr val="1F4E9C"/>
+          </a:solidFill>
+          <a:ln/>
+        </p:spPr>
+      </p:sp>
+      <p:sp>
+        <p:nvSpPr>
+          <p:cNvPr id="7" name="Text 5"/>
           <p:cNvSpPr/>
           <p:nvPr/>
         </p:nvSpPr>
@@ -5600,7 +6584,7 @@
       </p:sp>
       <p:sp>
         <p:nvSpPr>
-          <p:cNvPr id="7" name="Text 5"/>
+          <p:cNvPr id="8" name="Text 6"/>
           <p:cNvSpPr/>
           <p:nvPr/>
         </p:nvSpPr>
@@ -5670,7 +6654,7 @@
       </p:sp>
       <p:sp>
         <p:nvSpPr>
-          <p:cNvPr id="8" name="Text 6"/>
+          <p:cNvPr id="9" name="Text 7"/>
           <p:cNvSpPr/>
           <p:nvPr/>
         </p:nvSpPr>
@@ -5740,7 +6724,7 @@
       </p:sp>
       <p:sp>
         <p:nvSpPr>
-          <p:cNvPr id="9" name="Text 7"/>
+          <p:cNvPr id="10" name="Text 8"/>
           <p:cNvSpPr/>
           <p:nvPr/>
         </p:nvSpPr>
@@ -5866,7 +6850,7 @@
                 <a:ea typeface="微软雅黑" pitchFamily="34" charset="-122"/>
                 <a:cs typeface="微软雅黑" pitchFamily="34" charset="-120"/>
               </a:rPr>
-              <a:t>5 / 15</a:t>
+              <a:t>5 / 17</a:t>
             </a:r>
             <a:endParaRPr lang="en-US" sz="1000" dirty="0"/>
           </a:p>
@@ -5965,19 +6949,34 @@
             <a:avLst/>
           </a:prstGeom>
           <a:solidFill>
-            <a:srgbClr val="F5F6F7"/>
+            <a:srgbClr val="F7F9FC"/>
           </a:solidFill>
-          <a:ln w="9525">
-            <a:solidFill>
-              <a:srgbClr val="D8DBE0"/>
-            </a:solidFill>
-            <a:prstDash val="solid"/>
-          </a:ln>
-        </p:spPr>
-      </p:sp>
-      <p:sp>
-        <p:nvSpPr>
-          <p:cNvPr id="6" name="Text 4"/>
+          <a:ln/>
+        </p:spPr>
+      </p:sp>
+      <p:sp>
+        <p:nvSpPr>
+          <p:cNvPr id="6" name="Shape 4"/>
+          <p:cNvSpPr/>
+          <p:nvPr/>
+        </p:nvSpPr>
+        <p:spPr>
+          <a:xfrm>
+            <a:off x="822960" y="2395728"/>
+            <a:ext cx="50292" cy="1033272"/>
+          </a:xfrm>
+          <a:prstGeom prst="rect">
+            <a:avLst/>
+          </a:prstGeom>
+          <a:solidFill>
+            <a:srgbClr val="1F4E9C"/>
+          </a:solidFill>
+          <a:ln/>
+        </p:spPr>
+      </p:sp>
+      <p:sp>
+        <p:nvSpPr>
+          <p:cNvPr id="7" name="Text 5"/>
           <p:cNvSpPr/>
           <p:nvPr/>
         </p:nvSpPr>
@@ -6021,7 +7020,7 @@
       </p:sp>
       <p:sp>
         <p:nvSpPr>
-          <p:cNvPr id="7" name="Text 5"/>
+          <p:cNvPr id="8" name="Text 6"/>
           <p:cNvSpPr/>
           <p:nvPr/>
         </p:nvSpPr>
@@ -6077,7 +7076,7 @@
       </p:sp>
       <p:sp>
         <p:nvSpPr>
-          <p:cNvPr id="8" name="Text 6"/>
+          <p:cNvPr id="9" name="Text 7"/>
           <p:cNvSpPr/>
           <p:nvPr/>
         </p:nvSpPr>
@@ -6133,7 +7132,7 @@
       </p:sp>
       <p:sp>
         <p:nvSpPr>
-          <p:cNvPr id="9" name="Text 7"/>
+          <p:cNvPr id="10" name="Text 8"/>
           <p:cNvSpPr/>
           <p:nvPr/>
         </p:nvSpPr>
@@ -6259,7 +7258,7 @@
                 <a:ea typeface="微软雅黑" pitchFamily="34" charset="-122"/>
                 <a:cs typeface="微软雅黑" pitchFamily="34" charset="-120"/>
               </a:rPr>
-              <a:t>6 / 15</a:t>
+              <a:t>6 / 17</a:t>
             </a:r>
             <a:endParaRPr lang="en-US" sz="1000" dirty="0"/>
           </a:p>
@@ -6358,19 +7357,34 @@
             <a:avLst/>
           </a:prstGeom>
           <a:solidFill>
-            <a:srgbClr val="F5F6F7"/>
+            <a:srgbClr val="F7F9FC"/>
           </a:solidFill>
-          <a:ln w="9525">
-            <a:solidFill>
-              <a:srgbClr val="D8DBE0"/>
-            </a:solidFill>
-            <a:prstDash val="solid"/>
-          </a:ln>
-        </p:spPr>
-      </p:sp>
-      <p:sp>
-        <p:nvSpPr>
-          <p:cNvPr id="6" name="Text 4"/>
+          <a:ln/>
+        </p:spPr>
+      </p:sp>
+      <p:sp>
+        <p:nvSpPr>
+          <p:cNvPr id="6" name="Shape 4"/>
+          <p:cNvSpPr/>
+          <p:nvPr/>
+        </p:nvSpPr>
+        <p:spPr>
+          <a:xfrm>
+            <a:off x="822960" y="2395728"/>
+            <a:ext cx="50292" cy="1746504"/>
+          </a:xfrm>
+          <a:prstGeom prst="rect">
+            <a:avLst/>
+          </a:prstGeom>
+          <a:solidFill>
+            <a:srgbClr val="1F4E9C"/>
+          </a:solidFill>
+          <a:ln/>
+        </p:spPr>
+      </p:sp>
+      <p:sp>
+        <p:nvSpPr>
+          <p:cNvPr id="7" name="Text 5"/>
           <p:cNvSpPr/>
           <p:nvPr/>
         </p:nvSpPr>
@@ -6417,7 +7431,7 @@
       </p:sp>
       <p:sp>
         <p:nvSpPr>
-          <p:cNvPr id="7" name="Text 5"/>
+          <p:cNvPr id="8" name="Text 6"/>
           <p:cNvSpPr/>
           <p:nvPr/>
         </p:nvSpPr>
@@ -6473,7 +7487,7 @@
       </p:sp>
       <p:sp>
         <p:nvSpPr>
-          <p:cNvPr id="8" name="Text 6"/>
+          <p:cNvPr id="9" name="Text 7"/>
           <p:cNvSpPr/>
           <p:nvPr/>
         </p:nvSpPr>
@@ -6599,7 +7613,7 @@
                 <a:ea typeface="微软雅黑" pitchFamily="34" charset="-122"/>
                 <a:cs typeface="微软雅黑" pitchFamily="34" charset="-120"/>
               </a:rPr>
-              <a:t>7 / 15</a:t>
+              <a:t>7 / 17</a:t>
             </a:r>
             <a:endParaRPr lang="en-US" sz="1000" dirty="0"/>
           </a:p>
@@ -6698,19 +7712,34 @@
             <a:avLst/>
           </a:prstGeom>
           <a:solidFill>
-            <a:srgbClr val="F5F6F7"/>
+            <a:srgbClr val="F7F9FC"/>
           </a:solidFill>
-          <a:ln w="9525">
-            <a:solidFill>
-              <a:srgbClr val="D8DBE0"/>
-            </a:solidFill>
-            <a:prstDash val="solid"/>
-          </a:ln>
-        </p:spPr>
-      </p:sp>
-      <p:sp>
-        <p:nvSpPr>
-          <p:cNvPr id="6" name="Text 4"/>
+          <a:ln/>
+        </p:spPr>
+      </p:sp>
+      <p:sp>
+        <p:nvSpPr>
+          <p:cNvPr id="6" name="Shape 4"/>
+          <p:cNvSpPr/>
+          <p:nvPr/>
+        </p:nvSpPr>
+        <p:spPr>
+          <a:xfrm>
+            <a:off x="822960" y="2395728"/>
+            <a:ext cx="50292" cy="1271016"/>
+          </a:xfrm>
+          <a:prstGeom prst="rect">
+            <a:avLst/>
+          </a:prstGeom>
+          <a:solidFill>
+            <a:srgbClr val="1F4E9C"/>
+          </a:solidFill>
+          <a:ln/>
+        </p:spPr>
+      </p:sp>
+      <p:sp>
+        <p:nvSpPr>
+          <p:cNvPr id="7" name="Text 5"/>
           <p:cNvSpPr/>
           <p:nvPr/>
         </p:nvSpPr>
@@ -6755,7 +7784,7 @@
       </p:sp>
       <p:sp>
         <p:nvSpPr>
-          <p:cNvPr id="7" name="Text 5"/>
+          <p:cNvPr id="8" name="Text 6"/>
           <p:cNvSpPr/>
           <p:nvPr/>
         </p:nvSpPr>
@@ -6825,7 +7854,7 @@
       </p:sp>
       <p:sp>
         <p:nvSpPr>
-          <p:cNvPr id="8" name="Text 6"/>
+          <p:cNvPr id="9" name="Text 7"/>
           <p:cNvSpPr/>
           <p:nvPr/>
         </p:nvSpPr>
@@ -6895,7 +7924,7 @@
       </p:sp>
       <p:sp>
         <p:nvSpPr>
-          <p:cNvPr id="9" name="Text 7"/>
+          <p:cNvPr id="10" name="Text 8"/>
           <p:cNvSpPr/>
           <p:nvPr/>
         </p:nvSpPr>
@@ -7021,7 +8050,7 @@
                 <a:ea typeface="微软雅黑" pitchFamily="34" charset="-122"/>
                 <a:cs typeface="微软雅黑" pitchFamily="34" charset="-120"/>
               </a:rPr>
-              <a:t>8 / 15</a:t>
+              <a:t>8 / 17</a:t>
             </a:r>
             <a:endParaRPr lang="en-US" sz="1000" dirty="0"/>
           </a:p>
@@ -7120,19 +8149,34 @@
             <a:avLst/>
           </a:prstGeom>
           <a:solidFill>
-            <a:srgbClr val="F5F6F7"/>
+            <a:srgbClr val="F7F9FC"/>
           </a:solidFill>
-          <a:ln w="9525">
-            <a:solidFill>
-              <a:srgbClr val="D8DBE0"/>
-            </a:solidFill>
-            <a:prstDash val="solid"/>
-          </a:ln>
-        </p:spPr>
-      </p:sp>
-      <p:sp>
-        <p:nvSpPr>
-          <p:cNvPr id="6" name="Text 4"/>
+          <a:ln/>
+        </p:spPr>
+      </p:sp>
+      <p:sp>
+        <p:nvSpPr>
+          <p:cNvPr id="6" name="Shape 4"/>
+          <p:cNvSpPr/>
+          <p:nvPr/>
+        </p:nvSpPr>
+        <p:spPr>
+          <a:xfrm>
+            <a:off x="822960" y="2395728"/>
+            <a:ext cx="50292" cy="795528"/>
+          </a:xfrm>
+          <a:prstGeom prst="rect">
+            <a:avLst/>
+          </a:prstGeom>
+          <a:solidFill>
+            <a:srgbClr val="1F4E9C"/>
+          </a:solidFill>
+          <a:ln/>
+        </p:spPr>
+      </p:sp>
+      <p:sp>
+        <p:nvSpPr>
+          <p:cNvPr id="7" name="Text 5"/>
           <p:cNvSpPr/>
           <p:nvPr/>
         </p:nvSpPr>
@@ -7175,7 +8219,7 @@
       </p:sp>
       <p:sp>
         <p:nvSpPr>
-          <p:cNvPr id="7" name="Text 5"/>
+          <p:cNvPr id="8" name="Text 6"/>
           <p:cNvSpPr/>
           <p:nvPr/>
         </p:nvSpPr>
@@ -7231,7 +8275,7 @@
       </p:sp>
       <p:sp>
         <p:nvSpPr>
-          <p:cNvPr id="8" name="Text 6"/>
+          <p:cNvPr id="9" name="Text 7"/>
           <p:cNvSpPr/>
           <p:nvPr/>
         </p:nvSpPr>
@@ -7301,7 +8345,7 @@
       </p:sp>
       <p:sp>
         <p:nvSpPr>
-          <p:cNvPr id="9" name="Text 7"/>
+          <p:cNvPr id="10" name="Text 8"/>
           <p:cNvSpPr/>
           <p:nvPr/>
         </p:nvSpPr>
@@ -7357,7 +8401,7 @@
       </p:sp>
       <p:sp>
         <p:nvSpPr>
-          <p:cNvPr id="10" name="Text 8"/>
+          <p:cNvPr id="11" name="Text 9"/>
           <p:cNvSpPr/>
           <p:nvPr/>
         </p:nvSpPr>
@@ -7483,7 +8527,7 @@
                 <a:ea typeface="微软雅黑" pitchFamily="34" charset="-122"/>
                 <a:cs typeface="微软雅黑" pitchFamily="34" charset="-120"/>
               </a:rPr>
-              <a:t>9 / 15</a:t>
+              <a:t>9 / 17</a:t>
             </a:r>
             <a:endParaRPr lang="en-US" sz="1000" dirty="0"/>
           </a:p>
@@ -7582,19 +8626,34 @@
             <a:avLst/>
           </a:prstGeom>
           <a:solidFill>
-            <a:srgbClr val="F5F6F7"/>
+            <a:srgbClr val="F7F9FC"/>
           </a:solidFill>
-          <a:ln w="9525">
-            <a:solidFill>
-              <a:srgbClr val="D8DBE0"/>
-            </a:solidFill>
-            <a:prstDash val="solid"/>
-          </a:ln>
-        </p:spPr>
-      </p:sp>
-      <p:sp>
-        <p:nvSpPr>
-          <p:cNvPr id="6" name="Text 4"/>
+          <a:ln/>
+        </p:spPr>
+      </p:sp>
+      <p:sp>
+        <p:nvSpPr>
+          <p:cNvPr id="6" name="Shape 4"/>
+          <p:cNvSpPr/>
+          <p:nvPr/>
+        </p:nvSpPr>
+        <p:spPr>
+          <a:xfrm>
+            <a:off x="822960" y="2395728"/>
+            <a:ext cx="50292" cy="1271016"/>
+          </a:xfrm>
+          <a:prstGeom prst="rect">
+            <a:avLst/>
+          </a:prstGeom>
+          <a:solidFill>
+            <a:srgbClr val="1F4E9C"/>
+          </a:solidFill>
+          <a:ln/>
+        </p:spPr>
+      </p:sp>
+      <p:sp>
+        <p:nvSpPr>
+          <p:cNvPr id="7" name="Text 5"/>
           <p:cNvSpPr/>
           <p:nvPr/>
         </p:nvSpPr>
@@ -7639,7 +8698,7 @@
       </p:sp>
       <p:sp>
         <p:nvSpPr>
-          <p:cNvPr id="7" name="Text 5"/>
+          <p:cNvPr id="8" name="Text 6"/>
           <p:cNvSpPr/>
           <p:nvPr/>
         </p:nvSpPr>
@@ -7695,7 +8754,7 @@
       </p:sp>
       <p:sp>
         <p:nvSpPr>
-          <p:cNvPr id="8" name="Text 6"/>
+          <p:cNvPr id="9" name="Text 7"/>
           <p:cNvSpPr/>
           <p:nvPr/>
         </p:nvSpPr>
@@ -7751,7 +8810,7 @@
       </p:sp>
       <p:sp>
         <p:nvSpPr>
-          <p:cNvPr id="9" name="Text 7"/>
+          <p:cNvPr id="10" name="Text 8"/>
           <p:cNvSpPr/>
           <p:nvPr/>
         </p:nvSpPr>
